--- a/IEP/t2-lesson1-transforming-linear-functions-IEP-catchup.pptx
+++ b/IEP/t2-lesson1-transforming-linear-functions-IEP-catchup.pptx
@@ -3092,6 +3092,40 @@
           </a:p>
         </p:txBody>
       </p:sp>
+      <p:sp>
+        <p:nvSpPr>
+          <p:cNvPr id="12" name="Slide Number 12"/>
+          <p:cNvSpPr txBox="1"/>
+          <p:nvPr/>
+        </p:nvSpPr>
+        <p:spPr>
+          <a:xfrm>
+            <a:off x="11277295" y="6611112"/>
+            <a:ext cx="685800" cy="201168"/>
+          </a:xfrm>
+          <a:prstGeom prst="rect">
+            <a:avLst/>
+          </a:prstGeom>
+          <a:noFill/>
+        </p:spPr>
+        <p:txBody>
+          <a:bodyPr wrap="none" lIns="0" tIns="0" rIns="0" bIns="0" anchor="b">
+            <a:noAutofit/>
+          </a:bodyPr>
+          <a:lstStyle/>
+          <a:p>
+            <a:pPr algn="r"/>
+            <a:fld id="{5C1A6E0B-3B1F-4D5E-9C7A-2F4B8D6E1A90}" type="slidenum">
+              <a:rPr lang="en-US" sz="1200" dirty="0">
+                <a:solidFill>
+                  <a:srgbClr val="5F6272"/>
+                </a:solidFill>
+              </a:rPr>
+              <a:t>1</a:t>
+            </a:fld>
+          </a:p>
+        </p:txBody>
+      </p:sp>
     </p:spTree>
   </p:cSld>
   <p:clrMapOvr>
@@ -3252,6 +3286,40 @@
           </a:p>
         </p:txBody>
       </p:sp>
+      <p:sp>
+        <p:nvSpPr>
+          <p:cNvPr id="5" name="Slide Number 5"/>
+          <p:cNvSpPr txBox="1"/>
+          <p:nvPr/>
+        </p:nvSpPr>
+        <p:spPr>
+          <a:xfrm>
+            <a:off x="11277295" y="6611112"/>
+            <a:ext cx="685800" cy="201168"/>
+          </a:xfrm>
+          <a:prstGeom prst="rect">
+            <a:avLst/>
+          </a:prstGeom>
+          <a:noFill/>
+        </p:spPr>
+        <p:txBody>
+          <a:bodyPr wrap="none" lIns="0" tIns="0" rIns="0" bIns="0" anchor="b">
+            <a:noAutofit/>
+          </a:bodyPr>
+          <a:lstStyle/>
+          <a:p>
+            <a:pPr algn="r"/>
+            <a:fld id="{5C1A6E0B-3B1F-4D5E-9C7A-2F4B8D6E1A90}" type="slidenum">
+              <a:rPr lang="en-US" sz="1200" dirty="0">
+                <a:solidFill>
+                  <a:srgbClr val="5F6272"/>
+                </a:solidFill>
+              </a:rPr>
+              <a:t>10</a:t>
+            </a:fld>
+          </a:p>
+        </p:txBody>
+      </p:sp>
     </p:spTree>
   </p:cSld>
   <p:clrMapOvr>
@@ -4054,6 +4122,40 @@
           </a:p>
         </p:txBody>
       </p:sp>
+      <p:sp>
+        <p:nvSpPr>
+          <p:cNvPr id="16" name="Slide Number 16"/>
+          <p:cNvSpPr txBox="1"/>
+          <p:nvPr/>
+        </p:nvSpPr>
+        <p:spPr>
+          <a:xfrm>
+            <a:off x="11277295" y="6611112"/>
+            <a:ext cx="685800" cy="201168"/>
+          </a:xfrm>
+          <a:prstGeom prst="rect">
+            <a:avLst/>
+          </a:prstGeom>
+          <a:noFill/>
+        </p:spPr>
+        <p:txBody>
+          <a:bodyPr wrap="none" lIns="0" tIns="0" rIns="0" bIns="0" anchor="b">
+            <a:noAutofit/>
+          </a:bodyPr>
+          <a:lstStyle/>
+          <a:p>
+            <a:pPr algn="r"/>
+            <a:fld id="{5C1A6E0B-3B1F-4D5E-9C7A-2F4B8D6E1A90}" type="slidenum">
+              <a:rPr lang="en-US" sz="1200" dirty="0">
+                <a:solidFill>
+                  <a:srgbClr val="5F6272"/>
+                </a:solidFill>
+              </a:rPr>
+              <a:t>11</a:t>
+            </a:fld>
+          </a:p>
+        </p:txBody>
+      </p:sp>
     </p:spTree>
   </p:cSld>
   <p:clrMapOvr>
@@ -4696,6 +4798,40 @@
           </a:p>
         </p:txBody>
       </p:sp>
+      <p:sp>
+        <p:nvSpPr>
+          <p:cNvPr id="8" name="Slide Number 8"/>
+          <p:cNvSpPr txBox="1"/>
+          <p:nvPr/>
+        </p:nvSpPr>
+        <p:spPr>
+          <a:xfrm>
+            <a:off x="11277295" y="6611112"/>
+            <a:ext cx="685800" cy="201168"/>
+          </a:xfrm>
+          <a:prstGeom prst="rect">
+            <a:avLst/>
+          </a:prstGeom>
+          <a:noFill/>
+        </p:spPr>
+        <p:txBody>
+          <a:bodyPr wrap="none" lIns="0" tIns="0" rIns="0" bIns="0" anchor="b">
+            <a:noAutofit/>
+          </a:bodyPr>
+          <a:lstStyle/>
+          <a:p>
+            <a:pPr algn="r"/>
+            <a:fld id="{5C1A6E0B-3B1F-4D5E-9C7A-2F4B8D6E1A90}" type="slidenum">
+              <a:rPr lang="en-US" sz="1200" dirty="0">
+                <a:solidFill>
+                  <a:srgbClr val="5F6272"/>
+                </a:solidFill>
+              </a:rPr>
+              <a:t>12</a:t>
+            </a:fld>
+          </a:p>
+        </p:txBody>
+      </p:sp>
     </p:spTree>
   </p:cSld>
   <p:clrMapOvr>
@@ -6659,6 +6795,40 @@
               <a:t xml:space="preserve">p(x)</a:t>
             </a:r>
             <a:endParaRPr lang="en-US" sz="1275" dirty="0"/>
+          </a:p>
+        </p:txBody>
+      </p:sp>
+      <p:sp>
+        <p:nvSpPr>
+          <p:cNvPr id="58" name="Slide Number 58"/>
+          <p:cNvSpPr txBox="1"/>
+          <p:nvPr/>
+        </p:nvSpPr>
+        <p:spPr>
+          <a:xfrm>
+            <a:off x="11277295" y="6611112"/>
+            <a:ext cx="685800" cy="201168"/>
+          </a:xfrm>
+          <a:prstGeom prst="rect">
+            <a:avLst/>
+          </a:prstGeom>
+          <a:noFill/>
+        </p:spPr>
+        <p:txBody>
+          <a:bodyPr wrap="none" lIns="0" tIns="0" rIns="0" bIns="0" anchor="b">
+            <a:noAutofit/>
+          </a:bodyPr>
+          <a:lstStyle/>
+          <a:p>
+            <a:pPr algn="r"/>
+            <a:fld id="{5C1A6E0B-3B1F-4D5E-9C7A-2F4B8D6E1A90}" type="slidenum">
+              <a:rPr lang="en-US" sz="1200" dirty="0">
+                <a:solidFill>
+                  <a:srgbClr val="5F6272"/>
+                </a:solidFill>
+              </a:rPr>
+              <a:t>13</a:t>
+            </a:fld>
           </a:p>
         </p:txBody>
       </p:sp>
@@ -7588,6 +7758,40 @@
               <a:t xml:space="preserve">slope 2, (0, −5)</a:t>
             </a:r>
             <a:endParaRPr lang="en-US" sz="2325" dirty="0"/>
+          </a:p>
+        </p:txBody>
+      </p:sp>
+      <p:sp>
+        <p:nvSpPr>
+          <p:cNvPr id="10" name="Slide Number 10"/>
+          <p:cNvSpPr txBox="1"/>
+          <p:nvPr/>
+        </p:nvSpPr>
+        <p:spPr>
+          <a:xfrm>
+            <a:off x="11277295" y="6611112"/>
+            <a:ext cx="685800" cy="201168"/>
+          </a:xfrm>
+          <a:prstGeom prst="rect">
+            <a:avLst/>
+          </a:prstGeom>
+          <a:noFill/>
+        </p:spPr>
+        <p:txBody>
+          <a:bodyPr wrap="none" lIns="0" tIns="0" rIns="0" bIns="0" anchor="b">
+            <a:noAutofit/>
+          </a:bodyPr>
+          <a:lstStyle/>
+          <a:p>
+            <a:pPr algn="r"/>
+            <a:fld id="{5C1A6E0B-3B1F-4D5E-9C7A-2F4B8D6E1A90}" type="slidenum">
+              <a:rPr lang="en-US" sz="1200" dirty="0">
+                <a:solidFill>
+                  <a:srgbClr val="5F6272"/>
+                </a:solidFill>
+              </a:rPr>
+              <a:t>14</a:t>
+            </a:fld>
           </a:p>
         </p:txBody>
       </p:sp>
@@ -8078,6 +8282,40 @@
           </a:p>
         </p:txBody>
       </p:sp>
+      <p:sp>
+        <p:nvSpPr>
+          <p:cNvPr id="5" name="Slide Number 5"/>
+          <p:cNvSpPr txBox="1"/>
+          <p:nvPr/>
+        </p:nvSpPr>
+        <p:spPr>
+          <a:xfrm>
+            <a:off x="11277295" y="6611112"/>
+            <a:ext cx="685800" cy="201168"/>
+          </a:xfrm>
+          <a:prstGeom prst="rect">
+            <a:avLst/>
+          </a:prstGeom>
+          <a:noFill/>
+        </p:spPr>
+        <p:txBody>
+          <a:bodyPr wrap="none" lIns="0" tIns="0" rIns="0" bIns="0" anchor="b">
+            <a:noAutofit/>
+          </a:bodyPr>
+          <a:lstStyle/>
+          <a:p>
+            <a:pPr algn="r"/>
+            <a:fld id="{5C1A6E0B-3B1F-4D5E-9C7A-2F4B8D6E1A90}" type="slidenum">
+              <a:rPr lang="en-US" sz="1200" dirty="0">
+                <a:solidFill>
+                  <a:srgbClr val="5F6272"/>
+                </a:solidFill>
+              </a:rPr>
+              <a:t>15</a:t>
+            </a:fld>
+          </a:p>
+        </p:txBody>
+      </p:sp>
     </p:spTree>
   </p:cSld>
   <p:clrMapOvr>
@@ -8238,6 +8476,40 @@
           </a:p>
         </p:txBody>
       </p:sp>
+      <p:sp>
+        <p:nvSpPr>
+          <p:cNvPr id="5" name="Slide Number 5"/>
+          <p:cNvSpPr txBox="1"/>
+          <p:nvPr/>
+        </p:nvSpPr>
+        <p:spPr>
+          <a:xfrm>
+            <a:off x="11277295" y="6611112"/>
+            <a:ext cx="685800" cy="201168"/>
+          </a:xfrm>
+          <a:prstGeom prst="rect">
+            <a:avLst/>
+          </a:prstGeom>
+          <a:noFill/>
+        </p:spPr>
+        <p:txBody>
+          <a:bodyPr wrap="none" lIns="0" tIns="0" rIns="0" bIns="0" anchor="b">
+            <a:noAutofit/>
+          </a:bodyPr>
+          <a:lstStyle/>
+          <a:p>
+            <a:pPr algn="r"/>
+            <a:fld id="{5C1A6E0B-3B1F-4D5E-9C7A-2F4B8D6E1A90}" type="slidenum">
+              <a:rPr lang="en-US" sz="1200" dirty="0">
+                <a:solidFill>
+                  <a:srgbClr val="5F6272"/>
+                </a:solidFill>
+              </a:rPr>
+              <a:t>16</a:t>
+            </a:fld>
+          </a:p>
+        </p:txBody>
+      </p:sp>
     </p:spTree>
   </p:cSld>
   <p:clrMapOvr>
@@ -9269,6 +9541,40 @@
               <a:t xml:space="preserve">(0, 5)</a:t>
             </a:r>
             <a:endParaRPr lang="en-US" sz="2325" dirty="0"/>
+          </a:p>
+        </p:txBody>
+      </p:sp>
+      <p:sp>
+        <p:nvSpPr>
+          <p:cNvPr id="12" name="Slide Number 12"/>
+          <p:cNvSpPr txBox="1"/>
+          <p:nvPr/>
+        </p:nvSpPr>
+        <p:spPr>
+          <a:xfrm>
+            <a:off x="11277295" y="6611112"/>
+            <a:ext cx="685800" cy="201168"/>
+          </a:xfrm>
+          <a:prstGeom prst="rect">
+            <a:avLst/>
+          </a:prstGeom>
+          <a:noFill/>
+        </p:spPr>
+        <p:txBody>
+          <a:bodyPr wrap="none" lIns="0" tIns="0" rIns="0" bIns="0" anchor="b">
+            <a:noAutofit/>
+          </a:bodyPr>
+          <a:lstStyle/>
+          <a:p>
+            <a:pPr algn="r"/>
+            <a:fld id="{5C1A6E0B-3B1F-4D5E-9C7A-2F4B8D6E1A90}" type="slidenum">
+              <a:rPr lang="en-US" sz="1200" dirty="0">
+                <a:solidFill>
+                  <a:srgbClr val="5F6272"/>
+                </a:solidFill>
+              </a:rPr>
+              <a:t>17</a:t>
+            </a:fld>
           </a:p>
         </p:txBody>
       </p:sp>
@@ -9934,6 +10240,40 @@
           </a:p>
         </p:txBody>
       </p:sp>
+      <p:sp>
+        <p:nvSpPr>
+          <p:cNvPr id="6" name="Slide Number 6"/>
+          <p:cNvSpPr txBox="1"/>
+          <p:nvPr/>
+        </p:nvSpPr>
+        <p:spPr>
+          <a:xfrm>
+            <a:off x="11277295" y="6611112"/>
+            <a:ext cx="685800" cy="201168"/>
+          </a:xfrm>
+          <a:prstGeom prst="rect">
+            <a:avLst/>
+          </a:prstGeom>
+          <a:noFill/>
+        </p:spPr>
+        <p:txBody>
+          <a:bodyPr wrap="none" lIns="0" tIns="0" rIns="0" bIns="0" anchor="b">
+            <a:noAutofit/>
+          </a:bodyPr>
+          <a:lstStyle/>
+          <a:p>
+            <a:pPr algn="r"/>
+            <a:fld id="{5C1A6E0B-3B1F-4D5E-9C7A-2F4B8D6E1A90}" type="slidenum">
+              <a:rPr lang="en-US" sz="1200" dirty="0">
+                <a:solidFill>
+                  <a:srgbClr val="5F6272"/>
+                </a:solidFill>
+              </a:rPr>
+              <a:t>18</a:t>
+            </a:fld>
+          </a:p>
+        </p:txBody>
+      </p:sp>
     </p:spTree>
   </p:cSld>
   <p:clrMapOvr>
@@ -11709,6 +12049,40 @@
           </a:ln>
         </p:spPr>
       </p:cxnSp>
+      <p:sp>
+        <p:nvSpPr>
+          <p:cNvPr id="48" name="Slide Number 48"/>
+          <p:cNvSpPr txBox="1"/>
+          <p:nvPr/>
+        </p:nvSpPr>
+        <p:spPr>
+          <a:xfrm>
+            <a:off x="11277295" y="6611112"/>
+            <a:ext cx="685800" cy="201168"/>
+          </a:xfrm>
+          <a:prstGeom prst="rect">
+            <a:avLst/>
+          </a:prstGeom>
+          <a:noFill/>
+        </p:spPr>
+        <p:txBody>
+          <a:bodyPr wrap="none" lIns="0" tIns="0" rIns="0" bIns="0" anchor="b">
+            <a:noAutofit/>
+          </a:bodyPr>
+          <a:lstStyle/>
+          <a:p>
+            <a:pPr algn="r"/>
+            <a:fld id="{5C1A6E0B-3B1F-4D5E-9C7A-2F4B8D6E1A90}" type="slidenum">
+              <a:rPr lang="en-US" sz="1200" dirty="0">
+                <a:solidFill>
+                  <a:srgbClr val="5F6272"/>
+                </a:solidFill>
+              </a:rPr>
+              <a:t>19</a:t>
+            </a:fld>
+          </a:p>
+        </p:txBody>
+      </p:sp>
     </p:spTree>
   </p:cSld>
   <p:clrMapOvr>
@@ -12528,6 +12902,40 @@
           </a:p>
         </p:txBody>
       </p:sp>
+      <p:sp>
+        <p:nvSpPr>
+          <p:cNvPr id="5" name="Slide Number 5"/>
+          <p:cNvSpPr txBox="1"/>
+          <p:nvPr/>
+        </p:nvSpPr>
+        <p:spPr>
+          <a:xfrm>
+            <a:off x="11277295" y="6611112"/>
+            <a:ext cx="685800" cy="201168"/>
+          </a:xfrm>
+          <a:prstGeom prst="rect">
+            <a:avLst/>
+          </a:prstGeom>
+          <a:noFill/>
+        </p:spPr>
+        <p:txBody>
+          <a:bodyPr wrap="none" lIns="0" tIns="0" rIns="0" bIns="0" anchor="b">
+            <a:noAutofit/>
+          </a:bodyPr>
+          <a:lstStyle/>
+          <a:p>
+            <a:pPr algn="r"/>
+            <a:fld id="{5C1A6E0B-3B1F-4D5E-9C7A-2F4B8D6E1A90}" type="slidenum">
+              <a:rPr lang="en-US" sz="1200" dirty="0">
+                <a:solidFill>
+                  <a:srgbClr val="5F6272"/>
+                </a:solidFill>
+              </a:rPr>
+              <a:t>2</a:t>
+            </a:fld>
+          </a:p>
+        </p:txBody>
+      </p:sp>
     </p:spTree>
   </p:cSld>
   <p:clrMapOvr>
@@ -12688,6 +13096,40 @@
           </a:p>
         </p:txBody>
       </p:sp>
+      <p:sp>
+        <p:nvSpPr>
+          <p:cNvPr id="5" name="Slide Number 5"/>
+          <p:cNvSpPr txBox="1"/>
+          <p:nvPr/>
+        </p:nvSpPr>
+        <p:spPr>
+          <a:xfrm>
+            <a:off x="11277295" y="6611112"/>
+            <a:ext cx="685800" cy="201168"/>
+          </a:xfrm>
+          <a:prstGeom prst="rect">
+            <a:avLst/>
+          </a:prstGeom>
+          <a:noFill/>
+        </p:spPr>
+        <p:txBody>
+          <a:bodyPr wrap="none" lIns="0" tIns="0" rIns="0" bIns="0" anchor="b">
+            <a:noAutofit/>
+          </a:bodyPr>
+          <a:lstStyle/>
+          <a:p>
+            <a:pPr algn="r"/>
+            <a:fld id="{5C1A6E0B-3B1F-4D5E-9C7A-2F4B8D6E1A90}" type="slidenum">
+              <a:rPr lang="en-US" sz="1200" dirty="0">
+                <a:solidFill>
+                  <a:srgbClr val="5F6272"/>
+                </a:solidFill>
+              </a:rPr>
+              <a:t>20</a:t>
+            </a:fld>
+          </a:p>
+        </p:txBody>
+      </p:sp>
     </p:spTree>
   </p:cSld>
   <p:clrMapOvr>
@@ -13257,6 +13699,40 @@
               <a:t xml:space="preserve"> + 2</a:t>
             </a:r>
             <a:endParaRPr lang="en-US" sz="2325" dirty="0"/>
+          </a:p>
+        </p:txBody>
+      </p:sp>
+      <p:sp>
+        <p:nvSpPr>
+          <p:cNvPr id="10" name="Slide Number 10"/>
+          <p:cNvSpPr txBox="1"/>
+          <p:nvPr/>
+        </p:nvSpPr>
+        <p:spPr>
+          <a:xfrm>
+            <a:off x="11277295" y="6611112"/>
+            <a:ext cx="685800" cy="201168"/>
+          </a:xfrm>
+          <a:prstGeom prst="rect">
+            <a:avLst/>
+          </a:prstGeom>
+          <a:noFill/>
+        </p:spPr>
+        <p:txBody>
+          <a:bodyPr wrap="none" lIns="0" tIns="0" rIns="0" bIns="0" anchor="b">
+            <a:noAutofit/>
+          </a:bodyPr>
+          <a:lstStyle/>
+          <a:p>
+            <a:pPr algn="r"/>
+            <a:fld id="{5C1A6E0B-3B1F-4D5E-9C7A-2F4B8D6E1A90}" type="slidenum">
+              <a:rPr lang="en-US" sz="1200" dirty="0">
+                <a:solidFill>
+                  <a:srgbClr val="5F6272"/>
+                </a:solidFill>
+              </a:rPr>
+              <a:t>21</a:t>
+            </a:fld>
           </a:p>
         </p:txBody>
       </p:sp>
@@ -14131,6 +14607,40 @@
           </a:p>
         </p:txBody>
       </p:sp>
+      <p:sp>
+        <p:nvSpPr>
+          <p:cNvPr id="11" name="Slide Number 11"/>
+          <p:cNvSpPr txBox="1"/>
+          <p:nvPr/>
+        </p:nvSpPr>
+        <p:spPr>
+          <a:xfrm>
+            <a:off x="11277295" y="6611112"/>
+            <a:ext cx="685800" cy="201168"/>
+          </a:xfrm>
+          <a:prstGeom prst="rect">
+            <a:avLst/>
+          </a:prstGeom>
+          <a:noFill/>
+        </p:spPr>
+        <p:txBody>
+          <a:bodyPr wrap="none" lIns="0" tIns="0" rIns="0" bIns="0" anchor="b">
+            <a:noAutofit/>
+          </a:bodyPr>
+          <a:lstStyle/>
+          <a:p>
+            <a:pPr algn="r"/>
+            <a:fld id="{5C1A6E0B-3B1F-4D5E-9C7A-2F4B8D6E1A90}" type="slidenum">
+              <a:rPr lang="en-US" sz="1200" dirty="0">
+                <a:solidFill>
+                  <a:srgbClr val="5F6272"/>
+                </a:solidFill>
+              </a:rPr>
+              <a:t>22</a:t>
+            </a:fld>
+          </a:p>
+        </p:txBody>
+      </p:sp>
     </p:spTree>
   </p:cSld>
   <p:clrMapOvr>
@@ -16515,6 +17025,40 @@
               <a:t xml:space="preserve">−4x</a:t>
             </a:r>
             <a:endParaRPr lang="en-US" sz="1275" dirty="0"/>
+          </a:p>
+        </p:txBody>
+      </p:sp>
+      <p:sp>
+        <p:nvSpPr>
+          <p:cNvPr id="62" name="Slide Number 62"/>
+          <p:cNvSpPr txBox="1"/>
+          <p:nvPr/>
+        </p:nvSpPr>
+        <p:spPr>
+          <a:xfrm>
+            <a:off x="11277295" y="6611112"/>
+            <a:ext cx="685800" cy="201168"/>
+          </a:xfrm>
+          <a:prstGeom prst="rect">
+            <a:avLst/>
+          </a:prstGeom>
+          <a:noFill/>
+        </p:spPr>
+        <p:txBody>
+          <a:bodyPr wrap="none" lIns="0" tIns="0" rIns="0" bIns="0" anchor="b">
+            <a:noAutofit/>
+          </a:bodyPr>
+          <a:lstStyle/>
+          <a:p>
+            <a:pPr algn="r"/>
+            <a:fld id="{5C1A6E0B-3B1F-4D5E-9C7A-2F4B8D6E1A90}" type="slidenum">
+              <a:rPr lang="en-US" sz="1200" dirty="0">
+                <a:solidFill>
+                  <a:srgbClr val="5F6272"/>
+                </a:solidFill>
+              </a:rPr>
+              <a:t>23</a:t>
+            </a:fld>
           </a:p>
         </p:txBody>
       </p:sp>
@@ -17082,6 +17626,40 @@
           </a:p>
         </p:txBody>
       </p:sp>
+      <p:sp>
+        <p:nvSpPr>
+          <p:cNvPr id="5" name="Slide Number 5"/>
+          <p:cNvSpPr txBox="1"/>
+          <p:nvPr/>
+        </p:nvSpPr>
+        <p:spPr>
+          <a:xfrm>
+            <a:off x="11277295" y="6611112"/>
+            <a:ext cx="685800" cy="201168"/>
+          </a:xfrm>
+          <a:prstGeom prst="rect">
+            <a:avLst/>
+          </a:prstGeom>
+          <a:noFill/>
+        </p:spPr>
+        <p:txBody>
+          <a:bodyPr wrap="none" lIns="0" tIns="0" rIns="0" bIns="0" anchor="b">
+            <a:noAutofit/>
+          </a:bodyPr>
+          <a:lstStyle/>
+          <a:p>
+            <a:pPr algn="r"/>
+            <a:fld id="{5C1A6E0B-3B1F-4D5E-9C7A-2F4B8D6E1A90}" type="slidenum">
+              <a:rPr lang="en-US" sz="1200" dirty="0">
+                <a:solidFill>
+                  <a:srgbClr val="5F6272"/>
+                </a:solidFill>
+              </a:rPr>
+              <a:t>24</a:t>
+            </a:fld>
+          </a:p>
+        </p:txBody>
+      </p:sp>
     </p:spTree>
   </p:cSld>
   <p:clrMapOvr>
@@ -17242,6 +17820,40 @@
           </a:p>
         </p:txBody>
       </p:sp>
+      <p:sp>
+        <p:nvSpPr>
+          <p:cNvPr id="5" name="Slide Number 5"/>
+          <p:cNvSpPr txBox="1"/>
+          <p:nvPr/>
+        </p:nvSpPr>
+        <p:spPr>
+          <a:xfrm>
+            <a:off x="11277295" y="6611112"/>
+            <a:ext cx="685800" cy="201168"/>
+          </a:xfrm>
+          <a:prstGeom prst="rect">
+            <a:avLst/>
+          </a:prstGeom>
+          <a:noFill/>
+        </p:spPr>
+        <p:txBody>
+          <a:bodyPr wrap="none" lIns="0" tIns="0" rIns="0" bIns="0" anchor="b">
+            <a:noAutofit/>
+          </a:bodyPr>
+          <a:lstStyle/>
+          <a:p>
+            <a:pPr algn="r"/>
+            <a:fld id="{5C1A6E0B-3B1F-4D5E-9C7A-2F4B8D6E1A90}" type="slidenum">
+              <a:rPr lang="en-US" sz="1200" dirty="0">
+                <a:solidFill>
+                  <a:srgbClr val="5F6272"/>
+                </a:solidFill>
+              </a:rPr>
+              <a:t>25</a:t>
+            </a:fld>
+          </a:p>
+        </p:txBody>
+      </p:sp>
     </p:spTree>
   </p:cSld>
   <p:clrMapOvr>
@@ -18523,6 +19135,40 @@
               <a:t xml:space="preserve">(0, −5)</a:t>
             </a:r>
             <a:endParaRPr lang="en-US" sz="2325" dirty="0"/>
+          </a:p>
+        </p:txBody>
+      </p:sp>
+      <p:sp>
+        <p:nvSpPr>
+          <p:cNvPr id="12" name="Slide Number 12"/>
+          <p:cNvSpPr txBox="1"/>
+          <p:nvPr/>
+        </p:nvSpPr>
+        <p:spPr>
+          <a:xfrm>
+            <a:off x="11277295" y="6611112"/>
+            <a:ext cx="685800" cy="201168"/>
+          </a:xfrm>
+          <a:prstGeom prst="rect">
+            <a:avLst/>
+          </a:prstGeom>
+          <a:noFill/>
+        </p:spPr>
+        <p:txBody>
+          <a:bodyPr wrap="none" lIns="0" tIns="0" rIns="0" bIns="0" anchor="b">
+            <a:noAutofit/>
+          </a:bodyPr>
+          <a:lstStyle/>
+          <a:p>
+            <a:pPr algn="r"/>
+            <a:fld id="{5C1A6E0B-3B1F-4D5E-9C7A-2F4B8D6E1A90}" type="slidenum">
+              <a:rPr lang="en-US" sz="1200" dirty="0">
+                <a:solidFill>
+                  <a:srgbClr val="5F6272"/>
+                </a:solidFill>
+              </a:rPr>
+              <a:t>26</a:t>
+            </a:fld>
           </a:p>
         </p:txBody>
       </p:sp>
@@ -19188,6 +19834,40 @@
           </a:p>
         </p:txBody>
       </p:sp>
+      <p:sp>
+        <p:nvSpPr>
+          <p:cNvPr id="6" name="Slide Number 6"/>
+          <p:cNvSpPr txBox="1"/>
+          <p:nvPr/>
+        </p:nvSpPr>
+        <p:spPr>
+          <a:xfrm>
+            <a:off x="11277295" y="6611112"/>
+            <a:ext cx="685800" cy="201168"/>
+          </a:xfrm>
+          <a:prstGeom prst="rect">
+            <a:avLst/>
+          </a:prstGeom>
+          <a:noFill/>
+        </p:spPr>
+        <p:txBody>
+          <a:bodyPr wrap="none" lIns="0" tIns="0" rIns="0" bIns="0" anchor="b">
+            <a:noAutofit/>
+          </a:bodyPr>
+          <a:lstStyle/>
+          <a:p>
+            <a:pPr algn="r"/>
+            <a:fld id="{5C1A6E0B-3B1F-4D5E-9C7A-2F4B8D6E1A90}" type="slidenum">
+              <a:rPr lang="en-US" sz="1200" dirty="0">
+                <a:solidFill>
+                  <a:srgbClr val="5F6272"/>
+                </a:solidFill>
+              </a:rPr>
+              <a:t>27</a:t>
+            </a:fld>
+          </a:p>
+        </p:txBody>
+      </p:sp>
     </p:spTree>
   </p:cSld>
   <p:clrMapOvr>
@@ -21203,6 +21883,40 @@
           </a:ln>
         </p:spPr>
       </p:cxnSp>
+      <p:sp>
+        <p:nvSpPr>
+          <p:cNvPr id="53" name="Slide Number 53"/>
+          <p:cNvSpPr txBox="1"/>
+          <p:nvPr/>
+        </p:nvSpPr>
+        <p:spPr>
+          <a:xfrm>
+            <a:off x="11277295" y="6611112"/>
+            <a:ext cx="685800" cy="201168"/>
+          </a:xfrm>
+          <a:prstGeom prst="rect">
+            <a:avLst/>
+          </a:prstGeom>
+          <a:noFill/>
+        </p:spPr>
+        <p:txBody>
+          <a:bodyPr wrap="none" lIns="0" tIns="0" rIns="0" bIns="0" anchor="b">
+            <a:noAutofit/>
+          </a:bodyPr>
+          <a:lstStyle/>
+          <a:p>
+            <a:pPr algn="r"/>
+            <a:fld id="{5C1A6E0B-3B1F-4D5E-9C7A-2F4B8D6E1A90}" type="slidenum">
+              <a:rPr lang="en-US" sz="1200" dirty="0">
+                <a:solidFill>
+                  <a:srgbClr val="5F6272"/>
+                </a:solidFill>
+              </a:rPr>
+              <a:t>28</a:t>
+            </a:fld>
+          </a:p>
+        </p:txBody>
+      </p:sp>
     </p:spTree>
   </p:cSld>
   <p:clrMapOvr>
@@ -22304,6 +23018,40 @@
           </a:p>
         </p:txBody>
       </p:sp>
+      <p:sp>
+        <p:nvSpPr>
+          <p:cNvPr id="8" name="Slide Number 8"/>
+          <p:cNvSpPr txBox="1"/>
+          <p:nvPr/>
+        </p:nvSpPr>
+        <p:spPr>
+          <a:xfrm>
+            <a:off x="11277295" y="6611112"/>
+            <a:ext cx="685800" cy="201168"/>
+          </a:xfrm>
+          <a:prstGeom prst="rect">
+            <a:avLst/>
+          </a:prstGeom>
+          <a:noFill/>
+        </p:spPr>
+        <p:txBody>
+          <a:bodyPr wrap="none" lIns="0" tIns="0" rIns="0" bIns="0" anchor="b">
+            <a:noAutofit/>
+          </a:bodyPr>
+          <a:lstStyle/>
+          <a:p>
+            <a:pPr algn="r"/>
+            <a:fld id="{5C1A6E0B-3B1F-4D5E-9C7A-2F4B8D6E1A90}" type="slidenum">
+              <a:rPr lang="en-US" sz="1200" dirty="0">
+                <a:solidFill>
+                  <a:srgbClr val="5F6272"/>
+                </a:solidFill>
+              </a:rPr>
+              <a:t>29</a:t>
+            </a:fld>
+          </a:p>
+        </p:txBody>
+      </p:sp>
     </p:spTree>
   </p:cSld>
   <p:clrMapOvr>
@@ -23343,6 +24091,40 @@
               <a:t xml:space="preserve"> − 5</a:t>
             </a:r>
             <a:endParaRPr lang="en-US" sz="2325" dirty="0"/>
+          </a:p>
+        </p:txBody>
+      </p:sp>
+      <p:sp>
+        <p:nvSpPr>
+          <p:cNvPr id="12" name="Slide Number 12"/>
+          <p:cNvSpPr txBox="1"/>
+          <p:nvPr/>
+        </p:nvSpPr>
+        <p:spPr>
+          <a:xfrm>
+            <a:off x="11277295" y="6611112"/>
+            <a:ext cx="685800" cy="201168"/>
+          </a:xfrm>
+          <a:prstGeom prst="rect">
+            <a:avLst/>
+          </a:prstGeom>
+          <a:noFill/>
+        </p:spPr>
+        <p:txBody>
+          <a:bodyPr wrap="none" lIns="0" tIns="0" rIns="0" bIns="0" anchor="b">
+            <a:noAutofit/>
+          </a:bodyPr>
+          <a:lstStyle/>
+          <a:p>
+            <a:pPr algn="r"/>
+            <a:fld id="{5C1A6E0B-3B1F-4D5E-9C7A-2F4B8D6E1A90}" type="slidenum">
+              <a:rPr lang="en-US" sz="1200" dirty="0">
+                <a:solidFill>
+                  <a:srgbClr val="5F6272"/>
+                </a:solidFill>
+              </a:rPr>
+              <a:t>3</a:t>
+            </a:fld>
           </a:p>
         </p:txBody>
       </p:sp>
@@ -23932,6 +24714,40 @@
           </a:p>
         </p:txBody>
       </p:sp>
+      <p:sp>
+        <p:nvSpPr>
+          <p:cNvPr id="5" name="Slide Number 5"/>
+          <p:cNvSpPr txBox="1"/>
+          <p:nvPr/>
+        </p:nvSpPr>
+        <p:spPr>
+          <a:xfrm>
+            <a:off x="11277295" y="6611112"/>
+            <a:ext cx="685800" cy="201168"/>
+          </a:xfrm>
+          <a:prstGeom prst="rect">
+            <a:avLst/>
+          </a:prstGeom>
+          <a:noFill/>
+        </p:spPr>
+        <p:txBody>
+          <a:bodyPr wrap="none" lIns="0" tIns="0" rIns="0" bIns="0" anchor="b">
+            <a:noAutofit/>
+          </a:bodyPr>
+          <a:lstStyle/>
+          <a:p>
+            <a:pPr algn="r"/>
+            <a:fld id="{5C1A6E0B-3B1F-4D5E-9C7A-2F4B8D6E1A90}" type="slidenum">
+              <a:rPr lang="en-US" sz="1200" dirty="0">
+                <a:solidFill>
+                  <a:srgbClr val="5F6272"/>
+                </a:solidFill>
+              </a:rPr>
+              <a:t>30</a:t>
+            </a:fld>
+          </a:p>
+        </p:txBody>
+      </p:sp>
     </p:spTree>
   </p:cSld>
   <p:clrMapOvr>
@@ -24679,6 +25495,40 @@
               <a:t xml:space="preserve"> − 3</a:t>
             </a:r>
             <a:endParaRPr lang="en-US" sz="2325" dirty="0"/>
+          </a:p>
+        </p:txBody>
+      </p:sp>
+      <p:sp>
+        <p:nvSpPr>
+          <p:cNvPr id="10" name="Slide Number 10"/>
+          <p:cNvSpPr txBox="1"/>
+          <p:nvPr/>
+        </p:nvSpPr>
+        <p:spPr>
+          <a:xfrm>
+            <a:off x="11277295" y="6611112"/>
+            <a:ext cx="685800" cy="201168"/>
+          </a:xfrm>
+          <a:prstGeom prst="rect">
+            <a:avLst/>
+          </a:prstGeom>
+          <a:noFill/>
+        </p:spPr>
+        <p:txBody>
+          <a:bodyPr wrap="none" lIns="0" tIns="0" rIns="0" bIns="0" anchor="b">
+            <a:noAutofit/>
+          </a:bodyPr>
+          <a:lstStyle/>
+          <a:p>
+            <a:pPr algn="r"/>
+            <a:fld id="{5C1A6E0B-3B1F-4D5E-9C7A-2F4B8D6E1A90}" type="slidenum">
+              <a:rPr lang="en-US" sz="1200" dirty="0">
+                <a:solidFill>
+                  <a:srgbClr val="5F6272"/>
+                </a:solidFill>
+              </a:rPr>
+              <a:t>31</a:t>
+            </a:fld>
           </a:p>
         </p:txBody>
       </p:sp>
@@ -25679,6 +26529,40 @@
               <a:t xml:space="preserve"> − 2</a:t>
             </a:r>
             <a:endParaRPr lang="en-US" sz="2325" dirty="0"/>
+          </a:p>
+        </p:txBody>
+      </p:sp>
+      <p:sp>
+        <p:nvSpPr>
+          <p:cNvPr id="13" name="Slide Number 13"/>
+          <p:cNvSpPr txBox="1"/>
+          <p:nvPr/>
+        </p:nvSpPr>
+        <p:spPr>
+          <a:xfrm>
+            <a:off x="11277295" y="6611112"/>
+            <a:ext cx="685800" cy="201168"/>
+          </a:xfrm>
+          <a:prstGeom prst="rect">
+            <a:avLst/>
+          </a:prstGeom>
+          <a:noFill/>
+        </p:spPr>
+        <p:txBody>
+          <a:bodyPr wrap="none" lIns="0" tIns="0" rIns="0" bIns="0" anchor="b">
+            <a:noAutofit/>
+          </a:bodyPr>
+          <a:lstStyle/>
+          <a:p>
+            <a:pPr algn="r"/>
+            <a:fld id="{5C1A6E0B-3B1F-4D5E-9C7A-2F4B8D6E1A90}" type="slidenum">
+              <a:rPr lang="en-US" sz="1200" dirty="0">
+                <a:solidFill>
+                  <a:srgbClr val="5F6272"/>
+                </a:solidFill>
+              </a:rPr>
+              <a:t>32</a:t>
+            </a:fld>
           </a:p>
         </p:txBody>
       </p:sp>
@@ -26169,6 +27053,40 @@
           </a:p>
         </p:txBody>
       </p:sp>
+      <p:sp>
+        <p:nvSpPr>
+          <p:cNvPr id="5" name="Slide Number 5"/>
+          <p:cNvSpPr txBox="1"/>
+          <p:nvPr/>
+        </p:nvSpPr>
+        <p:spPr>
+          <a:xfrm>
+            <a:off x="11277295" y="6611112"/>
+            <a:ext cx="685800" cy="201168"/>
+          </a:xfrm>
+          <a:prstGeom prst="rect">
+            <a:avLst/>
+          </a:prstGeom>
+          <a:noFill/>
+        </p:spPr>
+        <p:txBody>
+          <a:bodyPr wrap="none" lIns="0" tIns="0" rIns="0" bIns="0" anchor="b">
+            <a:noAutofit/>
+          </a:bodyPr>
+          <a:lstStyle/>
+          <a:p>
+            <a:pPr algn="r"/>
+            <a:fld id="{5C1A6E0B-3B1F-4D5E-9C7A-2F4B8D6E1A90}" type="slidenum">
+              <a:rPr lang="en-US" sz="1200" dirty="0">
+                <a:solidFill>
+                  <a:srgbClr val="5F6272"/>
+                </a:solidFill>
+              </a:rPr>
+              <a:t>33</a:t>
+            </a:fld>
+          </a:p>
+        </p:txBody>
+      </p:sp>
     </p:spTree>
   </p:cSld>
   <p:clrMapOvr>
@@ -26468,6 +27386,40 @@
           </a:p>
         </p:txBody>
       </p:sp>
+      <p:sp>
+        <p:nvSpPr>
+          <p:cNvPr id="6" name="Slide Number 6"/>
+          <p:cNvSpPr txBox="1"/>
+          <p:nvPr/>
+        </p:nvSpPr>
+        <p:spPr>
+          <a:xfrm>
+            <a:off x="11277295" y="6611112"/>
+            <a:ext cx="685800" cy="201168"/>
+          </a:xfrm>
+          <a:prstGeom prst="rect">
+            <a:avLst/>
+          </a:prstGeom>
+          <a:noFill/>
+        </p:spPr>
+        <p:txBody>
+          <a:bodyPr wrap="none" lIns="0" tIns="0" rIns="0" bIns="0" anchor="b">
+            <a:noAutofit/>
+          </a:bodyPr>
+          <a:lstStyle/>
+          <a:p>
+            <a:pPr algn="r"/>
+            <a:fld id="{5C1A6E0B-3B1F-4D5E-9C7A-2F4B8D6E1A90}" type="slidenum">
+              <a:rPr lang="en-US" sz="1200" dirty="0">
+                <a:solidFill>
+                  <a:srgbClr val="5F6272"/>
+                </a:solidFill>
+              </a:rPr>
+              <a:t>34</a:t>
+            </a:fld>
+          </a:p>
+        </p:txBody>
+      </p:sp>
     </p:spTree>
   </p:cSld>
   <p:clrMapOvr>
@@ -26704,6 +27656,40 @@
           </a:p>
         </p:txBody>
       </p:sp>
+      <p:sp>
+        <p:nvSpPr>
+          <p:cNvPr id="6" name="Slide Number 6"/>
+          <p:cNvSpPr txBox="1"/>
+          <p:nvPr/>
+        </p:nvSpPr>
+        <p:spPr>
+          <a:xfrm>
+            <a:off x="11277295" y="6611112"/>
+            <a:ext cx="685800" cy="201168"/>
+          </a:xfrm>
+          <a:prstGeom prst="rect">
+            <a:avLst/>
+          </a:prstGeom>
+          <a:noFill/>
+        </p:spPr>
+        <p:txBody>
+          <a:bodyPr wrap="none" lIns="0" tIns="0" rIns="0" bIns="0" anchor="b">
+            <a:noAutofit/>
+          </a:bodyPr>
+          <a:lstStyle/>
+          <a:p>
+            <a:pPr algn="r"/>
+            <a:fld id="{5C1A6E0B-3B1F-4D5E-9C7A-2F4B8D6E1A90}" type="slidenum">
+              <a:rPr lang="en-US" sz="1200" dirty="0">
+                <a:solidFill>
+                  <a:srgbClr val="5F6272"/>
+                </a:solidFill>
+              </a:rPr>
+              <a:t>4</a:t>
+            </a:fld>
+          </a:p>
+        </p:txBody>
+      </p:sp>
     </p:spTree>
   </p:cSld>
   <p:clrMapOvr>
@@ -28362,6 +29348,40 @@
           </a:p>
         </p:txBody>
       </p:sp>
+      <p:sp>
+        <p:nvSpPr>
+          <p:cNvPr id="28" name="Slide Number 28"/>
+          <p:cNvSpPr txBox="1"/>
+          <p:nvPr/>
+        </p:nvSpPr>
+        <p:spPr>
+          <a:xfrm>
+            <a:off x="11277295" y="6611112"/>
+            <a:ext cx="685800" cy="201168"/>
+          </a:xfrm>
+          <a:prstGeom prst="rect">
+            <a:avLst/>
+          </a:prstGeom>
+          <a:noFill/>
+        </p:spPr>
+        <p:txBody>
+          <a:bodyPr wrap="none" lIns="0" tIns="0" rIns="0" bIns="0" anchor="b">
+            <a:noAutofit/>
+          </a:bodyPr>
+          <a:lstStyle/>
+          <a:p>
+            <a:pPr algn="r"/>
+            <a:fld id="{5C1A6E0B-3B1F-4D5E-9C7A-2F4B8D6E1A90}" type="slidenum">
+              <a:rPr lang="en-US" sz="1200" dirty="0">
+                <a:solidFill>
+                  <a:srgbClr val="5F6272"/>
+                </a:solidFill>
+              </a:rPr>
+              <a:t>5</a:t>
+            </a:fld>
+          </a:p>
+        </p:txBody>
+      </p:sp>
     </p:spTree>
   </p:cSld>
   <p:clrMapOvr>
@@ -28824,6 +29844,40 @@
           </a:p>
         </p:txBody>
       </p:sp>
+      <p:sp>
+        <p:nvSpPr>
+          <p:cNvPr id="8" name="Slide Number 8"/>
+          <p:cNvSpPr txBox="1"/>
+          <p:nvPr/>
+        </p:nvSpPr>
+        <p:spPr>
+          <a:xfrm>
+            <a:off x="11277295" y="6611112"/>
+            <a:ext cx="685800" cy="201168"/>
+          </a:xfrm>
+          <a:prstGeom prst="rect">
+            <a:avLst/>
+          </a:prstGeom>
+          <a:noFill/>
+        </p:spPr>
+        <p:txBody>
+          <a:bodyPr wrap="none" lIns="0" tIns="0" rIns="0" bIns="0" anchor="b">
+            <a:noAutofit/>
+          </a:bodyPr>
+          <a:lstStyle/>
+          <a:p>
+            <a:pPr algn="r"/>
+            <a:fld id="{5C1A6E0B-3B1F-4D5E-9C7A-2F4B8D6E1A90}" type="slidenum">
+              <a:rPr lang="en-US" sz="1200" dirty="0">
+                <a:solidFill>
+                  <a:srgbClr val="5F6272"/>
+                </a:solidFill>
+              </a:rPr>
+              <a:t>6</a:t>
+            </a:fld>
+          </a:p>
+        </p:txBody>
+      </p:sp>
     </p:spTree>
   </p:cSld>
   <p:clrMapOvr>
@@ -30694,6 +31748,40 @@
           </a:ln>
         </p:spPr>
       </p:cxnSp>
+      <p:sp>
+        <p:nvSpPr>
+          <p:cNvPr id="54" name="Slide Number 54"/>
+          <p:cNvSpPr txBox="1"/>
+          <p:nvPr/>
+        </p:nvSpPr>
+        <p:spPr>
+          <a:xfrm>
+            <a:off x="11277295" y="6611112"/>
+            <a:ext cx="685800" cy="201168"/>
+          </a:xfrm>
+          <a:prstGeom prst="rect">
+            <a:avLst/>
+          </a:prstGeom>
+          <a:noFill/>
+        </p:spPr>
+        <p:txBody>
+          <a:bodyPr wrap="none" lIns="0" tIns="0" rIns="0" bIns="0" anchor="b">
+            <a:noAutofit/>
+          </a:bodyPr>
+          <a:lstStyle/>
+          <a:p>
+            <a:pPr algn="r"/>
+            <a:fld id="{5C1A6E0B-3B1F-4D5E-9C7A-2F4B8D6E1A90}" type="slidenum">
+              <a:rPr lang="en-US" sz="1200" dirty="0">
+                <a:solidFill>
+                  <a:srgbClr val="5F6272"/>
+                </a:solidFill>
+              </a:rPr>
+              <a:t>7</a:t>
+            </a:fld>
+          </a:p>
+        </p:txBody>
+      </p:sp>
     </p:spTree>
   </p:cSld>
   <p:clrMapOvr>
@@ -33551,6 +34639,40 @@
           </a:ln>
         </p:spPr>
       </p:cxnSp>
+      <p:sp>
+        <p:nvSpPr>
+          <p:cNvPr id="60" name="Slide Number 60"/>
+          <p:cNvSpPr txBox="1"/>
+          <p:nvPr/>
+        </p:nvSpPr>
+        <p:spPr>
+          <a:xfrm>
+            <a:off x="11277295" y="6611112"/>
+            <a:ext cx="685800" cy="201168"/>
+          </a:xfrm>
+          <a:prstGeom prst="rect">
+            <a:avLst/>
+          </a:prstGeom>
+          <a:noFill/>
+        </p:spPr>
+        <p:txBody>
+          <a:bodyPr wrap="none" lIns="0" tIns="0" rIns="0" bIns="0" anchor="b">
+            <a:noAutofit/>
+          </a:bodyPr>
+          <a:lstStyle/>
+          <a:p>
+            <a:pPr algn="r"/>
+            <a:fld id="{5C1A6E0B-3B1F-4D5E-9C7A-2F4B8D6E1A90}" type="slidenum">
+              <a:rPr lang="en-US" sz="1200" dirty="0">
+                <a:solidFill>
+                  <a:srgbClr val="5F6272"/>
+                </a:solidFill>
+              </a:rPr>
+              <a:t>8</a:t>
+            </a:fld>
+          </a:p>
+        </p:txBody>
+      </p:sp>
     </p:spTree>
   </p:cSld>
   <p:clrMapOvr>
@@ -36346,6 +37468,40 @@
           </a:ln>
         </p:spPr>
       </p:cxnSp>
+      <p:sp>
+        <p:nvSpPr>
+          <p:cNvPr id="52" name="Slide Number 52"/>
+          <p:cNvSpPr txBox="1"/>
+          <p:nvPr/>
+        </p:nvSpPr>
+        <p:spPr>
+          <a:xfrm>
+            <a:off x="11277295" y="6611112"/>
+            <a:ext cx="685800" cy="201168"/>
+          </a:xfrm>
+          <a:prstGeom prst="rect">
+            <a:avLst/>
+          </a:prstGeom>
+          <a:noFill/>
+        </p:spPr>
+        <p:txBody>
+          <a:bodyPr wrap="none" lIns="0" tIns="0" rIns="0" bIns="0" anchor="b">
+            <a:noAutofit/>
+          </a:bodyPr>
+          <a:lstStyle/>
+          <a:p>
+            <a:pPr algn="r"/>
+            <a:fld id="{5C1A6E0B-3B1F-4D5E-9C7A-2F4B8D6E1A90}" type="slidenum">
+              <a:rPr lang="en-US" sz="1200" dirty="0">
+                <a:solidFill>
+                  <a:srgbClr val="5F6272"/>
+                </a:solidFill>
+              </a:rPr>
+              <a:t>9</a:t>
+            </a:fld>
+          </a:p>
+        </p:txBody>
+      </p:sp>
     </p:spTree>
   </p:cSld>
   <p:clrMapOvr>

--- a/IEP/t2-lesson1-transforming-linear-functions-IEP-catchup.pptx
+++ b/IEP/t2-lesson1-transforming-linear-functions-IEP-catchup.pptx
@@ -42,6 +42,8 @@
     <p:sldId id="287" r:id="rId42"/>
     <p:sldId id="288" r:id="rId43"/>
     <p:sldId id="289" r:id="rId44"/>
+    <p:sldId id="290" r:id="rId45"/>
+    <p:sldId id="291" r:id="rId46"/>
   </p:sldIdLst>
   <p:sldSz cx="12192000" cy="6858000"/>
   <p:notesSz cx="6858000" cy="9144000"/>
@@ -1073,7 +1075,7 @@
           <a:p>
             <a:r>
               <a:rPr lang="en-US" dirty="0"/>
-              <a:t>All three lines pass through (0, 0): multiplying 0 gives 0.</a:t>
+              <a:t>For the teacher or assistant: click once for each step. Read the step aloud, and before each click ask the student what to do next. Students check their own paper and fix any mistake in a different color.</a:t>
             </a:r>
           </a:p>
         </p:txBody>
@@ -1132,7 +1134,7 @@
           <a:p>
             <a:r>
               <a:rPr lang="en-US" dirty="0"/>
-              <a:t>Class ends here on Tuesday, October 20.</a:t>
+              <a:t>All three lines pass through (0, 0): multiplying 0 gives 0.</a:t>
             </a:r>
           </a:p>
         </p:txBody>
@@ -1191,7 +1193,7 @@
           <a:p>
             <a:r>
               <a:rPr lang="en-US" dirty="0"/>
-              <a:t>Class starts here on Wednesday, October 21.</a:t>
+              <a:t>Class ends here on Tuesday, October 20.</a:t>
             </a:r>
           </a:p>
         </p:txBody>
@@ -1250,7 +1252,7 @@
           <a:p>
             <a:r>
               <a:rPr lang="en-US" dirty="0"/>
-              <a:t>Added for this deck; not from the textbook. Have this up as students walk in; they work silently while you take attendance (about 5 minutes). The same 4 questions are on the online Day 3 bell work. Reveal the answers one at a time. Answer key: 1. g(x) = 3x. A vertical dilation by 3 multiplies the slope of f(x) = x by 3. 2. The 2 stretches the graph and the negative sign reflects it across the x-axis. 3. Multiplying by a number between 0 and 1 compresses the graph toward the x-axis. 4. g(x) = 2x − 5. The dilation keeps (0, 0) fixed, then the graph moves down 5.</a:t>
+              <a:t>Class starts here on Wednesday, October 21.</a:t>
             </a:r>
           </a:p>
         </p:txBody>
@@ -1309,7 +1311,7 @@
           <a:p>
             <a:r>
               <a:rPr lang="en-US" dirty="0"/>
-              <a:t>Catch-up from Topic 1 Lesson 5 so the class is ready for the End of Topic 1 Assessment (Lessons 1–6). Keep it to about 15 minutes, then go back to the Topic 2 lesson.</a:t>
+              <a:t>Added for this deck; not from the textbook. Have this up as students walk in; they work silently while you take attendance (about 5 minutes). The same 4 questions are on the online Day 3 bell work. Reveal the answers one at a time. Answer key: 1. g(x) = 3x. A vertical dilation by 3 multiplies the slope of f(x) = x by 3. 2. The 2 stretches the graph and the negative sign reflects it across the x-axis. 3. Multiplying by a number between 0 and 1 compresses the graph toward the x-axis. 4. g(x) = 2x − 5. The dilation keeps (0, 0) fixed, then the graph moves down 5.</a:t>
             </a:r>
           </a:p>
         </p:txBody>
@@ -1368,7 +1370,7 @@
           <a:p>
             <a:r>
               <a:rPr lang="en-US" dirty="0"/>
-              <a:t>Cover the x-term to find the y-intercept, and cover the y-term to find the x-intercept.</a:t>
+              <a:t>Catch-up from Topic 1 Lesson 5 so the class is ready for the End of Topic 1 Assessment (Lessons 1–6). Keep it to about 15 minutes, then go back to the Topic 2 lesson.</a:t>
             </a:r>
           </a:p>
         </p:txBody>
@@ -1425,7 +1427,10 @@
           <a:bodyPr/>
           <a:lstStyle/>
           <a:p>
-            <a:endParaRPr lang="en-US"/>
+            <a:r>
+              <a:rPr lang="en-US" dirty="0"/>
+              <a:t>Cover the x-term to find the y-intercept, and cover the y-term to find the x-intercept.</a:t>
+            </a:r>
           </a:p>
         </p:txBody>
       </p:sp>
@@ -1540,10 +1545,7 @@
           <a:bodyPr/>
           <a:lstStyle/>
           <a:p>
-            <a:r>
-              <a:rPr lang="en-US" dirty="0"/>
-              <a:t>End of the Topic 1 Catch-Up. Continue with the Topic 2 lesson.</a:t>
-            </a:r>
+            <a:endParaRPr lang="en-US"/>
           </a:p>
         </p:txBody>
       </p:sp>
@@ -1599,7 +1601,10 @@
           <a:bodyPr/>
           <a:lstStyle/>
           <a:p>
-            <a:endParaRPr lang="en-US"/>
+            <a:r>
+              <a:rPr lang="en-US" dirty="0"/>
+              <a:t>End of the Topic 1 Catch-Up. Continue with the Topic 2 lesson.</a:t>
+            </a:r>
           </a:p>
         </p:txBody>
       </p:sp>
@@ -1655,10 +1660,7 @@
           <a:bodyPr/>
           <a:lstStyle/>
           <a:p>
-            <a:r>
-              <a:rPr lang="en-US" dirty="0"/>
-              <a:t>Give students time to try all items before revealing. Students may use the steps slide and their notes.</a:t>
-            </a:r>
+            <a:endParaRPr lang="en-US"/>
           </a:p>
         </p:txBody>
       </p:sp>
@@ -1716,7 +1718,7 @@
           <a:p>
             <a:r>
               <a:rPr lang="en-US" dirty="0"/>
-              <a:t>Class ends here on Wednesday, October 21.</a:t>
+              <a:t>For the teacher or assistant: click once for each step. Read the step aloud, and before each click ask the student what to do next. Students check their own paper and fix any mistake in a different color.</a:t>
             </a:r>
           </a:p>
         </p:txBody>
@@ -1730,6 +1732,124 @@
 </file>
 
 <file path=ppt/notesSlides/notesSlide34.xml><?xml version="1.0" encoding="utf-8"?>
+<p:notes xmlns:a="http://schemas.openxmlformats.org/drawingml/2006/main" xmlns:r="http://schemas.openxmlformats.org/officeDocument/2006/relationships" xmlns:p="http://schemas.openxmlformats.org/presentationml/2006/main">
+  <p:cSld>
+    <p:spTree>
+      <p:nvGrpSpPr>
+        <p:cNvPr id="1" name=""/>
+        <p:cNvGrpSpPr/>
+        <p:nvPr/>
+      </p:nvGrpSpPr>
+      <p:grpSpPr>
+        <a:xfrm>
+          <a:off x="0" y="0"/>
+          <a:ext cx="0" cy="0"/>
+          <a:chOff x="0" y="0"/>
+          <a:chExt cx="0" cy="0"/>
+        </a:xfrm>
+      </p:grpSpPr>
+      <p:sp>
+        <p:nvSpPr>
+          <p:cNvPr id="2" name="Slide Image Placeholder 1"/>
+          <p:cNvSpPr>
+            <a:spLocks noGrp="1" noRot="1" noChangeAspect="1"/>
+          </p:cNvSpPr>
+          <p:nvPr>
+            <p:ph type="sldImg"/>
+          </p:nvPr>
+        </p:nvSpPr>
+        <p:spPr/>
+      </p:sp>
+      <p:sp>
+        <p:nvSpPr>
+          <p:cNvPr id="3" name="Notes Placeholder 2"/>
+          <p:cNvSpPr>
+            <a:spLocks noGrp="1"/>
+          </p:cNvSpPr>
+          <p:nvPr>
+            <p:ph type="body" idx="1"/>
+          </p:nvPr>
+        </p:nvSpPr>
+        <p:spPr/>
+        <p:txBody>
+          <a:bodyPr/>
+          <a:lstStyle/>
+          <a:p>
+            <a:r>
+              <a:rPr lang="en-US" dirty="0"/>
+              <a:t>Give students time to try all items before revealing. Students may use the steps slide and their notes.</a:t>
+            </a:r>
+          </a:p>
+        </p:txBody>
+      </p:sp>
+    </p:spTree>
+  </p:cSld>
+  <p:clrMapOvr>
+    <a:masterClrMapping/>
+  </p:clrMapOvr>
+</p:notes>
+</file>
+
+<file path=ppt/notesSlides/notesSlide35.xml><?xml version="1.0" encoding="utf-8"?>
+<p:notes xmlns:a="http://schemas.openxmlformats.org/drawingml/2006/main" xmlns:r="http://schemas.openxmlformats.org/officeDocument/2006/relationships" xmlns:p="http://schemas.openxmlformats.org/presentationml/2006/main">
+  <p:cSld>
+    <p:spTree>
+      <p:nvGrpSpPr>
+        <p:cNvPr id="1" name=""/>
+        <p:cNvGrpSpPr/>
+        <p:nvPr/>
+      </p:nvGrpSpPr>
+      <p:grpSpPr>
+        <a:xfrm>
+          <a:off x="0" y="0"/>
+          <a:ext cx="0" cy="0"/>
+          <a:chOff x="0" y="0"/>
+          <a:chExt cx="0" cy="0"/>
+        </a:xfrm>
+      </p:grpSpPr>
+      <p:sp>
+        <p:nvSpPr>
+          <p:cNvPr id="2" name="Slide Image Placeholder 1"/>
+          <p:cNvSpPr>
+            <a:spLocks noGrp="1" noRot="1" noChangeAspect="1"/>
+          </p:cNvSpPr>
+          <p:nvPr>
+            <p:ph type="sldImg"/>
+          </p:nvPr>
+        </p:nvSpPr>
+        <p:spPr/>
+      </p:sp>
+      <p:sp>
+        <p:nvSpPr>
+          <p:cNvPr id="3" name="Notes Placeholder 2"/>
+          <p:cNvSpPr>
+            <a:spLocks noGrp="1"/>
+          </p:cNvSpPr>
+          <p:nvPr>
+            <p:ph type="body" idx="1"/>
+          </p:nvPr>
+        </p:nvSpPr>
+        <p:spPr/>
+        <p:txBody>
+          <a:bodyPr/>
+          <a:lstStyle/>
+          <a:p>
+            <a:r>
+              <a:rPr lang="en-US" dirty="0"/>
+              <a:t>Class ends here on Wednesday, October 21.</a:t>
+            </a:r>
+          </a:p>
+        </p:txBody>
+      </p:sp>
+    </p:spTree>
+  </p:cSld>
+  <p:clrMapOvr>
+    <a:masterClrMapping/>
+  </p:clrMapOvr>
+</p:notes>
+</file>
+
+<file path=ppt/notesSlides/notesSlide36.xml><?xml version="1.0" encoding="utf-8"?>
 <p:notes xmlns:a="http://schemas.openxmlformats.org/drawingml/2006/main" xmlns:r="http://schemas.openxmlformats.org/officeDocument/2006/relationships" xmlns:p="http://schemas.openxmlformats.org/presentationml/2006/main">
   <p:cSld>
     <p:spTree>
@@ -14935,7 +15055,7 @@
                 <a:latin typeface="Segoe UI"/>
                 <a:cs typeface="Segoe UI"/>
               </a:rPr>
-              <a:t xml:space="preserve">I do · Stretch</a:t>
+              <a:t xml:space="preserve">Check it · Step by step</a:t>
             </a:r>
             <a:endParaRPr lang="en-US" sz="1200" dirty="0"/>
           </a:p>
@@ -14979,7 +15099,7 @@
                 <a:latin typeface="Segoe UI"/>
                 <a:cs typeface="Segoe UI"/>
               </a:rPr>
-              <a:t xml:space="preserve">Multiply </a:t>
+              <a:t xml:space="preserve">Parallel to </a:t>
             </a:r>
             <a:r>
               <a:rPr lang="en-US" sz="3450" dirty="0" b="1" i="1">
@@ -14989,7 +15109,7 @@
                 <a:latin typeface="Segoe UI"/>
                 <a:cs typeface="Segoe UI"/>
               </a:rPr>
-              <a:t xml:space="preserve">f</a:t>
+              <a:t xml:space="preserve">y</a:t>
             </a:r>
             <a:r>
               <a:rPr lang="en-US" sz="3450" dirty="0" b="1">
@@ -14999,7 +15119,7 @@
                 <a:latin typeface="Segoe UI"/>
                 <a:cs typeface="Segoe UI"/>
               </a:rPr>
-              <a:t xml:space="preserve">(</a:t>
+              <a:t xml:space="preserve"> = 2</a:t>
             </a:r>
             <a:r>
               <a:rPr lang="en-US" sz="3450" dirty="0" b="1" i="1">
@@ -15011,418 +15131,20 @@
               </a:rPr>
               <a:t xml:space="preserve">x</a:t>
             </a:r>
-            <a:r>
-              <a:rPr lang="en-US" sz="3450" dirty="0" b="1">
-                <a:solidFill>
-                  <a:srgbClr val="16171D"/>
-                </a:solidFill>
-                <a:latin typeface="Segoe UI"/>
-                <a:cs typeface="Segoe UI"/>
-              </a:rPr>
-              <a:t xml:space="preserve">) = </a:t>
-            </a:r>
-            <a:r>
-              <a:rPr lang="en-US" sz="3450" dirty="0" b="1" i="1">
-                <a:solidFill>
-                  <a:srgbClr val="16171D"/>
-                </a:solidFill>
-                <a:latin typeface="Segoe UI"/>
-                <a:cs typeface="Segoe UI"/>
-              </a:rPr>
-              <a:t xml:space="preserve">x</a:t>
-            </a:r>
-            <a:r>
-              <a:rPr lang="en-US" sz="3450" dirty="0" b="1">
-                <a:solidFill>
-                  <a:srgbClr val="16171D"/>
-                </a:solidFill>
-                <a:latin typeface="Segoe UI"/>
-                <a:cs typeface="Segoe UI"/>
-              </a:rPr>
-              <a:t xml:space="preserve"> by 4</a:t>
-            </a:r>
             <a:endParaRPr lang="en-US" sz="3450" dirty="0"/>
           </a:p>
         </p:txBody>
       </p:sp>
       <p:sp>
         <p:nvSpPr>
-          <p:cNvPr id="4" name="Shape 4"/>
+          <p:cNvPr id="10" name="Shape 10"/>
           <p:cNvSpPr txBox="1"/>
           <p:nvPr/>
         </p:nvSpPr>
         <p:spPr>
           <a:xfrm>
             <a:off x="685800" y="1618488"/>
-            <a:ext cx="5219548" cy="352044"/>
-          </a:xfrm>
-          <a:prstGeom prst="rect">
-            <a:avLst/>
-          </a:prstGeom>
-          <a:noFill/>
-          <a:ln>
-            <a:noFill/>
-          </a:ln>
-        </p:spPr>
-        <p:txBody>
-          <a:bodyPr wrap="square" lIns="36576" tIns="27432" rIns="36576" bIns="27432" anchor="t">
-            <a:noAutofit/>
-          </a:bodyPr>
-          <a:lstStyle/>
-          <a:p>
-            <a:pPr algn="l">
-              <a:lnSpc>
-                <a:spcPct val="100000"/>
-              </a:lnSpc>
-            </a:pPr>
-            <a:r>
-              <a:rPr lang="en-US" sz="1950" dirty="0">
-                <a:solidFill>
-                  <a:srgbClr val="16171D"/>
-                </a:solidFill>
-                <a:latin typeface="Segoe UI"/>
-                <a:cs typeface="Segoe UI"/>
-              </a:rPr>
-              <a:t xml:space="preserve">Multiply every output by 4.</a:t>
-            </a:r>
-            <a:endParaRPr lang="en-US" sz="1950" dirty="0"/>
-          </a:p>
-        </p:txBody>
-      </p:sp>
-      <p:sp>
-        <p:nvSpPr>
-          <p:cNvPr id="5" name="Shape 5"/>
-          <p:cNvSpPr txBox="1"/>
-          <p:nvPr/>
-        </p:nvSpPr>
-        <p:spPr>
-          <a:xfrm>
-            <a:off x="685800" y="2103882"/>
-            <a:ext cx="3405500" cy="518922"/>
-          </a:xfrm>
-          <a:prstGeom prst="roundRect">
-            <a:avLst>
-              <a:gd name="adj" fmla="val 8000"/>
-            </a:avLst>
-          </a:prstGeom>
-          <a:solidFill>
-            <a:srgbClr val="EDF5E9"/>
-          </a:solidFill>
-          <a:ln>
-            <a:noFill/>
-          </a:ln>
-        </p:spPr>
-        <p:txBody>
-          <a:bodyPr wrap="square" lIns="164592" tIns="64008" rIns="164592" bIns="64008" anchor="ctr">
-            <a:noAutofit/>
-          </a:bodyPr>
-          <a:lstStyle/>
-          <a:p>
-            <a:pPr algn="l">
-              <a:lnSpc>
-                <a:spcPct val="100000"/>
-              </a:lnSpc>
-            </a:pPr>
-            <a:r>
-              <a:rPr lang="en-US" sz="1125" dirty="0" b="1" spc="100">
-                <a:solidFill>
-                  <a:srgbClr val="4F8A3C"/>
-                </a:solidFill>
-                <a:latin typeface="Segoe UI"/>
-                <a:cs typeface="Segoe UI"/>
-              </a:rPr>
-              <a:t xml:space="preserve">ANSWER   </a:t>
-            </a:r>
-            <a:r>
-              <a:rPr lang="en-US" sz="2325" dirty="0" i="1">
-                <a:solidFill>
-                  <a:srgbClr val="16171D"/>
-                </a:solidFill>
-                <a:latin typeface="Cambria"/>
-                <a:cs typeface="Cambria"/>
-              </a:rPr>
-              <a:t xml:space="preserve">a</a:t>
-            </a:r>
-            <a:r>
-              <a:rPr lang="en-US" sz="2325" dirty="0">
-                <a:solidFill>
-                  <a:srgbClr val="16171D"/>
-                </a:solidFill>
-                <a:latin typeface="Cambria"/>
-                <a:cs typeface="Cambria"/>
-              </a:rPr>
-              <a:t xml:space="preserve">(</a:t>
-            </a:r>
-            <a:r>
-              <a:rPr lang="en-US" sz="2325" dirty="0" i="1">
-                <a:solidFill>
-                  <a:srgbClr val="16171D"/>
-                </a:solidFill>
-                <a:latin typeface="Cambria"/>
-                <a:cs typeface="Cambria"/>
-              </a:rPr>
-              <a:t xml:space="preserve">x</a:t>
-            </a:r>
-            <a:r>
-              <a:rPr lang="en-US" sz="2325" dirty="0">
-                <a:solidFill>
-                  <a:srgbClr val="16171D"/>
-                </a:solidFill>
-                <a:latin typeface="Cambria"/>
-                <a:cs typeface="Cambria"/>
-              </a:rPr>
-              <a:t xml:space="preserve">) = 4</a:t>
-            </a:r>
-            <a:r>
-              <a:rPr lang="en-US" sz="2325" dirty="0" i="1">
-                <a:solidFill>
-                  <a:srgbClr val="16171D"/>
-                </a:solidFill>
-                <a:latin typeface="Cambria"/>
-                <a:cs typeface="Cambria"/>
-              </a:rPr>
-              <a:t xml:space="preserve">x</a:t>
-            </a:r>
-            <a:endParaRPr lang="en-US" sz="2325" dirty="0"/>
-          </a:p>
-        </p:txBody>
-      </p:sp>
-      <p:sp>
-        <p:nvSpPr>
-          <p:cNvPr id="6" name="Shape 6"/>
-          <p:cNvSpPr txBox="1"/>
-          <p:nvPr/>
-        </p:nvSpPr>
-        <p:spPr>
-          <a:xfrm>
-            <a:off x="685800" y="2756154"/>
-            <a:ext cx="5219548" cy="352044"/>
-          </a:xfrm>
-          <a:prstGeom prst="rect">
-            <a:avLst/>
-          </a:prstGeom>
-          <a:noFill/>
-          <a:ln>
-            <a:noFill/>
-          </a:ln>
-        </p:spPr>
-        <p:txBody>
-          <a:bodyPr wrap="square" lIns="36576" tIns="27432" rIns="36576" bIns="27432" anchor="t">
-            <a:noAutofit/>
-          </a:bodyPr>
-          <a:lstStyle/>
-          <a:p>
-            <a:pPr algn="l">
-              <a:lnSpc>
-                <a:spcPct val="100000"/>
-              </a:lnSpc>
-            </a:pPr>
-            <a:r>
-              <a:rPr lang="en-US" sz="1950" dirty="0">
-                <a:solidFill>
-                  <a:srgbClr val="16171D"/>
-                </a:solidFill>
-                <a:latin typeface="Segoe UI"/>
-                <a:cs typeface="Segoe UI"/>
-              </a:rPr>
-              <a:t xml:space="preserve">The slope is now </a:t>
-            </a:r>
-            <a:r>
-              <a:rPr lang="en-US" sz="1950" dirty="0" b="1">
-                <a:solidFill>
-                  <a:srgbClr val="C9561F"/>
-                </a:solidFill>
-                <a:latin typeface="Segoe UI"/>
-                <a:cs typeface="Segoe UI"/>
-              </a:rPr>
-              <a:t xml:space="preserve">4</a:t>
-            </a:r>
-            <a:r>
-              <a:rPr lang="en-US" sz="1950" dirty="0">
-                <a:solidFill>
-                  <a:srgbClr val="16171D"/>
-                </a:solidFill>
-                <a:latin typeface="Segoe UI"/>
-                <a:cs typeface="Segoe UI"/>
-              </a:rPr>
-              <a:t xml:space="preserve">: steeper.</a:t>
-            </a:r>
-            <a:endParaRPr lang="en-US" sz="1950" dirty="0"/>
-          </a:p>
-        </p:txBody>
-      </p:sp>
-      <p:sp>
-        <p:nvSpPr>
-          <p:cNvPr id="7" name="Shape 7"/>
-          <p:cNvSpPr txBox="1"/>
-          <p:nvPr/>
-        </p:nvSpPr>
-        <p:spPr>
-          <a:xfrm>
-            <a:off x="685800" y="3241548"/>
-            <a:ext cx="5219548" cy="352044"/>
-          </a:xfrm>
-          <a:prstGeom prst="rect">
-            <a:avLst/>
-          </a:prstGeom>
-          <a:noFill/>
-          <a:ln>
-            <a:noFill/>
-          </a:ln>
-        </p:spPr>
-        <p:txBody>
-          <a:bodyPr wrap="square" lIns="36576" tIns="27432" rIns="36576" bIns="27432" anchor="t">
-            <a:noAutofit/>
-          </a:bodyPr>
-          <a:lstStyle/>
-          <a:p>
-            <a:pPr algn="l">
-              <a:lnSpc>
-                <a:spcPct val="100000"/>
-              </a:lnSpc>
-            </a:pPr>
-            <a:r>
-              <a:rPr lang="en-US" sz="1950" dirty="0">
-                <a:solidFill>
-                  <a:srgbClr val="16171D"/>
-                </a:solidFill>
-                <a:latin typeface="Segoe UI"/>
-                <a:cs typeface="Segoe UI"/>
-              </a:rPr>
-              <a:t xml:space="preserve">With −4, the line also </a:t>
-            </a:r>
-            <a:r>
-              <a:rPr lang="en-US" sz="1950" dirty="0" b="1">
-                <a:solidFill>
-                  <a:srgbClr val="16171D"/>
-                </a:solidFill>
-                <a:latin typeface="Segoe UI"/>
-                <a:cs typeface="Segoe UI"/>
-              </a:rPr>
-              <a:t xml:space="preserve">flips</a:t>
-            </a:r>
-            <a:r>
-              <a:rPr lang="en-US" sz="1950" dirty="0">
-                <a:solidFill>
-                  <a:srgbClr val="16171D"/>
-                </a:solidFill>
-                <a:latin typeface="Segoe UI"/>
-                <a:cs typeface="Segoe UI"/>
-              </a:rPr>
-              <a:t xml:space="preserve">:</a:t>
-            </a:r>
-            <a:endParaRPr lang="en-US" sz="1950" dirty="0"/>
-          </a:p>
-        </p:txBody>
-      </p:sp>
-      <p:sp>
-        <p:nvSpPr>
-          <p:cNvPr id="8" name="Shape 8"/>
-          <p:cNvSpPr txBox="1"/>
-          <p:nvPr/>
-        </p:nvSpPr>
-        <p:spPr>
-          <a:xfrm>
-            <a:off x="685800" y="3726942"/>
-            <a:ext cx="3571326" cy="518922"/>
-          </a:xfrm>
-          <a:prstGeom prst="roundRect">
-            <a:avLst>
-              <a:gd name="adj" fmla="val 8000"/>
-            </a:avLst>
-          </a:prstGeom>
-          <a:solidFill>
-            <a:srgbClr val="EDF5E9"/>
-          </a:solidFill>
-          <a:ln>
-            <a:noFill/>
-          </a:ln>
-        </p:spPr>
-        <p:txBody>
-          <a:bodyPr wrap="square" lIns="164592" tIns="64008" rIns="164592" bIns="64008" anchor="ctr">
-            <a:noAutofit/>
-          </a:bodyPr>
-          <a:lstStyle/>
-          <a:p>
-            <a:pPr algn="l">
-              <a:lnSpc>
-                <a:spcPct val="100000"/>
-              </a:lnSpc>
-            </a:pPr>
-            <a:r>
-              <a:rPr lang="en-US" sz="1125" dirty="0" b="1" spc="100">
-                <a:solidFill>
-                  <a:srgbClr val="4F8A3C"/>
-                </a:solidFill>
-                <a:latin typeface="Segoe UI"/>
-                <a:cs typeface="Segoe UI"/>
-              </a:rPr>
-              <a:t xml:space="preserve">ANSWER   </a:t>
-            </a:r>
-            <a:r>
-              <a:rPr lang="en-US" sz="2325" dirty="0" i="1">
-                <a:solidFill>
-                  <a:srgbClr val="16171D"/>
-                </a:solidFill>
-                <a:latin typeface="Cambria"/>
-                <a:cs typeface="Cambria"/>
-              </a:rPr>
-              <a:t xml:space="preserve">c</a:t>
-            </a:r>
-            <a:r>
-              <a:rPr lang="en-US" sz="2325" dirty="0">
-                <a:solidFill>
-                  <a:srgbClr val="16171D"/>
-                </a:solidFill>
-                <a:latin typeface="Cambria"/>
-                <a:cs typeface="Cambria"/>
-              </a:rPr>
-              <a:t xml:space="preserve">(</a:t>
-            </a:r>
-            <a:r>
-              <a:rPr lang="en-US" sz="2325" dirty="0" i="1">
-                <a:solidFill>
-                  <a:srgbClr val="16171D"/>
-                </a:solidFill>
-                <a:latin typeface="Cambria"/>
-                <a:cs typeface="Cambria"/>
-              </a:rPr>
-              <a:t xml:space="preserve">x</a:t>
-            </a:r>
-            <a:r>
-              <a:rPr lang="en-US" sz="2325" dirty="0">
-                <a:solidFill>
-                  <a:srgbClr val="16171D"/>
-                </a:solidFill>
-                <a:latin typeface="Cambria"/>
-                <a:cs typeface="Cambria"/>
-              </a:rPr>
-              <a:t xml:space="preserve">) = −4</a:t>
-            </a:r>
-            <a:r>
-              <a:rPr lang="en-US" sz="2325" dirty="0" i="1">
-                <a:solidFill>
-                  <a:srgbClr val="16171D"/>
-                </a:solidFill>
-                <a:latin typeface="Cambria"/>
-                <a:cs typeface="Cambria"/>
-              </a:rPr>
-              <a:t xml:space="preserve">x</a:t>
-            </a:r>
-            <a:endParaRPr lang="en-US" sz="2325" dirty="0"/>
-          </a:p>
-        </p:txBody>
-      </p:sp>
-      <p:sp>
-        <p:nvSpPr>
-          <p:cNvPr id="9" name="Shape 9"/>
-          <p:cNvSpPr/>
-          <p:nvPr/>
-        </p:nvSpPr>
-        <p:spPr>
-          <a:xfrm>
-            <a:off x="6286348" y="1618488"/>
-            <a:ext cx="3238500" cy="3238500"/>
+            <a:ext cx="5295748" cy="3132582"/>
           </a:xfrm>
           <a:prstGeom prst="roundRect">
             <a:avLst>
@@ -15453,6 +15175,2800 @@
           </a:p>
         </p:txBody>
       </p:sp>
+      <p:sp>
+        <p:nvSpPr>
+          <p:cNvPr id="4" name="Shape 4"/>
+          <p:cNvSpPr txBox="1"/>
+          <p:nvPr/>
+        </p:nvSpPr>
+        <p:spPr>
+          <a:xfrm>
+            <a:off x="895350" y="1789938"/>
+            <a:ext cx="4876648" cy="374904"/>
+          </a:xfrm>
+          <a:prstGeom prst="rect">
+            <a:avLst/>
+          </a:prstGeom>
+          <a:noFill/>
+          <a:ln>
+            <a:noFill/>
+          </a:ln>
+        </p:spPr>
+        <p:txBody>
+          <a:bodyPr wrap="square" lIns="36576" tIns="27432" rIns="36576" bIns="27432" anchor="t">
+            <a:noAutofit/>
+          </a:bodyPr>
+          <a:lstStyle/>
+          <a:p>
+            <a:pPr algn="l">
+              <a:lnSpc>
+                <a:spcPct val="100000"/>
+              </a:lnSpc>
+            </a:pPr>
+            <a:r>
+              <a:rPr lang="en-US" sz="2100" dirty="0" b="1">
+                <a:solidFill>
+                  <a:srgbClr val="16171D"/>
+                </a:solidFill>
+                <a:latin typeface="Segoe UI"/>
+                <a:cs typeface="Segoe UI"/>
+              </a:rPr>
+              <a:t xml:space="preserve">1. Through (0, 4)</a:t>
+            </a:r>
+            <a:endParaRPr lang="en-US" sz="2100" dirty="0"/>
+          </a:p>
+        </p:txBody>
+      </p:sp>
+      <p:sp>
+        <p:nvSpPr>
+          <p:cNvPr id="5" name="Shape 5"/>
+          <p:cNvSpPr txBox="1"/>
+          <p:nvPr/>
+        </p:nvSpPr>
+        <p:spPr>
+          <a:xfrm>
+            <a:off x="895350" y="2260092"/>
+            <a:ext cx="4876648" cy="294894"/>
+          </a:xfrm>
+          <a:prstGeom prst="rect">
+            <a:avLst/>
+          </a:prstGeom>
+          <a:noFill/>
+          <a:ln>
+            <a:noFill/>
+          </a:ln>
+        </p:spPr>
+        <p:txBody>
+          <a:bodyPr wrap="square" lIns="36576" tIns="27432" rIns="36576" bIns="27432" anchor="t">
+            <a:noAutofit/>
+          </a:bodyPr>
+          <a:lstStyle/>
+          <a:p>
+            <a:pPr algn="l">
+              <a:lnSpc>
+                <a:spcPct val="100000"/>
+              </a:lnSpc>
+            </a:pPr>
+            <a:r>
+              <a:rPr lang="en-US" sz="1575" dirty="0" b="1">
+                <a:solidFill>
+                  <a:srgbClr val="16171D"/>
+                </a:solidFill>
+                <a:latin typeface="Segoe UI"/>
+                <a:cs typeface="Segoe UI"/>
+              </a:rPr>
+              <a:t xml:space="preserve">Step 1.</a:t>
+            </a:r>
+            <a:r>
+              <a:rPr lang="en-US" sz="1575" dirty="0">
+                <a:solidFill>
+                  <a:srgbClr val="16171D"/>
+                </a:solidFill>
+                <a:latin typeface="Segoe UI"/>
+                <a:cs typeface="Segoe UI"/>
+              </a:rPr>
+              <a:t xml:space="preserve"> Parallel means the </a:t>
+            </a:r>
+            <a:r>
+              <a:rPr lang="en-US" sz="1575" dirty="0" b="1">
+                <a:solidFill>
+                  <a:srgbClr val="16171D"/>
+                </a:solidFill>
+                <a:latin typeface="Segoe UI"/>
+                <a:cs typeface="Segoe UI"/>
+              </a:rPr>
+              <a:t xml:space="preserve">same slope</a:t>
+            </a:r>
+            <a:r>
+              <a:rPr lang="en-US" sz="1575" dirty="0">
+                <a:solidFill>
+                  <a:srgbClr val="16171D"/>
+                </a:solidFill>
+                <a:latin typeface="Segoe UI"/>
+                <a:cs typeface="Segoe UI"/>
+              </a:rPr>
+              <a:t xml:space="preserve">: </a:t>
+            </a:r>
+            <a:r>
+              <a:rPr lang="en-US" sz="1575" dirty="0" i="1">
+                <a:solidFill>
+                  <a:srgbClr val="16171D"/>
+                </a:solidFill>
+                <a:latin typeface="Segoe UI"/>
+                <a:cs typeface="Segoe UI"/>
+              </a:rPr>
+              <a:t xml:space="preserve">m</a:t>
+            </a:r>
+            <a:r>
+              <a:rPr lang="en-US" sz="1575" dirty="0">
+                <a:solidFill>
+                  <a:srgbClr val="16171D"/>
+                </a:solidFill>
+                <a:latin typeface="Segoe UI"/>
+                <a:cs typeface="Segoe UI"/>
+              </a:rPr>
+              <a:t xml:space="preserve"> = 2.</a:t>
+            </a:r>
+            <a:endParaRPr lang="en-US" sz="1575" dirty="0"/>
+          </a:p>
+        </p:txBody>
+      </p:sp>
+      <p:sp>
+        <p:nvSpPr>
+          <p:cNvPr id="6" name="Shape 6"/>
+          <p:cNvSpPr txBox="1"/>
+          <p:nvPr/>
+        </p:nvSpPr>
+        <p:spPr>
+          <a:xfrm>
+            <a:off x="895350" y="2650236"/>
+            <a:ext cx="4876648" cy="534924"/>
+          </a:xfrm>
+          <a:prstGeom prst="rect">
+            <a:avLst/>
+          </a:prstGeom>
+          <a:noFill/>
+          <a:ln>
+            <a:noFill/>
+          </a:ln>
+        </p:spPr>
+        <p:txBody>
+          <a:bodyPr wrap="square" lIns="36576" tIns="27432" rIns="36576" bIns="27432" anchor="t">
+            <a:noAutofit/>
+          </a:bodyPr>
+          <a:lstStyle/>
+          <a:p>
+            <a:pPr algn="l">
+              <a:lnSpc>
+                <a:spcPct val="100000"/>
+              </a:lnSpc>
+            </a:pPr>
+            <a:r>
+              <a:rPr lang="en-US" sz="1575" dirty="0" b="1">
+                <a:solidFill>
+                  <a:srgbClr val="16171D"/>
+                </a:solidFill>
+                <a:latin typeface="Segoe UI"/>
+                <a:cs typeface="Segoe UI"/>
+              </a:rPr>
+              <a:t xml:space="preserve">Step 2.</a:t>
+            </a:r>
+            <a:r>
+              <a:rPr lang="en-US" sz="1575" dirty="0">
+                <a:solidFill>
+                  <a:srgbClr val="16171D"/>
+                </a:solidFill>
+                <a:latin typeface="Segoe UI"/>
+                <a:cs typeface="Segoe UI"/>
+              </a:rPr>
+              <a:t xml:space="preserve"> Put </a:t>
+            </a:r>
+            <a:r>
+              <a:rPr lang="en-US" sz="1575" dirty="0" i="1">
+                <a:solidFill>
+                  <a:srgbClr val="16171D"/>
+                </a:solidFill>
+                <a:latin typeface="Segoe UI"/>
+                <a:cs typeface="Segoe UI"/>
+              </a:rPr>
+              <a:t xml:space="preserve">x</a:t>
+            </a:r>
+            <a:r>
+              <a:rPr lang="en-US" sz="1575" dirty="0">
+                <a:solidFill>
+                  <a:srgbClr val="16171D"/>
+                </a:solidFill>
+                <a:latin typeface="Segoe UI"/>
+                <a:cs typeface="Segoe UI"/>
+              </a:rPr>
+              <a:t xml:space="preserve"> = 0 and </a:t>
+            </a:r>
+            <a:r>
+              <a:rPr lang="en-US" sz="1575" dirty="0" i="1">
+                <a:solidFill>
+                  <a:srgbClr val="16171D"/>
+                </a:solidFill>
+                <a:latin typeface="Segoe UI"/>
+                <a:cs typeface="Segoe UI"/>
+              </a:rPr>
+              <a:t xml:space="preserve">y</a:t>
+            </a:r>
+            <a:r>
+              <a:rPr lang="en-US" sz="1575" dirty="0">
+                <a:solidFill>
+                  <a:srgbClr val="16171D"/>
+                </a:solidFill>
+                <a:latin typeface="Segoe UI"/>
+                <a:cs typeface="Segoe UI"/>
+              </a:rPr>
+              <a:t xml:space="preserve"> = 4 into </a:t>
+            </a:r>
+            <a:r>
+              <a:rPr lang="en-US" sz="1575" dirty="0" i="1">
+                <a:solidFill>
+                  <a:srgbClr val="16171D"/>
+                </a:solidFill>
+                <a:latin typeface="Segoe UI"/>
+                <a:cs typeface="Segoe UI"/>
+              </a:rPr>
+              <a:t xml:space="preserve">y</a:t>
+            </a:r>
+            <a:r>
+              <a:rPr lang="en-US" sz="1575" dirty="0">
+                <a:solidFill>
+                  <a:srgbClr val="16171D"/>
+                </a:solidFill>
+                <a:latin typeface="Segoe UI"/>
+                <a:cs typeface="Segoe UI"/>
+              </a:rPr>
+              <a:t xml:space="preserve"> = </a:t>
+            </a:r>
+            <a:r>
+              <a:rPr lang="en-US" sz="1575" dirty="0" i="1">
+                <a:solidFill>
+                  <a:srgbClr val="16171D"/>
+                </a:solidFill>
+                <a:latin typeface="Segoe UI"/>
+                <a:cs typeface="Segoe UI"/>
+              </a:rPr>
+              <a:t xml:space="preserve">mx</a:t>
+            </a:r>
+            <a:r>
+              <a:rPr lang="en-US" sz="1575" dirty="0">
+                <a:solidFill>
+                  <a:srgbClr val="16171D"/>
+                </a:solidFill>
+                <a:latin typeface="Segoe UI"/>
+                <a:cs typeface="Segoe UI"/>
+              </a:rPr>
+              <a:t xml:space="preserve"> + </a:t>
+            </a:r>
+            <a:r>
+              <a:rPr lang="en-US" sz="1575" dirty="0" i="1">
+                <a:solidFill>
+                  <a:srgbClr val="16171D"/>
+                </a:solidFill>
+                <a:latin typeface="Segoe UI"/>
+                <a:cs typeface="Segoe UI"/>
+              </a:rPr>
+              <a:t xml:space="preserve">b</a:t>
+            </a:r>
+            <a:r>
+              <a:rPr lang="en-US" sz="1575" dirty="0">
+                <a:solidFill>
+                  <a:srgbClr val="16171D"/>
+                </a:solidFill>
+                <a:latin typeface="Segoe UI"/>
+                <a:cs typeface="Segoe UI"/>
+              </a:rPr>
+              <a:t xml:space="preserve">: 4 = 2(0) + </a:t>
+            </a:r>
+            <a:r>
+              <a:rPr lang="en-US" sz="1575" dirty="0" i="1">
+                <a:solidFill>
+                  <a:srgbClr val="16171D"/>
+                </a:solidFill>
+                <a:latin typeface="Segoe UI"/>
+                <a:cs typeface="Segoe UI"/>
+              </a:rPr>
+              <a:t xml:space="preserve">b</a:t>
+            </a:r>
+            <a:r>
+              <a:rPr lang="en-US" sz="1575" dirty="0">
+                <a:solidFill>
+                  <a:srgbClr val="16171D"/>
+                </a:solidFill>
+                <a:latin typeface="Segoe UI"/>
+                <a:cs typeface="Segoe UI"/>
+              </a:rPr>
+              <a:t xml:space="preserve">.</a:t>
+            </a:r>
+            <a:endParaRPr lang="en-US" sz="1575" dirty="0"/>
+          </a:p>
+        </p:txBody>
+      </p:sp>
+      <p:sp>
+        <p:nvSpPr>
+          <p:cNvPr id="7" name="Shape 7"/>
+          <p:cNvSpPr txBox="1"/>
+          <p:nvPr/>
+        </p:nvSpPr>
+        <p:spPr>
+          <a:xfrm>
+            <a:off x="895350" y="3280410"/>
+            <a:ext cx="4876648" cy="294894"/>
+          </a:xfrm>
+          <a:prstGeom prst="rect">
+            <a:avLst/>
+          </a:prstGeom>
+          <a:noFill/>
+          <a:ln>
+            <a:noFill/>
+          </a:ln>
+        </p:spPr>
+        <p:txBody>
+          <a:bodyPr wrap="square" lIns="36576" tIns="27432" rIns="36576" bIns="27432" anchor="t">
+            <a:noAutofit/>
+          </a:bodyPr>
+          <a:lstStyle/>
+          <a:p>
+            <a:pPr algn="l">
+              <a:lnSpc>
+                <a:spcPct val="100000"/>
+              </a:lnSpc>
+            </a:pPr>
+            <a:r>
+              <a:rPr lang="en-US" sz="1575" dirty="0" b="1">
+                <a:solidFill>
+                  <a:srgbClr val="16171D"/>
+                </a:solidFill>
+                <a:latin typeface="Segoe UI"/>
+                <a:cs typeface="Segoe UI"/>
+              </a:rPr>
+              <a:t xml:space="preserve">Step 3.</a:t>
+            </a:r>
+            <a:r>
+              <a:rPr lang="en-US" sz="1575" dirty="0">
+                <a:solidFill>
+                  <a:srgbClr val="16171D"/>
+                </a:solidFill>
+                <a:latin typeface="Segoe UI"/>
+                <a:cs typeface="Segoe UI"/>
+              </a:rPr>
+              <a:t xml:space="preserve"> 2(0) = 0, so 4 = </a:t>
+            </a:r>
+            <a:r>
+              <a:rPr lang="en-US" sz="1575" dirty="0" i="1">
+                <a:solidFill>
+                  <a:srgbClr val="16171D"/>
+                </a:solidFill>
+                <a:latin typeface="Segoe UI"/>
+                <a:cs typeface="Segoe UI"/>
+              </a:rPr>
+              <a:t xml:space="preserve">b</a:t>
+            </a:r>
+            <a:r>
+              <a:rPr lang="en-US" sz="1575" dirty="0">
+                <a:solidFill>
+                  <a:srgbClr val="16171D"/>
+                </a:solidFill>
+                <a:latin typeface="Segoe UI"/>
+                <a:cs typeface="Segoe UI"/>
+              </a:rPr>
+              <a:t xml:space="preserve">.</a:t>
+            </a:r>
+            <a:endParaRPr lang="en-US" sz="1575" dirty="0"/>
+          </a:p>
+        </p:txBody>
+      </p:sp>
+      <p:sp>
+        <p:nvSpPr>
+          <p:cNvPr id="8" name="Shape 8"/>
+          <p:cNvSpPr txBox="1"/>
+          <p:nvPr/>
+        </p:nvSpPr>
+        <p:spPr>
+          <a:xfrm>
+            <a:off x="895350" y="3670554"/>
+            <a:ext cx="4876648" cy="294894"/>
+          </a:xfrm>
+          <a:prstGeom prst="rect">
+            <a:avLst/>
+          </a:prstGeom>
+          <a:noFill/>
+          <a:ln>
+            <a:noFill/>
+          </a:ln>
+        </p:spPr>
+        <p:txBody>
+          <a:bodyPr wrap="square" lIns="36576" tIns="27432" rIns="36576" bIns="27432" anchor="t">
+            <a:noAutofit/>
+          </a:bodyPr>
+          <a:lstStyle/>
+          <a:p>
+            <a:pPr algn="l">
+              <a:lnSpc>
+                <a:spcPct val="100000"/>
+              </a:lnSpc>
+            </a:pPr>
+            <a:r>
+              <a:rPr lang="en-US" sz="1575" dirty="0" b="1">
+                <a:solidFill>
+                  <a:srgbClr val="16171D"/>
+                </a:solidFill>
+                <a:latin typeface="Segoe UI"/>
+                <a:cs typeface="Segoe UI"/>
+              </a:rPr>
+              <a:t xml:space="preserve">Step 4.</a:t>
+            </a:r>
+            <a:r>
+              <a:rPr lang="en-US" sz="1575" dirty="0">
+                <a:solidFill>
+                  <a:srgbClr val="16171D"/>
+                </a:solidFill>
+                <a:latin typeface="Segoe UI"/>
+                <a:cs typeface="Segoe UI"/>
+              </a:rPr>
+              <a:t xml:space="preserve"> Write the slope and </a:t>
+            </a:r>
+            <a:r>
+              <a:rPr lang="en-US" sz="1575" dirty="0" i="1">
+                <a:solidFill>
+                  <a:srgbClr val="16171D"/>
+                </a:solidFill>
+                <a:latin typeface="Segoe UI"/>
+                <a:cs typeface="Segoe UI"/>
+              </a:rPr>
+              <a:t xml:space="preserve">b</a:t>
+            </a:r>
+            <a:r>
+              <a:rPr lang="en-US" sz="1575" dirty="0">
+                <a:solidFill>
+                  <a:srgbClr val="16171D"/>
+                </a:solidFill>
+                <a:latin typeface="Segoe UI"/>
+                <a:cs typeface="Segoe UI"/>
+              </a:rPr>
+              <a:t xml:space="preserve">: </a:t>
+            </a:r>
+            <a:r>
+              <a:rPr lang="en-US" sz="1575" dirty="0" i="1">
+                <a:solidFill>
+                  <a:srgbClr val="16171D"/>
+                </a:solidFill>
+                <a:latin typeface="Segoe UI"/>
+                <a:cs typeface="Segoe UI"/>
+              </a:rPr>
+              <a:t xml:space="preserve">y</a:t>
+            </a:r>
+            <a:r>
+              <a:rPr lang="en-US" sz="1575" dirty="0">
+                <a:solidFill>
+                  <a:srgbClr val="16171D"/>
+                </a:solidFill>
+                <a:latin typeface="Segoe UI"/>
+                <a:cs typeface="Segoe UI"/>
+              </a:rPr>
+              <a:t xml:space="preserve"> = 2</a:t>
+            </a:r>
+            <a:r>
+              <a:rPr lang="en-US" sz="1575" dirty="0" i="1">
+                <a:solidFill>
+                  <a:srgbClr val="16171D"/>
+                </a:solidFill>
+                <a:latin typeface="Segoe UI"/>
+                <a:cs typeface="Segoe UI"/>
+              </a:rPr>
+              <a:t xml:space="preserve">x</a:t>
+            </a:r>
+            <a:r>
+              <a:rPr lang="en-US" sz="1575" dirty="0">
+                <a:solidFill>
+                  <a:srgbClr val="16171D"/>
+                </a:solidFill>
+                <a:latin typeface="Segoe UI"/>
+                <a:cs typeface="Segoe UI"/>
+              </a:rPr>
+              <a:t xml:space="preserve"> + 4.</a:t>
+            </a:r>
+            <a:endParaRPr lang="en-US" sz="1575" dirty="0"/>
+          </a:p>
+        </p:txBody>
+      </p:sp>
+      <p:sp>
+        <p:nvSpPr>
+          <p:cNvPr id="9" name="Shape 9"/>
+          <p:cNvSpPr txBox="1"/>
+          <p:nvPr/>
+        </p:nvSpPr>
+        <p:spPr>
+          <a:xfrm>
+            <a:off x="895350" y="4060698"/>
+            <a:ext cx="3571326" cy="518922"/>
+          </a:xfrm>
+          <a:prstGeom prst="roundRect">
+            <a:avLst>
+              <a:gd name="adj" fmla="val 8000"/>
+            </a:avLst>
+          </a:prstGeom>
+          <a:solidFill>
+            <a:srgbClr val="EDF5E9"/>
+          </a:solidFill>
+          <a:ln>
+            <a:noFill/>
+          </a:ln>
+        </p:spPr>
+        <p:txBody>
+          <a:bodyPr wrap="square" lIns="164592" tIns="64008" rIns="164592" bIns="64008" anchor="ctr">
+            <a:noAutofit/>
+          </a:bodyPr>
+          <a:lstStyle/>
+          <a:p>
+            <a:pPr algn="l">
+              <a:lnSpc>
+                <a:spcPct val="100000"/>
+              </a:lnSpc>
+            </a:pPr>
+            <a:r>
+              <a:rPr lang="en-US" sz="1125" dirty="0" b="1" spc="100">
+                <a:solidFill>
+                  <a:srgbClr val="4F8A3C"/>
+                </a:solidFill>
+                <a:latin typeface="Segoe UI"/>
+                <a:cs typeface="Segoe UI"/>
+              </a:rPr>
+              <a:t xml:space="preserve">ANSWER   </a:t>
+            </a:r>
+            <a:r>
+              <a:rPr lang="en-US" sz="2325" dirty="0" i="1">
+                <a:solidFill>
+                  <a:srgbClr val="16171D"/>
+                </a:solidFill>
+                <a:latin typeface="Cambria"/>
+                <a:cs typeface="Cambria"/>
+              </a:rPr>
+              <a:t xml:space="preserve">y</a:t>
+            </a:r>
+            <a:r>
+              <a:rPr lang="en-US" sz="2325" dirty="0">
+                <a:solidFill>
+                  <a:srgbClr val="16171D"/>
+                </a:solidFill>
+                <a:latin typeface="Cambria"/>
+                <a:cs typeface="Cambria"/>
+              </a:rPr>
+              <a:t xml:space="preserve"> = 2</a:t>
+            </a:r>
+            <a:r>
+              <a:rPr lang="en-US" sz="2325" dirty="0" i="1">
+                <a:solidFill>
+                  <a:srgbClr val="16171D"/>
+                </a:solidFill>
+                <a:latin typeface="Cambria"/>
+                <a:cs typeface="Cambria"/>
+              </a:rPr>
+              <a:t xml:space="preserve">x</a:t>
+            </a:r>
+            <a:r>
+              <a:rPr lang="en-US" sz="2325" dirty="0">
+                <a:solidFill>
+                  <a:srgbClr val="16171D"/>
+                </a:solidFill>
+                <a:latin typeface="Cambria"/>
+                <a:cs typeface="Cambria"/>
+              </a:rPr>
+              <a:t xml:space="preserve"> + 4</a:t>
+            </a:r>
+            <a:endParaRPr lang="en-US" sz="2325" dirty="0"/>
+          </a:p>
+        </p:txBody>
+      </p:sp>
+      <p:sp>
+        <p:nvSpPr>
+          <p:cNvPr id="17" name="Shape 17"/>
+          <p:cNvSpPr txBox="1"/>
+          <p:nvPr/>
+        </p:nvSpPr>
+        <p:spPr>
+          <a:xfrm>
+            <a:off x="6210148" y="1618488"/>
+            <a:ext cx="5295748" cy="3132582"/>
+          </a:xfrm>
+          <a:prstGeom prst="roundRect">
+            <a:avLst>
+              <a:gd name="adj" fmla="val 8000"/>
+            </a:avLst>
+          </a:prstGeom>
+          <a:solidFill>
+            <a:srgbClr val="FFFFFF"/>
+          </a:solidFill>
+          <a:ln w="12700">
+            <a:solidFill>
+              <a:srgbClr val="E3E4EC"/>
+            </a:solidFill>
+          </a:ln>
+        </p:spPr>
+        <p:txBody>
+          <a:bodyPr wrap="square" lIns="36576" tIns="27432" rIns="36576" bIns="27432" anchor="t">
+            <a:noAutofit/>
+          </a:bodyPr>
+          <a:lstStyle/>
+          <a:p>
+            <a:pPr algn="l">
+              <a:lnSpc>
+                <a:spcPct val="100000"/>
+              </a:lnSpc>
+            </a:pPr>
+            <a:endParaRPr lang="en-US" sz="1950" dirty="0"/>
+          </a:p>
+        </p:txBody>
+      </p:sp>
+      <p:sp>
+        <p:nvSpPr>
+          <p:cNvPr id="11" name="Shape 11"/>
+          <p:cNvSpPr txBox="1"/>
+          <p:nvPr/>
+        </p:nvSpPr>
+        <p:spPr>
+          <a:xfrm>
+            <a:off x="6419698" y="1789938"/>
+            <a:ext cx="4876648" cy="374904"/>
+          </a:xfrm>
+          <a:prstGeom prst="rect">
+            <a:avLst/>
+          </a:prstGeom>
+          <a:noFill/>
+          <a:ln>
+            <a:noFill/>
+          </a:ln>
+        </p:spPr>
+        <p:txBody>
+          <a:bodyPr wrap="square" lIns="36576" tIns="27432" rIns="36576" bIns="27432" anchor="t">
+            <a:noAutofit/>
+          </a:bodyPr>
+          <a:lstStyle/>
+          <a:p>
+            <a:pPr algn="l">
+              <a:lnSpc>
+                <a:spcPct val="100000"/>
+              </a:lnSpc>
+            </a:pPr>
+            <a:r>
+              <a:rPr lang="en-US" sz="2100" dirty="0" b="1">
+                <a:solidFill>
+                  <a:srgbClr val="16171D"/>
+                </a:solidFill>
+                <a:latin typeface="Segoe UI"/>
+                <a:cs typeface="Segoe UI"/>
+              </a:rPr>
+              <a:t xml:space="preserve">2. Through (2, 0)</a:t>
+            </a:r>
+            <a:endParaRPr lang="en-US" sz="2100" dirty="0"/>
+          </a:p>
+        </p:txBody>
+      </p:sp>
+      <p:sp>
+        <p:nvSpPr>
+          <p:cNvPr id="12" name="Shape 12"/>
+          <p:cNvSpPr txBox="1"/>
+          <p:nvPr/>
+        </p:nvSpPr>
+        <p:spPr>
+          <a:xfrm>
+            <a:off x="6419698" y="2260092"/>
+            <a:ext cx="4876648" cy="294894"/>
+          </a:xfrm>
+          <a:prstGeom prst="rect">
+            <a:avLst/>
+          </a:prstGeom>
+          <a:noFill/>
+          <a:ln>
+            <a:noFill/>
+          </a:ln>
+        </p:spPr>
+        <p:txBody>
+          <a:bodyPr wrap="square" lIns="36576" tIns="27432" rIns="36576" bIns="27432" anchor="t">
+            <a:noAutofit/>
+          </a:bodyPr>
+          <a:lstStyle/>
+          <a:p>
+            <a:pPr algn="l">
+              <a:lnSpc>
+                <a:spcPct val="100000"/>
+              </a:lnSpc>
+            </a:pPr>
+            <a:r>
+              <a:rPr lang="en-US" sz="1575" dirty="0" b="1">
+                <a:solidFill>
+                  <a:srgbClr val="16171D"/>
+                </a:solidFill>
+                <a:latin typeface="Segoe UI"/>
+                <a:cs typeface="Segoe UI"/>
+              </a:rPr>
+              <a:t xml:space="preserve">Step 1.</a:t>
+            </a:r>
+            <a:r>
+              <a:rPr lang="en-US" sz="1575" dirty="0">
+                <a:solidFill>
+                  <a:srgbClr val="16171D"/>
+                </a:solidFill>
+                <a:latin typeface="Segoe UI"/>
+                <a:cs typeface="Segoe UI"/>
+              </a:rPr>
+              <a:t xml:space="preserve"> Same slope: </a:t>
+            </a:r>
+            <a:r>
+              <a:rPr lang="en-US" sz="1575" dirty="0" i="1">
+                <a:solidFill>
+                  <a:srgbClr val="16171D"/>
+                </a:solidFill>
+                <a:latin typeface="Segoe UI"/>
+                <a:cs typeface="Segoe UI"/>
+              </a:rPr>
+              <a:t xml:space="preserve">m</a:t>
+            </a:r>
+            <a:r>
+              <a:rPr lang="en-US" sz="1575" dirty="0">
+                <a:solidFill>
+                  <a:srgbClr val="16171D"/>
+                </a:solidFill>
+                <a:latin typeface="Segoe UI"/>
+                <a:cs typeface="Segoe UI"/>
+              </a:rPr>
+              <a:t xml:space="preserve"> = 2.</a:t>
+            </a:r>
+            <a:endParaRPr lang="en-US" sz="1575" dirty="0"/>
+          </a:p>
+        </p:txBody>
+      </p:sp>
+      <p:sp>
+        <p:nvSpPr>
+          <p:cNvPr id="13" name="Shape 13"/>
+          <p:cNvSpPr txBox="1"/>
+          <p:nvPr/>
+        </p:nvSpPr>
+        <p:spPr>
+          <a:xfrm>
+            <a:off x="6419698" y="2650236"/>
+            <a:ext cx="4876648" cy="534924"/>
+          </a:xfrm>
+          <a:prstGeom prst="rect">
+            <a:avLst/>
+          </a:prstGeom>
+          <a:noFill/>
+          <a:ln>
+            <a:noFill/>
+          </a:ln>
+        </p:spPr>
+        <p:txBody>
+          <a:bodyPr wrap="square" lIns="36576" tIns="27432" rIns="36576" bIns="27432" anchor="t">
+            <a:noAutofit/>
+          </a:bodyPr>
+          <a:lstStyle/>
+          <a:p>
+            <a:pPr algn="l">
+              <a:lnSpc>
+                <a:spcPct val="100000"/>
+              </a:lnSpc>
+            </a:pPr>
+            <a:r>
+              <a:rPr lang="en-US" sz="1575" dirty="0" b="1">
+                <a:solidFill>
+                  <a:srgbClr val="16171D"/>
+                </a:solidFill>
+                <a:latin typeface="Segoe UI"/>
+                <a:cs typeface="Segoe UI"/>
+              </a:rPr>
+              <a:t xml:space="preserve">Step 2.</a:t>
+            </a:r>
+            <a:r>
+              <a:rPr lang="en-US" sz="1575" dirty="0">
+                <a:solidFill>
+                  <a:srgbClr val="16171D"/>
+                </a:solidFill>
+                <a:latin typeface="Segoe UI"/>
+                <a:cs typeface="Segoe UI"/>
+              </a:rPr>
+              <a:t xml:space="preserve"> Put </a:t>
+            </a:r>
+            <a:r>
+              <a:rPr lang="en-US" sz="1575" dirty="0" i="1">
+                <a:solidFill>
+                  <a:srgbClr val="16171D"/>
+                </a:solidFill>
+                <a:latin typeface="Segoe UI"/>
+                <a:cs typeface="Segoe UI"/>
+              </a:rPr>
+              <a:t xml:space="preserve">x</a:t>
+            </a:r>
+            <a:r>
+              <a:rPr lang="en-US" sz="1575" dirty="0">
+                <a:solidFill>
+                  <a:srgbClr val="16171D"/>
+                </a:solidFill>
+                <a:latin typeface="Segoe UI"/>
+                <a:cs typeface="Segoe UI"/>
+              </a:rPr>
+              <a:t xml:space="preserve"> = 2 and </a:t>
+            </a:r>
+            <a:r>
+              <a:rPr lang="en-US" sz="1575" dirty="0" i="1">
+                <a:solidFill>
+                  <a:srgbClr val="16171D"/>
+                </a:solidFill>
+                <a:latin typeface="Segoe UI"/>
+                <a:cs typeface="Segoe UI"/>
+              </a:rPr>
+              <a:t xml:space="preserve">y</a:t>
+            </a:r>
+            <a:r>
+              <a:rPr lang="en-US" sz="1575" dirty="0">
+                <a:solidFill>
+                  <a:srgbClr val="16171D"/>
+                </a:solidFill>
+                <a:latin typeface="Segoe UI"/>
+                <a:cs typeface="Segoe UI"/>
+              </a:rPr>
+              <a:t xml:space="preserve"> = 0 into </a:t>
+            </a:r>
+            <a:r>
+              <a:rPr lang="en-US" sz="1575" dirty="0" i="1">
+                <a:solidFill>
+                  <a:srgbClr val="16171D"/>
+                </a:solidFill>
+                <a:latin typeface="Segoe UI"/>
+                <a:cs typeface="Segoe UI"/>
+              </a:rPr>
+              <a:t xml:space="preserve">y</a:t>
+            </a:r>
+            <a:r>
+              <a:rPr lang="en-US" sz="1575" dirty="0">
+                <a:solidFill>
+                  <a:srgbClr val="16171D"/>
+                </a:solidFill>
+                <a:latin typeface="Segoe UI"/>
+                <a:cs typeface="Segoe UI"/>
+              </a:rPr>
+              <a:t xml:space="preserve"> = </a:t>
+            </a:r>
+            <a:r>
+              <a:rPr lang="en-US" sz="1575" dirty="0" i="1">
+                <a:solidFill>
+                  <a:srgbClr val="16171D"/>
+                </a:solidFill>
+                <a:latin typeface="Segoe UI"/>
+                <a:cs typeface="Segoe UI"/>
+              </a:rPr>
+              <a:t xml:space="preserve">mx</a:t>
+            </a:r>
+            <a:r>
+              <a:rPr lang="en-US" sz="1575" dirty="0">
+                <a:solidFill>
+                  <a:srgbClr val="16171D"/>
+                </a:solidFill>
+                <a:latin typeface="Segoe UI"/>
+                <a:cs typeface="Segoe UI"/>
+              </a:rPr>
+              <a:t xml:space="preserve"> + </a:t>
+            </a:r>
+            <a:r>
+              <a:rPr lang="en-US" sz="1575" dirty="0" i="1">
+                <a:solidFill>
+                  <a:srgbClr val="16171D"/>
+                </a:solidFill>
+                <a:latin typeface="Segoe UI"/>
+                <a:cs typeface="Segoe UI"/>
+              </a:rPr>
+              <a:t xml:space="preserve">b</a:t>
+            </a:r>
+            <a:r>
+              <a:rPr lang="en-US" sz="1575" dirty="0">
+                <a:solidFill>
+                  <a:srgbClr val="16171D"/>
+                </a:solidFill>
+                <a:latin typeface="Segoe UI"/>
+                <a:cs typeface="Segoe UI"/>
+              </a:rPr>
+              <a:t xml:space="preserve">: 0 = 2(2) + </a:t>
+            </a:r>
+            <a:r>
+              <a:rPr lang="en-US" sz="1575" dirty="0" i="1">
+                <a:solidFill>
+                  <a:srgbClr val="16171D"/>
+                </a:solidFill>
+                <a:latin typeface="Segoe UI"/>
+                <a:cs typeface="Segoe UI"/>
+              </a:rPr>
+              <a:t xml:space="preserve">b</a:t>
+            </a:r>
+            <a:r>
+              <a:rPr lang="en-US" sz="1575" dirty="0">
+                <a:solidFill>
+                  <a:srgbClr val="16171D"/>
+                </a:solidFill>
+                <a:latin typeface="Segoe UI"/>
+                <a:cs typeface="Segoe UI"/>
+              </a:rPr>
+              <a:t xml:space="preserve">.</a:t>
+            </a:r>
+            <a:endParaRPr lang="en-US" sz="1575" dirty="0"/>
+          </a:p>
+        </p:txBody>
+      </p:sp>
+      <p:sp>
+        <p:nvSpPr>
+          <p:cNvPr id="14" name="Shape 14"/>
+          <p:cNvSpPr txBox="1"/>
+          <p:nvPr/>
+        </p:nvSpPr>
+        <p:spPr>
+          <a:xfrm>
+            <a:off x="6419698" y="3280410"/>
+            <a:ext cx="4876648" cy="294894"/>
+          </a:xfrm>
+          <a:prstGeom prst="rect">
+            <a:avLst/>
+          </a:prstGeom>
+          <a:noFill/>
+          <a:ln>
+            <a:noFill/>
+          </a:ln>
+        </p:spPr>
+        <p:txBody>
+          <a:bodyPr wrap="square" lIns="36576" tIns="27432" rIns="36576" bIns="27432" anchor="t">
+            <a:noAutofit/>
+          </a:bodyPr>
+          <a:lstStyle/>
+          <a:p>
+            <a:pPr algn="l">
+              <a:lnSpc>
+                <a:spcPct val="100000"/>
+              </a:lnSpc>
+            </a:pPr>
+            <a:r>
+              <a:rPr lang="en-US" sz="1575" dirty="0" b="1">
+                <a:solidFill>
+                  <a:srgbClr val="16171D"/>
+                </a:solidFill>
+                <a:latin typeface="Segoe UI"/>
+                <a:cs typeface="Segoe UI"/>
+              </a:rPr>
+              <a:t xml:space="preserve">Step 3.</a:t>
+            </a:r>
+            <a:r>
+              <a:rPr lang="en-US" sz="1575" dirty="0">
+                <a:solidFill>
+                  <a:srgbClr val="16171D"/>
+                </a:solidFill>
+                <a:latin typeface="Segoe UI"/>
+                <a:cs typeface="Segoe UI"/>
+              </a:rPr>
+              <a:t xml:space="preserve"> Multiply: 0 = 4 + </a:t>
+            </a:r>
+            <a:r>
+              <a:rPr lang="en-US" sz="1575" dirty="0" i="1">
+                <a:solidFill>
+                  <a:srgbClr val="16171D"/>
+                </a:solidFill>
+                <a:latin typeface="Segoe UI"/>
+                <a:cs typeface="Segoe UI"/>
+              </a:rPr>
+              <a:t xml:space="preserve">b</a:t>
+            </a:r>
+            <a:r>
+              <a:rPr lang="en-US" sz="1575" dirty="0">
+                <a:solidFill>
+                  <a:srgbClr val="16171D"/>
+                </a:solidFill>
+                <a:latin typeface="Segoe UI"/>
+                <a:cs typeface="Segoe UI"/>
+              </a:rPr>
+              <a:t xml:space="preserve">.</a:t>
+            </a:r>
+            <a:endParaRPr lang="en-US" sz="1575" dirty="0"/>
+          </a:p>
+        </p:txBody>
+      </p:sp>
+      <p:sp>
+        <p:nvSpPr>
+          <p:cNvPr id="15" name="Shape 15"/>
+          <p:cNvSpPr txBox="1"/>
+          <p:nvPr/>
+        </p:nvSpPr>
+        <p:spPr>
+          <a:xfrm>
+            <a:off x="6419698" y="3670554"/>
+            <a:ext cx="4876648" cy="294894"/>
+          </a:xfrm>
+          <a:prstGeom prst="rect">
+            <a:avLst/>
+          </a:prstGeom>
+          <a:noFill/>
+          <a:ln>
+            <a:noFill/>
+          </a:ln>
+        </p:spPr>
+        <p:txBody>
+          <a:bodyPr wrap="square" lIns="36576" tIns="27432" rIns="36576" bIns="27432" anchor="t">
+            <a:noAutofit/>
+          </a:bodyPr>
+          <a:lstStyle/>
+          <a:p>
+            <a:pPr algn="l">
+              <a:lnSpc>
+                <a:spcPct val="100000"/>
+              </a:lnSpc>
+            </a:pPr>
+            <a:r>
+              <a:rPr lang="en-US" sz="1575" dirty="0" b="1">
+                <a:solidFill>
+                  <a:srgbClr val="16171D"/>
+                </a:solidFill>
+                <a:latin typeface="Segoe UI"/>
+                <a:cs typeface="Segoe UI"/>
+              </a:rPr>
+              <a:t xml:space="preserve">Step 4.</a:t>
+            </a:r>
+            <a:r>
+              <a:rPr lang="en-US" sz="1575" dirty="0">
+                <a:solidFill>
+                  <a:srgbClr val="16171D"/>
+                </a:solidFill>
+                <a:latin typeface="Segoe UI"/>
+                <a:cs typeface="Segoe UI"/>
+              </a:rPr>
+              <a:t xml:space="preserve"> Subtract 4 from both sides: −4 = </a:t>
+            </a:r>
+            <a:r>
+              <a:rPr lang="en-US" sz="1575" dirty="0" i="1">
+                <a:solidFill>
+                  <a:srgbClr val="16171D"/>
+                </a:solidFill>
+                <a:latin typeface="Segoe UI"/>
+                <a:cs typeface="Segoe UI"/>
+              </a:rPr>
+              <a:t xml:space="preserve">b</a:t>
+            </a:r>
+            <a:r>
+              <a:rPr lang="en-US" sz="1575" dirty="0">
+                <a:solidFill>
+                  <a:srgbClr val="16171D"/>
+                </a:solidFill>
+                <a:latin typeface="Segoe UI"/>
+                <a:cs typeface="Segoe UI"/>
+              </a:rPr>
+              <a:t xml:space="preserve">.</a:t>
+            </a:r>
+            <a:endParaRPr lang="en-US" sz="1575" dirty="0"/>
+          </a:p>
+        </p:txBody>
+      </p:sp>
+      <p:sp>
+        <p:nvSpPr>
+          <p:cNvPr id="16" name="Shape 16"/>
+          <p:cNvSpPr txBox="1"/>
+          <p:nvPr/>
+        </p:nvSpPr>
+        <p:spPr>
+          <a:xfrm>
+            <a:off x="6419698" y="4060698"/>
+            <a:ext cx="3571326" cy="518922"/>
+          </a:xfrm>
+          <a:prstGeom prst="roundRect">
+            <a:avLst>
+              <a:gd name="adj" fmla="val 8000"/>
+            </a:avLst>
+          </a:prstGeom>
+          <a:solidFill>
+            <a:srgbClr val="EDF5E9"/>
+          </a:solidFill>
+          <a:ln>
+            <a:noFill/>
+          </a:ln>
+        </p:spPr>
+        <p:txBody>
+          <a:bodyPr wrap="square" lIns="164592" tIns="64008" rIns="164592" bIns="64008" anchor="ctr">
+            <a:noAutofit/>
+          </a:bodyPr>
+          <a:lstStyle/>
+          <a:p>
+            <a:pPr algn="l">
+              <a:lnSpc>
+                <a:spcPct val="100000"/>
+              </a:lnSpc>
+            </a:pPr>
+            <a:r>
+              <a:rPr lang="en-US" sz="1125" dirty="0" b="1" spc="100">
+                <a:solidFill>
+                  <a:srgbClr val="4F8A3C"/>
+                </a:solidFill>
+                <a:latin typeface="Segoe UI"/>
+                <a:cs typeface="Segoe UI"/>
+              </a:rPr>
+              <a:t xml:space="preserve">ANSWER   </a:t>
+            </a:r>
+            <a:r>
+              <a:rPr lang="en-US" sz="2325" dirty="0" i="1">
+                <a:solidFill>
+                  <a:srgbClr val="16171D"/>
+                </a:solidFill>
+                <a:latin typeface="Cambria"/>
+                <a:cs typeface="Cambria"/>
+              </a:rPr>
+              <a:t xml:space="preserve">y</a:t>
+            </a:r>
+            <a:r>
+              <a:rPr lang="en-US" sz="2325" dirty="0">
+                <a:solidFill>
+                  <a:srgbClr val="16171D"/>
+                </a:solidFill>
+                <a:latin typeface="Cambria"/>
+                <a:cs typeface="Cambria"/>
+              </a:rPr>
+              <a:t xml:space="preserve"> = 2</a:t>
+            </a:r>
+            <a:r>
+              <a:rPr lang="en-US" sz="2325" dirty="0" i="1">
+                <a:solidFill>
+                  <a:srgbClr val="16171D"/>
+                </a:solidFill>
+                <a:latin typeface="Cambria"/>
+                <a:cs typeface="Cambria"/>
+              </a:rPr>
+              <a:t xml:space="preserve">x</a:t>
+            </a:r>
+            <a:r>
+              <a:rPr lang="en-US" sz="2325" dirty="0">
+                <a:solidFill>
+                  <a:srgbClr val="16171D"/>
+                </a:solidFill>
+                <a:latin typeface="Cambria"/>
+                <a:cs typeface="Cambria"/>
+              </a:rPr>
+              <a:t xml:space="preserve"> − 4</a:t>
+            </a:r>
+            <a:endParaRPr lang="en-US" sz="2325" dirty="0"/>
+          </a:p>
+        </p:txBody>
+      </p:sp>
+      <p:sp>
+        <p:nvSpPr>
+          <p:cNvPr id="18" name="Slide Number 18"/>
+          <p:cNvSpPr txBox="1"/>
+          <p:nvPr/>
+        </p:nvSpPr>
+        <p:spPr>
+          <a:xfrm>
+            <a:off x="11277295" y="6611112"/>
+            <a:ext cx="685800" cy="201168"/>
+          </a:xfrm>
+          <a:prstGeom prst="rect">
+            <a:avLst/>
+          </a:prstGeom>
+          <a:noFill/>
+        </p:spPr>
+        <p:txBody>
+          <a:bodyPr wrap="none" lIns="0" tIns="0" rIns="0" bIns="0" anchor="b">
+            <a:noAutofit/>
+          </a:bodyPr>
+          <a:lstStyle/>
+          <a:p>
+            <a:pPr algn="r"/>
+            <a:fld id="{5C1A6E0B-3B1F-4D5E-9C7A-2F4B8D6E1A90}" type="slidenum">
+              <a:rPr lang="en-US" sz="1200" dirty="0">
+                <a:solidFill>
+                  <a:srgbClr val="5F6272"/>
+                </a:solidFill>
+              </a:rPr>
+              <a:t>23</a:t>
+            </a:fld>
+          </a:p>
+        </p:txBody>
+      </p:sp>
+    </p:spTree>
+  </p:cSld>
+  <p:clrMapOvr>
+    <a:masterClrMapping/>
+  </p:clrMapOvr>
+  <p:transition spd="med">
+    <p:fade/>
+  </p:transition>
+  <p:timing>
+    <p:tnLst>
+      <p:par>
+        <p:cTn id="1" dur="indefinite" restart="never" nodeType="tmRoot">
+          <p:childTnLst>
+            <p:seq concurrent="1" nextAc="seek">
+              <p:cTn id="2" dur="indefinite" nodeType="mainSeq">
+                <p:childTnLst>
+                  <p:par>
+                    <p:cTn id="8" fill="hold">
+                      <p:stCondLst>
+                        <p:cond delay="indefinite"/>
+                      </p:stCondLst>
+                      <p:childTnLst>
+                        <p:par>
+                          <p:cTn id="9" fill="hold">
+                            <p:stCondLst>
+                              <p:cond delay="0"/>
+                            </p:stCondLst>
+                            <p:childTnLst>
+                              <p:par>
+                                <p:cTn id="7" presetID="42" presetClass="entr" presetSubtype="0" fill="hold" nodeType="clickEffect">
+                                  <p:stCondLst>
+                                    <p:cond delay="0"/>
+                                  </p:stCondLst>
+                                  <p:childTnLst>
+                                    <p:set>
+                                      <p:cBhvr>
+                                        <p:cTn id="3" dur="1" fill="hold">
+                                          <p:stCondLst>
+                                            <p:cond delay="0"/>
+                                          </p:stCondLst>
+                                        </p:cTn>
+                                        <p:tgtEl>
+                                          <p:spTgt spid="5"/>
+                                        </p:tgtEl>
+                                        <p:attrNameLst>
+                                          <p:attrName>style.visibility</p:attrName>
+                                        </p:attrNameLst>
+                                      </p:cBhvr>
+                                      <p:to>
+                                        <p:strVal val="visible"/>
+                                      </p:to>
+                                    </p:set>
+                                    <p:animEffect transition="in" filter="fade">
+                                      <p:cBhvr>
+                                        <p:cTn id="4" dur="500"/>
+                                        <p:tgtEl>
+                                          <p:spTgt spid="5"/>
+                                        </p:tgtEl>
+                                      </p:cBhvr>
+                                    </p:animEffect>
+                                    <p:anim calcmode="lin" valueType="num">
+                                      <p:cBhvr>
+                                        <p:cTn id="5" dur="500" fill="hold"/>
+                                        <p:tgtEl>
+                                          <p:spTgt spid="5"/>
+                                        </p:tgtEl>
+                                        <p:attrNameLst>
+                                          <p:attrName>ppt_x</p:attrName>
+                                        </p:attrNameLst>
+                                      </p:cBhvr>
+                                      <p:tavLst>
+                                        <p:tav tm="0">
+                                          <p:val>
+                                            <p:strVal val="#ppt_x"/>
+                                          </p:val>
+                                        </p:tav>
+                                        <p:tav tm="100000">
+                                          <p:val>
+                                            <p:strVal val="#ppt_x"/>
+                                          </p:val>
+                                        </p:tav>
+                                      </p:tavLst>
+                                    </p:anim>
+                                    <p:anim calcmode="lin" valueType="num">
+                                      <p:cBhvr>
+                                        <p:cTn id="6" dur="500" fill="hold"/>
+                                        <p:tgtEl>
+                                          <p:spTgt spid="5"/>
+                                        </p:tgtEl>
+                                        <p:attrNameLst>
+                                          <p:attrName>ppt_y</p:attrName>
+                                        </p:attrNameLst>
+                                      </p:cBhvr>
+                                      <p:tavLst>
+                                        <p:tav tm="0">
+                                          <p:val>
+                                            <p:strVal val="#ppt_y+.1"/>
+                                          </p:val>
+                                        </p:tav>
+                                        <p:tav tm="100000">
+                                          <p:val>
+                                            <p:strVal val="#ppt_y"/>
+                                          </p:val>
+                                        </p:tav>
+                                      </p:tavLst>
+                                    </p:anim>
+                                  </p:childTnLst>
+                                </p:cTn>
+                              </p:par>
+                            </p:childTnLst>
+                          </p:cTn>
+                        </p:par>
+                      </p:childTnLst>
+                    </p:cTn>
+                  </p:par>
+                  <p:par>
+                    <p:cTn id="15" fill="hold">
+                      <p:stCondLst>
+                        <p:cond delay="indefinite"/>
+                      </p:stCondLst>
+                      <p:childTnLst>
+                        <p:par>
+                          <p:cTn id="16" fill="hold">
+                            <p:stCondLst>
+                              <p:cond delay="0"/>
+                            </p:stCondLst>
+                            <p:childTnLst>
+                              <p:par>
+                                <p:cTn id="14" presetID="42" presetClass="entr" presetSubtype="0" fill="hold" nodeType="clickEffect">
+                                  <p:stCondLst>
+                                    <p:cond delay="0"/>
+                                  </p:stCondLst>
+                                  <p:childTnLst>
+                                    <p:set>
+                                      <p:cBhvr>
+                                        <p:cTn id="10" dur="1" fill="hold">
+                                          <p:stCondLst>
+                                            <p:cond delay="0"/>
+                                          </p:stCondLst>
+                                        </p:cTn>
+                                        <p:tgtEl>
+                                          <p:spTgt spid="6"/>
+                                        </p:tgtEl>
+                                        <p:attrNameLst>
+                                          <p:attrName>style.visibility</p:attrName>
+                                        </p:attrNameLst>
+                                      </p:cBhvr>
+                                      <p:to>
+                                        <p:strVal val="visible"/>
+                                      </p:to>
+                                    </p:set>
+                                    <p:animEffect transition="in" filter="fade">
+                                      <p:cBhvr>
+                                        <p:cTn id="11" dur="500"/>
+                                        <p:tgtEl>
+                                          <p:spTgt spid="6"/>
+                                        </p:tgtEl>
+                                      </p:cBhvr>
+                                    </p:animEffect>
+                                    <p:anim calcmode="lin" valueType="num">
+                                      <p:cBhvr>
+                                        <p:cTn id="12" dur="500" fill="hold"/>
+                                        <p:tgtEl>
+                                          <p:spTgt spid="6"/>
+                                        </p:tgtEl>
+                                        <p:attrNameLst>
+                                          <p:attrName>ppt_x</p:attrName>
+                                        </p:attrNameLst>
+                                      </p:cBhvr>
+                                      <p:tavLst>
+                                        <p:tav tm="0">
+                                          <p:val>
+                                            <p:strVal val="#ppt_x"/>
+                                          </p:val>
+                                        </p:tav>
+                                        <p:tav tm="100000">
+                                          <p:val>
+                                            <p:strVal val="#ppt_x"/>
+                                          </p:val>
+                                        </p:tav>
+                                      </p:tavLst>
+                                    </p:anim>
+                                    <p:anim calcmode="lin" valueType="num">
+                                      <p:cBhvr>
+                                        <p:cTn id="13" dur="500" fill="hold"/>
+                                        <p:tgtEl>
+                                          <p:spTgt spid="6"/>
+                                        </p:tgtEl>
+                                        <p:attrNameLst>
+                                          <p:attrName>ppt_y</p:attrName>
+                                        </p:attrNameLst>
+                                      </p:cBhvr>
+                                      <p:tavLst>
+                                        <p:tav tm="0">
+                                          <p:val>
+                                            <p:strVal val="#ppt_y+.1"/>
+                                          </p:val>
+                                        </p:tav>
+                                        <p:tav tm="100000">
+                                          <p:val>
+                                            <p:strVal val="#ppt_y"/>
+                                          </p:val>
+                                        </p:tav>
+                                      </p:tavLst>
+                                    </p:anim>
+                                  </p:childTnLst>
+                                </p:cTn>
+                              </p:par>
+                            </p:childTnLst>
+                          </p:cTn>
+                        </p:par>
+                      </p:childTnLst>
+                    </p:cTn>
+                  </p:par>
+                  <p:par>
+                    <p:cTn id="22" fill="hold">
+                      <p:stCondLst>
+                        <p:cond delay="indefinite"/>
+                      </p:stCondLst>
+                      <p:childTnLst>
+                        <p:par>
+                          <p:cTn id="23" fill="hold">
+                            <p:stCondLst>
+                              <p:cond delay="0"/>
+                            </p:stCondLst>
+                            <p:childTnLst>
+                              <p:par>
+                                <p:cTn id="21" presetID="42" presetClass="entr" presetSubtype="0" fill="hold" nodeType="clickEffect">
+                                  <p:stCondLst>
+                                    <p:cond delay="0"/>
+                                  </p:stCondLst>
+                                  <p:childTnLst>
+                                    <p:set>
+                                      <p:cBhvr>
+                                        <p:cTn id="17" dur="1" fill="hold">
+                                          <p:stCondLst>
+                                            <p:cond delay="0"/>
+                                          </p:stCondLst>
+                                        </p:cTn>
+                                        <p:tgtEl>
+                                          <p:spTgt spid="7"/>
+                                        </p:tgtEl>
+                                        <p:attrNameLst>
+                                          <p:attrName>style.visibility</p:attrName>
+                                        </p:attrNameLst>
+                                      </p:cBhvr>
+                                      <p:to>
+                                        <p:strVal val="visible"/>
+                                      </p:to>
+                                    </p:set>
+                                    <p:animEffect transition="in" filter="fade">
+                                      <p:cBhvr>
+                                        <p:cTn id="18" dur="500"/>
+                                        <p:tgtEl>
+                                          <p:spTgt spid="7"/>
+                                        </p:tgtEl>
+                                      </p:cBhvr>
+                                    </p:animEffect>
+                                    <p:anim calcmode="lin" valueType="num">
+                                      <p:cBhvr>
+                                        <p:cTn id="19" dur="500" fill="hold"/>
+                                        <p:tgtEl>
+                                          <p:spTgt spid="7"/>
+                                        </p:tgtEl>
+                                        <p:attrNameLst>
+                                          <p:attrName>ppt_x</p:attrName>
+                                        </p:attrNameLst>
+                                      </p:cBhvr>
+                                      <p:tavLst>
+                                        <p:tav tm="0">
+                                          <p:val>
+                                            <p:strVal val="#ppt_x"/>
+                                          </p:val>
+                                        </p:tav>
+                                        <p:tav tm="100000">
+                                          <p:val>
+                                            <p:strVal val="#ppt_x"/>
+                                          </p:val>
+                                        </p:tav>
+                                      </p:tavLst>
+                                    </p:anim>
+                                    <p:anim calcmode="lin" valueType="num">
+                                      <p:cBhvr>
+                                        <p:cTn id="20" dur="500" fill="hold"/>
+                                        <p:tgtEl>
+                                          <p:spTgt spid="7"/>
+                                        </p:tgtEl>
+                                        <p:attrNameLst>
+                                          <p:attrName>ppt_y</p:attrName>
+                                        </p:attrNameLst>
+                                      </p:cBhvr>
+                                      <p:tavLst>
+                                        <p:tav tm="0">
+                                          <p:val>
+                                            <p:strVal val="#ppt_y+.1"/>
+                                          </p:val>
+                                        </p:tav>
+                                        <p:tav tm="100000">
+                                          <p:val>
+                                            <p:strVal val="#ppt_y"/>
+                                          </p:val>
+                                        </p:tav>
+                                      </p:tavLst>
+                                    </p:anim>
+                                  </p:childTnLst>
+                                </p:cTn>
+                              </p:par>
+                            </p:childTnLst>
+                          </p:cTn>
+                        </p:par>
+                      </p:childTnLst>
+                    </p:cTn>
+                  </p:par>
+                  <p:par>
+                    <p:cTn id="29" fill="hold">
+                      <p:stCondLst>
+                        <p:cond delay="indefinite"/>
+                      </p:stCondLst>
+                      <p:childTnLst>
+                        <p:par>
+                          <p:cTn id="30" fill="hold">
+                            <p:stCondLst>
+                              <p:cond delay="0"/>
+                            </p:stCondLst>
+                            <p:childTnLst>
+                              <p:par>
+                                <p:cTn id="28" presetID="42" presetClass="entr" presetSubtype="0" fill="hold" nodeType="clickEffect">
+                                  <p:stCondLst>
+                                    <p:cond delay="0"/>
+                                  </p:stCondLst>
+                                  <p:childTnLst>
+                                    <p:set>
+                                      <p:cBhvr>
+                                        <p:cTn id="24" dur="1" fill="hold">
+                                          <p:stCondLst>
+                                            <p:cond delay="0"/>
+                                          </p:stCondLst>
+                                        </p:cTn>
+                                        <p:tgtEl>
+                                          <p:spTgt spid="8"/>
+                                        </p:tgtEl>
+                                        <p:attrNameLst>
+                                          <p:attrName>style.visibility</p:attrName>
+                                        </p:attrNameLst>
+                                      </p:cBhvr>
+                                      <p:to>
+                                        <p:strVal val="visible"/>
+                                      </p:to>
+                                    </p:set>
+                                    <p:animEffect transition="in" filter="fade">
+                                      <p:cBhvr>
+                                        <p:cTn id="25" dur="500"/>
+                                        <p:tgtEl>
+                                          <p:spTgt spid="8"/>
+                                        </p:tgtEl>
+                                      </p:cBhvr>
+                                    </p:animEffect>
+                                    <p:anim calcmode="lin" valueType="num">
+                                      <p:cBhvr>
+                                        <p:cTn id="26" dur="500" fill="hold"/>
+                                        <p:tgtEl>
+                                          <p:spTgt spid="8"/>
+                                        </p:tgtEl>
+                                        <p:attrNameLst>
+                                          <p:attrName>ppt_x</p:attrName>
+                                        </p:attrNameLst>
+                                      </p:cBhvr>
+                                      <p:tavLst>
+                                        <p:tav tm="0">
+                                          <p:val>
+                                            <p:strVal val="#ppt_x"/>
+                                          </p:val>
+                                        </p:tav>
+                                        <p:tav tm="100000">
+                                          <p:val>
+                                            <p:strVal val="#ppt_x"/>
+                                          </p:val>
+                                        </p:tav>
+                                      </p:tavLst>
+                                    </p:anim>
+                                    <p:anim calcmode="lin" valueType="num">
+                                      <p:cBhvr>
+                                        <p:cTn id="27" dur="500" fill="hold"/>
+                                        <p:tgtEl>
+                                          <p:spTgt spid="8"/>
+                                        </p:tgtEl>
+                                        <p:attrNameLst>
+                                          <p:attrName>ppt_y</p:attrName>
+                                        </p:attrNameLst>
+                                      </p:cBhvr>
+                                      <p:tavLst>
+                                        <p:tav tm="0">
+                                          <p:val>
+                                            <p:strVal val="#ppt_y+.1"/>
+                                          </p:val>
+                                        </p:tav>
+                                        <p:tav tm="100000">
+                                          <p:val>
+                                            <p:strVal val="#ppt_y"/>
+                                          </p:val>
+                                        </p:tav>
+                                      </p:tavLst>
+                                    </p:anim>
+                                  </p:childTnLst>
+                                </p:cTn>
+                              </p:par>
+                            </p:childTnLst>
+                          </p:cTn>
+                        </p:par>
+                      </p:childTnLst>
+                    </p:cTn>
+                  </p:par>
+                  <p:par>
+                    <p:cTn id="36" fill="hold">
+                      <p:stCondLst>
+                        <p:cond delay="indefinite"/>
+                      </p:stCondLst>
+                      <p:childTnLst>
+                        <p:par>
+                          <p:cTn id="37" fill="hold">
+                            <p:stCondLst>
+                              <p:cond delay="0"/>
+                            </p:stCondLst>
+                            <p:childTnLst>
+                              <p:par>
+                                <p:cTn id="35" presetID="53" presetClass="entr" presetSubtype="16" fill="hold" nodeType="clickEffect">
+                                  <p:stCondLst>
+                                    <p:cond delay="0"/>
+                                  </p:stCondLst>
+                                  <p:childTnLst>
+                                    <p:set>
+                                      <p:cBhvr>
+                                        <p:cTn id="31" dur="1" fill="hold">
+                                          <p:stCondLst>
+                                            <p:cond delay="0"/>
+                                          </p:stCondLst>
+                                        </p:cTn>
+                                        <p:tgtEl>
+                                          <p:spTgt spid="9"/>
+                                        </p:tgtEl>
+                                        <p:attrNameLst>
+                                          <p:attrName>style.visibility</p:attrName>
+                                        </p:attrNameLst>
+                                      </p:cBhvr>
+                                      <p:to>
+                                        <p:strVal val="visible"/>
+                                      </p:to>
+                                    </p:set>
+                                    <p:animEffect transition="in" filter="fade">
+                                      <p:cBhvr>
+                                        <p:cTn id="32" dur="500"/>
+                                        <p:tgtEl>
+                                          <p:spTgt spid="9"/>
+                                        </p:tgtEl>
+                                      </p:cBhvr>
+                                    </p:animEffect>
+                                    <p:anim calcmode="lin" valueType="num">
+                                      <p:cBhvr>
+                                        <p:cTn id="33" dur="500" fill="hold"/>
+                                        <p:tgtEl>
+                                          <p:spTgt spid="9"/>
+                                        </p:tgtEl>
+                                        <p:attrNameLst>
+                                          <p:attrName>ppt_w</p:attrName>
+                                        </p:attrNameLst>
+                                      </p:cBhvr>
+                                      <p:tavLst>
+                                        <p:tav tm="0">
+                                          <p:val>
+                                            <p:fltVal val="0"/>
+                                          </p:val>
+                                        </p:tav>
+                                        <p:tav tm="100000">
+                                          <p:val>
+                                            <p:strVal val="#ppt_w"/>
+                                          </p:val>
+                                        </p:tav>
+                                      </p:tavLst>
+                                    </p:anim>
+                                    <p:anim calcmode="lin" valueType="num">
+                                      <p:cBhvr>
+                                        <p:cTn id="34" dur="500" fill="hold"/>
+                                        <p:tgtEl>
+                                          <p:spTgt spid="9"/>
+                                        </p:tgtEl>
+                                        <p:attrNameLst>
+                                          <p:attrName>ppt_h</p:attrName>
+                                        </p:attrNameLst>
+                                      </p:cBhvr>
+                                      <p:tavLst>
+                                        <p:tav tm="0">
+                                          <p:val>
+                                            <p:fltVal val="0"/>
+                                          </p:val>
+                                        </p:tav>
+                                        <p:tav tm="100000">
+                                          <p:val>
+                                            <p:strVal val="#ppt_h"/>
+                                          </p:val>
+                                        </p:tav>
+                                      </p:tavLst>
+                                    </p:anim>
+                                  </p:childTnLst>
+                                </p:cTn>
+                              </p:par>
+                            </p:childTnLst>
+                          </p:cTn>
+                        </p:par>
+                      </p:childTnLst>
+                    </p:cTn>
+                  </p:par>
+                  <p:par>
+                    <p:cTn id="43" fill="hold">
+                      <p:stCondLst>
+                        <p:cond delay="indefinite"/>
+                      </p:stCondLst>
+                      <p:childTnLst>
+                        <p:par>
+                          <p:cTn id="44" fill="hold">
+                            <p:stCondLst>
+                              <p:cond delay="0"/>
+                            </p:stCondLst>
+                            <p:childTnLst>
+                              <p:par>
+                                <p:cTn id="42" presetID="42" presetClass="entr" presetSubtype="0" fill="hold" nodeType="clickEffect">
+                                  <p:stCondLst>
+                                    <p:cond delay="0"/>
+                                  </p:stCondLst>
+                                  <p:childTnLst>
+                                    <p:set>
+                                      <p:cBhvr>
+                                        <p:cTn id="38" dur="1" fill="hold">
+                                          <p:stCondLst>
+                                            <p:cond delay="0"/>
+                                          </p:stCondLst>
+                                        </p:cTn>
+                                        <p:tgtEl>
+                                          <p:spTgt spid="12"/>
+                                        </p:tgtEl>
+                                        <p:attrNameLst>
+                                          <p:attrName>style.visibility</p:attrName>
+                                        </p:attrNameLst>
+                                      </p:cBhvr>
+                                      <p:to>
+                                        <p:strVal val="visible"/>
+                                      </p:to>
+                                    </p:set>
+                                    <p:animEffect transition="in" filter="fade">
+                                      <p:cBhvr>
+                                        <p:cTn id="39" dur="500"/>
+                                        <p:tgtEl>
+                                          <p:spTgt spid="12"/>
+                                        </p:tgtEl>
+                                      </p:cBhvr>
+                                    </p:animEffect>
+                                    <p:anim calcmode="lin" valueType="num">
+                                      <p:cBhvr>
+                                        <p:cTn id="40" dur="500" fill="hold"/>
+                                        <p:tgtEl>
+                                          <p:spTgt spid="12"/>
+                                        </p:tgtEl>
+                                        <p:attrNameLst>
+                                          <p:attrName>ppt_x</p:attrName>
+                                        </p:attrNameLst>
+                                      </p:cBhvr>
+                                      <p:tavLst>
+                                        <p:tav tm="0">
+                                          <p:val>
+                                            <p:strVal val="#ppt_x"/>
+                                          </p:val>
+                                        </p:tav>
+                                        <p:tav tm="100000">
+                                          <p:val>
+                                            <p:strVal val="#ppt_x"/>
+                                          </p:val>
+                                        </p:tav>
+                                      </p:tavLst>
+                                    </p:anim>
+                                    <p:anim calcmode="lin" valueType="num">
+                                      <p:cBhvr>
+                                        <p:cTn id="41" dur="500" fill="hold"/>
+                                        <p:tgtEl>
+                                          <p:spTgt spid="12"/>
+                                        </p:tgtEl>
+                                        <p:attrNameLst>
+                                          <p:attrName>ppt_y</p:attrName>
+                                        </p:attrNameLst>
+                                      </p:cBhvr>
+                                      <p:tavLst>
+                                        <p:tav tm="0">
+                                          <p:val>
+                                            <p:strVal val="#ppt_y+.1"/>
+                                          </p:val>
+                                        </p:tav>
+                                        <p:tav tm="100000">
+                                          <p:val>
+                                            <p:strVal val="#ppt_y"/>
+                                          </p:val>
+                                        </p:tav>
+                                      </p:tavLst>
+                                    </p:anim>
+                                  </p:childTnLst>
+                                </p:cTn>
+                              </p:par>
+                            </p:childTnLst>
+                          </p:cTn>
+                        </p:par>
+                      </p:childTnLst>
+                    </p:cTn>
+                  </p:par>
+                  <p:par>
+                    <p:cTn id="50" fill="hold">
+                      <p:stCondLst>
+                        <p:cond delay="indefinite"/>
+                      </p:stCondLst>
+                      <p:childTnLst>
+                        <p:par>
+                          <p:cTn id="51" fill="hold">
+                            <p:stCondLst>
+                              <p:cond delay="0"/>
+                            </p:stCondLst>
+                            <p:childTnLst>
+                              <p:par>
+                                <p:cTn id="49" presetID="42" presetClass="entr" presetSubtype="0" fill="hold" nodeType="clickEffect">
+                                  <p:stCondLst>
+                                    <p:cond delay="0"/>
+                                  </p:stCondLst>
+                                  <p:childTnLst>
+                                    <p:set>
+                                      <p:cBhvr>
+                                        <p:cTn id="45" dur="1" fill="hold">
+                                          <p:stCondLst>
+                                            <p:cond delay="0"/>
+                                          </p:stCondLst>
+                                        </p:cTn>
+                                        <p:tgtEl>
+                                          <p:spTgt spid="13"/>
+                                        </p:tgtEl>
+                                        <p:attrNameLst>
+                                          <p:attrName>style.visibility</p:attrName>
+                                        </p:attrNameLst>
+                                      </p:cBhvr>
+                                      <p:to>
+                                        <p:strVal val="visible"/>
+                                      </p:to>
+                                    </p:set>
+                                    <p:animEffect transition="in" filter="fade">
+                                      <p:cBhvr>
+                                        <p:cTn id="46" dur="500"/>
+                                        <p:tgtEl>
+                                          <p:spTgt spid="13"/>
+                                        </p:tgtEl>
+                                      </p:cBhvr>
+                                    </p:animEffect>
+                                    <p:anim calcmode="lin" valueType="num">
+                                      <p:cBhvr>
+                                        <p:cTn id="47" dur="500" fill="hold"/>
+                                        <p:tgtEl>
+                                          <p:spTgt spid="13"/>
+                                        </p:tgtEl>
+                                        <p:attrNameLst>
+                                          <p:attrName>ppt_x</p:attrName>
+                                        </p:attrNameLst>
+                                      </p:cBhvr>
+                                      <p:tavLst>
+                                        <p:tav tm="0">
+                                          <p:val>
+                                            <p:strVal val="#ppt_x"/>
+                                          </p:val>
+                                        </p:tav>
+                                        <p:tav tm="100000">
+                                          <p:val>
+                                            <p:strVal val="#ppt_x"/>
+                                          </p:val>
+                                        </p:tav>
+                                      </p:tavLst>
+                                    </p:anim>
+                                    <p:anim calcmode="lin" valueType="num">
+                                      <p:cBhvr>
+                                        <p:cTn id="48" dur="500" fill="hold"/>
+                                        <p:tgtEl>
+                                          <p:spTgt spid="13"/>
+                                        </p:tgtEl>
+                                        <p:attrNameLst>
+                                          <p:attrName>ppt_y</p:attrName>
+                                        </p:attrNameLst>
+                                      </p:cBhvr>
+                                      <p:tavLst>
+                                        <p:tav tm="0">
+                                          <p:val>
+                                            <p:strVal val="#ppt_y+.1"/>
+                                          </p:val>
+                                        </p:tav>
+                                        <p:tav tm="100000">
+                                          <p:val>
+                                            <p:strVal val="#ppt_y"/>
+                                          </p:val>
+                                        </p:tav>
+                                      </p:tavLst>
+                                    </p:anim>
+                                  </p:childTnLst>
+                                </p:cTn>
+                              </p:par>
+                            </p:childTnLst>
+                          </p:cTn>
+                        </p:par>
+                      </p:childTnLst>
+                    </p:cTn>
+                  </p:par>
+                  <p:par>
+                    <p:cTn id="57" fill="hold">
+                      <p:stCondLst>
+                        <p:cond delay="indefinite"/>
+                      </p:stCondLst>
+                      <p:childTnLst>
+                        <p:par>
+                          <p:cTn id="58" fill="hold">
+                            <p:stCondLst>
+                              <p:cond delay="0"/>
+                            </p:stCondLst>
+                            <p:childTnLst>
+                              <p:par>
+                                <p:cTn id="56" presetID="42" presetClass="entr" presetSubtype="0" fill="hold" nodeType="clickEffect">
+                                  <p:stCondLst>
+                                    <p:cond delay="0"/>
+                                  </p:stCondLst>
+                                  <p:childTnLst>
+                                    <p:set>
+                                      <p:cBhvr>
+                                        <p:cTn id="52" dur="1" fill="hold">
+                                          <p:stCondLst>
+                                            <p:cond delay="0"/>
+                                          </p:stCondLst>
+                                        </p:cTn>
+                                        <p:tgtEl>
+                                          <p:spTgt spid="14"/>
+                                        </p:tgtEl>
+                                        <p:attrNameLst>
+                                          <p:attrName>style.visibility</p:attrName>
+                                        </p:attrNameLst>
+                                      </p:cBhvr>
+                                      <p:to>
+                                        <p:strVal val="visible"/>
+                                      </p:to>
+                                    </p:set>
+                                    <p:animEffect transition="in" filter="fade">
+                                      <p:cBhvr>
+                                        <p:cTn id="53" dur="500"/>
+                                        <p:tgtEl>
+                                          <p:spTgt spid="14"/>
+                                        </p:tgtEl>
+                                      </p:cBhvr>
+                                    </p:animEffect>
+                                    <p:anim calcmode="lin" valueType="num">
+                                      <p:cBhvr>
+                                        <p:cTn id="54" dur="500" fill="hold"/>
+                                        <p:tgtEl>
+                                          <p:spTgt spid="14"/>
+                                        </p:tgtEl>
+                                        <p:attrNameLst>
+                                          <p:attrName>ppt_x</p:attrName>
+                                        </p:attrNameLst>
+                                      </p:cBhvr>
+                                      <p:tavLst>
+                                        <p:tav tm="0">
+                                          <p:val>
+                                            <p:strVal val="#ppt_x"/>
+                                          </p:val>
+                                        </p:tav>
+                                        <p:tav tm="100000">
+                                          <p:val>
+                                            <p:strVal val="#ppt_x"/>
+                                          </p:val>
+                                        </p:tav>
+                                      </p:tavLst>
+                                    </p:anim>
+                                    <p:anim calcmode="lin" valueType="num">
+                                      <p:cBhvr>
+                                        <p:cTn id="55" dur="500" fill="hold"/>
+                                        <p:tgtEl>
+                                          <p:spTgt spid="14"/>
+                                        </p:tgtEl>
+                                        <p:attrNameLst>
+                                          <p:attrName>ppt_y</p:attrName>
+                                        </p:attrNameLst>
+                                      </p:cBhvr>
+                                      <p:tavLst>
+                                        <p:tav tm="0">
+                                          <p:val>
+                                            <p:strVal val="#ppt_y+.1"/>
+                                          </p:val>
+                                        </p:tav>
+                                        <p:tav tm="100000">
+                                          <p:val>
+                                            <p:strVal val="#ppt_y"/>
+                                          </p:val>
+                                        </p:tav>
+                                      </p:tavLst>
+                                    </p:anim>
+                                  </p:childTnLst>
+                                </p:cTn>
+                              </p:par>
+                            </p:childTnLst>
+                          </p:cTn>
+                        </p:par>
+                      </p:childTnLst>
+                    </p:cTn>
+                  </p:par>
+                  <p:par>
+                    <p:cTn id="64" fill="hold">
+                      <p:stCondLst>
+                        <p:cond delay="indefinite"/>
+                      </p:stCondLst>
+                      <p:childTnLst>
+                        <p:par>
+                          <p:cTn id="65" fill="hold">
+                            <p:stCondLst>
+                              <p:cond delay="0"/>
+                            </p:stCondLst>
+                            <p:childTnLst>
+                              <p:par>
+                                <p:cTn id="63" presetID="42" presetClass="entr" presetSubtype="0" fill="hold" nodeType="clickEffect">
+                                  <p:stCondLst>
+                                    <p:cond delay="0"/>
+                                  </p:stCondLst>
+                                  <p:childTnLst>
+                                    <p:set>
+                                      <p:cBhvr>
+                                        <p:cTn id="59" dur="1" fill="hold">
+                                          <p:stCondLst>
+                                            <p:cond delay="0"/>
+                                          </p:stCondLst>
+                                        </p:cTn>
+                                        <p:tgtEl>
+                                          <p:spTgt spid="15"/>
+                                        </p:tgtEl>
+                                        <p:attrNameLst>
+                                          <p:attrName>style.visibility</p:attrName>
+                                        </p:attrNameLst>
+                                      </p:cBhvr>
+                                      <p:to>
+                                        <p:strVal val="visible"/>
+                                      </p:to>
+                                    </p:set>
+                                    <p:animEffect transition="in" filter="fade">
+                                      <p:cBhvr>
+                                        <p:cTn id="60" dur="500"/>
+                                        <p:tgtEl>
+                                          <p:spTgt spid="15"/>
+                                        </p:tgtEl>
+                                      </p:cBhvr>
+                                    </p:animEffect>
+                                    <p:anim calcmode="lin" valueType="num">
+                                      <p:cBhvr>
+                                        <p:cTn id="61" dur="500" fill="hold"/>
+                                        <p:tgtEl>
+                                          <p:spTgt spid="15"/>
+                                        </p:tgtEl>
+                                        <p:attrNameLst>
+                                          <p:attrName>ppt_x</p:attrName>
+                                        </p:attrNameLst>
+                                      </p:cBhvr>
+                                      <p:tavLst>
+                                        <p:tav tm="0">
+                                          <p:val>
+                                            <p:strVal val="#ppt_x"/>
+                                          </p:val>
+                                        </p:tav>
+                                        <p:tav tm="100000">
+                                          <p:val>
+                                            <p:strVal val="#ppt_x"/>
+                                          </p:val>
+                                        </p:tav>
+                                      </p:tavLst>
+                                    </p:anim>
+                                    <p:anim calcmode="lin" valueType="num">
+                                      <p:cBhvr>
+                                        <p:cTn id="62" dur="500" fill="hold"/>
+                                        <p:tgtEl>
+                                          <p:spTgt spid="15"/>
+                                        </p:tgtEl>
+                                        <p:attrNameLst>
+                                          <p:attrName>ppt_y</p:attrName>
+                                        </p:attrNameLst>
+                                      </p:cBhvr>
+                                      <p:tavLst>
+                                        <p:tav tm="0">
+                                          <p:val>
+                                            <p:strVal val="#ppt_y+.1"/>
+                                          </p:val>
+                                        </p:tav>
+                                        <p:tav tm="100000">
+                                          <p:val>
+                                            <p:strVal val="#ppt_y"/>
+                                          </p:val>
+                                        </p:tav>
+                                      </p:tavLst>
+                                    </p:anim>
+                                  </p:childTnLst>
+                                </p:cTn>
+                              </p:par>
+                            </p:childTnLst>
+                          </p:cTn>
+                        </p:par>
+                      </p:childTnLst>
+                    </p:cTn>
+                  </p:par>
+                  <p:par>
+                    <p:cTn id="71" fill="hold">
+                      <p:stCondLst>
+                        <p:cond delay="indefinite"/>
+                      </p:stCondLst>
+                      <p:childTnLst>
+                        <p:par>
+                          <p:cTn id="72" fill="hold">
+                            <p:stCondLst>
+                              <p:cond delay="0"/>
+                            </p:stCondLst>
+                            <p:childTnLst>
+                              <p:par>
+                                <p:cTn id="70" presetID="53" presetClass="entr" presetSubtype="16" fill="hold" nodeType="clickEffect">
+                                  <p:stCondLst>
+                                    <p:cond delay="0"/>
+                                  </p:stCondLst>
+                                  <p:childTnLst>
+                                    <p:set>
+                                      <p:cBhvr>
+                                        <p:cTn id="66" dur="1" fill="hold">
+                                          <p:stCondLst>
+                                            <p:cond delay="0"/>
+                                          </p:stCondLst>
+                                        </p:cTn>
+                                        <p:tgtEl>
+                                          <p:spTgt spid="16"/>
+                                        </p:tgtEl>
+                                        <p:attrNameLst>
+                                          <p:attrName>style.visibility</p:attrName>
+                                        </p:attrNameLst>
+                                      </p:cBhvr>
+                                      <p:to>
+                                        <p:strVal val="visible"/>
+                                      </p:to>
+                                    </p:set>
+                                    <p:animEffect transition="in" filter="fade">
+                                      <p:cBhvr>
+                                        <p:cTn id="67" dur="500"/>
+                                        <p:tgtEl>
+                                          <p:spTgt spid="16"/>
+                                        </p:tgtEl>
+                                      </p:cBhvr>
+                                    </p:animEffect>
+                                    <p:anim calcmode="lin" valueType="num">
+                                      <p:cBhvr>
+                                        <p:cTn id="68" dur="500" fill="hold"/>
+                                        <p:tgtEl>
+                                          <p:spTgt spid="16"/>
+                                        </p:tgtEl>
+                                        <p:attrNameLst>
+                                          <p:attrName>ppt_w</p:attrName>
+                                        </p:attrNameLst>
+                                      </p:cBhvr>
+                                      <p:tavLst>
+                                        <p:tav tm="0">
+                                          <p:val>
+                                            <p:fltVal val="0"/>
+                                          </p:val>
+                                        </p:tav>
+                                        <p:tav tm="100000">
+                                          <p:val>
+                                            <p:strVal val="#ppt_w"/>
+                                          </p:val>
+                                        </p:tav>
+                                      </p:tavLst>
+                                    </p:anim>
+                                    <p:anim calcmode="lin" valueType="num">
+                                      <p:cBhvr>
+                                        <p:cTn id="69" dur="500" fill="hold"/>
+                                        <p:tgtEl>
+                                          <p:spTgt spid="16"/>
+                                        </p:tgtEl>
+                                        <p:attrNameLst>
+                                          <p:attrName>ppt_h</p:attrName>
+                                        </p:attrNameLst>
+                                      </p:cBhvr>
+                                      <p:tavLst>
+                                        <p:tav tm="0">
+                                          <p:val>
+                                            <p:fltVal val="0"/>
+                                          </p:val>
+                                        </p:tav>
+                                        <p:tav tm="100000">
+                                          <p:val>
+                                            <p:strVal val="#ppt_h"/>
+                                          </p:val>
+                                        </p:tav>
+                                      </p:tavLst>
+                                    </p:anim>
+                                  </p:childTnLst>
+                                </p:cTn>
+                              </p:par>
+                            </p:childTnLst>
+                          </p:cTn>
+                        </p:par>
+                      </p:childTnLst>
+                    </p:cTn>
+                  </p:par>
+                </p:childTnLst>
+              </p:cTn>
+              <p:prevCondLst>
+                <p:cond evt="onPrev" delay="0">
+                  <p:tgtEl>
+                    <p:sldTgt/>
+                  </p:tgtEl>
+                </p:cond>
+              </p:prevCondLst>
+              <p:nextCondLst>
+                <p:cond evt="onNext" delay="0">
+                  <p:tgtEl>
+                    <p:sldTgt/>
+                  </p:tgtEl>
+                </p:cond>
+              </p:nextCondLst>
+            </p:seq>
+          </p:childTnLst>
+        </p:cTn>
+      </p:par>
+    </p:tnLst>
+  </p:timing>
+</p:sld>
+</file>
+
+<file path=ppt/slides/slide24.xml><?xml version="1.0" encoding="utf-8"?>
+<p:sld xmlns:a="http://schemas.openxmlformats.org/drawingml/2006/main" xmlns:r="http://schemas.openxmlformats.org/officeDocument/2006/relationships" xmlns:p="http://schemas.openxmlformats.org/presentationml/2006/main">
+  <p:cSld>
+    <p:spTree>
+      <p:nvGrpSpPr>
+        <p:cNvPr id="1" name=""/>
+        <p:cNvGrpSpPr/>
+        <p:nvPr/>
+      </p:nvGrpSpPr>
+      <p:grpSpPr>
+        <a:xfrm>
+          <a:off x="0" y="0"/>
+          <a:ext cx="0" cy="0"/>
+          <a:chOff x="0" y="0"/>
+          <a:chExt cx="0" cy="0"/>
+        </a:xfrm>
+      </p:grpSpPr>
+      <p:sp>
+        <p:nvSpPr>
+          <p:cNvPr id="2" name="Shape 2"/>
+          <p:cNvSpPr txBox="1"/>
+          <p:nvPr/>
+        </p:nvSpPr>
+        <p:spPr>
+          <a:xfrm>
+            <a:off x="685800" y="457200"/>
+            <a:ext cx="10820095" cy="237744"/>
+          </a:xfrm>
+          <a:prstGeom prst="rect">
+            <a:avLst/>
+          </a:prstGeom>
+          <a:noFill/>
+          <a:ln>
+            <a:noFill/>
+          </a:ln>
+        </p:spPr>
+        <p:txBody>
+          <a:bodyPr wrap="square" lIns="36576" tIns="27432" rIns="36576" bIns="27432" anchor="t">
+            <a:noAutofit/>
+          </a:bodyPr>
+          <a:lstStyle/>
+          <a:p>
+            <a:pPr algn="l">
+              <a:lnSpc>
+                <a:spcPct val="100000"/>
+              </a:lnSpc>
+            </a:pPr>
+            <a:r>
+              <a:rPr lang="en-US" sz="1200" dirty="0" b="1" spc="150" cap="all">
+                <a:solidFill>
+                  <a:srgbClr val="5F6272"/>
+                </a:solidFill>
+                <a:latin typeface="Segoe UI"/>
+                <a:cs typeface="Segoe UI"/>
+              </a:rPr>
+              <a:t xml:space="preserve">I do · Stretch</a:t>
+            </a:r>
+            <a:endParaRPr lang="en-US" sz="1200" dirty="0"/>
+          </a:p>
+        </p:txBody>
+      </p:sp>
+      <p:sp>
+        <p:nvSpPr>
+          <p:cNvPr id="3" name="Shape 3"/>
+          <p:cNvSpPr txBox="1"/>
+          <p:nvPr/>
+        </p:nvSpPr>
+        <p:spPr>
+          <a:xfrm>
+            <a:off x="685800" y="866394"/>
+            <a:ext cx="10820095" cy="580644"/>
+          </a:xfrm>
+          <a:prstGeom prst="rect">
+            <a:avLst/>
+          </a:prstGeom>
+          <a:noFill/>
+          <a:ln>
+            <a:noFill/>
+          </a:ln>
+        </p:spPr>
+        <p:txBody>
+          <a:bodyPr wrap="square" lIns="36576" tIns="27432" rIns="36576" bIns="27432" anchor="t">
+            <a:noAutofit/>
+          </a:bodyPr>
+          <a:lstStyle/>
+          <a:p>
+            <a:pPr algn="l">
+              <a:lnSpc>
+                <a:spcPct val="100000"/>
+              </a:lnSpc>
+            </a:pPr>
+            <a:r>
+              <a:rPr lang="en-US" sz="3450" dirty="0" b="1">
+                <a:solidFill>
+                  <a:srgbClr val="16171D"/>
+                </a:solidFill>
+                <a:latin typeface="Segoe UI"/>
+                <a:cs typeface="Segoe UI"/>
+              </a:rPr>
+              <a:t xml:space="preserve">Multiply </a:t>
+            </a:r>
+            <a:r>
+              <a:rPr lang="en-US" sz="3450" dirty="0" b="1" i="1">
+                <a:solidFill>
+                  <a:srgbClr val="16171D"/>
+                </a:solidFill>
+                <a:latin typeface="Segoe UI"/>
+                <a:cs typeface="Segoe UI"/>
+              </a:rPr>
+              <a:t xml:space="preserve">f</a:t>
+            </a:r>
+            <a:r>
+              <a:rPr lang="en-US" sz="3450" dirty="0" b="1">
+                <a:solidFill>
+                  <a:srgbClr val="16171D"/>
+                </a:solidFill>
+                <a:latin typeface="Segoe UI"/>
+                <a:cs typeface="Segoe UI"/>
+              </a:rPr>
+              <a:t xml:space="preserve">(</a:t>
+            </a:r>
+            <a:r>
+              <a:rPr lang="en-US" sz="3450" dirty="0" b="1" i="1">
+                <a:solidFill>
+                  <a:srgbClr val="16171D"/>
+                </a:solidFill>
+                <a:latin typeface="Segoe UI"/>
+                <a:cs typeface="Segoe UI"/>
+              </a:rPr>
+              <a:t xml:space="preserve">x</a:t>
+            </a:r>
+            <a:r>
+              <a:rPr lang="en-US" sz="3450" dirty="0" b="1">
+                <a:solidFill>
+                  <a:srgbClr val="16171D"/>
+                </a:solidFill>
+                <a:latin typeface="Segoe UI"/>
+                <a:cs typeface="Segoe UI"/>
+              </a:rPr>
+              <a:t xml:space="preserve">) = </a:t>
+            </a:r>
+            <a:r>
+              <a:rPr lang="en-US" sz="3450" dirty="0" b="1" i="1">
+                <a:solidFill>
+                  <a:srgbClr val="16171D"/>
+                </a:solidFill>
+                <a:latin typeface="Segoe UI"/>
+                <a:cs typeface="Segoe UI"/>
+              </a:rPr>
+              <a:t xml:space="preserve">x</a:t>
+            </a:r>
+            <a:r>
+              <a:rPr lang="en-US" sz="3450" dirty="0" b="1">
+                <a:solidFill>
+                  <a:srgbClr val="16171D"/>
+                </a:solidFill>
+                <a:latin typeface="Segoe UI"/>
+                <a:cs typeface="Segoe UI"/>
+              </a:rPr>
+              <a:t xml:space="preserve"> by 4</a:t>
+            </a:r>
+            <a:endParaRPr lang="en-US" sz="3450" dirty="0"/>
+          </a:p>
+        </p:txBody>
+      </p:sp>
+      <p:sp>
+        <p:nvSpPr>
+          <p:cNvPr id="4" name="Shape 4"/>
+          <p:cNvSpPr txBox="1"/>
+          <p:nvPr/>
+        </p:nvSpPr>
+        <p:spPr>
+          <a:xfrm>
+            <a:off x="685800" y="1618488"/>
+            <a:ext cx="5219548" cy="352044"/>
+          </a:xfrm>
+          <a:prstGeom prst="rect">
+            <a:avLst/>
+          </a:prstGeom>
+          <a:noFill/>
+          <a:ln>
+            <a:noFill/>
+          </a:ln>
+        </p:spPr>
+        <p:txBody>
+          <a:bodyPr wrap="square" lIns="36576" tIns="27432" rIns="36576" bIns="27432" anchor="t">
+            <a:noAutofit/>
+          </a:bodyPr>
+          <a:lstStyle/>
+          <a:p>
+            <a:pPr algn="l">
+              <a:lnSpc>
+                <a:spcPct val="100000"/>
+              </a:lnSpc>
+            </a:pPr>
+            <a:r>
+              <a:rPr lang="en-US" sz="1950" dirty="0">
+                <a:solidFill>
+                  <a:srgbClr val="16171D"/>
+                </a:solidFill>
+                <a:latin typeface="Segoe UI"/>
+                <a:cs typeface="Segoe UI"/>
+              </a:rPr>
+              <a:t xml:space="preserve">Multiply every output by 4.</a:t>
+            </a:r>
+            <a:endParaRPr lang="en-US" sz="1950" dirty="0"/>
+          </a:p>
+        </p:txBody>
+      </p:sp>
+      <p:sp>
+        <p:nvSpPr>
+          <p:cNvPr id="5" name="Shape 5"/>
+          <p:cNvSpPr txBox="1"/>
+          <p:nvPr/>
+        </p:nvSpPr>
+        <p:spPr>
+          <a:xfrm>
+            <a:off x="685800" y="2103882"/>
+            <a:ext cx="3405500" cy="518922"/>
+          </a:xfrm>
+          <a:prstGeom prst="roundRect">
+            <a:avLst>
+              <a:gd name="adj" fmla="val 8000"/>
+            </a:avLst>
+          </a:prstGeom>
+          <a:solidFill>
+            <a:srgbClr val="EDF5E9"/>
+          </a:solidFill>
+          <a:ln>
+            <a:noFill/>
+          </a:ln>
+        </p:spPr>
+        <p:txBody>
+          <a:bodyPr wrap="square" lIns="164592" tIns="64008" rIns="164592" bIns="64008" anchor="ctr">
+            <a:noAutofit/>
+          </a:bodyPr>
+          <a:lstStyle/>
+          <a:p>
+            <a:pPr algn="l">
+              <a:lnSpc>
+                <a:spcPct val="100000"/>
+              </a:lnSpc>
+            </a:pPr>
+            <a:r>
+              <a:rPr lang="en-US" sz="1125" dirty="0" b="1" spc="100">
+                <a:solidFill>
+                  <a:srgbClr val="4F8A3C"/>
+                </a:solidFill>
+                <a:latin typeface="Segoe UI"/>
+                <a:cs typeface="Segoe UI"/>
+              </a:rPr>
+              <a:t xml:space="preserve">ANSWER   </a:t>
+            </a:r>
+            <a:r>
+              <a:rPr lang="en-US" sz="2325" dirty="0" i="1">
+                <a:solidFill>
+                  <a:srgbClr val="16171D"/>
+                </a:solidFill>
+                <a:latin typeface="Cambria"/>
+                <a:cs typeface="Cambria"/>
+              </a:rPr>
+              <a:t xml:space="preserve">a</a:t>
+            </a:r>
+            <a:r>
+              <a:rPr lang="en-US" sz="2325" dirty="0">
+                <a:solidFill>
+                  <a:srgbClr val="16171D"/>
+                </a:solidFill>
+                <a:latin typeface="Cambria"/>
+                <a:cs typeface="Cambria"/>
+              </a:rPr>
+              <a:t xml:space="preserve">(</a:t>
+            </a:r>
+            <a:r>
+              <a:rPr lang="en-US" sz="2325" dirty="0" i="1">
+                <a:solidFill>
+                  <a:srgbClr val="16171D"/>
+                </a:solidFill>
+                <a:latin typeface="Cambria"/>
+                <a:cs typeface="Cambria"/>
+              </a:rPr>
+              <a:t xml:space="preserve">x</a:t>
+            </a:r>
+            <a:r>
+              <a:rPr lang="en-US" sz="2325" dirty="0">
+                <a:solidFill>
+                  <a:srgbClr val="16171D"/>
+                </a:solidFill>
+                <a:latin typeface="Cambria"/>
+                <a:cs typeface="Cambria"/>
+              </a:rPr>
+              <a:t xml:space="preserve">) = 4</a:t>
+            </a:r>
+            <a:r>
+              <a:rPr lang="en-US" sz="2325" dirty="0" i="1">
+                <a:solidFill>
+                  <a:srgbClr val="16171D"/>
+                </a:solidFill>
+                <a:latin typeface="Cambria"/>
+                <a:cs typeface="Cambria"/>
+              </a:rPr>
+              <a:t xml:space="preserve">x</a:t>
+            </a:r>
+            <a:endParaRPr lang="en-US" sz="2325" dirty="0"/>
+          </a:p>
+        </p:txBody>
+      </p:sp>
+      <p:sp>
+        <p:nvSpPr>
+          <p:cNvPr id="6" name="Shape 6"/>
+          <p:cNvSpPr txBox="1"/>
+          <p:nvPr/>
+        </p:nvSpPr>
+        <p:spPr>
+          <a:xfrm>
+            <a:off x="685800" y="2756154"/>
+            <a:ext cx="5219548" cy="352044"/>
+          </a:xfrm>
+          <a:prstGeom prst="rect">
+            <a:avLst/>
+          </a:prstGeom>
+          <a:noFill/>
+          <a:ln>
+            <a:noFill/>
+          </a:ln>
+        </p:spPr>
+        <p:txBody>
+          <a:bodyPr wrap="square" lIns="36576" tIns="27432" rIns="36576" bIns="27432" anchor="t">
+            <a:noAutofit/>
+          </a:bodyPr>
+          <a:lstStyle/>
+          <a:p>
+            <a:pPr algn="l">
+              <a:lnSpc>
+                <a:spcPct val="100000"/>
+              </a:lnSpc>
+            </a:pPr>
+            <a:r>
+              <a:rPr lang="en-US" sz="1950" dirty="0">
+                <a:solidFill>
+                  <a:srgbClr val="16171D"/>
+                </a:solidFill>
+                <a:latin typeface="Segoe UI"/>
+                <a:cs typeface="Segoe UI"/>
+              </a:rPr>
+              <a:t xml:space="preserve">The slope is now </a:t>
+            </a:r>
+            <a:r>
+              <a:rPr lang="en-US" sz="1950" dirty="0" b="1">
+                <a:solidFill>
+                  <a:srgbClr val="C9561F"/>
+                </a:solidFill>
+                <a:latin typeface="Segoe UI"/>
+                <a:cs typeface="Segoe UI"/>
+              </a:rPr>
+              <a:t xml:space="preserve">4</a:t>
+            </a:r>
+            <a:r>
+              <a:rPr lang="en-US" sz="1950" dirty="0">
+                <a:solidFill>
+                  <a:srgbClr val="16171D"/>
+                </a:solidFill>
+                <a:latin typeface="Segoe UI"/>
+                <a:cs typeface="Segoe UI"/>
+              </a:rPr>
+              <a:t xml:space="preserve">: steeper.</a:t>
+            </a:r>
+            <a:endParaRPr lang="en-US" sz="1950" dirty="0"/>
+          </a:p>
+        </p:txBody>
+      </p:sp>
+      <p:sp>
+        <p:nvSpPr>
+          <p:cNvPr id="7" name="Shape 7"/>
+          <p:cNvSpPr txBox="1"/>
+          <p:nvPr/>
+        </p:nvSpPr>
+        <p:spPr>
+          <a:xfrm>
+            <a:off x="685800" y="3241548"/>
+            <a:ext cx="5219548" cy="352044"/>
+          </a:xfrm>
+          <a:prstGeom prst="rect">
+            <a:avLst/>
+          </a:prstGeom>
+          <a:noFill/>
+          <a:ln>
+            <a:noFill/>
+          </a:ln>
+        </p:spPr>
+        <p:txBody>
+          <a:bodyPr wrap="square" lIns="36576" tIns="27432" rIns="36576" bIns="27432" anchor="t">
+            <a:noAutofit/>
+          </a:bodyPr>
+          <a:lstStyle/>
+          <a:p>
+            <a:pPr algn="l">
+              <a:lnSpc>
+                <a:spcPct val="100000"/>
+              </a:lnSpc>
+            </a:pPr>
+            <a:r>
+              <a:rPr lang="en-US" sz="1950" dirty="0">
+                <a:solidFill>
+                  <a:srgbClr val="16171D"/>
+                </a:solidFill>
+                <a:latin typeface="Segoe UI"/>
+                <a:cs typeface="Segoe UI"/>
+              </a:rPr>
+              <a:t xml:space="preserve">With −4, the line also </a:t>
+            </a:r>
+            <a:r>
+              <a:rPr lang="en-US" sz="1950" dirty="0" b="1">
+                <a:solidFill>
+                  <a:srgbClr val="16171D"/>
+                </a:solidFill>
+                <a:latin typeface="Segoe UI"/>
+                <a:cs typeface="Segoe UI"/>
+              </a:rPr>
+              <a:t xml:space="preserve">flips</a:t>
+            </a:r>
+            <a:r>
+              <a:rPr lang="en-US" sz="1950" dirty="0">
+                <a:solidFill>
+                  <a:srgbClr val="16171D"/>
+                </a:solidFill>
+                <a:latin typeface="Segoe UI"/>
+                <a:cs typeface="Segoe UI"/>
+              </a:rPr>
+              <a:t xml:space="preserve">:</a:t>
+            </a:r>
+            <a:endParaRPr lang="en-US" sz="1950" dirty="0"/>
+          </a:p>
+        </p:txBody>
+      </p:sp>
+      <p:sp>
+        <p:nvSpPr>
+          <p:cNvPr id="8" name="Shape 8"/>
+          <p:cNvSpPr txBox="1"/>
+          <p:nvPr/>
+        </p:nvSpPr>
+        <p:spPr>
+          <a:xfrm>
+            <a:off x="685800" y="3726942"/>
+            <a:ext cx="3571326" cy="518922"/>
+          </a:xfrm>
+          <a:prstGeom prst="roundRect">
+            <a:avLst>
+              <a:gd name="adj" fmla="val 8000"/>
+            </a:avLst>
+          </a:prstGeom>
+          <a:solidFill>
+            <a:srgbClr val="EDF5E9"/>
+          </a:solidFill>
+          <a:ln>
+            <a:noFill/>
+          </a:ln>
+        </p:spPr>
+        <p:txBody>
+          <a:bodyPr wrap="square" lIns="164592" tIns="64008" rIns="164592" bIns="64008" anchor="ctr">
+            <a:noAutofit/>
+          </a:bodyPr>
+          <a:lstStyle/>
+          <a:p>
+            <a:pPr algn="l">
+              <a:lnSpc>
+                <a:spcPct val="100000"/>
+              </a:lnSpc>
+            </a:pPr>
+            <a:r>
+              <a:rPr lang="en-US" sz="1125" dirty="0" b="1" spc="100">
+                <a:solidFill>
+                  <a:srgbClr val="4F8A3C"/>
+                </a:solidFill>
+                <a:latin typeface="Segoe UI"/>
+                <a:cs typeface="Segoe UI"/>
+              </a:rPr>
+              <a:t xml:space="preserve">ANSWER   </a:t>
+            </a:r>
+            <a:r>
+              <a:rPr lang="en-US" sz="2325" dirty="0" i="1">
+                <a:solidFill>
+                  <a:srgbClr val="16171D"/>
+                </a:solidFill>
+                <a:latin typeface="Cambria"/>
+                <a:cs typeface="Cambria"/>
+              </a:rPr>
+              <a:t xml:space="preserve">c</a:t>
+            </a:r>
+            <a:r>
+              <a:rPr lang="en-US" sz="2325" dirty="0">
+                <a:solidFill>
+                  <a:srgbClr val="16171D"/>
+                </a:solidFill>
+                <a:latin typeface="Cambria"/>
+                <a:cs typeface="Cambria"/>
+              </a:rPr>
+              <a:t xml:space="preserve">(</a:t>
+            </a:r>
+            <a:r>
+              <a:rPr lang="en-US" sz="2325" dirty="0" i="1">
+                <a:solidFill>
+                  <a:srgbClr val="16171D"/>
+                </a:solidFill>
+                <a:latin typeface="Cambria"/>
+                <a:cs typeface="Cambria"/>
+              </a:rPr>
+              <a:t xml:space="preserve">x</a:t>
+            </a:r>
+            <a:r>
+              <a:rPr lang="en-US" sz="2325" dirty="0">
+                <a:solidFill>
+                  <a:srgbClr val="16171D"/>
+                </a:solidFill>
+                <a:latin typeface="Cambria"/>
+                <a:cs typeface="Cambria"/>
+              </a:rPr>
+              <a:t xml:space="preserve">) = −4</a:t>
+            </a:r>
+            <a:r>
+              <a:rPr lang="en-US" sz="2325" dirty="0" i="1">
+                <a:solidFill>
+                  <a:srgbClr val="16171D"/>
+                </a:solidFill>
+                <a:latin typeface="Cambria"/>
+                <a:cs typeface="Cambria"/>
+              </a:rPr>
+              <a:t xml:space="preserve">x</a:t>
+            </a:r>
+            <a:endParaRPr lang="en-US" sz="2325" dirty="0"/>
+          </a:p>
+        </p:txBody>
+      </p:sp>
+      <p:sp>
+        <p:nvSpPr>
+          <p:cNvPr id="9" name="Shape 9"/>
+          <p:cNvSpPr/>
+          <p:nvPr/>
+        </p:nvSpPr>
+        <p:spPr>
+          <a:xfrm>
+            <a:off x="6286348" y="1618488"/>
+            <a:ext cx="3238500" cy="3238500"/>
+          </a:xfrm>
+          <a:prstGeom prst="roundRect">
+            <a:avLst>
+              <a:gd name="adj" fmla="val 8000"/>
+            </a:avLst>
+          </a:prstGeom>
+          <a:solidFill>
+            <a:srgbClr val="FFFFFF"/>
+          </a:solidFill>
+          <a:ln w="12700">
+            <a:solidFill>
+              <a:srgbClr val="E3E4EC"/>
+            </a:solidFill>
+          </a:ln>
+        </p:spPr>
+        <p:txBody>
+          <a:bodyPr wrap="square" lIns="36576" tIns="27432" rIns="36576" bIns="27432" anchor="t">
+            <a:noAutofit/>
+          </a:bodyPr>
+          <a:lstStyle/>
+          <a:p>
+            <a:pPr algn="l">
+              <a:lnSpc>
+                <a:spcPct val="100000"/>
+              </a:lnSpc>
+            </a:pPr>
+            <a:endParaRPr lang="en-US" sz="1950" dirty="0"/>
+          </a:p>
+        </p:txBody>
+      </p:sp>
       <p:cxnSp>
         <p:nvCxnSpPr>
           <p:cNvPr id="10" name="Line 10"/>
@@ -17057,7 +19573,7 @@
                   <a:srgbClr val="5F6272"/>
                 </a:solidFill>
               </a:rPr>
-              <a:t>23</a:t>
+              <a:t>24</a:t>
             </a:fld>
           </a:p>
         </p:txBody>
@@ -17477,200 +19993,6 @@
 </p:sld>
 </file>
 
-<file path=ppt/slides/slide24.xml><?xml version="1.0" encoding="utf-8"?>
-<p:sld xmlns:a="http://schemas.openxmlformats.org/drawingml/2006/main" xmlns:r="http://schemas.openxmlformats.org/officeDocument/2006/relationships" xmlns:p="http://schemas.openxmlformats.org/presentationml/2006/main">
-  <p:cSld>
-    <p:spTree>
-      <p:nvGrpSpPr>
-        <p:cNvPr id="1" name=""/>
-        <p:cNvGrpSpPr/>
-        <p:nvPr/>
-      </p:nvGrpSpPr>
-      <p:grpSpPr>
-        <a:xfrm>
-          <a:off x="0" y="0"/>
-          <a:ext cx="0" cy="0"/>
-          <a:chOff x="0" y="0"/>
-          <a:chExt cx="0" cy="0"/>
-        </a:xfrm>
-      </p:grpSpPr>
-      <p:sp>
-        <p:nvSpPr>
-          <p:cNvPr id="2" name="Shape 2"/>
-          <p:cNvSpPr txBox="1"/>
-          <p:nvPr/>
-        </p:nvSpPr>
-        <p:spPr>
-          <a:xfrm>
-            <a:off x="685800" y="2103120"/>
-            <a:ext cx="10820095" cy="237744"/>
-          </a:xfrm>
-          <a:prstGeom prst="rect">
-            <a:avLst/>
-          </a:prstGeom>
-          <a:noFill/>
-          <a:ln>
-            <a:noFill/>
-          </a:ln>
-        </p:spPr>
-        <p:txBody>
-          <a:bodyPr wrap="square" lIns="36576" tIns="27432" rIns="36576" bIns="27432" anchor="t">
-            <a:noAutofit/>
-          </a:bodyPr>
-          <a:lstStyle/>
-          <a:p>
-            <a:pPr algn="l">
-              <a:lnSpc>
-                <a:spcPct val="100000"/>
-              </a:lnSpc>
-            </a:pPr>
-            <a:r>
-              <a:rPr lang="en-US" sz="1200" dirty="0" b="1" spc="150" cap="all">
-                <a:solidFill>
-                  <a:srgbClr val="5F6272"/>
-                </a:solidFill>
-                <a:latin typeface="Segoe UI"/>
-                <a:cs typeface="Segoe UI"/>
-              </a:rPr>
-              <a:t xml:space="preserve">Topic 2 · Lesson 1 · End of Day 2</a:t>
-            </a:r>
-            <a:endParaRPr lang="en-US" sz="1200" dirty="0"/>
-          </a:p>
-        </p:txBody>
-      </p:sp>
-      <p:sp>
-        <p:nvSpPr>
-          <p:cNvPr id="3" name="Shape 3"/>
-          <p:cNvSpPr txBox="1"/>
-          <p:nvPr/>
-        </p:nvSpPr>
-        <p:spPr>
-          <a:xfrm>
-            <a:off x="685800" y="2512314"/>
-            <a:ext cx="10820095" cy="2569464"/>
-          </a:xfrm>
-          <a:prstGeom prst="rect">
-            <a:avLst/>
-          </a:prstGeom>
-          <a:noFill/>
-          <a:ln>
-            <a:noFill/>
-          </a:ln>
-        </p:spPr>
-        <p:txBody>
-          <a:bodyPr wrap="square" lIns="36576" tIns="27432" rIns="36576" bIns="27432" anchor="t">
-            <a:noAutofit/>
-          </a:bodyPr>
-          <a:lstStyle/>
-          <a:p>
-            <a:pPr algn="l">
-              <a:lnSpc>
-                <a:spcPct val="100000"/>
-              </a:lnSpc>
-            </a:pPr>
-            <a:r>
-              <a:rPr lang="en-US" sz="8250" dirty="0" b="1">
-                <a:solidFill>
-                  <a:srgbClr val="16171D"/>
-                </a:solidFill>
-                <a:latin typeface="Segoe UI"/>
-                <a:cs typeface="Segoe UI"/>
-              </a:rPr>
-              <a:t xml:space="preserve">Stop here: Tuesday, October 20</a:t>
-            </a:r>
-            <a:endParaRPr lang="en-US" sz="8250" dirty="0"/>
-          </a:p>
-        </p:txBody>
-      </p:sp>
-      <p:sp>
-        <p:nvSpPr>
-          <p:cNvPr id="4" name="Shape 4"/>
-          <p:cNvSpPr txBox="1"/>
-          <p:nvPr/>
-        </p:nvSpPr>
-        <p:spPr>
-          <a:xfrm>
-            <a:off x="685800" y="5253228"/>
-            <a:ext cx="10820095" cy="740664"/>
-          </a:xfrm>
-          <a:prstGeom prst="rect">
-            <a:avLst/>
-          </a:prstGeom>
-          <a:noFill/>
-          <a:ln>
-            <a:noFill/>
-          </a:ln>
-        </p:spPr>
-        <p:txBody>
-          <a:bodyPr wrap="square" lIns="36576" tIns="27432" rIns="36576" bIns="27432" anchor="t">
-            <a:noAutofit/>
-          </a:bodyPr>
-          <a:lstStyle/>
-          <a:p>
-            <a:pPr algn="l">
-              <a:lnSpc>
-                <a:spcPct val="100000"/>
-              </a:lnSpc>
-            </a:pPr>
-            <a:r>
-              <a:rPr lang="en-US" sz="2250" dirty="0">
-                <a:solidFill>
-                  <a:srgbClr val="16171D"/>
-                </a:solidFill>
-                <a:latin typeface="Segoe UI"/>
-                <a:cs typeface="Segoe UI"/>
-              </a:rPr>
-              <a:t xml:space="preserve">Next class: Wednesday, October 21. Start at the next slide, “Start: Wednesday, October 21.”</a:t>
-            </a:r>
-            <a:endParaRPr lang="en-US" sz="2250" dirty="0"/>
-          </a:p>
-        </p:txBody>
-      </p:sp>
-      <p:sp>
-        <p:nvSpPr>
-          <p:cNvPr id="5" name="Slide Number 5"/>
-          <p:cNvSpPr txBox="1"/>
-          <p:nvPr/>
-        </p:nvSpPr>
-        <p:spPr>
-          <a:xfrm>
-            <a:off x="11277295" y="6611112"/>
-            <a:ext cx="685800" cy="201168"/>
-          </a:xfrm>
-          <a:prstGeom prst="rect">
-            <a:avLst/>
-          </a:prstGeom>
-          <a:noFill/>
-        </p:spPr>
-        <p:txBody>
-          <a:bodyPr wrap="none" lIns="0" tIns="0" rIns="0" bIns="0" anchor="b">
-            <a:noAutofit/>
-          </a:bodyPr>
-          <a:lstStyle/>
-          <a:p>
-            <a:pPr algn="r"/>
-            <a:fld id="{5C1A6E0B-3B1F-4D5E-9C7A-2F4B8D6E1A90}" type="slidenum">
-              <a:rPr lang="en-US" sz="1200" dirty="0">
-                <a:solidFill>
-                  <a:srgbClr val="5F6272"/>
-                </a:solidFill>
-              </a:rPr>
-              <a:t>24</a:t>
-            </a:fld>
-          </a:p>
-        </p:txBody>
-      </p:sp>
-    </p:spTree>
-  </p:cSld>
-  <p:clrMapOvr>
-    <a:masterClrMapping/>
-  </p:clrMapOvr>
-  <p:transition spd="med">
-    <p:fade/>
-  </p:transition>
-</p:sld>
-</file>
-
 <file path=ppt/slides/slide25.xml><?xml version="1.0" encoding="utf-8"?>
 <p:sld xmlns:a="http://schemas.openxmlformats.org/drawingml/2006/main" xmlns:r="http://schemas.openxmlformats.org/officeDocument/2006/relationships" xmlns:p="http://schemas.openxmlformats.org/presentationml/2006/main">
   <p:cSld>
@@ -17726,7 +20048,7 @@
                 <a:latin typeface="Segoe UI"/>
                 <a:cs typeface="Segoe UI"/>
               </a:rPr>
-              <a:t xml:space="preserve">Topic 2 · Lesson 1 · Day 3 of 3 · Start here</a:t>
+              <a:t xml:space="preserve">Topic 2 · Lesson 1 · End of Day 2</a:t>
             </a:r>
             <a:endParaRPr lang="en-US" sz="1200" dirty="0"/>
           </a:p>
@@ -17770,7 +20092,7 @@
                 <a:latin typeface="Segoe UI"/>
                 <a:cs typeface="Segoe UI"/>
               </a:rPr>
-              <a:t xml:space="preserve">Start: Wednesday, October 21</a:t>
+              <a:t xml:space="preserve">Stop here: Tuesday, October 20</a:t>
             </a:r>
             <a:endParaRPr lang="en-US" sz="8250" dirty="0"/>
           </a:p>
@@ -17785,7 +20107,7 @@
         <p:spPr>
           <a:xfrm>
             <a:off x="685800" y="5253228"/>
-            <a:ext cx="10820095" cy="694944"/>
+            <a:ext cx="10820095" cy="740664"/>
           </a:xfrm>
           <a:prstGeom prst="rect">
             <a:avLst/>
@@ -17807,16 +20129,16 @@
               </a:lnSpc>
             </a:pPr>
             <a:r>
-              <a:rPr lang="en-US" sz="2100" dirty="0">
-                <a:solidFill>
-                  <a:srgbClr val="16171D"/>
-                </a:solidFill>
-                <a:latin typeface="Segoe UI"/>
-                <a:cs typeface="Segoe UI"/>
-              </a:rPr>
-              <a:t xml:space="preserve">Today: bell work → Topic 1 catch-up (Standard form and intercepts) → Lesson 1, Day 3.</a:t>
-            </a:r>
-            <a:endParaRPr lang="en-US" sz="2100" dirty="0"/>
+              <a:rPr lang="en-US" sz="2250" dirty="0">
+                <a:solidFill>
+                  <a:srgbClr val="16171D"/>
+                </a:solidFill>
+                <a:latin typeface="Segoe UI"/>
+                <a:cs typeface="Segoe UI"/>
+              </a:rPr>
+              <a:t xml:space="preserve">Next class: Wednesday, October 21. Start at the next slide, “Start: Wednesday, October 21.”</a:t>
+            </a:r>
+            <a:endParaRPr lang="en-US" sz="2250" dirty="0"/>
           </a:p>
         </p:txBody>
       </p:sp>
@@ -17890,7 +20212,7 @@
         </p:nvSpPr>
         <p:spPr>
           <a:xfrm>
-            <a:off x="685800" y="457200"/>
+            <a:off x="685800" y="2103120"/>
             <a:ext cx="10820095" cy="237744"/>
           </a:xfrm>
           <a:prstGeom prst="rect">
@@ -17920,7 +20242,7 @@
                 <a:latin typeface="Segoe UI"/>
                 <a:cs typeface="Segoe UI"/>
               </a:rPr>
-              <a:t xml:space="preserve">Day 3 · Bell Work · Review of Day 2 · Wed, Oct 21</a:t>
+              <a:t xml:space="preserve">Topic 2 · Lesson 1 · Day 3 of 3 · Start here</a:t>
             </a:r>
             <a:endParaRPr lang="en-US" sz="1200" dirty="0"/>
           </a:p>
@@ -17934,8 +20256,8 @@
         </p:nvSpPr>
         <p:spPr>
           <a:xfrm>
-            <a:off x="685800" y="866394"/>
-            <a:ext cx="10820095" cy="580644"/>
+            <a:off x="685800" y="2512314"/>
+            <a:ext cx="10820095" cy="2569464"/>
           </a:xfrm>
           <a:prstGeom prst="rect">
             <a:avLst/>
@@ -17957,16 +20279,16 @@
               </a:lnSpc>
             </a:pPr>
             <a:r>
-              <a:rPr lang="en-US" sz="3450" dirty="0" b="1">
-                <a:solidFill>
-                  <a:srgbClr val="16171D"/>
-                </a:solidFill>
-                <a:latin typeface="Segoe UI"/>
-                <a:cs typeface="Segoe UI"/>
-              </a:rPr>
-              <a:t xml:space="preserve">Warm up: work these on your own</a:t>
-            </a:r>
-            <a:endParaRPr lang="en-US" sz="3450" dirty="0"/>
+              <a:rPr lang="en-US" sz="8250" dirty="0" b="1">
+                <a:solidFill>
+                  <a:srgbClr val="16171D"/>
+                </a:solidFill>
+                <a:latin typeface="Segoe UI"/>
+                <a:cs typeface="Segoe UI"/>
+              </a:rPr>
+              <a:t xml:space="preserve">Start: Wednesday, October 21</a:t>
+            </a:r>
+            <a:endParaRPr lang="en-US" sz="8250" dirty="0"/>
           </a:p>
         </p:txBody>
       </p:sp>
@@ -17978,8 +20300,8 @@
         </p:nvSpPr>
         <p:spPr>
           <a:xfrm>
-            <a:off x="685800" y="1675638"/>
-            <a:ext cx="5143348" cy="649224"/>
+            <a:off x="685800" y="5253228"/>
+            <a:ext cx="10820095" cy="694944"/>
           </a:xfrm>
           <a:prstGeom prst="rect">
             <a:avLst/>
@@ -18001,6 +20323,200 @@
               </a:lnSpc>
             </a:pPr>
             <a:r>
+              <a:rPr lang="en-US" sz="2100" dirty="0">
+                <a:solidFill>
+                  <a:srgbClr val="16171D"/>
+                </a:solidFill>
+                <a:latin typeface="Segoe UI"/>
+                <a:cs typeface="Segoe UI"/>
+              </a:rPr>
+              <a:t xml:space="preserve">Today: bell work → Topic 1 catch-up (Standard form and intercepts) → Lesson 1, Day 3.</a:t>
+            </a:r>
+            <a:endParaRPr lang="en-US" sz="2100" dirty="0"/>
+          </a:p>
+        </p:txBody>
+      </p:sp>
+      <p:sp>
+        <p:nvSpPr>
+          <p:cNvPr id="5" name="Slide Number 5"/>
+          <p:cNvSpPr txBox="1"/>
+          <p:nvPr/>
+        </p:nvSpPr>
+        <p:spPr>
+          <a:xfrm>
+            <a:off x="11277295" y="6611112"/>
+            <a:ext cx="685800" cy="201168"/>
+          </a:xfrm>
+          <a:prstGeom prst="rect">
+            <a:avLst/>
+          </a:prstGeom>
+          <a:noFill/>
+        </p:spPr>
+        <p:txBody>
+          <a:bodyPr wrap="none" lIns="0" tIns="0" rIns="0" bIns="0" anchor="b">
+            <a:noAutofit/>
+          </a:bodyPr>
+          <a:lstStyle/>
+          <a:p>
+            <a:pPr algn="r"/>
+            <a:fld id="{5C1A6E0B-3B1F-4D5E-9C7A-2F4B8D6E1A90}" type="slidenum">
+              <a:rPr lang="en-US" sz="1200" dirty="0">
+                <a:solidFill>
+                  <a:srgbClr val="5F6272"/>
+                </a:solidFill>
+              </a:rPr>
+              <a:t>26</a:t>
+            </a:fld>
+          </a:p>
+        </p:txBody>
+      </p:sp>
+    </p:spTree>
+  </p:cSld>
+  <p:clrMapOvr>
+    <a:masterClrMapping/>
+  </p:clrMapOvr>
+  <p:transition spd="med">
+    <p:fade/>
+  </p:transition>
+</p:sld>
+</file>
+
+<file path=ppt/slides/slide27.xml><?xml version="1.0" encoding="utf-8"?>
+<p:sld xmlns:a="http://schemas.openxmlformats.org/drawingml/2006/main" xmlns:r="http://schemas.openxmlformats.org/officeDocument/2006/relationships" xmlns:p="http://schemas.openxmlformats.org/presentationml/2006/main">
+  <p:cSld>
+    <p:spTree>
+      <p:nvGrpSpPr>
+        <p:cNvPr id="1" name=""/>
+        <p:cNvGrpSpPr/>
+        <p:nvPr/>
+      </p:nvGrpSpPr>
+      <p:grpSpPr>
+        <a:xfrm>
+          <a:off x="0" y="0"/>
+          <a:ext cx="0" cy="0"/>
+          <a:chOff x="0" y="0"/>
+          <a:chExt cx="0" cy="0"/>
+        </a:xfrm>
+      </p:grpSpPr>
+      <p:sp>
+        <p:nvSpPr>
+          <p:cNvPr id="2" name="Shape 2"/>
+          <p:cNvSpPr txBox="1"/>
+          <p:nvPr/>
+        </p:nvSpPr>
+        <p:spPr>
+          <a:xfrm>
+            <a:off x="685800" y="457200"/>
+            <a:ext cx="10820095" cy="237744"/>
+          </a:xfrm>
+          <a:prstGeom prst="rect">
+            <a:avLst/>
+          </a:prstGeom>
+          <a:noFill/>
+          <a:ln>
+            <a:noFill/>
+          </a:ln>
+        </p:spPr>
+        <p:txBody>
+          <a:bodyPr wrap="square" lIns="36576" tIns="27432" rIns="36576" bIns="27432" anchor="t">
+            <a:noAutofit/>
+          </a:bodyPr>
+          <a:lstStyle/>
+          <a:p>
+            <a:pPr algn="l">
+              <a:lnSpc>
+                <a:spcPct val="100000"/>
+              </a:lnSpc>
+            </a:pPr>
+            <a:r>
+              <a:rPr lang="en-US" sz="1200" dirty="0" b="1" spc="150" cap="all">
+                <a:solidFill>
+                  <a:srgbClr val="5F6272"/>
+                </a:solidFill>
+                <a:latin typeface="Segoe UI"/>
+                <a:cs typeface="Segoe UI"/>
+              </a:rPr>
+              <a:t xml:space="preserve">Day 3 · Bell Work · Review of Day 2 · Wed, Oct 21</a:t>
+            </a:r>
+            <a:endParaRPr lang="en-US" sz="1200" dirty="0"/>
+          </a:p>
+        </p:txBody>
+      </p:sp>
+      <p:sp>
+        <p:nvSpPr>
+          <p:cNvPr id="3" name="Shape 3"/>
+          <p:cNvSpPr txBox="1"/>
+          <p:nvPr/>
+        </p:nvSpPr>
+        <p:spPr>
+          <a:xfrm>
+            <a:off x="685800" y="866394"/>
+            <a:ext cx="10820095" cy="580644"/>
+          </a:xfrm>
+          <a:prstGeom prst="rect">
+            <a:avLst/>
+          </a:prstGeom>
+          <a:noFill/>
+          <a:ln>
+            <a:noFill/>
+          </a:ln>
+        </p:spPr>
+        <p:txBody>
+          <a:bodyPr wrap="square" lIns="36576" tIns="27432" rIns="36576" bIns="27432" anchor="t">
+            <a:noAutofit/>
+          </a:bodyPr>
+          <a:lstStyle/>
+          <a:p>
+            <a:pPr algn="l">
+              <a:lnSpc>
+                <a:spcPct val="100000"/>
+              </a:lnSpc>
+            </a:pPr>
+            <a:r>
+              <a:rPr lang="en-US" sz="3450" dirty="0" b="1">
+                <a:solidFill>
+                  <a:srgbClr val="16171D"/>
+                </a:solidFill>
+                <a:latin typeface="Segoe UI"/>
+                <a:cs typeface="Segoe UI"/>
+              </a:rPr>
+              <a:t xml:space="preserve">Warm up: work these on your own</a:t>
+            </a:r>
+            <a:endParaRPr lang="en-US" sz="3450" dirty="0"/>
+          </a:p>
+        </p:txBody>
+      </p:sp>
+      <p:sp>
+        <p:nvSpPr>
+          <p:cNvPr id="4" name="Shape 4"/>
+          <p:cNvSpPr txBox="1"/>
+          <p:nvPr/>
+        </p:nvSpPr>
+        <p:spPr>
+          <a:xfrm>
+            <a:off x="685800" y="1675638"/>
+            <a:ext cx="5143348" cy="649224"/>
+          </a:xfrm>
+          <a:prstGeom prst="rect">
+            <a:avLst/>
+          </a:prstGeom>
+          <a:noFill/>
+          <a:ln>
+            <a:noFill/>
+          </a:ln>
+        </p:spPr>
+        <p:txBody>
+          <a:bodyPr wrap="square" lIns="36576" tIns="27432" rIns="36576" bIns="27432" anchor="t">
+            <a:noAutofit/>
+          </a:bodyPr>
+          <a:lstStyle/>
+          <a:p>
+            <a:pPr algn="l">
+              <a:lnSpc>
+                <a:spcPct val="100000"/>
+              </a:lnSpc>
+            </a:pPr>
+            <a:r>
               <a:rPr lang="en-US" sz="1950" dirty="0">
                 <a:solidFill>
                   <a:srgbClr val="16171D"/>
@@ -19167,7 +21683,7 @@
                   <a:srgbClr val="5F6272"/>
                 </a:solidFill>
               </a:rPr>
-              <a:t>26</a:t>
+              <a:t>27</a:t>
             </a:fld>
           </a:p>
         </p:txBody>
@@ -19609,276 +22125,6 @@
 </p:sld>
 </file>
 
-<file path=ppt/slides/slide27.xml><?xml version="1.0" encoding="utf-8"?>
-<p:sld xmlns:a="http://schemas.openxmlformats.org/drawingml/2006/main" xmlns:r="http://schemas.openxmlformats.org/officeDocument/2006/relationships" xmlns:p="http://schemas.openxmlformats.org/presentationml/2006/main">
-  <p:cSld>
-    <p:spTree>
-      <p:nvGrpSpPr>
-        <p:cNvPr id="1" name=""/>
-        <p:cNvGrpSpPr/>
-        <p:nvPr/>
-      </p:nvGrpSpPr>
-      <p:grpSpPr>
-        <a:xfrm>
-          <a:off x="0" y="0"/>
-          <a:ext cx="0" cy="0"/>
-          <a:chOff x="0" y="0"/>
-          <a:chExt cx="0" cy="0"/>
-        </a:xfrm>
-      </p:grpSpPr>
-      <p:sp>
-        <p:nvSpPr>
-          <p:cNvPr id="2" name="Shape 2"/>
-          <p:cNvSpPr txBox="1"/>
-          <p:nvPr/>
-        </p:nvSpPr>
-        <p:spPr>
-          <a:xfrm>
-            <a:off x="685800" y="914400"/>
-            <a:ext cx="10820095" cy="237744"/>
-          </a:xfrm>
-          <a:prstGeom prst="rect">
-            <a:avLst/>
-          </a:prstGeom>
-          <a:noFill/>
-          <a:ln>
-            <a:noFill/>
-          </a:ln>
-        </p:spPr>
-        <p:txBody>
-          <a:bodyPr wrap="square" lIns="36576" tIns="27432" rIns="36576" bIns="27432" anchor="t">
-            <a:noAutofit/>
-          </a:bodyPr>
-          <a:lstStyle/>
-          <a:p>
-            <a:pPr algn="l">
-              <a:lnSpc>
-                <a:spcPct val="100000"/>
-              </a:lnSpc>
-            </a:pPr>
-            <a:r>
-              <a:rPr lang="en-US" sz="1200" dirty="0" b="1" spc="150" cap="all">
-                <a:solidFill>
-                  <a:srgbClr val="5F6272"/>
-                </a:solidFill>
-                <a:latin typeface="Segoe UI"/>
-                <a:cs typeface="Segoe UI"/>
-              </a:rPr>
-              <a:t xml:space="preserve">Topic 1 Catch-Up · Wed, Oct 21 · about 15 minutes</a:t>
-            </a:r>
-            <a:endParaRPr lang="en-US" sz="1200" dirty="0"/>
-          </a:p>
-        </p:txBody>
-      </p:sp>
-      <p:sp>
-        <p:nvSpPr>
-          <p:cNvPr id="3" name="Shape 3"/>
-          <p:cNvSpPr txBox="1"/>
-          <p:nvPr/>
-        </p:nvSpPr>
-        <p:spPr>
-          <a:xfrm>
-            <a:off x="685800" y="1323594"/>
-            <a:ext cx="10820095" cy="1792224"/>
-          </a:xfrm>
-          <a:prstGeom prst="rect">
-            <a:avLst/>
-          </a:prstGeom>
-          <a:noFill/>
-          <a:ln>
-            <a:noFill/>
-          </a:ln>
-        </p:spPr>
-        <p:txBody>
-          <a:bodyPr wrap="square" lIns="36576" tIns="27432" rIns="36576" bIns="27432" anchor="t">
-            <a:noAutofit/>
-          </a:bodyPr>
-          <a:lstStyle/>
-          <a:p>
-            <a:pPr algn="l">
-              <a:lnSpc>
-                <a:spcPct val="100000"/>
-              </a:lnSpc>
-            </a:pPr>
-            <a:r>
-              <a:rPr lang="en-US" sz="5700" dirty="0" b="1">
-                <a:solidFill>
-                  <a:srgbClr val="16171D"/>
-                </a:solidFill>
-                <a:latin typeface="Segoe UI"/>
-                <a:cs typeface="Segoe UI"/>
-              </a:rPr>
-              <a:t xml:space="preserve">Topic 1 Lesson 5: Standard form and intercepts</a:t>
-            </a:r>
-            <a:endParaRPr lang="en-US" sz="5700" dirty="0"/>
-          </a:p>
-        </p:txBody>
-      </p:sp>
-      <p:sp>
-        <p:nvSpPr>
-          <p:cNvPr id="4" name="Shape 4"/>
-          <p:cNvSpPr txBox="1"/>
-          <p:nvPr/>
-        </p:nvSpPr>
-        <p:spPr>
-          <a:xfrm>
-            <a:off x="685800" y="3287268"/>
-            <a:ext cx="10820095" cy="740664"/>
-          </a:xfrm>
-          <a:prstGeom prst="rect">
-            <a:avLst/>
-          </a:prstGeom>
-          <a:noFill/>
-          <a:ln>
-            <a:noFill/>
-          </a:ln>
-        </p:spPr>
-        <p:txBody>
-          <a:bodyPr wrap="square" lIns="36576" tIns="27432" rIns="36576" bIns="27432" anchor="t">
-            <a:noAutofit/>
-          </a:bodyPr>
-          <a:lstStyle/>
-          <a:p>
-            <a:pPr algn="l">
-              <a:lnSpc>
-                <a:spcPct val="100000"/>
-              </a:lnSpc>
-            </a:pPr>
-            <a:r>
-              <a:rPr lang="en-US" sz="2250" dirty="0">
-                <a:solidFill>
-                  <a:srgbClr val="16171D"/>
-                </a:solidFill>
-                <a:latin typeface="Segoe UI"/>
-                <a:cs typeface="Segoe UI"/>
-              </a:rPr>
-              <a:t xml:space="preserve">Graphing with the intercepts is a fast check on the transformed graphs in Activity 1.4.</a:t>
-            </a:r>
-            <a:endParaRPr lang="en-US" sz="2250" dirty="0"/>
-          </a:p>
-        </p:txBody>
-      </p:sp>
-      <p:sp>
-        <p:nvSpPr>
-          <p:cNvPr id="5" name="Shape 5"/>
-          <p:cNvSpPr txBox="1"/>
-          <p:nvPr/>
-        </p:nvSpPr>
-        <p:spPr>
-          <a:xfrm>
-            <a:off x="685800" y="4199382"/>
-            <a:ext cx="10820095" cy="329184"/>
-          </a:xfrm>
-          <a:prstGeom prst="rect">
-            <a:avLst/>
-          </a:prstGeom>
-          <a:noFill/>
-          <a:ln>
-            <a:noFill/>
-          </a:ln>
-        </p:spPr>
-        <p:txBody>
-          <a:bodyPr wrap="square" lIns="36576" tIns="27432" rIns="36576" bIns="27432" anchor="t">
-            <a:noAutofit/>
-          </a:bodyPr>
-          <a:lstStyle/>
-          <a:p>
-            <a:pPr algn="l">
-              <a:lnSpc>
-                <a:spcPct val="100000"/>
-              </a:lnSpc>
-            </a:pPr>
-            <a:r>
-              <a:rPr lang="en-US" sz="1800" dirty="0">
-                <a:solidFill>
-                  <a:srgbClr val="16171D"/>
-                </a:solidFill>
-                <a:latin typeface="Segoe UI"/>
-                <a:cs typeface="Segoe UI"/>
-              </a:rPr>
-              <a:t xml:space="preserve">Topic 1 Lesson 5 practice: </a:t>
-            </a:r>
-            <a:r>
-              <a:rPr lang="en-US" sz="1800" dirty="0">
-                <a:solidFill>
-                  <a:srgbClr val="3050B8"/>
-                </a:solidFill>
-                <a:latin typeface="Segoe UI"/>
-                <a:cs typeface="Segoe UI"/>
-                <a:hlinkClick r:id="rId3"/>
-              </a:rPr>
-              <a:t xml:space="preserve">Homework →</a:t>
-            </a:r>
-            <a:r>
-              <a:rPr lang="en-US" sz="1800" dirty="0">
-                <a:solidFill>
-                  <a:srgbClr val="16171D"/>
-                </a:solidFill>
-                <a:latin typeface="Segoe UI"/>
-                <a:cs typeface="Segoe UI"/>
-              </a:rPr>
-              <a:t xml:space="preserve"> · </a:t>
-            </a:r>
-            <a:r>
-              <a:rPr lang="en-US" sz="1800" dirty="0">
-                <a:solidFill>
-                  <a:srgbClr val="3050B8"/>
-                </a:solidFill>
-                <a:latin typeface="Segoe UI"/>
-                <a:cs typeface="Segoe UI"/>
-                <a:hlinkClick r:id="rId4"/>
-              </a:rPr>
-              <a:t xml:space="preserve">Quiz →</a:t>
-            </a:r>
-            <a:endParaRPr lang="en-US" sz="1800" dirty="0"/>
-          </a:p>
-        </p:txBody>
-      </p:sp>
-      <p:sp>
-        <p:nvSpPr>
-          <p:cNvPr id="6" name="Slide Number 6"/>
-          <p:cNvSpPr txBox="1"/>
-          <p:nvPr/>
-        </p:nvSpPr>
-        <p:spPr>
-          <a:xfrm>
-            <a:off x="11277295" y="6611112"/>
-            <a:ext cx="685800" cy="201168"/>
-          </a:xfrm>
-          <a:prstGeom prst="rect">
-            <a:avLst/>
-          </a:prstGeom>
-          <a:noFill/>
-        </p:spPr>
-        <p:txBody>
-          <a:bodyPr wrap="none" lIns="0" tIns="0" rIns="0" bIns="0" anchor="b">
-            <a:noAutofit/>
-          </a:bodyPr>
-          <a:lstStyle/>
-          <a:p>
-            <a:pPr algn="r"/>
-            <a:fld id="{5C1A6E0B-3B1F-4D5E-9C7A-2F4B8D6E1A90}" type="slidenum">
-              <a:rPr lang="en-US" sz="1200" dirty="0">
-                <a:solidFill>
-                  <a:srgbClr val="5F6272"/>
-                </a:solidFill>
-              </a:rPr>
-              <a:t>27</a:t>
-            </a:fld>
-          </a:p>
-        </p:txBody>
-      </p:sp>
-    </p:spTree>
-  </p:cSld>
-  <p:clrMapOvr>
-    <a:masterClrMapping/>
-  </p:clrMapOvr>
-  <p:transition spd="med">
-    <p:fade/>
-  </p:transition>
-</p:sld>
-</file>
-
 <file path=ppt/slides/slide28.xml><?xml version="1.0" encoding="utf-8"?>
 <p:sld xmlns:a="http://schemas.openxmlformats.org/drawingml/2006/main" xmlns:r="http://schemas.openxmlformats.org/officeDocument/2006/relationships" xmlns:p="http://schemas.openxmlformats.org/presentationml/2006/main">
   <p:cSld>
@@ -19904,6 +22150,276 @@
         </p:nvSpPr>
         <p:spPr>
           <a:xfrm>
+            <a:off x="685800" y="914400"/>
+            <a:ext cx="10820095" cy="237744"/>
+          </a:xfrm>
+          <a:prstGeom prst="rect">
+            <a:avLst/>
+          </a:prstGeom>
+          <a:noFill/>
+          <a:ln>
+            <a:noFill/>
+          </a:ln>
+        </p:spPr>
+        <p:txBody>
+          <a:bodyPr wrap="square" lIns="36576" tIns="27432" rIns="36576" bIns="27432" anchor="t">
+            <a:noAutofit/>
+          </a:bodyPr>
+          <a:lstStyle/>
+          <a:p>
+            <a:pPr algn="l">
+              <a:lnSpc>
+                <a:spcPct val="100000"/>
+              </a:lnSpc>
+            </a:pPr>
+            <a:r>
+              <a:rPr lang="en-US" sz="1200" dirty="0" b="1" spc="150" cap="all">
+                <a:solidFill>
+                  <a:srgbClr val="5F6272"/>
+                </a:solidFill>
+                <a:latin typeface="Segoe UI"/>
+                <a:cs typeface="Segoe UI"/>
+              </a:rPr>
+              <a:t xml:space="preserve">Topic 1 Catch-Up · Wed, Oct 21 · about 15 minutes</a:t>
+            </a:r>
+            <a:endParaRPr lang="en-US" sz="1200" dirty="0"/>
+          </a:p>
+        </p:txBody>
+      </p:sp>
+      <p:sp>
+        <p:nvSpPr>
+          <p:cNvPr id="3" name="Shape 3"/>
+          <p:cNvSpPr txBox="1"/>
+          <p:nvPr/>
+        </p:nvSpPr>
+        <p:spPr>
+          <a:xfrm>
+            <a:off x="685800" y="1323594"/>
+            <a:ext cx="10820095" cy="1792224"/>
+          </a:xfrm>
+          <a:prstGeom prst="rect">
+            <a:avLst/>
+          </a:prstGeom>
+          <a:noFill/>
+          <a:ln>
+            <a:noFill/>
+          </a:ln>
+        </p:spPr>
+        <p:txBody>
+          <a:bodyPr wrap="square" lIns="36576" tIns="27432" rIns="36576" bIns="27432" anchor="t">
+            <a:noAutofit/>
+          </a:bodyPr>
+          <a:lstStyle/>
+          <a:p>
+            <a:pPr algn="l">
+              <a:lnSpc>
+                <a:spcPct val="100000"/>
+              </a:lnSpc>
+            </a:pPr>
+            <a:r>
+              <a:rPr lang="en-US" sz="5700" dirty="0" b="1">
+                <a:solidFill>
+                  <a:srgbClr val="16171D"/>
+                </a:solidFill>
+                <a:latin typeface="Segoe UI"/>
+                <a:cs typeface="Segoe UI"/>
+              </a:rPr>
+              <a:t xml:space="preserve">Topic 1 Lesson 5: Standard form and intercepts</a:t>
+            </a:r>
+            <a:endParaRPr lang="en-US" sz="5700" dirty="0"/>
+          </a:p>
+        </p:txBody>
+      </p:sp>
+      <p:sp>
+        <p:nvSpPr>
+          <p:cNvPr id="4" name="Shape 4"/>
+          <p:cNvSpPr txBox="1"/>
+          <p:nvPr/>
+        </p:nvSpPr>
+        <p:spPr>
+          <a:xfrm>
+            <a:off x="685800" y="3287268"/>
+            <a:ext cx="10820095" cy="740664"/>
+          </a:xfrm>
+          <a:prstGeom prst="rect">
+            <a:avLst/>
+          </a:prstGeom>
+          <a:noFill/>
+          <a:ln>
+            <a:noFill/>
+          </a:ln>
+        </p:spPr>
+        <p:txBody>
+          <a:bodyPr wrap="square" lIns="36576" tIns="27432" rIns="36576" bIns="27432" anchor="t">
+            <a:noAutofit/>
+          </a:bodyPr>
+          <a:lstStyle/>
+          <a:p>
+            <a:pPr algn="l">
+              <a:lnSpc>
+                <a:spcPct val="100000"/>
+              </a:lnSpc>
+            </a:pPr>
+            <a:r>
+              <a:rPr lang="en-US" sz="2250" dirty="0">
+                <a:solidFill>
+                  <a:srgbClr val="16171D"/>
+                </a:solidFill>
+                <a:latin typeface="Segoe UI"/>
+                <a:cs typeface="Segoe UI"/>
+              </a:rPr>
+              <a:t xml:space="preserve">Graphing with the intercepts is a fast check on the transformed graphs in Activity 1.4.</a:t>
+            </a:r>
+            <a:endParaRPr lang="en-US" sz="2250" dirty="0"/>
+          </a:p>
+        </p:txBody>
+      </p:sp>
+      <p:sp>
+        <p:nvSpPr>
+          <p:cNvPr id="5" name="Shape 5"/>
+          <p:cNvSpPr txBox="1"/>
+          <p:nvPr/>
+        </p:nvSpPr>
+        <p:spPr>
+          <a:xfrm>
+            <a:off x="685800" y="4199382"/>
+            <a:ext cx="10820095" cy="329184"/>
+          </a:xfrm>
+          <a:prstGeom prst="rect">
+            <a:avLst/>
+          </a:prstGeom>
+          <a:noFill/>
+          <a:ln>
+            <a:noFill/>
+          </a:ln>
+        </p:spPr>
+        <p:txBody>
+          <a:bodyPr wrap="square" lIns="36576" tIns="27432" rIns="36576" bIns="27432" anchor="t">
+            <a:noAutofit/>
+          </a:bodyPr>
+          <a:lstStyle/>
+          <a:p>
+            <a:pPr algn="l">
+              <a:lnSpc>
+                <a:spcPct val="100000"/>
+              </a:lnSpc>
+            </a:pPr>
+            <a:r>
+              <a:rPr lang="en-US" sz="1800" dirty="0">
+                <a:solidFill>
+                  <a:srgbClr val="16171D"/>
+                </a:solidFill>
+                <a:latin typeface="Segoe UI"/>
+                <a:cs typeface="Segoe UI"/>
+              </a:rPr>
+              <a:t xml:space="preserve">Topic 1 Lesson 5 practice: </a:t>
+            </a:r>
+            <a:r>
+              <a:rPr lang="en-US" sz="1800" dirty="0">
+                <a:solidFill>
+                  <a:srgbClr val="3050B8"/>
+                </a:solidFill>
+                <a:latin typeface="Segoe UI"/>
+                <a:cs typeface="Segoe UI"/>
+                <a:hlinkClick r:id="rId3"/>
+              </a:rPr>
+              <a:t xml:space="preserve">Homework →</a:t>
+            </a:r>
+            <a:r>
+              <a:rPr lang="en-US" sz="1800" dirty="0">
+                <a:solidFill>
+                  <a:srgbClr val="16171D"/>
+                </a:solidFill>
+                <a:latin typeface="Segoe UI"/>
+                <a:cs typeface="Segoe UI"/>
+              </a:rPr>
+              <a:t xml:space="preserve"> · </a:t>
+            </a:r>
+            <a:r>
+              <a:rPr lang="en-US" sz="1800" dirty="0">
+                <a:solidFill>
+                  <a:srgbClr val="3050B8"/>
+                </a:solidFill>
+                <a:latin typeface="Segoe UI"/>
+                <a:cs typeface="Segoe UI"/>
+                <a:hlinkClick r:id="rId4"/>
+              </a:rPr>
+              <a:t xml:space="preserve">Quiz →</a:t>
+            </a:r>
+            <a:endParaRPr lang="en-US" sz="1800" dirty="0"/>
+          </a:p>
+        </p:txBody>
+      </p:sp>
+      <p:sp>
+        <p:nvSpPr>
+          <p:cNvPr id="6" name="Slide Number 6"/>
+          <p:cNvSpPr txBox="1"/>
+          <p:nvPr/>
+        </p:nvSpPr>
+        <p:spPr>
+          <a:xfrm>
+            <a:off x="11277295" y="6611112"/>
+            <a:ext cx="685800" cy="201168"/>
+          </a:xfrm>
+          <a:prstGeom prst="rect">
+            <a:avLst/>
+          </a:prstGeom>
+          <a:noFill/>
+        </p:spPr>
+        <p:txBody>
+          <a:bodyPr wrap="none" lIns="0" tIns="0" rIns="0" bIns="0" anchor="b">
+            <a:noAutofit/>
+          </a:bodyPr>
+          <a:lstStyle/>
+          <a:p>
+            <a:pPr algn="r"/>
+            <a:fld id="{5C1A6E0B-3B1F-4D5E-9C7A-2F4B8D6E1A90}" type="slidenum">
+              <a:rPr lang="en-US" sz="1200" dirty="0">
+                <a:solidFill>
+                  <a:srgbClr val="5F6272"/>
+                </a:solidFill>
+              </a:rPr>
+              <a:t>28</a:t>
+            </a:fld>
+          </a:p>
+        </p:txBody>
+      </p:sp>
+    </p:spTree>
+  </p:cSld>
+  <p:clrMapOvr>
+    <a:masterClrMapping/>
+  </p:clrMapOvr>
+  <p:transition spd="med">
+    <p:fade/>
+  </p:transition>
+</p:sld>
+</file>
+
+<file path=ppt/slides/slide29.xml><?xml version="1.0" encoding="utf-8"?>
+<p:sld xmlns:a="http://schemas.openxmlformats.org/drawingml/2006/main" xmlns:r="http://schemas.openxmlformats.org/officeDocument/2006/relationships" xmlns:p="http://schemas.openxmlformats.org/presentationml/2006/main">
+  <p:cSld>
+    <p:spTree>
+      <p:nvGrpSpPr>
+        <p:cNvPr id="1" name=""/>
+        <p:cNvGrpSpPr/>
+        <p:nvPr/>
+      </p:nvGrpSpPr>
+      <p:grpSpPr>
+        <a:xfrm>
+          <a:off x="0" y="0"/>
+          <a:ext cx="0" cy="0"/>
+          <a:chOff x="0" y="0"/>
+          <a:chExt cx="0" cy="0"/>
+        </a:xfrm>
+      </p:grpSpPr>
+      <p:sp>
+        <p:nvSpPr>
+          <p:cNvPr id="2" name="Shape 2"/>
+          <p:cNvSpPr txBox="1"/>
+          <p:nvPr/>
+        </p:nvSpPr>
+        <p:spPr>
+          <a:xfrm>
             <a:off x="685800" y="457200"/>
             <a:ext cx="10820095" cy="237744"/>
           </a:xfrm>
@@ -21912,7 +24428,7 @@
                   <a:srgbClr val="5F6272"/>
                 </a:solidFill>
               </a:rPr>
-              <a:t>28</a:t>
+              <a:t>29</a:t>
             </a:fld>
           </a:p>
         </p:txBody>
@@ -22569,728 +25085,6 @@
 </p:sld>
 </file>
 
-<file path=ppt/slides/slide29.xml><?xml version="1.0" encoding="utf-8"?>
-<p:sld xmlns:a="http://schemas.openxmlformats.org/drawingml/2006/main" xmlns:r="http://schemas.openxmlformats.org/officeDocument/2006/relationships" xmlns:p="http://schemas.openxmlformats.org/presentationml/2006/main">
-  <p:cSld>
-    <p:spTree>
-      <p:nvGrpSpPr>
-        <p:cNvPr id="1" name=""/>
-        <p:cNvGrpSpPr/>
-        <p:nvPr/>
-      </p:nvGrpSpPr>
-      <p:grpSpPr>
-        <a:xfrm>
-          <a:off x="0" y="0"/>
-          <a:ext cx="0" cy="0"/>
-          <a:chOff x="0" y="0"/>
-          <a:chExt cx="0" cy="0"/>
-        </a:xfrm>
-      </p:grpSpPr>
-      <p:sp>
-        <p:nvSpPr>
-          <p:cNvPr id="2" name="Shape 2"/>
-          <p:cNvSpPr txBox="1"/>
-          <p:nvPr/>
-        </p:nvSpPr>
-        <p:spPr>
-          <a:xfrm>
-            <a:off x="685800" y="457200"/>
-            <a:ext cx="10820095" cy="237744"/>
-          </a:xfrm>
-          <a:prstGeom prst="rect">
-            <a:avLst/>
-          </a:prstGeom>
-          <a:noFill/>
-          <a:ln>
-            <a:noFill/>
-          </a:ln>
-        </p:spPr>
-        <p:txBody>
-          <a:bodyPr wrap="square" lIns="36576" tIns="27432" rIns="36576" bIns="27432" anchor="t">
-            <a:noAutofit/>
-          </a:bodyPr>
-          <a:lstStyle/>
-          <a:p>
-            <a:pPr algn="l">
-              <a:lnSpc>
-                <a:spcPct val="100000"/>
-              </a:lnSpc>
-            </a:pPr>
-            <a:r>
-              <a:rPr lang="en-US" sz="1200" dirty="0" b="1" spc="150" cap="all">
-                <a:solidFill>
-                  <a:srgbClr val="5F6272"/>
-                </a:solidFill>
-                <a:latin typeface="Segoe UI"/>
-                <a:cs typeface="Segoe UI"/>
-              </a:rPr>
-              <a:t xml:space="preserve">Topic 1 Catch-Up · Lesson 5 · You do · Try it</a:t>
-            </a:r>
-            <a:endParaRPr lang="en-US" sz="1200" dirty="0"/>
-          </a:p>
-        </p:txBody>
-      </p:sp>
-      <p:sp>
-        <p:nvSpPr>
-          <p:cNvPr id="3" name="Shape 3"/>
-          <p:cNvSpPr txBox="1"/>
-          <p:nvPr/>
-        </p:nvSpPr>
-        <p:spPr>
-          <a:xfrm>
-            <a:off x="685800" y="866394"/>
-            <a:ext cx="10820095" cy="580644"/>
-          </a:xfrm>
-          <a:prstGeom prst="rect">
-            <a:avLst/>
-          </a:prstGeom>
-          <a:noFill/>
-          <a:ln>
-            <a:noFill/>
-          </a:ln>
-        </p:spPr>
-        <p:txBody>
-          <a:bodyPr wrap="square" lIns="36576" tIns="27432" rIns="36576" bIns="27432" anchor="t">
-            <a:noAutofit/>
-          </a:bodyPr>
-          <a:lstStyle/>
-          <a:p>
-            <a:pPr algn="l">
-              <a:lnSpc>
-                <a:spcPct val="100000"/>
-              </a:lnSpc>
-            </a:pPr>
-            <a:r>
-              <a:rPr lang="en-US" sz="3450" dirty="0" b="1">
-                <a:solidFill>
-                  <a:srgbClr val="16171D"/>
-                </a:solidFill>
-                <a:latin typeface="Segoe UI"/>
-                <a:cs typeface="Segoe UI"/>
-              </a:rPr>
-              <a:t xml:space="preserve">Find the intercepts of 2</a:t>
-            </a:r>
-            <a:r>
-              <a:rPr lang="en-US" sz="3450" dirty="0" b="1" i="1">
-                <a:solidFill>
-                  <a:srgbClr val="16171D"/>
-                </a:solidFill>
-                <a:latin typeface="Segoe UI"/>
-                <a:cs typeface="Segoe UI"/>
-              </a:rPr>
-              <a:t xml:space="preserve">x</a:t>
-            </a:r>
-            <a:r>
-              <a:rPr lang="en-US" sz="3450" dirty="0" b="1">
-                <a:solidFill>
-                  <a:srgbClr val="16171D"/>
-                </a:solidFill>
-                <a:latin typeface="Segoe UI"/>
-                <a:cs typeface="Segoe UI"/>
-              </a:rPr>
-              <a:t xml:space="preserve"> + 5</a:t>
-            </a:r>
-            <a:r>
-              <a:rPr lang="en-US" sz="3450" dirty="0" b="1" i="1">
-                <a:solidFill>
-                  <a:srgbClr val="16171D"/>
-                </a:solidFill>
-                <a:latin typeface="Segoe UI"/>
-                <a:cs typeface="Segoe UI"/>
-              </a:rPr>
-              <a:t xml:space="preserve">y</a:t>
-            </a:r>
-            <a:r>
-              <a:rPr lang="en-US" sz="3450" dirty="0" b="1">
-                <a:solidFill>
-                  <a:srgbClr val="16171D"/>
-                </a:solidFill>
-                <a:latin typeface="Segoe UI"/>
-                <a:cs typeface="Segoe UI"/>
-              </a:rPr>
-              <a:t xml:space="preserve"> = 20</a:t>
-            </a:r>
-            <a:endParaRPr lang="en-US" sz="3450" dirty="0"/>
-          </a:p>
-        </p:txBody>
-      </p:sp>
-      <p:sp>
-        <p:nvSpPr>
-          <p:cNvPr id="4" name="Shape 4"/>
-          <p:cNvSpPr txBox="1"/>
-          <p:nvPr/>
-        </p:nvSpPr>
-        <p:spPr>
-          <a:xfrm>
-            <a:off x="685800" y="1618488"/>
-            <a:ext cx="10820095" cy="352044"/>
-          </a:xfrm>
-          <a:prstGeom prst="rect">
-            <a:avLst/>
-          </a:prstGeom>
-          <a:noFill/>
-          <a:ln>
-            <a:noFill/>
-          </a:ln>
-        </p:spPr>
-        <p:txBody>
-          <a:bodyPr wrap="square" lIns="36576" tIns="27432" rIns="36576" bIns="27432" anchor="t">
-            <a:noAutofit/>
-          </a:bodyPr>
-          <a:lstStyle/>
-          <a:p>
-            <a:pPr algn="l">
-              <a:lnSpc>
-                <a:spcPct val="100000"/>
-              </a:lnSpc>
-            </a:pPr>
-            <a:r>
-              <a:rPr lang="en-US" sz="1950" dirty="0" i="1">
-                <a:solidFill>
-                  <a:srgbClr val="16171D"/>
-                </a:solidFill>
-                <a:latin typeface="Segoe UI"/>
-                <a:cs typeface="Segoe UI"/>
-              </a:rPr>
-              <a:t xml:space="preserve">y</a:t>
-            </a:r>
-            <a:r>
-              <a:rPr lang="en-US" sz="1950" dirty="0">
-                <a:solidFill>
-                  <a:srgbClr val="16171D"/>
-                </a:solidFill>
-                <a:latin typeface="Segoe UI"/>
-                <a:cs typeface="Segoe UI"/>
-              </a:rPr>
-              <a:t xml:space="preserve"> = 0: 2</a:t>
-            </a:r>
-            <a:r>
-              <a:rPr lang="en-US" sz="1950" dirty="0" i="1">
-                <a:solidFill>
-                  <a:srgbClr val="16171D"/>
-                </a:solidFill>
-                <a:latin typeface="Segoe UI"/>
-                <a:cs typeface="Segoe UI"/>
-              </a:rPr>
-              <a:t xml:space="preserve">x</a:t>
-            </a:r>
-            <a:r>
-              <a:rPr lang="en-US" sz="1950" dirty="0">
-                <a:solidFill>
-                  <a:srgbClr val="16171D"/>
-                </a:solidFill>
-                <a:latin typeface="Segoe UI"/>
-                <a:cs typeface="Segoe UI"/>
-              </a:rPr>
-              <a:t xml:space="preserve"> = 20, so </a:t>
-            </a:r>
-            <a:r>
-              <a:rPr lang="en-US" sz="1950" dirty="0" i="1">
-                <a:solidFill>
-                  <a:srgbClr val="16171D"/>
-                </a:solidFill>
-                <a:latin typeface="Segoe UI"/>
-                <a:cs typeface="Segoe UI"/>
-              </a:rPr>
-              <a:t xml:space="preserve">x</a:t>
-            </a:r>
-            <a:r>
-              <a:rPr lang="en-US" sz="1950" dirty="0">
-                <a:solidFill>
-                  <a:srgbClr val="16171D"/>
-                </a:solidFill>
-                <a:latin typeface="Segoe UI"/>
-                <a:cs typeface="Segoe UI"/>
-              </a:rPr>
-              <a:t xml:space="preserve"> = ____</a:t>
-            </a:r>
-            <a:endParaRPr lang="en-US" sz="1950" dirty="0"/>
-          </a:p>
-        </p:txBody>
-      </p:sp>
-      <p:sp>
-        <p:nvSpPr>
-          <p:cNvPr id="5" name="Shape 5"/>
-          <p:cNvSpPr txBox="1"/>
-          <p:nvPr/>
-        </p:nvSpPr>
-        <p:spPr>
-          <a:xfrm>
-            <a:off x="685800" y="2141982"/>
-            <a:ext cx="3073847" cy="518922"/>
-          </a:xfrm>
-          <a:prstGeom prst="roundRect">
-            <a:avLst>
-              <a:gd name="adj" fmla="val 8000"/>
-            </a:avLst>
-          </a:prstGeom>
-          <a:solidFill>
-            <a:srgbClr val="EDF5E9"/>
-          </a:solidFill>
-          <a:ln>
-            <a:noFill/>
-          </a:ln>
-        </p:spPr>
-        <p:txBody>
-          <a:bodyPr wrap="square" lIns="164592" tIns="64008" rIns="164592" bIns="64008" anchor="ctr">
-            <a:noAutofit/>
-          </a:bodyPr>
-          <a:lstStyle/>
-          <a:p>
-            <a:pPr algn="l">
-              <a:lnSpc>
-                <a:spcPct val="100000"/>
-              </a:lnSpc>
-            </a:pPr>
-            <a:r>
-              <a:rPr lang="en-US" sz="1125" dirty="0" b="1" spc="100">
-                <a:solidFill>
-                  <a:srgbClr val="4F8A3C"/>
-                </a:solidFill>
-                <a:latin typeface="Segoe UI"/>
-                <a:cs typeface="Segoe UI"/>
-              </a:rPr>
-              <a:t xml:space="preserve">ANSWER   </a:t>
-            </a:r>
-            <a:r>
-              <a:rPr lang="en-US" sz="2325" dirty="0">
-                <a:solidFill>
-                  <a:srgbClr val="16171D"/>
-                </a:solidFill>
-                <a:latin typeface="Cambria"/>
-                <a:cs typeface="Cambria"/>
-              </a:rPr>
-              <a:t xml:space="preserve">(10, 0)</a:t>
-            </a:r>
-            <a:endParaRPr lang="en-US" sz="2325" dirty="0"/>
-          </a:p>
-        </p:txBody>
-      </p:sp>
-      <p:sp>
-        <p:nvSpPr>
-          <p:cNvPr id="6" name="Shape 6"/>
-          <p:cNvSpPr txBox="1"/>
-          <p:nvPr/>
-        </p:nvSpPr>
-        <p:spPr>
-          <a:xfrm>
-            <a:off x="685800" y="2832354"/>
-            <a:ext cx="10820095" cy="352044"/>
-          </a:xfrm>
-          <a:prstGeom prst="rect">
-            <a:avLst/>
-          </a:prstGeom>
-          <a:noFill/>
-          <a:ln>
-            <a:noFill/>
-          </a:ln>
-        </p:spPr>
-        <p:txBody>
-          <a:bodyPr wrap="square" lIns="36576" tIns="27432" rIns="36576" bIns="27432" anchor="t">
-            <a:noAutofit/>
-          </a:bodyPr>
-          <a:lstStyle/>
-          <a:p>
-            <a:pPr algn="l">
-              <a:lnSpc>
-                <a:spcPct val="100000"/>
-              </a:lnSpc>
-            </a:pPr>
-            <a:r>
-              <a:rPr lang="en-US" sz="1950" dirty="0" i="1">
-                <a:solidFill>
-                  <a:srgbClr val="16171D"/>
-                </a:solidFill>
-                <a:latin typeface="Segoe UI"/>
-                <a:cs typeface="Segoe UI"/>
-              </a:rPr>
-              <a:t xml:space="preserve">x</a:t>
-            </a:r>
-            <a:r>
-              <a:rPr lang="en-US" sz="1950" dirty="0">
-                <a:solidFill>
-                  <a:srgbClr val="16171D"/>
-                </a:solidFill>
-                <a:latin typeface="Segoe UI"/>
-                <a:cs typeface="Segoe UI"/>
-              </a:rPr>
-              <a:t xml:space="preserve"> = 0: 5</a:t>
-            </a:r>
-            <a:r>
-              <a:rPr lang="en-US" sz="1950" dirty="0" i="1">
-                <a:solidFill>
-                  <a:srgbClr val="16171D"/>
-                </a:solidFill>
-                <a:latin typeface="Segoe UI"/>
-                <a:cs typeface="Segoe UI"/>
-              </a:rPr>
-              <a:t xml:space="preserve">y</a:t>
-            </a:r>
-            <a:r>
-              <a:rPr lang="en-US" sz="1950" dirty="0">
-                <a:solidFill>
-                  <a:srgbClr val="16171D"/>
-                </a:solidFill>
-                <a:latin typeface="Segoe UI"/>
-                <a:cs typeface="Segoe UI"/>
-              </a:rPr>
-              <a:t xml:space="preserve"> = 20, so </a:t>
-            </a:r>
-            <a:r>
-              <a:rPr lang="en-US" sz="1950" dirty="0" i="1">
-                <a:solidFill>
-                  <a:srgbClr val="16171D"/>
-                </a:solidFill>
-                <a:latin typeface="Segoe UI"/>
-                <a:cs typeface="Segoe UI"/>
-              </a:rPr>
-              <a:t xml:space="preserve">y</a:t>
-            </a:r>
-            <a:r>
-              <a:rPr lang="en-US" sz="1950" dirty="0">
-                <a:solidFill>
-                  <a:srgbClr val="16171D"/>
-                </a:solidFill>
-                <a:latin typeface="Segoe UI"/>
-                <a:cs typeface="Segoe UI"/>
-              </a:rPr>
-              <a:t xml:space="preserve"> = ____</a:t>
-            </a:r>
-            <a:endParaRPr lang="en-US" sz="1950" dirty="0"/>
-          </a:p>
-        </p:txBody>
-      </p:sp>
-      <p:sp>
-        <p:nvSpPr>
-          <p:cNvPr id="7" name="Shape 7"/>
-          <p:cNvSpPr txBox="1"/>
-          <p:nvPr/>
-        </p:nvSpPr>
-        <p:spPr>
-          <a:xfrm>
-            <a:off x="685800" y="3355848"/>
-            <a:ext cx="2908021" cy="518922"/>
-          </a:xfrm>
-          <a:prstGeom prst="roundRect">
-            <a:avLst>
-              <a:gd name="adj" fmla="val 8000"/>
-            </a:avLst>
-          </a:prstGeom>
-          <a:solidFill>
-            <a:srgbClr val="EDF5E9"/>
-          </a:solidFill>
-          <a:ln>
-            <a:noFill/>
-          </a:ln>
-        </p:spPr>
-        <p:txBody>
-          <a:bodyPr wrap="square" lIns="164592" tIns="64008" rIns="164592" bIns="64008" anchor="ctr">
-            <a:noAutofit/>
-          </a:bodyPr>
-          <a:lstStyle/>
-          <a:p>
-            <a:pPr algn="l">
-              <a:lnSpc>
-                <a:spcPct val="100000"/>
-              </a:lnSpc>
-            </a:pPr>
-            <a:r>
-              <a:rPr lang="en-US" sz="1125" dirty="0" b="1" spc="100">
-                <a:solidFill>
-                  <a:srgbClr val="4F8A3C"/>
-                </a:solidFill>
-                <a:latin typeface="Segoe UI"/>
-                <a:cs typeface="Segoe UI"/>
-              </a:rPr>
-              <a:t xml:space="preserve">ANSWER   </a:t>
-            </a:r>
-            <a:r>
-              <a:rPr lang="en-US" sz="2325" dirty="0">
-                <a:solidFill>
-                  <a:srgbClr val="16171D"/>
-                </a:solidFill>
-                <a:latin typeface="Cambria"/>
-                <a:cs typeface="Cambria"/>
-              </a:rPr>
-              <a:t xml:space="preserve">(0, 4)</a:t>
-            </a:r>
-            <a:endParaRPr lang="en-US" sz="2325" dirty="0"/>
-          </a:p>
-        </p:txBody>
-      </p:sp>
-      <p:sp>
-        <p:nvSpPr>
-          <p:cNvPr id="8" name="Slide Number 8"/>
-          <p:cNvSpPr txBox="1"/>
-          <p:nvPr/>
-        </p:nvSpPr>
-        <p:spPr>
-          <a:xfrm>
-            <a:off x="11277295" y="6611112"/>
-            <a:ext cx="685800" cy="201168"/>
-          </a:xfrm>
-          <a:prstGeom prst="rect">
-            <a:avLst/>
-          </a:prstGeom>
-          <a:noFill/>
-        </p:spPr>
-        <p:txBody>
-          <a:bodyPr wrap="none" lIns="0" tIns="0" rIns="0" bIns="0" anchor="b">
-            <a:noAutofit/>
-          </a:bodyPr>
-          <a:lstStyle/>
-          <a:p>
-            <a:pPr algn="r"/>
-            <a:fld id="{5C1A6E0B-3B1F-4D5E-9C7A-2F4B8D6E1A90}" type="slidenum">
-              <a:rPr lang="en-US" sz="1200" dirty="0">
-                <a:solidFill>
-                  <a:srgbClr val="5F6272"/>
-                </a:solidFill>
-              </a:rPr>
-              <a:t>29</a:t>
-            </a:fld>
-          </a:p>
-        </p:txBody>
-      </p:sp>
-    </p:spTree>
-  </p:cSld>
-  <p:clrMapOvr>
-    <a:masterClrMapping/>
-  </p:clrMapOvr>
-  <p:transition spd="med">
-    <p:fade/>
-  </p:transition>
-  <p:timing>
-    <p:tnLst>
-      <p:par>
-        <p:cTn id="1" dur="indefinite" restart="never" nodeType="tmRoot">
-          <p:childTnLst>
-            <p:seq concurrent="1" nextAc="seek">
-              <p:cTn id="2" dur="indefinite" nodeType="mainSeq">
-                <p:childTnLst>
-                  <p:par>
-                    <p:cTn id="8" fill="hold">
-                      <p:stCondLst>
-                        <p:cond delay="indefinite"/>
-                      </p:stCondLst>
-                      <p:childTnLst>
-                        <p:par>
-                          <p:cTn id="9" fill="hold">
-                            <p:stCondLst>
-                              <p:cond delay="0"/>
-                            </p:stCondLst>
-                            <p:childTnLst>
-                              <p:par>
-                                <p:cTn id="7" presetID="53" presetClass="entr" presetSubtype="16" fill="hold" nodeType="clickEffect">
-                                  <p:stCondLst>
-                                    <p:cond delay="0"/>
-                                  </p:stCondLst>
-                                  <p:childTnLst>
-                                    <p:set>
-                                      <p:cBhvr>
-                                        <p:cTn id="3" dur="1" fill="hold">
-                                          <p:stCondLst>
-                                            <p:cond delay="0"/>
-                                          </p:stCondLst>
-                                        </p:cTn>
-                                        <p:tgtEl>
-                                          <p:spTgt spid="5"/>
-                                        </p:tgtEl>
-                                        <p:attrNameLst>
-                                          <p:attrName>style.visibility</p:attrName>
-                                        </p:attrNameLst>
-                                      </p:cBhvr>
-                                      <p:to>
-                                        <p:strVal val="visible"/>
-                                      </p:to>
-                                    </p:set>
-                                    <p:animEffect transition="in" filter="fade">
-                                      <p:cBhvr>
-                                        <p:cTn id="4" dur="500"/>
-                                        <p:tgtEl>
-                                          <p:spTgt spid="5"/>
-                                        </p:tgtEl>
-                                      </p:cBhvr>
-                                    </p:animEffect>
-                                    <p:anim calcmode="lin" valueType="num">
-                                      <p:cBhvr>
-                                        <p:cTn id="5" dur="500" fill="hold"/>
-                                        <p:tgtEl>
-                                          <p:spTgt spid="5"/>
-                                        </p:tgtEl>
-                                        <p:attrNameLst>
-                                          <p:attrName>ppt_w</p:attrName>
-                                        </p:attrNameLst>
-                                      </p:cBhvr>
-                                      <p:tavLst>
-                                        <p:tav tm="0">
-                                          <p:val>
-                                            <p:fltVal val="0"/>
-                                          </p:val>
-                                        </p:tav>
-                                        <p:tav tm="100000">
-                                          <p:val>
-                                            <p:strVal val="#ppt_w"/>
-                                          </p:val>
-                                        </p:tav>
-                                      </p:tavLst>
-                                    </p:anim>
-                                    <p:anim calcmode="lin" valueType="num">
-                                      <p:cBhvr>
-                                        <p:cTn id="6" dur="500" fill="hold"/>
-                                        <p:tgtEl>
-                                          <p:spTgt spid="5"/>
-                                        </p:tgtEl>
-                                        <p:attrNameLst>
-                                          <p:attrName>ppt_h</p:attrName>
-                                        </p:attrNameLst>
-                                      </p:cBhvr>
-                                      <p:tavLst>
-                                        <p:tav tm="0">
-                                          <p:val>
-                                            <p:fltVal val="0"/>
-                                          </p:val>
-                                        </p:tav>
-                                        <p:tav tm="100000">
-                                          <p:val>
-                                            <p:strVal val="#ppt_h"/>
-                                          </p:val>
-                                        </p:tav>
-                                      </p:tavLst>
-                                    </p:anim>
-                                  </p:childTnLst>
-                                </p:cTn>
-                              </p:par>
-                            </p:childTnLst>
-                          </p:cTn>
-                        </p:par>
-                      </p:childTnLst>
-                    </p:cTn>
-                  </p:par>
-                  <p:par>
-                    <p:cTn id="15" fill="hold">
-                      <p:stCondLst>
-                        <p:cond delay="indefinite"/>
-                      </p:stCondLst>
-                      <p:childTnLst>
-                        <p:par>
-                          <p:cTn id="16" fill="hold">
-                            <p:stCondLst>
-                              <p:cond delay="0"/>
-                            </p:stCondLst>
-                            <p:childTnLst>
-                              <p:par>
-                                <p:cTn id="14" presetID="53" presetClass="entr" presetSubtype="16" fill="hold" nodeType="clickEffect">
-                                  <p:stCondLst>
-                                    <p:cond delay="0"/>
-                                  </p:stCondLst>
-                                  <p:childTnLst>
-                                    <p:set>
-                                      <p:cBhvr>
-                                        <p:cTn id="10" dur="1" fill="hold">
-                                          <p:stCondLst>
-                                            <p:cond delay="0"/>
-                                          </p:stCondLst>
-                                        </p:cTn>
-                                        <p:tgtEl>
-                                          <p:spTgt spid="7"/>
-                                        </p:tgtEl>
-                                        <p:attrNameLst>
-                                          <p:attrName>style.visibility</p:attrName>
-                                        </p:attrNameLst>
-                                      </p:cBhvr>
-                                      <p:to>
-                                        <p:strVal val="visible"/>
-                                      </p:to>
-                                    </p:set>
-                                    <p:animEffect transition="in" filter="fade">
-                                      <p:cBhvr>
-                                        <p:cTn id="11" dur="500"/>
-                                        <p:tgtEl>
-                                          <p:spTgt spid="7"/>
-                                        </p:tgtEl>
-                                      </p:cBhvr>
-                                    </p:animEffect>
-                                    <p:anim calcmode="lin" valueType="num">
-                                      <p:cBhvr>
-                                        <p:cTn id="12" dur="500" fill="hold"/>
-                                        <p:tgtEl>
-                                          <p:spTgt spid="7"/>
-                                        </p:tgtEl>
-                                        <p:attrNameLst>
-                                          <p:attrName>ppt_w</p:attrName>
-                                        </p:attrNameLst>
-                                      </p:cBhvr>
-                                      <p:tavLst>
-                                        <p:tav tm="0">
-                                          <p:val>
-                                            <p:fltVal val="0"/>
-                                          </p:val>
-                                        </p:tav>
-                                        <p:tav tm="100000">
-                                          <p:val>
-                                            <p:strVal val="#ppt_w"/>
-                                          </p:val>
-                                        </p:tav>
-                                      </p:tavLst>
-                                    </p:anim>
-                                    <p:anim calcmode="lin" valueType="num">
-                                      <p:cBhvr>
-                                        <p:cTn id="13" dur="500" fill="hold"/>
-                                        <p:tgtEl>
-                                          <p:spTgt spid="7"/>
-                                        </p:tgtEl>
-                                        <p:attrNameLst>
-                                          <p:attrName>ppt_h</p:attrName>
-                                        </p:attrNameLst>
-                                      </p:cBhvr>
-                                      <p:tavLst>
-                                        <p:tav tm="0">
-                                          <p:val>
-                                            <p:fltVal val="0"/>
-                                          </p:val>
-                                        </p:tav>
-                                        <p:tav tm="100000">
-                                          <p:val>
-                                            <p:strVal val="#ppt_h"/>
-                                          </p:val>
-                                        </p:tav>
-                                      </p:tavLst>
-                                    </p:anim>
-                                  </p:childTnLst>
-                                </p:cTn>
-                              </p:par>
-                            </p:childTnLst>
-                          </p:cTn>
-                        </p:par>
-                      </p:childTnLst>
-                    </p:cTn>
-                  </p:par>
-                </p:childTnLst>
-              </p:cTn>
-              <p:prevCondLst>
-                <p:cond evt="onPrev" delay="0">
-                  <p:tgtEl>
-                    <p:sldTgt/>
-                  </p:tgtEl>
-                </p:cond>
-              </p:prevCondLst>
-              <p:nextCondLst>
-                <p:cond evt="onNext" delay="0">
-                  <p:tgtEl>
-                    <p:sldTgt/>
-                  </p:tgtEl>
-                </p:cond>
-              </p:nextCondLst>
-            </p:seq>
-          </p:childTnLst>
-        </p:cTn>
-      </p:par>
-    </p:tnLst>
-  </p:timing>
-</p:sld>
-</file>
-
 <file path=ppt/slides/slide3.xml><?xml version="1.0" encoding="utf-8"?>
 <p:sld xmlns:a="http://schemas.openxmlformats.org/drawingml/2006/main" xmlns:r="http://schemas.openxmlformats.org/officeDocument/2006/relationships" xmlns:p="http://schemas.openxmlformats.org/presentationml/2006/main">
   <p:cSld>
@@ -24590,7 +26384,7 @@
         </p:nvSpPr>
         <p:spPr>
           <a:xfrm>
-            <a:off x="685800" y="2103120"/>
+            <a:off x="685800" y="457200"/>
             <a:ext cx="10820095" cy="237744"/>
           </a:xfrm>
           <a:prstGeom prst="rect">
@@ -24620,7 +26414,7 @@
                 <a:latin typeface="Segoe UI"/>
                 <a:cs typeface="Segoe UI"/>
               </a:rPr>
-              <a:t xml:space="preserve">Topic 2 · Lesson 1</a:t>
+              <a:t xml:space="preserve">Topic 1 Catch-Up · Lesson 5 · You do · Try it</a:t>
             </a:r>
             <a:endParaRPr lang="en-US" sz="1200" dirty="0"/>
           </a:p>
@@ -24634,8 +26428,8 @@
         </p:nvSpPr>
         <p:spPr>
           <a:xfrm>
-            <a:off x="685800" y="2512314"/>
-            <a:ext cx="10820095" cy="1312164"/>
+            <a:off x="685800" y="866394"/>
+            <a:ext cx="10820095" cy="580644"/>
           </a:xfrm>
           <a:prstGeom prst="rect">
             <a:avLst/>
@@ -24657,16 +26451,56 @@
               </a:lnSpc>
             </a:pPr>
             <a:r>
-              <a:rPr lang="en-US" sz="8250" dirty="0" b="1">
-                <a:solidFill>
-                  <a:srgbClr val="16171D"/>
-                </a:solidFill>
-                <a:latin typeface="Segoe UI"/>
-                <a:cs typeface="Segoe UI"/>
-              </a:rPr>
-              <a:t xml:space="preserve">Back to Topic 2</a:t>
-            </a:r>
-            <a:endParaRPr lang="en-US" sz="8250" dirty="0"/>
+              <a:rPr lang="en-US" sz="3450" dirty="0" b="1">
+                <a:solidFill>
+                  <a:srgbClr val="16171D"/>
+                </a:solidFill>
+                <a:latin typeface="Segoe UI"/>
+                <a:cs typeface="Segoe UI"/>
+              </a:rPr>
+              <a:t xml:space="preserve">Find the intercepts of 2</a:t>
+            </a:r>
+            <a:r>
+              <a:rPr lang="en-US" sz="3450" dirty="0" b="1" i="1">
+                <a:solidFill>
+                  <a:srgbClr val="16171D"/>
+                </a:solidFill>
+                <a:latin typeface="Segoe UI"/>
+                <a:cs typeface="Segoe UI"/>
+              </a:rPr>
+              <a:t xml:space="preserve">x</a:t>
+            </a:r>
+            <a:r>
+              <a:rPr lang="en-US" sz="3450" dirty="0" b="1">
+                <a:solidFill>
+                  <a:srgbClr val="16171D"/>
+                </a:solidFill>
+                <a:latin typeface="Segoe UI"/>
+                <a:cs typeface="Segoe UI"/>
+              </a:rPr>
+              <a:t xml:space="preserve"> + 5</a:t>
+            </a:r>
+            <a:r>
+              <a:rPr lang="en-US" sz="3450" dirty="0" b="1" i="1">
+                <a:solidFill>
+                  <a:srgbClr val="16171D"/>
+                </a:solidFill>
+                <a:latin typeface="Segoe UI"/>
+                <a:cs typeface="Segoe UI"/>
+              </a:rPr>
+              <a:t xml:space="preserve">y</a:t>
+            </a:r>
+            <a:r>
+              <a:rPr lang="en-US" sz="3450" dirty="0" b="1">
+                <a:solidFill>
+                  <a:srgbClr val="16171D"/>
+                </a:solidFill>
+                <a:latin typeface="Segoe UI"/>
+                <a:cs typeface="Segoe UI"/>
+              </a:rPr>
+              <a:t xml:space="preserve"> = 20</a:t>
+            </a:r>
+            <a:endParaRPr lang="en-US" sz="3450" dirty="0"/>
           </a:p>
         </p:txBody>
       </p:sp>
@@ -24678,8 +26512,8 @@
         </p:nvSpPr>
         <p:spPr>
           <a:xfrm>
-            <a:off x="685800" y="3995928"/>
-            <a:ext cx="10820095" cy="397764"/>
+            <a:off x="685800" y="1618488"/>
+            <a:ext cx="10820095" cy="352044"/>
           </a:xfrm>
           <a:prstGeom prst="rect">
             <a:avLst/>
@@ -24701,22 +26535,282 @@
               </a:lnSpc>
             </a:pPr>
             <a:r>
-              <a:rPr lang="en-US" sz="2250" dirty="0">
-                <a:solidFill>
-                  <a:srgbClr val="16171D"/>
-                </a:solidFill>
-                <a:latin typeface="Segoe UI"/>
-                <a:cs typeface="Segoe UI"/>
-              </a:rPr>
-              <a:t xml:space="preserve">Catch-up done. Now today's Topic 2 lesson.</a:t>
-            </a:r>
-            <a:endParaRPr lang="en-US" sz="2250" dirty="0"/>
-          </a:p>
-        </p:txBody>
-      </p:sp>
-      <p:sp>
-        <p:nvSpPr>
-          <p:cNvPr id="5" name="Slide Number 5"/>
+              <a:rPr lang="en-US" sz="1950" dirty="0" i="1">
+                <a:solidFill>
+                  <a:srgbClr val="16171D"/>
+                </a:solidFill>
+                <a:latin typeface="Segoe UI"/>
+                <a:cs typeface="Segoe UI"/>
+              </a:rPr>
+              <a:t xml:space="preserve">y</a:t>
+            </a:r>
+            <a:r>
+              <a:rPr lang="en-US" sz="1950" dirty="0">
+                <a:solidFill>
+                  <a:srgbClr val="16171D"/>
+                </a:solidFill>
+                <a:latin typeface="Segoe UI"/>
+                <a:cs typeface="Segoe UI"/>
+              </a:rPr>
+              <a:t xml:space="preserve"> = 0: 2</a:t>
+            </a:r>
+            <a:r>
+              <a:rPr lang="en-US" sz="1950" dirty="0" i="1">
+                <a:solidFill>
+                  <a:srgbClr val="16171D"/>
+                </a:solidFill>
+                <a:latin typeface="Segoe UI"/>
+                <a:cs typeface="Segoe UI"/>
+              </a:rPr>
+              <a:t xml:space="preserve">x</a:t>
+            </a:r>
+            <a:r>
+              <a:rPr lang="en-US" sz="1950" dirty="0">
+                <a:solidFill>
+                  <a:srgbClr val="16171D"/>
+                </a:solidFill>
+                <a:latin typeface="Segoe UI"/>
+                <a:cs typeface="Segoe UI"/>
+              </a:rPr>
+              <a:t xml:space="preserve"> = 20, so </a:t>
+            </a:r>
+            <a:r>
+              <a:rPr lang="en-US" sz="1950" dirty="0" i="1">
+                <a:solidFill>
+                  <a:srgbClr val="16171D"/>
+                </a:solidFill>
+                <a:latin typeface="Segoe UI"/>
+                <a:cs typeface="Segoe UI"/>
+              </a:rPr>
+              <a:t xml:space="preserve">x</a:t>
+            </a:r>
+            <a:r>
+              <a:rPr lang="en-US" sz="1950" dirty="0">
+                <a:solidFill>
+                  <a:srgbClr val="16171D"/>
+                </a:solidFill>
+                <a:latin typeface="Segoe UI"/>
+                <a:cs typeface="Segoe UI"/>
+              </a:rPr>
+              <a:t xml:space="preserve"> = ____</a:t>
+            </a:r>
+            <a:endParaRPr lang="en-US" sz="1950" dirty="0"/>
+          </a:p>
+        </p:txBody>
+      </p:sp>
+      <p:sp>
+        <p:nvSpPr>
+          <p:cNvPr id="5" name="Shape 5"/>
+          <p:cNvSpPr txBox="1"/>
+          <p:nvPr/>
+        </p:nvSpPr>
+        <p:spPr>
+          <a:xfrm>
+            <a:off x="685800" y="2141982"/>
+            <a:ext cx="3073847" cy="518922"/>
+          </a:xfrm>
+          <a:prstGeom prst="roundRect">
+            <a:avLst>
+              <a:gd name="adj" fmla="val 8000"/>
+            </a:avLst>
+          </a:prstGeom>
+          <a:solidFill>
+            <a:srgbClr val="EDF5E9"/>
+          </a:solidFill>
+          <a:ln>
+            <a:noFill/>
+          </a:ln>
+        </p:spPr>
+        <p:txBody>
+          <a:bodyPr wrap="square" lIns="164592" tIns="64008" rIns="164592" bIns="64008" anchor="ctr">
+            <a:noAutofit/>
+          </a:bodyPr>
+          <a:lstStyle/>
+          <a:p>
+            <a:pPr algn="l">
+              <a:lnSpc>
+                <a:spcPct val="100000"/>
+              </a:lnSpc>
+            </a:pPr>
+            <a:r>
+              <a:rPr lang="en-US" sz="1125" dirty="0" b="1" spc="100">
+                <a:solidFill>
+                  <a:srgbClr val="4F8A3C"/>
+                </a:solidFill>
+                <a:latin typeface="Segoe UI"/>
+                <a:cs typeface="Segoe UI"/>
+              </a:rPr>
+              <a:t xml:space="preserve">ANSWER   </a:t>
+            </a:r>
+            <a:r>
+              <a:rPr lang="en-US" sz="2325" dirty="0">
+                <a:solidFill>
+                  <a:srgbClr val="16171D"/>
+                </a:solidFill>
+                <a:latin typeface="Cambria"/>
+                <a:cs typeface="Cambria"/>
+              </a:rPr>
+              <a:t xml:space="preserve">(10, 0)</a:t>
+            </a:r>
+            <a:endParaRPr lang="en-US" sz="2325" dirty="0"/>
+          </a:p>
+        </p:txBody>
+      </p:sp>
+      <p:sp>
+        <p:nvSpPr>
+          <p:cNvPr id="6" name="Shape 6"/>
+          <p:cNvSpPr txBox="1"/>
+          <p:nvPr/>
+        </p:nvSpPr>
+        <p:spPr>
+          <a:xfrm>
+            <a:off x="685800" y="2832354"/>
+            <a:ext cx="10820095" cy="352044"/>
+          </a:xfrm>
+          <a:prstGeom prst="rect">
+            <a:avLst/>
+          </a:prstGeom>
+          <a:noFill/>
+          <a:ln>
+            <a:noFill/>
+          </a:ln>
+        </p:spPr>
+        <p:txBody>
+          <a:bodyPr wrap="square" lIns="36576" tIns="27432" rIns="36576" bIns="27432" anchor="t">
+            <a:noAutofit/>
+          </a:bodyPr>
+          <a:lstStyle/>
+          <a:p>
+            <a:pPr algn="l">
+              <a:lnSpc>
+                <a:spcPct val="100000"/>
+              </a:lnSpc>
+            </a:pPr>
+            <a:r>
+              <a:rPr lang="en-US" sz="1950" dirty="0" i="1">
+                <a:solidFill>
+                  <a:srgbClr val="16171D"/>
+                </a:solidFill>
+                <a:latin typeface="Segoe UI"/>
+                <a:cs typeface="Segoe UI"/>
+              </a:rPr>
+              <a:t xml:space="preserve">x</a:t>
+            </a:r>
+            <a:r>
+              <a:rPr lang="en-US" sz="1950" dirty="0">
+                <a:solidFill>
+                  <a:srgbClr val="16171D"/>
+                </a:solidFill>
+                <a:latin typeface="Segoe UI"/>
+                <a:cs typeface="Segoe UI"/>
+              </a:rPr>
+              <a:t xml:space="preserve"> = 0: 5</a:t>
+            </a:r>
+            <a:r>
+              <a:rPr lang="en-US" sz="1950" dirty="0" i="1">
+                <a:solidFill>
+                  <a:srgbClr val="16171D"/>
+                </a:solidFill>
+                <a:latin typeface="Segoe UI"/>
+                <a:cs typeface="Segoe UI"/>
+              </a:rPr>
+              <a:t xml:space="preserve">y</a:t>
+            </a:r>
+            <a:r>
+              <a:rPr lang="en-US" sz="1950" dirty="0">
+                <a:solidFill>
+                  <a:srgbClr val="16171D"/>
+                </a:solidFill>
+                <a:latin typeface="Segoe UI"/>
+                <a:cs typeface="Segoe UI"/>
+              </a:rPr>
+              <a:t xml:space="preserve"> = 20, so </a:t>
+            </a:r>
+            <a:r>
+              <a:rPr lang="en-US" sz="1950" dirty="0" i="1">
+                <a:solidFill>
+                  <a:srgbClr val="16171D"/>
+                </a:solidFill>
+                <a:latin typeface="Segoe UI"/>
+                <a:cs typeface="Segoe UI"/>
+              </a:rPr>
+              <a:t xml:space="preserve">y</a:t>
+            </a:r>
+            <a:r>
+              <a:rPr lang="en-US" sz="1950" dirty="0">
+                <a:solidFill>
+                  <a:srgbClr val="16171D"/>
+                </a:solidFill>
+                <a:latin typeface="Segoe UI"/>
+                <a:cs typeface="Segoe UI"/>
+              </a:rPr>
+              <a:t xml:space="preserve"> = ____</a:t>
+            </a:r>
+            <a:endParaRPr lang="en-US" sz="1950" dirty="0"/>
+          </a:p>
+        </p:txBody>
+      </p:sp>
+      <p:sp>
+        <p:nvSpPr>
+          <p:cNvPr id="7" name="Shape 7"/>
+          <p:cNvSpPr txBox="1"/>
+          <p:nvPr/>
+        </p:nvSpPr>
+        <p:spPr>
+          <a:xfrm>
+            <a:off x="685800" y="3355848"/>
+            <a:ext cx="2908021" cy="518922"/>
+          </a:xfrm>
+          <a:prstGeom prst="roundRect">
+            <a:avLst>
+              <a:gd name="adj" fmla="val 8000"/>
+            </a:avLst>
+          </a:prstGeom>
+          <a:solidFill>
+            <a:srgbClr val="EDF5E9"/>
+          </a:solidFill>
+          <a:ln>
+            <a:noFill/>
+          </a:ln>
+        </p:spPr>
+        <p:txBody>
+          <a:bodyPr wrap="square" lIns="164592" tIns="64008" rIns="164592" bIns="64008" anchor="ctr">
+            <a:noAutofit/>
+          </a:bodyPr>
+          <a:lstStyle/>
+          <a:p>
+            <a:pPr algn="l">
+              <a:lnSpc>
+                <a:spcPct val="100000"/>
+              </a:lnSpc>
+            </a:pPr>
+            <a:r>
+              <a:rPr lang="en-US" sz="1125" dirty="0" b="1" spc="100">
+                <a:solidFill>
+                  <a:srgbClr val="4F8A3C"/>
+                </a:solidFill>
+                <a:latin typeface="Segoe UI"/>
+                <a:cs typeface="Segoe UI"/>
+              </a:rPr>
+              <a:t xml:space="preserve">ANSWER   </a:t>
+            </a:r>
+            <a:r>
+              <a:rPr lang="en-US" sz="2325" dirty="0">
+                <a:solidFill>
+                  <a:srgbClr val="16171D"/>
+                </a:solidFill>
+                <a:latin typeface="Cambria"/>
+                <a:cs typeface="Cambria"/>
+              </a:rPr>
+              <a:t xml:space="preserve">(0, 4)</a:t>
+            </a:r>
+            <a:endParaRPr lang="en-US" sz="2325" dirty="0"/>
+          </a:p>
+        </p:txBody>
+      </p:sp>
+      <p:sp>
+        <p:nvSpPr>
+          <p:cNvPr id="8" name="Slide Number 8"/>
           <p:cNvSpPr txBox="1"/>
           <p:nvPr/>
         </p:nvSpPr>
@@ -24756,6 +26850,234 @@
   <p:transition spd="med">
     <p:fade/>
   </p:transition>
+  <p:timing>
+    <p:tnLst>
+      <p:par>
+        <p:cTn id="1" dur="indefinite" restart="never" nodeType="tmRoot">
+          <p:childTnLst>
+            <p:seq concurrent="1" nextAc="seek">
+              <p:cTn id="2" dur="indefinite" nodeType="mainSeq">
+                <p:childTnLst>
+                  <p:par>
+                    <p:cTn id="8" fill="hold">
+                      <p:stCondLst>
+                        <p:cond delay="indefinite"/>
+                      </p:stCondLst>
+                      <p:childTnLst>
+                        <p:par>
+                          <p:cTn id="9" fill="hold">
+                            <p:stCondLst>
+                              <p:cond delay="0"/>
+                            </p:stCondLst>
+                            <p:childTnLst>
+                              <p:par>
+                                <p:cTn id="7" presetID="53" presetClass="entr" presetSubtype="16" fill="hold" nodeType="clickEffect">
+                                  <p:stCondLst>
+                                    <p:cond delay="0"/>
+                                  </p:stCondLst>
+                                  <p:childTnLst>
+                                    <p:set>
+                                      <p:cBhvr>
+                                        <p:cTn id="3" dur="1" fill="hold">
+                                          <p:stCondLst>
+                                            <p:cond delay="0"/>
+                                          </p:stCondLst>
+                                        </p:cTn>
+                                        <p:tgtEl>
+                                          <p:spTgt spid="5"/>
+                                        </p:tgtEl>
+                                        <p:attrNameLst>
+                                          <p:attrName>style.visibility</p:attrName>
+                                        </p:attrNameLst>
+                                      </p:cBhvr>
+                                      <p:to>
+                                        <p:strVal val="visible"/>
+                                      </p:to>
+                                    </p:set>
+                                    <p:animEffect transition="in" filter="fade">
+                                      <p:cBhvr>
+                                        <p:cTn id="4" dur="500"/>
+                                        <p:tgtEl>
+                                          <p:spTgt spid="5"/>
+                                        </p:tgtEl>
+                                      </p:cBhvr>
+                                    </p:animEffect>
+                                    <p:anim calcmode="lin" valueType="num">
+                                      <p:cBhvr>
+                                        <p:cTn id="5" dur="500" fill="hold"/>
+                                        <p:tgtEl>
+                                          <p:spTgt spid="5"/>
+                                        </p:tgtEl>
+                                        <p:attrNameLst>
+                                          <p:attrName>ppt_w</p:attrName>
+                                        </p:attrNameLst>
+                                      </p:cBhvr>
+                                      <p:tavLst>
+                                        <p:tav tm="0">
+                                          <p:val>
+                                            <p:fltVal val="0"/>
+                                          </p:val>
+                                        </p:tav>
+                                        <p:tav tm="100000">
+                                          <p:val>
+                                            <p:strVal val="#ppt_w"/>
+                                          </p:val>
+                                        </p:tav>
+                                      </p:tavLst>
+                                    </p:anim>
+                                    <p:anim calcmode="lin" valueType="num">
+                                      <p:cBhvr>
+                                        <p:cTn id="6" dur="500" fill="hold"/>
+                                        <p:tgtEl>
+                                          <p:spTgt spid="5"/>
+                                        </p:tgtEl>
+                                        <p:attrNameLst>
+                                          <p:attrName>ppt_h</p:attrName>
+                                        </p:attrNameLst>
+                                      </p:cBhvr>
+                                      <p:tavLst>
+                                        <p:tav tm="0">
+                                          <p:val>
+                                            <p:fltVal val="0"/>
+                                          </p:val>
+                                        </p:tav>
+                                        <p:tav tm="100000">
+                                          <p:val>
+                                            <p:strVal val="#ppt_h"/>
+                                          </p:val>
+                                        </p:tav>
+                                      </p:tavLst>
+                                    </p:anim>
+                                  </p:childTnLst>
+                                </p:cTn>
+                              </p:par>
+                            </p:childTnLst>
+                          </p:cTn>
+                        </p:par>
+                      </p:childTnLst>
+                    </p:cTn>
+                  </p:par>
+                  <p:par>
+                    <p:cTn id="15" fill="hold">
+                      <p:stCondLst>
+                        <p:cond delay="indefinite"/>
+                      </p:stCondLst>
+                      <p:childTnLst>
+                        <p:par>
+                          <p:cTn id="16" fill="hold">
+                            <p:stCondLst>
+                              <p:cond delay="0"/>
+                            </p:stCondLst>
+                            <p:childTnLst>
+                              <p:par>
+                                <p:cTn id="14" presetID="53" presetClass="entr" presetSubtype="16" fill="hold" nodeType="clickEffect">
+                                  <p:stCondLst>
+                                    <p:cond delay="0"/>
+                                  </p:stCondLst>
+                                  <p:childTnLst>
+                                    <p:set>
+                                      <p:cBhvr>
+                                        <p:cTn id="10" dur="1" fill="hold">
+                                          <p:stCondLst>
+                                            <p:cond delay="0"/>
+                                          </p:stCondLst>
+                                        </p:cTn>
+                                        <p:tgtEl>
+                                          <p:spTgt spid="7"/>
+                                        </p:tgtEl>
+                                        <p:attrNameLst>
+                                          <p:attrName>style.visibility</p:attrName>
+                                        </p:attrNameLst>
+                                      </p:cBhvr>
+                                      <p:to>
+                                        <p:strVal val="visible"/>
+                                      </p:to>
+                                    </p:set>
+                                    <p:animEffect transition="in" filter="fade">
+                                      <p:cBhvr>
+                                        <p:cTn id="11" dur="500"/>
+                                        <p:tgtEl>
+                                          <p:spTgt spid="7"/>
+                                        </p:tgtEl>
+                                      </p:cBhvr>
+                                    </p:animEffect>
+                                    <p:anim calcmode="lin" valueType="num">
+                                      <p:cBhvr>
+                                        <p:cTn id="12" dur="500" fill="hold"/>
+                                        <p:tgtEl>
+                                          <p:spTgt spid="7"/>
+                                        </p:tgtEl>
+                                        <p:attrNameLst>
+                                          <p:attrName>ppt_w</p:attrName>
+                                        </p:attrNameLst>
+                                      </p:cBhvr>
+                                      <p:tavLst>
+                                        <p:tav tm="0">
+                                          <p:val>
+                                            <p:fltVal val="0"/>
+                                          </p:val>
+                                        </p:tav>
+                                        <p:tav tm="100000">
+                                          <p:val>
+                                            <p:strVal val="#ppt_w"/>
+                                          </p:val>
+                                        </p:tav>
+                                      </p:tavLst>
+                                    </p:anim>
+                                    <p:anim calcmode="lin" valueType="num">
+                                      <p:cBhvr>
+                                        <p:cTn id="13" dur="500" fill="hold"/>
+                                        <p:tgtEl>
+                                          <p:spTgt spid="7"/>
+                                        </p:tgtEl>
+                                        <p:attrNameLst>
+                                          <p:attrName>ppt_h</p:attrName>
+                                        </p:attrNameLst>
+                                      </p:cBhvr>
+                                      <p:tavLst>
+                                        <p:tav tm="0">
+                                          <p:val>
+                                            <p:fltVal val="0"/>
+                                          </p:val>
+                                        </p:tav>
+                                        <p:tav tm="100000">
+                                          <p:val>
+                                            <p:strVal val="#ppt_h"/>
+                                          </p:val>
+                                        </p:tav>
+                                      </p:tavLst>
+                                    </p:anim>
+                                  </p:childTnLst>
+                                </p:cTn>
+                              </p:par>
+                            </p:childTnLst>
+                          </p:cTn>
+                        </p:par>
+                      </p:childTnLst>
+                    </p:cTn>
+                  </p:par>
+                </p:childTnLst>
+              </p:cTn>
+              <p:prevCondLst>
+                <p:cond evt="onPrev" delay="0">
+                  <p:tgtEl>
+                    <p:sldTgt/>
+                  </p:tgtEl>
+                </p:cond>
+              </p:prevCondLst>
+              <p:nextCondLst>
+                <p:cond evt="onNext" delay="0">
+                  <p:tgtEl>
+                    <p:sldTgt/>
+                  </p:tgtEl>
+                </p:cond>
+              </p:nextCondLst>
+            </p:seq>
+          </p:childTnLst>
+        </p:cTn>
+      </p:par>
+    </p:tnLst>
+  </p:timing>
 </p:sld>
 </file>
 
@@ -24784,6 +27106,200 @@
         </p:nvSpPr>
         <p:spPr>
           <a:xfrm>
+            <a:off x="685800" y="2103120"/>
+            <a:ext cx="10820095" cy="237744"/>
+          </a:xfrm>
+          <a:prstGeom prst="rect">
+            <a:avLst/>
+          </a:prstGeom>
+          <a:noFill/>
+          <a:ln>
+            <a:noFill/>
+          </a:ln>
+        </p:spPr>
+        <p:txBody>
+          <a:bodyPr wrap="square" lIns="36576" tIns="27432" rIns="36576" bIns="27432" anchor="t">
+            <a:noAutofit/>
+          </a:bodyPr>
+          <a:lstStyle/>
+          <a:p>
+            <a:pPr algn="l">
+              <a:lnSpc>
+                <a:spcPct val="100000"/>
+              </a:lnSpc>
+            </a:pPr>
+            <a:r>
+              <a:rPr lang="en-US" sz="1200" dirty="0" b="1" spc="150" cap="all">
+                <a:solidFill>
+                  <a:srgbClr val="5F6272"/>
+                </a:solidFill>
+                <a:latin typeface="Segoe UI"/>
+                <a:cs typeface="Segoe UI"/>
+              </a:rPr>
+              <a:t xml:space="preserve">Topic 2 · Lesson 1</a:t>
+            </a:r>
+            <a:endParaRPr lang="en-US" sz="1200" dirty="0"/>
+          </a:p>
+        </p:txBody>
+      </p:sp>
+      <p:sp>
+        <p:nvSpPr>
+          <p:cNvPr id="3" name="Shape 3"/>
+          <p:cNvSpPr txBox="1"/>
+          <p:nvPr/>
+        </p:nvSpPr>
+        <p:spPr>
+          <a:xfrm>
+            <a:off x="685800" y="2512314"/>
+            <a:ext cx="10820095" cy="1312164"/>
+          </a:xfrm>
+          <a:prstGeom prst="rect">
+            <a:avLst/>
+          </a:prstGeom>
+          <a:noFill/>
+          <a:ln>
+            <a:noFill/>
+          </a:ln>
+        </p:spPr>
+        <p:txBody>
+          <a:bodyPr wrap="square" lIns="36576" tIns="27432" rIns="36576" bIns="27432" anchor="t">
+            <a:noAutofit/>
+          </a:bodyPr>
+          <a:lstStyle/>
+          <a:p>
+            <a:pPr algn="l">
+              <a:lnSpc>
+                <a:spcPct val="100000"/>
+              </a:lnSpc>
+            </a:pPr>
+            <a:r>
+              <a:rPr lang="en-US" sz="8250" dirty="0" b="1">
+                <a:solidFill>
+                  <a:srgbClr val="16171D"/>
+                </a:solidFill>
+                <a:latin typeface="Segoe UI"/>
+                <a:cs typeface="Segoe UI"/>
+              </a:rPr>
+              <a:t xml:space="preserve">Back to Topic 2</a:t>
+            </a:r>
+            <a:endParaRPr lang="en-US" sz="8250" dirty="0"/>
+          </a:p>
+        </p:txBody>
+      </p:sp>
+      <p:sp>
+        <p:nvSpPr>
+          <p:cNvPr id="4" name="Shape 4"/>
+          <p:cNvSpPr txBox="1"/>
+          <p:nvPr/>
+        </p:nvSpPr>
+        <p:spPr>
+          <a:xfrm>
+            <a:off x="685800" y="3995928"/>
+            <a:ext cx="10820095" cy="397764"/>
+          </a:xfrm>
+          <a:prstGeom prst="rect">
+            <a:avLst/>
+          </a:prstGeom>
+          <a:noFill/>
+          <a:ln>
+            <a:noFill/>
+          </a:ln>
+        </p:spPr>
+        <p:txBody>
+          <a:bodyPr wrap="square" lIns="36576" tIns="27432" rIns="36576" bIns="27432" anchor="t">
+            <a:noAutofit/>
+          </a:bodyPr>
+          <a:lstStyle/>
+          <a:p>
+            <a:pPr algn="l">
+              <a:lnSpc>
+                <a:spcPct val="100000"/>
+              </a:lnSpc>
+            </a:pPr>
+            <a:r>
+              <a:rPr lang="en-US" sz="2250" dirty="0">
+                <a:solidFill>
+                  <a:srgbClr val="16171D"/>
+                </a:solidFill>
+                <a:latin typeface="Segoe UI"/>
+                <a:cs typeface="Segoe UI"/>
+              </a:rPr>
+              <a:t xml:space="preserve">Catch-up done. Now today's Topic 2 lesson.</a:t>
+            </a:r>
+            <a:endParaRPr lang="en-US" sz="2250" dirty="0"/>
+          </a:p>
+        </p:txBody>
+      </p:sp>
+      <p:sp>
+        <p:nvSpPr>
+          <p:cNvPr id="5" name="Slide Number 5"/>
+          <p:cNvSpPr txBox="1"/>
+          <p:nvPr/>
+        </p:nvSpPr>
+        <p:spPr>
+          <a:xfrm>
+            <a:off x="11277295" y="6611112"/>
+            <a:ext cx="685800" cy="201168"/>
+          </a:xfrm>
+          <a:prstGeom prst="rect">
+            <a:avLst/>
+          </a:prstGeom>
+          <a:noFill/>
+        </p:spPr>
+        <p:txBody>
+          <a:bodyPr wrap="none" lIns="0" tIns="0" rIns="0" bIns="0" anchor="b">
+            <a:noAutofit/>
+          </a:bodyPr>
+          <a:lstStyle/>
+          <a:p>
+            <a:pPr algn="r"/>
+            <a:fld id="{5C1A6E0B-3B1F-4D5E-9C7A-2F4B8D6E1A90}" type="slidenum">
+              <a:rPr lang="en-US" sz="1200" dirty="0">
+                <a:solidFill>
+                  <a:srgbClr val="5F6272"/>
+                </a:solidFill>
+              </a:rPr>
+              <a:t>31</a:t>
+            </a:fld>
+          </a:p>
+        </p:txBody>
+      </p:sp>
+    </p:spTree>
+  </p:cSld>
+  <p:clrMapOvr>
+    <a:masterClrMapping/>
+  </p:clrMapOvr>
+  <p:transition spd="med">
+    <p:fade/>
+  </p:transition>
+</p:sld>
+</file>
+
+<file path=ppt/slides/slide32.xml><?xml version="1.0" encoding="utf-8"?>
+<p:sld xmlns:a="http://schemas.openxmlformats.org/drawingml/2006/main" xmlns:r="http://schemas.openxmlformats.org/officeDocument/2006/relationships" xmlns:p="http://schemas.openxmlformats.org/presentationml/2006/main">
+  <p:cSld>
+    <p:spTree>
+      <p:nvGrpSpPr>
+        <p:cNvPr id="1" name=""/>
+        <p:cNvGrpSpPr/>
+        <p:nvPr/>
+      </p:nvGrpSpPr>
+      <p:grpSpPr>
+        <a:xfrm>
+          <a:off x="0" y="0"/>
+          <a:ext cx="0" cy="0"/>
+          <a:chOff x="0" y="0"/>
+          <a:chExt cx="0" cy="0"/>
+        </a:xfrm>
+      </p:grpSpPr>
+      <p:sp>
+        <p:nvSpPr>
+          <p:cNvPr id="2" name="Shape 2"/>
+          <p:cNvSpPr txBox="1"/>
+          <p:nvPr/>
+        </p:nvSpPr>
+        <p:spPr>
+          <a:xfrm>
             <a:off x="685800" y="457200"/>
             <a:ext cx="10820095" cy="237744"/>
           </a:xfrm>
@@ -25527,7 +28043,7 @@
                   <a:srgbClr val="5F6272"/>
                 </a:solidFill>
               </a:rPr>
-              <a:t>31</a:t>
+              <a:t>32</a:t>
             </a:fld>
           </a:p>
         </p:txBody>
@@ -25771,7 +28287,7 @@
 </p:sld>
 </file>
 
-<file path=ppt/slides/slide32.xml><?xml version="1.0" encoding="utf-8"?>
+<file path=ppt/slides/slide33.xml><?xml version="1.0" encoding="utf-8"?>
 <p:sld xmlns:a="http://schemas.openxmlformats.org/drawingml/2006/main" xmlns:r="http://schemas.openxmlformats.org/officeDocument/2006/relationships" xmlns:p="http://schemas.openxmlformats.org/presentationml/2006/main">
   <p:cSld>
     <p:spTree>
@@ -25826,7 +28342,7 @@
                 <a:latin typeface="Segoe UI"/>
                 <a:cs typeface="Segoe UI"/>
               </a:rPr>
-              <a:t xml:space="preserve">Exit Ticket</a:t>
+              <a:t xml:space="preserve">Check it · Step by step</a:t>
             </a:r>
             <a:endParaRPr lang="en-US" sz="1200" dirty="0"/>
           </a:p>
@@ -25870,7 +28386,47 @@
                 <a:latin typeface="Segoe UI"/>
                 <a:cs typeface="Segoe UI"/>
               </a:rPr>
-              <a:t xml:space="preserve">Show what you know</a:t>
+              <a:t xml:space="preserve">Describe the change and write </a:t>
+            </a:r>
+            <a:r>
+              <a:rPr lang="en-US" sz="3450" dirty="0" b="1" i="1">
+                <a:solidFill>
+                  <a:srgbClr val="16171D"/>
+                </a:solidFill>
+                <a:latin typeface="Segoe UI"/>
+                <a:cs typeface="Segoe UI"/>
+              </a:rPr>
+              <a:t xml:space="preserve">g</a:t>
+            </a:r>
+            <a:r>
+              <a:rPr lang="en-US" sz="3450" dirty="0" b="1">
+                <a:solidFill>
+                  <a:srgbClr val="16171D"/>
+                </a:solidFill>
+                <a:latin typeface="Segoe UI"/>
+                <a:cs typeface="Segoe UI"/>
+              </a:rPr>
+              <a:t xml:space="preserve">(</a:t>
+            </a:r>
+            <a:r>
+              <a:rPr lang="en-US" sz="3450" dirty="0" b="1" i="1">
+                <a:solidFill>
+                  <a:srgbClr val="16171D"/>
+                </a:solidFill>
+                <a:latin typeface="Segoe UI"/>
+                <a:cs typeface="Segoe UI"/>
+              </a:rPr>
+              <a:t xml:space="preserve">x</a:t>
+            </a:r>
+            <a:r>
+              <a:rPr lang="en-US" sz="3450" dirty="0" b="1">
+                <a:solidFill>
+                  <a:srgbClr val="16171D"/>
+                </a:solidFill>
+                <a:latin typeface="Segoe UI"/>
+                <a:cs typeface="Segoe UI"/>
+              </a:rPr>
+              <a:t xml:space="preserve">)</a:t>
             </a:r>
             <a:endParaRPr lang="en-US" sz="3450" dirty="0"/>
           </a:p>
@@ -25878,14 +28434,14 @@
       </p:sp>
       <p:sp>
         <p:nvSpPr>
-          <p:cNvPr id="6" name="Shape 6"/>
+          <p:cNvPr id="9" name="Shape 9"/>
           <p:cNvSpPr txBox="1"/>
           <p:nvPr/>
         </p:nvSpPr>
         <p:spPr>
           <a:xfrm>
             <a:off x="685800" y="1618488"/>
-            <a:ext cx="10820095" cy="1309116"/>
+            <a:ext cx="5295748" cy="4056888"/>
           </a:xfrm>
           <a:prstGeom prst="roundRect">
             <a:avLst>
@@ -25925,7 +28481,7 @@
         <p:spPr>
           <a:xfrm>
             <a:off x="895350" y="1789938"/>
-            <a:ext cx="10400995" cy="352044"/>
+            <a:ext cx="4876648" cy="374904"/>
           </a:xfrm>
           <a:prstGeom prst="rect">
             <a:avLst/>
@@ -25947,7 +28503,7 @@
               </a:lnSpc>
             </a:pPr>
             <a:r>
-              <a:rPr lang="en-US" sz="1950" dirty="0">
+              <a:rPr lang="en-US" sz="2100" dirty="0" b="1">
                 <a:solidFill>
                   <a:srgbClr val="16171D"/>
                 </a:solidFill>
@@ -25957,7 +28513,7 @@
               <a:t xml:space="preserve">1. </a:t>
             </a:r>
             <a:r>
-              <a:rPr lang="en-US" sz="1950" dirty="0" i="1">
+              <a:rPr lang="en-US" sz="2100" dirty="0" b="1" i="1">
                 <a:solidFill>
                   <a:srgbClr val="16171D"/>
                 </a:solidFill>
@@ -25967,7 +28523,7 @@
               <a:t xml:space="preserve">g</a:t>
             </a:r>
             <a:r>
-              <a:rPr lang="en-US" sz="1950" dirty="0">
+              <a:rPr lang="en-US" sz="2100" dirty="0" b="1">
                 <a:solidFill>
                   <a:srgbClr val="16171D"/>
                 </a:solidFill>
@@ -25977,7 +28533,7 @@
               <a:t xml:space="preserve">(</a:t>
             </a:r>
             <a:r>
-              <a:rPr lang="en-US" sz="1950" dirty="0" i="1">
+              <a:rPr lang="en-US" sz="2100" dirty="0" b="1" i="1">
                 <a:solidFill>
                   <a:srgbClr val="16171D"/>
                 </a:solidFill>
@@ -25987,17 +28543,17 @@
               <a:t xml:space="preserve">x</a:t>
             </a:r>
             <a:r>
-              <a:rPr lang="en-US" sz="1950" dirty="0">
-                <a:solidFill>
-                  <a:srgbClr val="16171D"/>
-                </a:solidFill>
-                <a:latin typeface="Segoe UI"/>
-                <a:cs typeface="Segoe UI"/>
-              </a:rPr>
-              <a:t xml:space="preserve">) = </a:t>
-            </a:r>
-            <a:r>
-              <a:rPr lang="en-US" sz="1950" dirty="0" i="1">
+              <a:rPr lang="en-US" sz="2100" dirty="0" b="1">
+                <a:solidFill>
+                  <a:srgbClr val="16171D"/>
+                </a:solidFill>
+                <a:latin typeface="Segoe UI"/>
+                <a:cs typeface="Segoe UI"/>
+              </a:rPr>
+              <a:t xml:space="preserve">) = 2 · </a:t>
+            </a:r>
+            <a:r>
+              <a:rPr lang="en-US" sz="2100" dirty="0" b="1" i="1">
                 <a:solidFill>
                   <a:srgbClr val="16171D"/>
                 </a:solidFill>
@@ -26007,7 +28563,7 @@
               <a:t xml:space="preserve">f</a:t>
             </a:r>
             <a:r>
-              <a:rPr lang="en-US" sz="1950" dirty="0">
+              <a:rPr lang="en-US" sz="2100" dirty="0" b="1">
                 <a:solidFill>
                   <a:srgbClr val="16171D"/>
                 </a:solidFill>
@@ -26017,7 +28573,7 @@
               <a:t xml:space="preserve">(</a:t>
             </a:r>
             <a:r>
-              <a:rPr lang="en-US" sz="1950" dirty="0" i="1">
+              <a:rPr lang="en-US" sz="2100" dirty="0" b="1" i="1">
                 <a:solidFill>
                   <a:srgbClr val="16171D"/>
                 </a:solidFill>
@@ -26027,16 +28583,16 @@
               <a:t xml:space="preserve">x</a:t>
             </a:r>
             <a:r>
-              <a:rPr lang="en-US" sz="1950" dirty="0">
-                <a:solidFill>
-                  <a:srgbClr val="16171D"/>
-                </a:solidFill>
-                <a:latin typeface="Segoe UI"/>
-                <a:cs typeface="Segoe UI"/>
-              </a:rPr>
-              <a:t xml:space="preserve">) + 6. Up or down? How far?</a:t>
-            </a:r>
-            <a:endParaRPr lang="en-US" sz="1950" dirty="0"/>
+              <a:rPr lang="en-US" sz="2100" dirty="0" b="1">
+                <a:solidFill>
+                  <a:srgbClr val="16171D"/>
+                </a:solidFill>
+                <a:latin typeface="Segoe UI"/>
+                <a:cs typeface="Segoe UI"/>
+              </a:rPr>
+              <a:t xml:space="preserve">) + 7</a:t>
+            </a:r>
+            <a:endParaRPr lang="en-US" sz="2100" dirty="0"/>
           </a:p>
         </p:txBody>
       </p:sp>
@@ -26048,8 +28604,450 @@
         </p:nvSpPr>
         <p:spPr>
           <a:xfrm>
-            <a:off x="895350" y="2237232"/>
-            <a:ext cx="2576368" cy="518922"/>
+            <a:off x="895350" y="2260092"/>
+            <a:ext cx="4876648" cy="534924"/>
+          </a:xfrm>
+          <a:prstGeom prst="rect">
+            <a:avLst/>
+          </a:prstGeom>
+          <a:noFill/>
+          <a:ln>
+            <a:noFill/>
+          </a:ln>
+        </p:spPr>
+        <p:txBody>
+          <a:bodyPr wrap="square" lIns="36576" tIns="27432" rIns="36576" bIns="27432" anchor="t">
+            <a:noAutofit/>
+          </a:bodyPr>
+          <a:lstStyle/>
+          <a:p>
+            <a:pPr algn="l">
+              <a:lnSpc>
+                <a:spcPct val="100000"/>
+              </a:lnSpc>
+            </a:pPr>
+            <a:r>
+              <a:rPr lang="en-US" sz="1575" dirty="0" b="1">
+                <a:solidFill>
+                  <a:srgbClr val="16171D"/>
+                </a:solidFill>
+                <a:latin typeface="Segoe UI"/>
+                <a:cs typeface="Segoe UI"/>
+              </a:rPr>
+              <a:t xml:space="preserve">Step 1.</a:t>
+            </a:r>
+            <a:r>
+              <a:rPr lang="en-US" sz="1575" dirty="0">
+                <a:solidFill>
+                  <a:srgbClr val="16171D"/>
+                </a:solidFill>
+                <a:latin typeface="Segoe UI"/>
+                <a:cs typeface="Segoe UI"/>
+              </a:rPr>
+              <a:t xml:space="preserve"> </a:t>
+            </a:r>
+            <a:r>
+              <a:rPr lang="en-US" sz="1575" dirty="0" i="1">
+                <a:solidFill>
+                  <a:srgbClr val="16171D"/>
+                </a:solidFill>
+                <a:latin typeface="Segoe UI"/>
+                <a:cs typeface="Segoe UI"/>
+              </a:rPr>
+              <a:t xml:space="preserve">f</a:t>
+            </a:r>
+            <a:r>
+              <a:rPr lang="en-US" sz="1575" dirty="0">
+                <a:solidFill>
+                  <a:srgbClr val="16171D"/>
+                </a:solidFill>
+                <a:latin typeface="Segoe UI"/>
+                <a:cs typeface="Segoe UI"/>
+              </a:rPr>
+              <a:t xml:space="preserve">(</a:t>
+            </a:r>
+            <a:r>
+              <a:rPr lang="en-US" sz="1575" dirty="0" i="1">
+                <a:solidFill>
+                  <a:srgbClr val="16171D"/>
+                </a:solidFill>
+                <a:latin typeface="Segoe UI"/>
+                <a:cs typeface="Segoe UI"/>
+              </a:rPr>
+              <a:t xml:space="preserve">x</a:t>
+            </a:r>
+            <a:r>
+              <a:rPr lang="en-US" sz="1575" dirty="0">
+                <a:solidFill>
+                  <a:srgbClr val="16171D"/>
+                </a:solidFill>
+                <a:latin typeface="Segoe UI"/>
+                <a:cs typeface="Segoe UI"/>
+              </a:rPr>
+              <a:t xml:space="preserve">) = </a:t>
+            </a:r>
+            <a:r>
+              <a:rPr lang="en-US" sz="1575" dirty="0" i="1">
+                <a:solidFill>
+                  <a:srgbClr val="16171D"/>
+                </a:solidFill>
+                <a:latin typeface="Segoe UI"/>
+                <a:cs typeface="Segoe UI"/>
+              </a:rPr>
+              <a:t xml:space="preserve">x</a:t>
+            </a:r>
+            <a:r>
+              <a:rPr lang="en-US" sz="1575" dirty="0">
+                <a:solidFill>
+                  <a:srgbClr val="16171D"/>
+                </a:solidFill>
+                <a:latin typeface="Segoe UI"/>
+                <a:cs typeface="Segoe UI"/>
+              </a:rPr>
+              <a:t xml:space="preserve">, so write </a:t>
+            </a:r>
+            <a:r>
+              <a:rPr lang="en-US" sz="1575" dirty="0" i="1">
+                <a:solidFill>
+                  <a:srgbClr val="16171D"/>
+                </a:solidFill>
+                <a:latin typeface="Segoe UI"/>
+                <a:cs typeface="Segoe UI"/>
+              </a:rPr>
+              <a:t xml:space="preserve">x</a:t>
+            </a:r>
+            <a:r>
+              <a:rPr lang="en-US" sz="1575" dirty="0">
+                <a:solidFill>
+                  <a:srgbClr val="16171D"/>
+                </a:solidFill>
+                <a:latin typeface="Segoe UI"/>
+                <a:cs typeface="Segoe UI"/>
+              </a:rPr>
+              <a:t xml:space="preserve"> in its place: </a:t>
+            </a:r>
+            <a:r>
+              <a:rPr lang="en-US" sz="1575" dirty="0" i="1">
+                <a:solidFill>
+                  <a:srgbClr val="16171D"/>
+                </a:solidFill>
+                <a:latin typeface="Segoe UI"/>
+                <a:cs typeface="Segoe UI"/>
+              </a:rPr>
+              <a:t xml:space="preserve">g</a:t>
+            </a:r>
+            <a:r>
+              <a:rPr lang="en-US" sz="1575" dirty="0">
+                <a:solidFill>
+                  <a:srgbClr val="16171D"/>
+                </a:solidFill>
+                <a:latin typeface="Segoe UI"/>
+                <a:cs typeface="Segoe UI"/>
+              </a:rPr>
+              <a:t xml:space="preserve">(</a:t>
+            </a:r>
+            <a:r>
+              <a:rPr lang="en-US" sz="1575" dirty="0" i="1">
+                <a:solidFill>
+                  <a:srgbClr val="16171D"/>
+                </a:solidFill>
+                <a:latin typeface="Segoe UI"/>
+                <a:cs typeface="Segoe UI"/>
+              </a:rPr>
+              <a:t xml:space="preserve">x</a:t>
+            </a:r>
+            <a:r>
+              <a:rPr lang="en-US" sz="1575" dirty="0">
+                <a:solidFill>
+                  <a:srgbClr val="16171D"/>
+                </a:solidFill>
+                <a:latin typeface="Segoe UI"/>
+                <a:cs typeface="Segoe UI"/>
+              </a:rPr>
+              <a:t xml:space="preserve">) = 2</a:t>
+            </a:r>
+            <a:r>
+              <a:rPr lang="en-US" sz="1575" dirty="0" i="1">
+                <a:solidFill>
+                  <a:srgbClr val="16171D"/>
+                </a:solidFill>
+                <a:latin typeface="Segoe UI"/>
+                <a:cs typeface="Segoe UI"/>
+              </a:rPr>
+              <a:t xml:space="preserve">x</a:t>
+            </a:r>
+            <a:r>
+              <a:rPr lang="en-US" sz="1575" dirty="0">
+                <a:solidFill>
+                  <a:srgbClr val="16171D"/>
+                </a:solidFill>
+                <a:latin typeface="Segoe UI"/>
+                <a:cs typeface="Segoe UI"/>
+              </a:rPr>
+              <a:t xml:space="preserve"> + 7.</a:t>
+            </a:r>
+            <a:endParaRPr lang="en-US" sz="1575" dirty="0"/>
+          </a:p>
+        </p:txBody>
+      </p:sp>
+      <p:sp>
+        <p:nvSpPr>
+          <p:cNvPr id="6" name="Shape 6"/>
+          <p:cNvSpPr txBox="1"/>
+          <p:nvPr/>
+        </p:nvSpPr>
+        <p:spPr>
+          <a:xfrm>
+            <a:off x="895350" y="2890266"/>
+            <a:ext cx="4876648" cy="774954"/>
+          </a:xfrm>
+          <a:prstGeom prst="rect">
+            <a:avLst/>
+          </a:prstGeom>
+          <a:noFill/>
+          <a:ln>
+            <a:noFill/>
+          </a:ln>
+        </p:spPr>
+        <p:txBody>
+          <a:bodyPr wrap="square" lIns="36576" tIns="27432" rIns="36576" bIns="27432" anchor="t">
+            <a:noAutofit/>
+          </a:bodyPr>
+          <a:lstStyle/>
+          <a:p>
+            <a:pPr algn="l">
+              <a:lnSpc>
+                <a:spcPct val="100000"/>
+              </a:lnSpc>
+            </a:pPr>
+            <a:r>
+              <a:rPr lang="en-US" sz="1575" dirty="0" b="1">
+                <a:solidFill>
+                  <a:srgbClr val="16171D"/>
+                </a:solidFill>
+                <a:latin typeface="Segoe UI"/>
+                <a:cs typeface="Segoe UI"/>
+              </a:rPr>
+              <a:t xml:space="preserve">Step 2.</a:t>
+            </a:r>
+            <a:r>
+              <a:rPr lang="en-US" sz="1575" dirty="0">
+                <a:solidFill>
+                  <a:srgbClr val="16171D"/>
+                </a:solidFill>
+                <a:latin typeface="Segoe UI"/>
+                <a:cs typeface="Segoe UI"/>
+              </a:rPr>
+              <a:t xml:space="preserve"> The number </a:t>
+            </a:r>
+            <a:r>
+              <a:rPr lang="en-US" sz="1575" dirty="0" b="1">
+                <a:solidFill>
+                  <a:srgbClr val="C9561F"/>
+                </a:solidFill>
+                <a:latin typeface="Segoe UI"/>
+                <a:cs typeface="Segoe UI"/>
+              </a:rPr>
+              <a:t xml:space="preserve">multiplied</a:t>
+            </a:r>
+            <a:r>
+              <a:rPr lang="en-US" sz="1575" dirty="0">
+                <a:solidFill>
+                  <a:srgbClr val="16171D"/>
+                </a:solidFill>
+                <a:latin typeface="Segoe UI"/>
+                <a:cs typeface="Segoe UI"/>
+              </a:rPr>
+              <a:t xml:space="preserve"> is </a:t>
+            </a:r>
+            <a:r>
+              <a:rPr lang="en-US" sz="1575" dirty="0" i="1">
+                <a:solidFill>
+                  <a:srgbClr val="16171D"/>
+                </a:solidFill>
+                <a:latin typeface="Segoe UI"/>
+                <a:cs typeface="Segoe UI"/>
+              </a:rPr>
+              <a:t xml:space="preserve">a</a:t>
+            </a:r>
+            <a:r>
+              <a:rPr lang="en-US" sz="1575" dirty="0">
+                <a:solidFill>
+                  <a:srgbClr val="16171D"/>
+                </a:solidFill>
+                <a:latin typeface="Segoe UI"/>
+                <a:cs typeface="Segoe UI"/>
+              </a:rPr>
+              <a:t xml:space="preserve"> = 2. It is the new slope. 2 is more than 1, so the line </a:t>
+            </a:r>
+            <a:r>
+              <a:rPr lang="en-US" sz="1575" dirty="0" b="1">
+                <a:solidFill>
+                  <a:srgbClr val="16171D"/>
+                </a:solidFill>
+                <a:latin typeface="Segoe UI"/>
+                <a:cs typeface="Segoe UI"/>
+              </a:rPr>
+              <a:t xml:space="preserve">stretches</a:t>
+            </a:r>
+            <a:r>
+              <a:rPr lang="en-US" sz="1575" dirty="0">
+                <a:solidFill>
+                  <a:srgbClr val="16171D"/>
+                </a:solidFill>
+                <a:latin typeface="Segoe UI"/>
+                <a:cs typeface="Segoe UI"/>
+              </a:rPr>
+              <a:t xml:space="preserve"> (gets steeper).</a:t>
+            </a:r>
+            <a:endParaRPr lang="en-US" sz="1575" dirty="0"/>
+          </a:p>
+        </p:txBody>
+      </p:sp>
+      <p:sp>
+        <p:nvSpPr>
+          <p:cNvPr id="7" name="Shape 7"/>
+          <p:cNvSpPr txBox="1"/>
+          <p:nvPr/>
+        </p:nvSpPr>
+        <p:spPr>
+          <a:xfrm>
+            <a:off x="895350" y="3760470"/>
+            <a:ext cx="4876648" cy="774954"/>
+          </a:xfrm>
+          <a:prstGeom prst="rect">
+            <a:avLst/>
+          </a:prstGeom>
+          <a:noFill/>
+          <a:ln>
+            <a:noFill/>
+          </a:ln>
+        </p:spPr>
+        <p:txBody>
+          <a:bodyPr wrap="square" lIns="36576" tIns="27432" rIns="36576" bIns="27432" anchor="t">
+            <a:noAutofit/>
+          </a:bodyPr>
+          <a:lstStyle/>
+          <a:p>
+            <a:pPr algn="l">
+              <a:lnSpc>
+                <a:spcPct val="100000"/>
+              </a:lnSpc>
+            </a:pPr>
+            <a:r>
+              <a:rPr lang="en-US" sz="1575" dirty="0" b="1">
+                <a:solidFill>
+                  <a:srgbClr val="16171D"/>
+                </a:solidFill>
+                <a:latin typeface="Segoe UI"/>
+                <a:cs typeface="Segoe UI"/>
+              </a:rPr>
+              <a:t xml:space="preserve">Step 3.</a:t>
+            </a:r>
+            <a:r>
+              <a:rPr lang="en-US" sz="1575" dirty="0">
+                <a:solidFill>
+                  <a:srgbClr val="16171D"/>
+                </a:solidFill>
+                <a:latin typeface="Segoe UI"/>
+                <a:cs typeface="Segoe UI"/>
+              </a:rPr>
+              <a:t xml:space="preserve"> The number </a:t>
+            </a:r>
+            <a:r>
+              <a:rPr lang="en-US" sz="1575" dirty="0" b="1">
+                <a:solidFill>
+                  <a:srgbClr val="3050B8"/>
+                </a:solidFill>
+                <a:latin typeface="Segoe UI"/>
+                <a:cs typeface="Segoe UI"/>
+              </a:rPr>
+              <a:t xml:space="preserve">added</a:t>
+            </a:r>
+            <a:r>
+              <a:rPr lang="en-US" sz="1575" dirty="0">
+                <a:solidFill>
+                  <a:srgbClr val="16171D"/>
+                </a:solidFill>
+                <a:latin typeface="Segoe UI"/>
+                <a:cs typeface="Segoe UI"/>
+              </a:rPr>
+              <a:t xml:space="preserve"> is </a:t>
+            </a:r>
+            <a:r>
+              <a:rPr lang="en-US" sz="1575" dirty="0" i="1">
+                <a:solidFill>
+                  <a:srgbClr val="16171D"/>
+                </a:solidFill>
+                <a:latin typeface="Segoe UI"/>
+                <a:cs typeface="Segoe UI"/>
+              </a:rPr>
+              <a:t xml:space="preserve">d</a:t>
+            </a:r>
+            <a:r>
+              <a:rPr lang="en-US" sz="1575" dirty="0">
+                <a:solidFill>
+                  <a:srgbClr val="16171D"/>
+                </a:solidFill>
+                <a:latin typeface="Segoe UI"/>
+                <a:cs typeface="Segoe UI"/>
+              </a:rPr>
+              <a:t xml:space="preserve"> = +7. Plus means the line moves </a:t>
+            </a:r>
+            <a:r>
+              <a:rPr lang="en-US" sz="1575" dirty="0" b="1">
+                <a:solidFill>
+                  <a:srgbClr val="16171D"/>
+                </a:solidFill>
+                <a:latin typeface="Segoe UI"/>
+                <a:cs typeface="Segoe UI"/>
+              </a:rPr>
+              <a:t xml:space="preserve">up 7</a:t>
+            </a:r>
+            <a:r>
+              <a:rPr lang="en-US" sz="1575" dirty="0">
+                <a:solidFill>
+                  <a:srgbClr val="16171D"/>
+                </a:solidFill>
+                <a:latin typeface="Segoe UI"/>
+                <a:cs typeface="Segoe UI"/>
+              </a:rPr>
+              <a:t xml:space="preserve">. It crosses the </a:t>
+            </a:r>
+            <a:r>
+              <a:rPr lang="en-US" sz="1575" dirty="0" i="1">
+                <a:solidFill>
+                  <a:srgbClr val="16171D"/>
+                </a:solidFill>
+                <a:latin typeface="Segoe UI"/>
+                <a:cs typeface="Segoe UI"/>
+              </a:rPr>
+              <a:t xml:space="preserve">y</a:t>
+            </a:r>
+            <a:r>
+              <a:rPr lang="en-US" sz="1575" dirty="0">
+                <a:solidFill>
+                  <a:srgbClr val="16171D"/>
+                </a:solidFill>
+                <a:latin typeface="Segoe UI"/>
+                <a:cs typeface="Segoe UI"/>
+              </a:rPr>
+              <a:t xml:space="preserve">-axis at (0, 7).</a:t>
+            </a:r>
+            <a:endParaRPr lang="en-US" sz="1575" dirty="0"/>
+          </a:p>
+        </p:txBody>
+      </p:sp>
+      <p:sp>
+        <p:nvSpPr>
+          <p:cNvPr id="8" name="Shape 8"/>
+          <p:cNvSpPr txBox="1"/>
+          <p:nvPr/>
+        </p:nvSpPr>
+        <p:spPr>
+          <a:xfrm>
+            <a:off x="895350" y="4630674"/>
+            <a:ext cx="4876648" cy="873252"/>
           </a:xfrm>
           <a:prstGeom prst="roundRect">
             <a:avLst>
@@ -26092,7 +29090,67 @@
                 <a:latin typeface="Cambria"/>
                 <a:cs typeface="Cambria"/>
               </a:rPr>
-              <a:t xml:space="preserve">up 6</a:t>
+              <a:t xml:space="preserve">stretch by 2, up 7: </a:t>
+            </a:r>
+            <a:r>
+              <a:rPr lang="en-US" sz="2325" dirty="0" i="1">
+                <a:solidFill>
+                  <a:srgbClr val="16171D"/>
+                </a:solidFill>
+                <a:latin typeface="Cambria"/>
+                <a:cs typeface="Cambria"/>
+              </a:rPr>
+              <a:t xml:space="preserve">g</a:t>
+            </a:r>
+            <a:r>
+              <a:rPr lang="en-US" sz="2325" dirty="0">
+                <a:solidFill>
+                  <a:srgbClr val="16171D"/>
+                </a:solidFill>
+                <a:latin typeface="Cambria"/>
+                <a:cs typeface="Cambria"/>
+              </a:rPr>
+              <a:t xml:space="preserve">(</a:t>
+            </a:r>
+            <a:r>
+              <a:rPr lang="en-US" sz="2325" dirty="0" i="1">
+                <a:solidFill>
+                  <a:srgbClr val="16171D"/>
+                </a:solidFill>
+                <a:latin typeface="Cambria"/>
+                <a:cs typeface="Cambria"/>
+              </a:rPr>
+              <a:t xml:space="preserve">x</a:t>
+            </a:r>
+            <a:r>
+              <a:rPr lang="en-US" sz="2325" dirty="0">
+                <a:solidFill>
+                  <a:srgbClr val="16171D"/>
+                </a:solidFill>
+                <a:latin typeface="Cambria"/>
+                <a:cs typeface="Cambria"/>
+              </a:rPr>
+              <a:t xml:space="preserve">) = 2</a:t>
+            </a:r>
+            <a:r>
+              <a:rPr lang="en-US" sz="2325" dirty="0" i="1">
+                <a:solidFill>
+                  <a:srgbClr val="16171D"/>
+                </a:solidFill>
+                <a:latin typeface="Cambria"/>
+                <a:cs typeface="Cambria"/>
+              </a:rPr>
+              <a:t xml:space="preserve">x</a:t>
+            </a:r>
+            <a:r>
+              <a:rPr lang="en-US" sz="2325" dirty="0">
+                <a:solidFill>
+                  <a:srgbClr val="16171D"/>
+                </a:solidFill>
+                <a:latin typeface="Cambria"/>
+                <a:cs typeface="Cambria"/>
+              </a:rPr>
+              <a:t xml:space="preserve"> + 7</a:t>
             </a:r>
             <a:endParaRPr lang="en-US" sz="2325" dirty="0"/>
           </a:p>
@@ -26100,14 +29158,14 @@
       </p:sp>
       <p:sp>
         <p:nvSpPr>
-          <p:cNvPr id="9" name="Shape 9"/>
+          <p:cNvPr id="15" name="Shape 15"/>
           <p:cNvSpPr txBox="1"/>
           <p:nvPr/>
         </p:nvSpPr>
         <p:spPr>
           <a:xfrm>
-            <a:off x="685800" y="3060954"/>
-            <a:ext cx="10820095" cy="1309116"/>
+            <a:off x="6210148" y="1618488"/>
+            <a:ext cx="5295748" cy="3576828"/>
           </a:xfrm>
           <a:prstGeom prst="roundRect">
             <a:avLst>
@@ -26140,14 +29198,14 @@
       </p:sp>
       <p:sp>
         <p:nvSpPr>
-          <p:cNvPr id="7" name="Shape 7"/>
+          <p:cNvPr id="10" name="Shape 10"/>
           <p:cNvSpPr txBox="1"/>
           <p:nvPr/>
         </p:nvSpPr>
         <p:spPr>
           <a:xfrm>
-            <a:off x="895350" y="3232404"/>
-            <a:ext cx="10400995" cy="352044"/>
+            <a:off x="6419698" y="1789938"/>
+            <a:ext cx="4876648" cy="374904"/>
           </a:xfrm>
           <a:prstGeom prst="rect">
             <a:avLst/>
@@ -26169,17 +29227,17 @@
               </a:lnSpc>
             </a:pPr>
             <a:r>
-              <a:rPr lang="en-US" sz="1950" dirty="0">
-                <a:solidFill>
-                  <a:srgbClr val="16171D"/>
-                </a:solidFill>
-                <a:latin typeface="Segoe UI"/>
-                <a:cs typeface="Segoe UI"/>
-              </a:rPr>
-              <a:t xml:space="preserve">2. What is the slope of </a:t>
-            </a:r>
-            <a:r>
-              <a:rPr lang="en-US" sz="1950" dirty="0" i="1">
+              <a:rPr lang="en-US" sz="2100" dirty="0" b="1">
+                <a:solidFill>
+                  <a:srgbClr val="16171D"/>
+                </a:solidFill>
+                <a:latin typeface="Segoe UI"/>
+                <a:cs typeface="Segoe UI"/>
+              </a:rPr>
+              <a:t xml:space="preserve">2. </a:t>
+            </a:r>
+            <a:r>
+              <a:rPr lang="en-US" sz="2100" dirty="0" b="1" i="1">
                 <a:solidFill>
                   <a:srgbClr val="16171D"/>
                 </a:solidFill>
@@ -26189,7 +29247,7 @@
               <a:t xml:space="preserve">g</a:t>
             </a:r>
             <a:r>
-              <a:rPr lang="en-US" sz="1950" dirty="0">
+              <a:rPr lang="en-US" sz="2100" dirty="0" b="1">
                 <a:solidFill>
                   <a:srgbClr val="16171D"/>
                 </a:solidFill>
@@ -26199,7 +29257,7 @@
               <a:t xml:space="preserve">(</a:t>
             </a:r>
             <a:r>
-              <a:rPr lang="en-US" sz="1950" dirty="0" i="1">
+              <a:rPr lang="en-US" sz="2100" dirty="0" b="1" i="1">
                 <a:solidFill>
                   <a:srgbClr val="16171D"/>
                 </a:solidFill>
@@ -26209,17 +29267,57 @@
               <a:t xml:space="preserve">x</a:t>
             </a:r>
             <a:r>
-              <a:rPr lang="en-US" sz="1950" dirty="0">
-                <a:solidFill>
-                  <a:srgbClr val="16171D"/>
-                </a:solidFill>
-                <a:latin typeface="Segoe UI"/>
-                <a:cs typeface="Segoe UI"/>
-              </a:rPr>
-              <a:t xml:space="preserve">) = 5 · </a:t>
-            </a:r>
-            <a:r>
-              <a:rPr lang="en-US" sz="1950" dirty="0" i="1">
+              <a:rPr lang="en-US" sz="2100" dirty="0" b="1">
+                <a:solidFill>
+                  <a:srgbClr val="16171D"/>
+                </a:solidFill>
+                <a:latin typeface="Segoe UI"/>
+                <a:cs typeface="Segoe UI"/>
+              </a:rPr>
+              <a:t xml:space="preserve">) = </a:t>
+            </a:r>
+            <a:r>
+              <a:rPr lang="en-US" sz="2100" dirty="0" b="1">
+                <a:solidFill>
+                  <a:srgbClr val="16171D"/>
+                </a:solidFill>
+                <a:latin typeface="Segoe UI"/>
+                <a:cs typeface="Segoe UI"/>
+              </a:rPr>
+              <a:t xml:space="preserve">1</a:t>
+            </a:r>
+            <a:r>
+              <a:rPr lang="en-US" sz="2100" dirty="0" b="1">
+                <a:solidFill>
+                  <a:srgbClr val="16171D"/>
+                </a:solidFill>
+                <a:latin typeface="Segoe UI"/>
+                <a:cs typeface="Segoe UI"/>
+              </a:rPr>
+              <a:t xml:space="preserve">/</a:t>
+            </a:r>
+            <a:r>
+              <a:rPr lang="en-US" sz="2100" dirty="0" b="1">
+                <a:solidFill>
+                  <a:srgbClr val="16171D"/>
+                </a:solidFill>
+                <a:latin typeface="Segoe UI"/>
+                <a:cs typeface="Segoe UI"/>
+              </a:rPr>
+              <a:t xml:space="preserve">2</a:t>
+            </a:r>
+            <a:r>
+              <a:rPr lang="en-US" sz="2100" dirty="0" b="1">
+                <a:solidFill>
+                  <a:srgbClr val="16171D"/>
+                </a:solidFill>
+                <a:latin typeface="Segoe UI"/>
+                <a:cs typeface="Segoe UI"/>
+              </a:rPr>
+              <a:t xml:space="preserve"> · </a:t>
+            </a:r>
+            <a:r>
+              <a:rPr lang="en-US" sz="2100" dirty="0" b="1" i="1">
                 <a:solidFill>
                   <a:srgbClr val="16171D"/>
                 </a:solidFill>
@@ -26229,7 +29327,7 @@
               <a:t xml:space="preserve">f</a:t>
             </a:r>
             <a:r>
-              <a:rPr lang="en-US" sz="1950" dirty="0">
+              <a:rPr lang="en-US" sz="2100" dirty="0" b="1">
                 <a:solidFill>
                   <a:srgbClr val="16171D"/>
                 </a:solidFill>
@@ -26239,7 +29337,7 @@
               <a:t xml:space="preserve">(</a:t>
             </a:r>
             <a:r>
-              <a:rPr lang="en-US" sz="1950" dirty="0" i="1">
+              <a:rPr lang="en-US" sz="2100" dirty="0" b="1" i="1">
                 <a:solidFill>
                   <a:srgbClr val="16171D"/>
                 </a:solidFill>
@@ -26249,29 +29347,521 @@
               <a:t xml:space="preserve">x</a:t>
             </a:r>
             <a:r>
-              <a:rPr lang="en-US" sz="1950" dirty="0">
-                <a:solidFill>
-                  <a:srgbClr val="16171D"/>
-                </a:solidFill>
-                <a:latin typeface="Segoe UI"/>
-                <a:cs typeface="Segoe UI"/>
-              </a:rPr>
-              <a:t xml:space="preserve">)?</a:t>
-            </a:r>
-            <a:endParaRPr lang="en-US" sz="1950" dirty="0"/>
-          </a:p>
-        </p:txBody>
-      </p:sp>
-      <p:sp>
-        <p:nvSpPr>
-          <p:cNvPr id="8" name="Shape 8"/>
+              <a:rPr lang="en-US" sz="2100" dirty="0" b="1">
+                <a:solidFill>
+                  <a:srgbClr val="16171D"/>
+                </a:solidFill>
+                <a:latin typeface="Segoe UI"/>
+                <a:cs typeface="Segoe UI"/>
+              </a:rPr>
+              <a:t xml:space="preserve">) − 3</a:t>
+            </a:r>
+            <a:endParaRPr lang="en-US" sz="2100" dirty="0"/>
+          </a:p>
+        </p:txBody>
+      </p:sp>
+      <p:sp>
+        <p:nvSpPr>
+          <p:cNvPr id="11" name="Shape 11"/>
           <p:cNvSpPr txBox="1"/>
           <p:nvPr/>
         </p:nvSpPr>
         <p:spPr>
           <a:xfrm>
-            <a:off x="895350" y="3679698"/>
-            <a:ext cx="2078888" cy="518922"/>
+            <a:off x="6419698" y="2260092"/>
+            <a:ext cx="4876648" cy="534924"/>
+          </a:xfrm>
+          <a:prstGeom prst="rect">
+            <a:avLst/>
+          </a:prstGeom>
+          <a:noFill/>
+          <a:ln>
+            <a:noFill/>
+          </a:ln>
+        </p:spPr>
+        <p:txBody>
+          <a:bodyPr wrap="square" lIns="36576" tIns="27432" rIns="36576" bIns="27432" anchor="t">
+            <a:noAutofit/>
+          </a:bodyPr>
+          <a:lstStyle/>
+          <a:p>
+            <a:pPr algn="l">
+              <a:lnSpc>
+                <a:spcPct val="100000"/>
+              </a:lnSpc>
+            </a:pPr>
+            <a:r>
+              <a:rPr lang="en-US" sz="1575" dirty="0" b="1">
+                <a:solidFill>
+                  <a:srgbClr val="16171D"/>
+                </a:solidFill>
+                <a:latin typeface="Segoe UI"/>
+                <a:cs typeface="Segoe UI"/>
+              </a:rPr>
+              <a:t xml:space="preserve">Step 1.</a:t>
+            </a:r>
+            <a:r>
+              <a:rPr lang="en-US" sz="1575" dirty="0">
+                <a:solidFill>
+                  <a:srgbClr val="16171D"/>
+                </a:solidFill>
+                <a:latin typeface="Segoe UI"/>
+                <a:cs typeface="Segoe UI"/>
+              </a:rPr>
+              <a:t xml:space="preserve"> Write </a:t>
+            </a:r>
+            <a:r>
+              <a:rPr lang="en-US" sz="1575" dirty="0" i="1">
+                <a:solidFill>
+                  <a:srgbClr val="16171D"/>
+                </a:solidFill>
+                <a:latin typeface="Segoe UI"/>
+                <a:cs typeface="Segoe UI"/>
+              </a:rPr>
+              <a:t xml:space="preserve">x</a:t>
+            </a:r>
+            <a:r>
+              <a:rPr lang="en-US" sz="1575" dirty="0">
+                <a:solidFill>
+                  <a:srgbClr val="16171D"/>
+                </a:solidFill>
+                <a:latin typeface="Segoe UI"/>
+                <a:cs typeface="Segoe UI"/>
+              </a:rPr>
+              <a:t xml:space="preserve"> in place of </a:t>
+            </a:r>
+            <a:r>
+              <a:rPr lang="en-US" sz="1575" dirty="0" i="1">
+                <a:solidFill>
+                  <a:srgbClr val="16171D"/>
+                </a:solidFill>
+                <a:latin typeface="Segoe UI"/>
+                <a:cs typeface="Segoe UI"/>
+              </a:rPr>
+              <a:t xml:space="preserve">f</a:t>
+            </a:r>
+            <a:r>
+              <a:rPr lang="en-US" sz="1575" dirty="0">
+                <a:solidFill>
+                  <a:srgbClr val="16171D"/>
+                </a:solidFill>
+                <a:latin typeface="Segoe UI"/>
+                <a:cs typeface="Segoe UI"/>
+              </a:rPr>
+              <a:t xml:space="preserve">(</a:t>
+            </a:r>
+            <a:r>
+              <a:rPr lang="en-US" sz="1575" dirty="0" i="1">
+                <a:solidFill>
+                  <a:srgbClr val="16171D"/>
+                </a:solidFill>
+                <a:latin typeface="Segoe UI"/>
+                <a:cs typeface="Segoe UI"/>
+              </a:rPr>
+              <a:t xml:space="preserve">x</a:t>
+            </a:r>
+            <a:r>
+              <a:rPr lang="en-US" sz="1575" dirty="0">
+                <a:solidFill>
+                  <a:srgbClr val="16171D"/>
+                </a:solidFill>
+                <a:latin typeface="Segoe UI"/>
+                <a:cs typeface="Segoe UI"/>
+              </a:rPr>
+              <a:t xml:space="preserve">): </a:t>
+            </a:r>
+            <a:r>
+              <a:rPr lang="en-US" sz="1575" dirty="0" i="1">
+                <a:solidFill>
+                  <a:srgbClr val="16171D"/>
+                </a:solidFill>
+                <a:latin typeface="Segoe UI"/>
+                <a:cs typeface="Segoe UI"/>
+              </a:rPr>
+              <a:t xml:space="preserve">g</a:t>
+            </a:r>
+            <a:r>
+              <a:rPr lang="en-US" sz="1575" dirty="0">
+                <a:solidFill>
+                  <a:srgbClr val="16171D"/>
+                </a:solidFill>
+                <a:latin typeface="Segoe UI"/>
+                <a:cs typeface="Segoe UI"/>
+              </a:rPr>
+              <a:t xml:space="preserve">(</a:t>
+            </a:r>
+            <a:r>
+              <a:rPr lang="en-US" sz="1575" dirty="0" i="1">
+                <a:solidFill>
+                  <a:srgbClr val="16171D"/>
+                </a:solidFill>
+                <a:latin typeface="Segoe UI"/>
+                <a:cs typeface="Segoe UI"/>
+              </a:rPr>
+              <a:t xml:space="preserve">x</a:t>
+            </a:r>
+            <a:r>
+              <a:rPr lang="en-US" sz="1575" dirty="0">
+                <a:solidFill>
+                  <a:srgbClr val="16171D"/>
+                </a:solidFill>
+                <a:latin typeface="Segoe UI"/>
+                <a:cs typeface="Segoe UI"/>
+              </a:rPr>
+              <a:t xml:space="preserve">) = </a:t>
+            </a:r>
+            <a:r>
+              <a:rPr lang="en-US" sz="1575" dirty="0">
+                <a:solidFill>
+                  <a:srgbClr val="16171D"/>
+                </a:solidFill>
+                <a:latin typeface="Segoe UI"/>
+                <a:cs typeface="Segoe UI"/>
+              </a:rPr>
+              <a:t xml:space="preserve">1</a:t>
+            </a:r>
+            <a:r>
+              <a:rPr lang="en-US" sz="1575" dirty="0">
+                <a:solidFill>
+                  <a:srgbClr val="16171D"/>
+                </a:solidFill>
+                <a:latin typeface="Segoe UI"/>
+                <a:cs typeface="Segoe UI"/>
+              </a:rPr>
+              <a:t xml:space="preserve">/</a:t>
+            </a:r>
+            <a:r>
+              <a:rPr lang="en-US" sz="1575" dirty="0">
+                <a:solidFill>
+                  <a:srgbClr val="16171D"/>
+                </a:solidFill>
+                <a:latin typeface="Segoe UI"/>
+                <a:cs typeface="Segoe UI"/>
+              </a:rPr>
+              <a:t xml:space="preserve">2</a:t>
+            </a:r>
+            <a:r>
+              <a:rPr lang="en-US" sz="1575" dirty="0" i="1">
+                <a:solidFill>
+                  <a:srgbClr val="16171D"/>
+                </a:solidFill>
+                <a:latin typeface="Segoe UI"/>
+                <a:cs typeface="Segoe UI"/>
+              </a:rPr>
+              <a:t xml:space="preserve">x</a:t>
+            </a:r>
+            <a:r>
+              <a:rPr lang="en-US" sz="1575" dirty="0">
+                <a:solidFill>
+                  <a:srgbClr val="16171D"/>
+                </a:solidFill>
+                <a:latin typeface="Segoe UI"/>
+                <a:cs typeface="Segoe UI"/>
+              </a:rPr>
+              <a:t xml:space="preserve"> − 3.</a:t>
+            </a:r>
+            <a:endParaRPr lang="en-US" sz="1575" dirty="0"/>
+          </a:p>
+        </p:txBody>
+      </p:sp>
+      <p:sp>
+        <p:nvSpPr>
+          <p:cNvPr id="12" name="Shape 12"/>
+          <p:cNvSpPr txBox="1"/>
+          <p:nvPr/>
+        </p:nvSpPr>
+        <p:spPr>
+          <a:xfrm>
+            <a:off x="6419698" y="2890266"/>
+            <a:ext cx="4876648" cy="534924"/>
+          </a:xfrm>
+          <a:prstGeom prst="rect">
+            <a:avLst/>
+          </a:prstGeom>
+          <a:noFill/>
+          <a:ln>
+            <a:noFill/>
+          </a:ln>
+        </p:spPr>
+        <p:txBody>
+          <a:bodyPr wrap="square" lIns="36576" tIns="27432" rIns="36576" bIns="27432" anchor="t">
+            <a:noAutofit/>
+          </a:bodyPr>
+          <a:lstStyle/>
+          <a:p>
+            <a:pPr algn="l">
+              <a:lnSpc>
+                <a:spcPct val="100000"/>
+              </a:lnSpc>
+            </a:pPr>
+            <a:r>
+              <a:rPr lang="en-US" sz="1575" dirty="0" b="1">
+                <a:solidFill>
+                  <a:srgbClr val="16171D"/>
+                </a:solidFill>
+                <a:latin typeface="Segoe UI"/>
+                <a:cs typeface="Segoe UI"/>
+              </a:rPr>
+              <a:t xml:space="preserve">Step 2.</a:t>
+            </a:r>
+            <a:r>
+              <a:rPr lang="en-US" sz="1575" dirty="0">
+                <a:solidFill>
+                  <a:srgbClr val="16171D"/>
+                </a:solidFill>
+                <a:latin typeface="Segoe UI"/>
+                <a:cs typeface="Segoe UI"/>
+              </a:rPr>
+              <a:t xml:space="preserve"> </a:t>
+            </a:r>
+            <a:r>
+              <a:rPr lang="en-US" sz="1575" dirty="0" i="1">
+                <a:solidFill>
+                  <a:srgbClr val="16171D"/>
+                </a:solidFill>
+                <a:latin typeface="Segoe UI"/>
+                <a:cs typeface="Segoe UI"/>
+              </a:rPr>
+              <a:t xml:space="preserve">a</a:t>
+            </a:r>
+            <a:r>
+              <a:rPr lang="en-US" sz="1575" dirty="0">
+                <a:solidFill>
+                  <a:srgbClr val="16171D"/>
+                </a:solidFill>
+                <a:latin typeface="Segoe UI"/>
+                <a:cs typeface="Segoe UI"/>
+              </a:rPr>
+              <a:t xml:space="preserve"> = </a:t>
+            </a:r>
+            <a:r>
+              <a:rPr lang="en-US" sz="1575" dirty="0">
+                <a:solidFill>
+                  <a:srgbClr val="16171D"/>
+                </a:solidFill>
+                <a:latin typeface="Segoe UI"/>
+                <a:cs typeface="Segoe UI"/>
+              </a:rPr>
+              <a:t xml:space="preserve">1</a:t>
+            </a:r>
+            <a:r>
+              <a:rPr lang="en-US" sz="1575" dirty="0">
+                <a:solidFill>
+                  <a:srgbClr val="16171D"/>
+                </a:solidFill>
+                <a:latin typeface="Segoe UI"/>
+                <a:cs typeface="Segoe UI"/>
+              </a:rPr>
+              <a:t xml:space="preserve">/</a:t>
+            </a:r>
+            <a:r>
+              <a:rPr lang="en-US" sz="1575" dirty="0">
+                <a:solidFill>
+                  <a:srgbClr val="16171D"/>
+                </a:solidFill>
+                <a:latin typeface="Segoe UI"/>
+                <a:cs typeface="Segoe UI"/>
+              </a:rPr>
+              <a:t xml:space="preserve">2</a:t>
+            </a:r>
+            <a:r>
+              <a:rPr lang="en-US" sz="1575" dirty="0">
+                <a:solidFill>
+                  <a:srgbClr val="16171D"/>
+                </a:solidFill>
+                <a:latin typeface="Segoe UI"/>
+                <a:cs typeface="Segoe UI"/>
+              </a:rPr>
+              <a:t xml:space="preserve"> is between 0 and 1, so the line </a:t>
+            </a:r>
+            <a:r>
+              <a:rPr lang="en-US" sz="1575" dirty="0" b="1">
+                <a:solidFill>
+                  <a:srgbClr val="16171D"/>
+                </a:solidFill>
+                <a:latin typeface="Segoe UI"/>
+                <a:cs typeface="Segoe UI"/>
+              </a:rPr>
+              <a:t xml:space="preserve">compresses</a:t>
+            </a:r>
+            <a:r>
+              <a:rPr lang="en-US" sz="1575" dirty="0">
+                <a:solidFill>
+                  <a:srgbClr val="16171D"/>
+                </a:solidFill>
+                <a:latin typeface="Segoe UI"/>
+                <a:cs typeface="Segoe UI"/>
+              </a:rPr>
+              <a:t xml:space="preserve"> (gets less steep). The slope is </a:t>
+            </a:r>
+            <a:r>
+              <a:rPr lang="en-US" sz="1575" dirty="0">
+                <a:solidFill>
+                  <a:srgbClr val="16171D"/>
+                </a:solidFill>
+                <a:latin typeface="Segoe UI"/>
+                <a:cs typeface="Segoe UI"/>
+              </a:rPr>
+              <a:t xml:space="preserve">1</a:t>
+            </a:r>
+            <a:r>
+              <a:rPr lang="en-US" sz="1575" dirty="0">
+                <a:solidFill>
+                  <a:srgbClr val="16171D"/>
+                </a:solidFill>
+                <a:latin typeface="Segoe UI"/>
+                <a:cs typeface="Segoe UI"/>
+              </a:rPr>
+              <a:t xml:space="preserve">/</a:t>
+            </a:r>
+            <a:r>
+              <a:rPr lang="en-US" sz="1575" dirty="0">
+                <a:solidFill>
+                  <a:srgbClr val="16171D"/>
+                </a:solidFill>
+                <a:latin typeface="Segoe UI"/>
+                <a:cs typeface="Segoe UI"/>
+              </a:rPr>
+              <a:t xml:space="preserve">2</a:t>
+            </a:r>
+            <a:r>
+              <a:rPr lang="en-US" sz="1575" dirty="0">
+                <a:solidFill>
+                  <a:srgbClr val="16171D"/>
+                </a:solidFill>
+                <a:latin typeface="Segoe UI"/>
+                <a:cs typeface="Segoe UI"/>
+              </a:rPr>
+              <a:t xml:space="preserve">.</a:t>
+            </a:r>
+            <a:endParaRPr lang="en-US" sz="1575" dirty="0"/>
+          </a:p>
+        </p:txBody>
+      </p:sp>
+      <p:sp>
+        <p:nvSpPr>
+          <p:cNvPr id="13" name="Shape 13"/>
+          <p:cNvSpPr txBox="1"/>
+          <p:nvPr/>
+        </p:nvSpPr>
+        <p:spPr>
+          <a:xfrm>
+            <a:off x="6419698" y="3520440"/>
+            <a:ext cx="4876648" cy="534924"/>
+          </a:xfrm>
+          <a:prstGeom prst="rect">
+            <a:avLst/>
+          </a:prstGeom>
+          <a:noFill/>
+          <a:ln>
+            <a:noFill/>
+          </a:ln>
+        </p:spPr>
+        <p:txBody>
+          <a:bodyPr wrap="square" lIns="36576" tIns="27432" rIns="36576" bIns="27432" anchor="t">
+            <a:noAutofit/>
+          </a:bodyPr>
+          <a:lstStyle/>
+          <a:p>
+            <a:pPr algn="l">
+              <a:lnSpc>
+                <a:spcPct val="100000"/>
+              </a:lnSpc>
+            </a:pPr>
+            <a:r>
+              <a:rPr lang="en-US" sz="1575" dirty="0" b="1">
+                <a:solidFill>
+                  <a:srgbClr val="16171D"/>
+                </a:solidFill>
+                <a:latin typeface="Segoe UI"/>
+                <a:cs typeface="Segoe UI"/>
+              </a:rPr>
+              <a:t xml:space="preserve">Step 3.</a:t>
+            </a:r>
+            <a:r>
+              <a:rPr lang="en-US" sz="1575" dirty="0">
+                <a:solidFill>
+                  <a:srgbClr val="16171D"/>
+                </a:solidFill>
+                <a:latin typeface="Segoe UI"/>
+                <a:cs typeface="Segoe UI"/>
+              </a:rPr>
+              <a:t xml:space="preserve"> </a:t>
+            </a:r>
+            <a:r>
+              <a:rPr lang="en-US" sz="1575" dirty="0" i="1">
+                <a:solidFill>
+                  <a:srgbClr val="16171D"/>
+                </a:solidFill>
+                <a:latin typeface="Segoe UI"/>
+                <a:cs typeface="Segoe UI"/>
+              </a:rPr>
+              <a:t xml:space="preserve">d</a:t>
+            </a:r>
+            <a:r>
+              <a:rPr lang="en-US" sz="1575" dirty="0">
+                <a:solidFill>
+                  <a:srgbClr val="16171D"/>
+                </a:solidFill>
+                <a:latin typeface="Segoe UI"/>
+                <a:cs typeface="Segoe UI"/>
+              </a:rPr>
+              <a:t xml:space="preserve"> = −3. Minus means the line moves </a:t>
+            </a:r>
+            <a:r>
+              <a:rPr lang="en-US" sz="1575" dirty="0" b="1">
+                <a:solidFill>
+                  <a:srgbClr val="16171D"/>
+                </a:solidFill>
+                <a:latin typeface="Segoe UI"/>
+                <a:cs typeface="Segoe UI"/>
+              </a:rPr>
+              <a:t xml:space="preserve">down 3</a:t>
+            </a:r>
+            <a:r>
+              <a:rPr lang="en-US" sz="1575" dirty="0">
+                <a:solidFill>
+                  <a:srgbClr val="16171D"/>
+                </a:solidFill>
+                <a:latin typeface="Segoe UI"/>
+                <a:cs typeface="Segoe UI"/>
+              </a:rPr>
+              <a:t xml:space="preserve">. It crosses the </a:t>
+            </a:r>
+            <a:r>
+              <a:rPr lang="en-US" sz="1575" dirty="0" i="1">
+                <a:solidFill>
+                  <a:srgbClr val="16171D"/>
+                </a:solidFill>
+                <a:latin typeface="Segoe UI"/>
+                <a:cs typeface="Segoe UI"/>
+              </a:rPr>
+              <a:t xml:space="preserve">y</a:t>
+            </a:r>
+            <a:r>
+              <a:rPr lang="en-US" sz="1575" dirty="0">
+                <a:solidFill>
+                  <a:srgbClr val="16171D"/>
+                </a:solidFill>
+                <a:latin typeface="Segoe UI"/>
+                <a:cs typeface="Segoe UI"/>
+              </a:rPr>
+              <a:t xml:space="preserve">-axis at (0, −3).</a:t>
+            </a:r>
+            <a:endParaRPr lang="en-US" sz="1575" dirty="0"/>
+          </a:p>
+        </p:txBody>
+      </p:sp>
+      <p:sp>
+        <p:nvSpPr>
+          <p:cNvPr id="14" name="Shape 14"/>
+          <p:cNvSpPr txBox="1"/>
+          <p:nvPr/>
+        </p:nvSpPr>
+        <p:spPr>
+          <a:xfrm>
+            <a:off x="6419698" y="4150614"/>
+            <a:ext cx="4876648" cy="873252"/>
           </a:xfrm>
           <a:prstGeom prst="roundRect">
             <a:avLst>
@@ -26314,7 +29904,97 @@
                 <a:latin typeface="Cambria"/>
                 <a:cs typeface="Cambria"/>
               </a:rPr>
-              <a:t xml:space="preserve">5</a:t>
+              <a:t xml:space="preserve">compress by </a:t>
+            </a:r>
+            <a:r>
+              <a:rPr lang="en-US" sz="2325" dirty="0">
+                <a:solidFill>
+                  <a:srgbClr val="16171D"/>
+                </a:solidFill>
+                <a:latin typeface="Cambria"/>
+                <a:cs typeface="Cambria"/>
+              </a:rPr>
+              <a:t xml:space="preserve">1</a:t>
+            </a:r>
+            <a:r>
+              <a:rPr lang="en-US" sz="2325" dirty="0">
+                <a:solidFill>
+                  <a:srgbClr val="16171D"/>
+                </a:solidFill>
+                <a:latin typeface="Cambria"/>
+                <a:cs typeface="Cambria"/>
+              </a:rPr>
+              <a:t xml:space="preserve">/</a:t>
+            </a:r>
+            <a:r>
+              <a:rPr lang="en-US" sz="2325" dirty="0">
+                <a:solidFill>
+                  <a:srgbClr val="16171D"/>
+                </a:solidFill>
+                <a:latin typeface="Cambria"/>
+                <a:cs typeface="Cambria"/>
+              </a:rPr>
+              <a:t xml:space="preserve">2</a:t>
+            </a:r>
+            <a:r>
+              <a:rPr lang="en-US" sz="2325" dirty="0">
+                <a:solidFill>
+                  <a:srgbClr val="16171D"/>
+                </a:solidFill>
+                <a:latin typeface="Cambria"/>
+                <a:cs typeface="Cambria"/>
+              </a:rPr>
+              <a:t xml:space="preserve">, down 3: </a:t>
+            </a:r>
+            <a:r>
+              <a:rPr lang="en-US" sz="2325" dirty="0">
+                <a:solidFill>
+                  <a:srgbClr val="16171D"/>
+                </a:solidFill>
+                <a:latin typeface="Cambria"/>
+                <a:cs typeface="Cambria"/>
+              </a:rPr>
+              <a:t xml:space="preserve">1</a:t>
+            </a:r>
+            <a:r>
+              <a:rPr lang="en-US" sz="2325" dirty="0">
+                <a:solidFill>
+                  <a:srgbClr val="16171D"/>
+                </a:solidFill>
+                <a:latin typeface="Cambria"/>
+                <a:cs typeface="Cambria"/>
+              </a:rPr>
+              <a:t xml:space="preserve">/</a:t>
+            </a:r>
+            <a:r>
+              <a:rPr lang="en-US" sz="2325" dirty="0">
+                <a:solidFill>
+                  <a:srgbClr val="16171D"/>
+                </a:solidFill>
+                <a:latin typeface="Cambria"/>
+                <a:cs typeface="Cambria"/>
+              </a:rPr>
+              <a:t xml:space="preserve">2</a:t>
+            </a:r>
+            <a:r>
+              <a:rPr lang="en-US" sz="2325" dirty="0" i="1">
+                <a:solidFill>
+                  <a:srgbClr val="16171D"/>
+                </a:solidFill>
+                <a:latin typeface="Cambria"/>
+                <a:cs typeface="Cambria"/>
+              </a:rPr>
+              <a:t xml:space="preserve">x</a:t>
+            </a:r>
+            <a:r>
+              <a:rPr lang="en-US" sz="2325" dirty="0">
+                <a:solidFill>
+                  <a:srgbClr val="16171D"/>
+                </a:solidFill>
+                <a:latin typeface="Cambria"/>
+                <a:cs typeface="Cambria"/>
+              </a:rPr>
+              <a:t xml:space="preserve"> − 3</a:t>
             </a:r>
             <a:endParaRPr lang="en-US" sz="2325" dirty="0"/>
           </a:p>
@@ -26322,13 +30002,985 @@
       </p:sp>
       <p:sp>
         <p:nvSpPr>
-          <p:cNvPr id="12" name="Shape 12"/>
+          <p:cNvPr id="16" name="Slide Number 16"/>
           <p:cNvSpPr txBox="1"/>
           <p:nvPr/>
         </p:nvSpPr>
         <p:spPr>
           <a:xfrm>
-            <a:off x="685800" y="4503420"/>
+            <a:off x="11277295" y="6611112"/>
+            <a:ext cx="685800" cy="201168"/>
+          </a:xfrm>
+          <a:prstGeom prst="rect">
+            <a:avLst/>
+          </a:prstGeom>
+          <a:noFill/>
+        </p:spPr>
+        <p:txBody>
+          <a:bodyPr wrap="none" lIns="0" tIns="0" rIns="0" bIns="0" anchor="b">
+            <a:noAutofit/>
+          </a:bodyPr>
+          <a:lstStyle/>
+          <a:p>
+            <a:pPr algn="r"/>
+            <a:fld id="{5C1A6E0B-3B1F-4D5E-9C7A-2F4B8D6E1A90}" type="slidenum">
+              <a:rPr lang="en-US" sz="1200" dirty="0">
+                <a:solidFill>
+                  <a:srgbClr val="5F6272"/>
+                </a:solidFill>
+              </a:rPr>
+              <a:t>33</a:t>
+            </a:fld>
+          </a:p>
+        </p:txBody>
+      </p:sp>
+    </p:spTree>
+  </p:cSld>
+  <p:clrMapOvr>
+    <a:masterClrMapping/>
+  </p:clrMapOvr>
+  <p:transition spd="med">
+    <p:fade/>
+  </p:transition>
+  <p:timing>
+    <p:tnLst>
+      <p:par>
+        <p:cTn id="1" dur="indefinite" restart="never" nodeType="tmRoot">
+          <p:childTnLst>
+            <p:seq concurrent="1" nextAc="seek">
+              <p:cTn id="2" dur="indefinite" nodeType="mainSeq">
+                <p:childTnLst>
+                  <p:par>
+                    <p:cTn id="8" fill="hold">
+                      <p:stCondLst>
+                        <p:cond delay="indefinite"/>
+                      </p:stCondLst>
+                      <p:childTnLst>
+                        <p:par>
+                          <p:cTn id="9" fill="hold">
+                            <p:stCondLst>
+                              <p:cond delay="0"/>
+                            </p:stCondLst>
+                            <p:childTnLst>
+                              <p:par>
+                                <p:cTn id="7" presetID="42" presetClass="entr" presetSubtype="0" fill="hold" nodeType="clickEffect">
+                                  <p:stCondLst>
+                                    <p:cond delay="0"/>
+                                  </p:stCondLst>
+                                  <p:childTnLst>
+                                    <p:set>
+                                      <p:cBhvr>
+                                        <p:cTn id="3" dur="1" fill="hold">
+                                          <p:stCondLst>
+                                            <p:cond delay="0"/>
+                                          </p:stCondLst>
+                                        </p:cTn>
+                                        <p:tgtEl>
+                                          <p:spTgt spid="5"/>
+                                        </p:tgtEl>
+                                        <p:attrNameLst>
+                                          <p:attrName>style.visibility</p:attrName>
+                                        </p:attrNameLst>
+                                      </p:cBhvr>
+                                      <p:to>
+                                        <p:strVal val="visible"/>
+                                      </p:to>
+                                    </p:set>
+                                    <p:animEffect transition="in" filter="fade">
+                                      <p:cBhvr>
+                                        <p:cTn id="4" dur="500"/>
+                                        <p:tgtEl>
+                                          <p:spTgt spid="5"/>
+                                        </p:tgtEl>
+                                      </p:cBhvr>
+                                    </p:animEffect>
+                                    <p:anim calcmode="lin" valueType="num">
+                                      <p:cBhvr>
+                                        <p:cTn id="5" dur="500" fill="hold"/>
+                                        <p:tgtEl>
+                                          <p:spTgt spid="5"/>
+                                        </p:tgtEl>
+                                        <p:attrNameLst>
+                                          <p:attrName>ppt_x</p:attrName>
+                                        </p:attrNameLst>
+                                      </p:cBhvr>
+                                      <p:tavLst>
+                                        <p:tav tm="0">
+                                          <p:val>
+                                            <p:strVal val="#ppt_x"/>
+                                          </p:val>
+                                        </p:tav>
+                                        <p:tav tm="100000">
+                                          <p:val>
+                                            <p:strVal val="#ppt_x"/>
+                                          </p:val>
+                                        </p:tav>
+                                      </p:tavLst>
+                                    </p:anim>
+                                    <p:anim calcmode="lin" valueType="num">
+                                      <p:cBhvr>
+                                        <p:cTn id="6" dur="500" fill="hold"/>
+                                        <p:tgtEl>
+                                          <p:spTgt spid="5"/>
+                                        </p:tgtEl>
+                                        <p:attrNameLst>
+                                          <p:attrName>ppt_y</p:attrName>
+                                        </p:attrNameLst>
+                                      </p:cBhvr>
+                                      <p:tavLst>
+                                        <p:tav tm="0">
+                                          <p:val>
+                                            <p:strVal val="#ppt_y+.1"/>
+                                          </p:val>
+                                        </p:tav>
+                                        <p:tav tm="100000">
+                                          <p:val>
+                                            <p:strVal val="#ppt_y"/>
+                                          </p:val>
+                                        </p:tav>
+                                      </p:tavLst>
+                                    </p:anim>
+                                  </p:childTnLst>
+                                </p:cTn>
+                              </p:par>
+                            </p:childTnLst>
+                          </p:cTn>
+                        </p:par>
+                      </p:childTnLst>
+                    </p:cTn>
+                  </p:par>
+                  <p:par>
+                    <p:cTn id="15" fill="hold">
+                      <p:stCondLst>
+                        <p:cond delay="indefinite"/>
+                      </p:stCondLst>
+                      <p:childTnLst>
+                        <p:par>
+                          <p:cTn id="16" fill="hold">
+                            <p:stCondLst>
+                              <p:cond delay="0"/>
+                            </p:stCondLst>
+                            <p:childTnLst>
+                              <p:par>
+                                <p:cTn id="14" presetID="42" presetClass="entr" presetSubtype="0" fill="hold" nodeType="clickEffect">
+                                  <p:stCondLst>
+                                    <p:cond delay="0"/>
+                                  </p:stCondLst>
+                                  <p:childTnLst>
+                                    <p:set>
+                                      <p:cBhvr>
+                                        <p:cTn id="10" dur="1" fill="hold">
+                                          <p:stCondLst>
+                                            <p:cond delay="0"/>
+                                          </p:stCondLst>
+                                        </p:cTn>
+                                        <p:tgtEl>
+                                          <p:spTgt spid="6"/>
+                                        </p:tgtEl>
+                                        <p:attrNameLst>
+                                          <p:attrName>style.visibility</p:attrName>
+                                        </p:attrNameLst>
+                                      </p:cBhvr>
+                                      <p:to>
+                                        <p:strVal val="visible"/>
+                                      </p:to>
+                                    </p:set>
+                                    <p:animEffect transition="in" filter="fade">
+                                      <p:cBhvr>
+                                        <p:cTn id="11" dur="500"/>
+                                        <p:tgtEl>
+                                          <p:spTgt spid="6"/>
+                                        </p:tgtEl>
+                                      </p:cBhvr>
+                                    </p:animEffect>
+                                    <p:anim calcmode="lin" valueType="num">
+                                      <p:cBhvr>
+                                        <p:cTn id="12" dur="500" fill="hold"/>
+                                        <p:tgtEl>
+                                          <p:spTgt spid="6"/>
+                                        </p:tgtEl>
+                                        <p:attrNameLst>
+                                          <p:attrName>ppt_x</p:attrName>
+                                        </p:attrNameLst>
+                                      </p:cBhvr>
+                                      <p:tavLst>
+                                        <p:tav tm="0">
+                                          <p:val>
+                                            <p:strVal val="#ppt_x"/>
+                                          </p:val>
+                                        </p:tav>
+                                        <p:tav tm="100000">
+                                          <p:val>
+                                            <p:strVal val="#ppt_x"/>
+                                          </p:val>
+                                        </p:tav>
+                                      </p:tavLst>
+                                    </p:anim>
+                                    <p:anim calcmode="lin" valueType="num">
+                                      <p:cBhvr>
+                                        <p:cTn id="13" dur="500" fill="hold"/>
+                                        <p:tgtEl>
+                                          <p:spTgt spid="6"/>
+                                        </p:tgtEl>
+                                        <p:attrNameLst>
+                                          <p:attrName>ppt_y</p:attrName>
+                                        </p:attrNameLst>
+                                      </p:cBhvr>
+                                      <p:tavLst>
+                                        <p:tav tm="0">
+                                          <p:val>
+                                            <p:strVal val="#ppt_y+.1"/>
+                                          </p:val>
+                                        </p:tav>
+                                        <p:tav tm="100000">
+                                          <p:val>
+                                            <p:strVal val="#ppt_y"/>
+                                          </p:val>
+                                        </p:tav>
+                                      </p:tavLst>
+                                    </p:anim>
+                                  </p:childTnLst>
+                                </p:cTn>
+                              </p:par>
+                            </p:childTnLst>
+                          </p:cTn>
+                        </p:par>
+                      </p:childTnLst>
+                    </p:cTn>
+                  </p:par>
+                  <p:par>
+                    <p:cTn id="22" fill="hold">
+                      <p:stCondLst>
+                        <p:cond delay="indefinite"/>
+                      </p:stCondLst>
+                      <p:childTnLst>
+                        <p:par>
+                          <p:cTn id="23" fill="hold">
+                            <p:stCondLst>
+                              <p:cond delay="0"/>
+                            </p:stCondLst>
+                            <p:childTnLst>
+                              <p:par>
+                                <p:cTn id="21" presetID="42" presetClass="entr" presetSubtype="0" fill="hold" nodeType="clickEffect">
+                                  <p:stCondLst>
+                                    <p:cond delay="0"/>
+                                  </p:stCondLst>
+                                  <p:childTnLst>
+                                    <p:set>
+                                      <p:cBhvr>
+                                        <p:cTn id="17" dur="1" fill="hold">
+                                          <p:stCondLst>
+                                            <p:cond delay="0"/>
+                                          </p:stCondLst>
+                                        </p:cTn>
+                                        <p:tgtEl>
+                                          <p:spTgt spid="7"/>
+                                        </p:tgtEl>
+                                        <p:attrNameLst>
+                                          <p:attrName>style.visibility</p:attrName>
+                                        </p:attrNameLst>
+                                      </p:cBhvr>
+                                      <p:to>
+                                        <p:strVal val="visible"/>
+                                      </p:to>
+                                    </p:set>
+                                    <p:animEffect transition="in" filter="fade">
+                                      <p:cBhvr>
+                                        <p:cTn id="18" dur="500"/>
+                                        <p:tgtEl>
+                                          <p:spTgt spid="7"/>
+                                        </p:tgtEl>
+                                      </p:cBhvr>
+                                    </p:animEffect>
+                                    <p:anim calcmode="lin" valueType="num">
+                                      <p:cBhvr>
+                                        <p:cTn id="19" dur="500" fill="hold"/>
+                                        <p:tgtEl>
+                                          <p:spTgt spid="7"/>
+                                        </p:tgtEl>
+                                        <p:attrNameLst>
+                                          <p:attrName>ppt_x</p:attrName>
+                                        </p:attrNameLst>
+                                      </p:cBhvr>
+                                      <p:tavLst>
+                                        <p:tav tm="0">
+                                          <p:val>
+                                            <p:strVal val="#ppt_x"/>
+                                          </p:val>
+                                        </p:tav>
+                                        <p:tav tm="100000">
+                                          <p:val>
+                                            <p:strVal val="#ppt_x"/>
+                                          </p:val>
+                                        </p:tav>
+                                      </p:tavLst>
+                                    </p:anim>
+                                    <p:anim calcmode="lin" valueType="num">
+                                      <p:cBhvr>
+                                        <p:cTn id="20" dur="500" fill="hold"/>
+                                        <p:tgtEl>
+                                          <p:spTgt spid="7"/>
+                                        </p:tgtEl>
+                                        <p:attrNameLst>
+                                          <p:attrName>ppt_y</p:attrName>
+                                        </p:attrNameLst>
+                                      </p:cBhvr>
+                                      <p:tavLst>
+                                        <p:tav tm="0">
+                                          <p:val>
+                                            <p:strVal val="#ppt_y+.1"/>
+                                          </p:val>
+                                        </p:tav>
+                                        <p:tav tm="100000">
+                                          <p:val>
+                                            <p:strVal val="#ppt_y"/>
+                                          </p:val>
+                                        </p:tav>
+                                      </p:tavLst>
+                                    </p:anim>
+                                  </p:childTnLst>
+                                </p:cTn>
+                              </p:par>
+                            </p:childTnLst>
+                          </p:cTn>
+                        </p:par>
+                      </p:childTnLst>
+                    </p:cTn>
+                  </p:par>
+                  <p:par>
+                    <p:cTn id="29" fill="hold">
+                      <p:stCondLst>
+                        <p:cond delay="indefinite"/>
+                      </p:stCondLst>
+                      <p:childTnLst>
+                        <p:par>
+                          <p:cTn id="30" fill="hold">
+                            <p:stCondLst>
+                              <p:cond delay="0"/>
+                            </p:stCondLst>
+                            <p:childTnLst>
+                              <p:par>
+                                <p:cTn id="28" presetID="53" presetClass="entr" presetSubtype="16" fill="hold" nodeType="clickEffect">
+                                  <p:stCondLst>
+                                    <p:cond delay="0"/>
+                                  </p:stCondLst>
+                                  <p:childTnLst>
+                                    <p:set>
+                                      <p:cBhvr>
+                                        <p:cTn id="24" dur="1" fill="hold">
+                                          <p:stCondLst>
+                                            <p:cond delay="0"/>
+                                          </p:stCondLst>
+                                        </p:cTn>
+                                        <p:tgtEl>
+                                          <p:spTgt spid="8"/>
+                                        </p:tgtEl>
+                                        <p:attrNameLst>
+                                          <p:attrName>style.visibility</p:attrName>
+                                        </p:attrNameLst>
+                                      </p:cBhvr>
+                                      <p:to>
+                                        <p:strVal val="visible"/>
+                                      </p:to>
+                                    </p:set>
+                                    <p:animEffect transition="in" filter="fade">
+                                      <p:cBhvr>
+                                        <p:cTn id="25" dur="500"/>
+                                        <p:tgtEl>
+                                          <p:spTgt spid="8"/>
+                                        </p:tgtEl>
+                                      </p:cBhvr>
+                                    </p:animEffect>
+                                    <p:anim calcmode="lin" valueType="num">
+                                      <p:cBhvr>
+                                        <p:cTn id="26" dur="500" fill="hold"/>
+                                        <p:tgtEl>
+                                          <p:spTgt spid="8"/>
+                                        </p:tgtEl>
+                                        <p:attrNameLst>
+                                          <p:attrName>ppt_w</p:attrName>
+                                        </p:attrNameLst>
+                                      </p:cBhvr>
+                                      <p:tavLst>
+                                        <p:tav tm="0">
+                                          <p:val>
+                                            <p:fltVal val="0"/>
+                                          </p:val>
+                                        </p:tav>
+                                        <p:tav tm="100000">
+                                          <p:val>
+                                            <p:strVal val="#ppt_w"/>
+                                          </p:val>
+                                        </p:tav>
+                                      </p:tavLst>
+                                    </p:anim>
+                                    <p:anim calcmode="lin" valueType="num">
+                                      <p:cBhvr>
+                                        <p:cTn id="27" dur="500" fill="hold"/>
+                                        <p:tgtEl>
+                                          <p:spTgt spid="8"/>
+                                        </p:tgtEl>
+                                        <p:attrNameLst>
+                                          <p:attrName>ppt_h</p:attrName>
+                                        </p:attrNameLst>
+                                      </p:cBhvr>
+                                      <p:tavLst>
+                                        <p:tav tm="0">
+                                          <p:val>
+                                            <p:fltVal val="0"/>
+                                          </p:val>
+                                        </p:tav>
+                                        <p:tav tm="100000">
+                                          <p:val>
+                                            <p:strVal val="#ppt_h"/>
+                                          </p:val>
+                                        </p:tav>
+                                      </p:tavLst>
+                                    </p:anim>
+                                  </p:childTnLst>
+                                </p:cTn>
+                              </p:par>
+                            </p:childTnLst>
+                          </p:cTn>
+                        </p:par>
+                      </p:childTnLst>
+                    </p:cTn>
+                  </p:par>
+                  <p:par>
+                    <p:cTn id="36" fill="hold">
+                      <p:stCondLst>
+                        <p:cond delay="indefinite"/>
+                      </p:stCondLst>
+                      <p:childTnLst>
+                        <p:par>
+                          <p:cTn id="37" fill="hold">
+                            <p:stCondLst>
+                              <p:cond delay="0"/>
+                            </p:stCondLst>
+                            <p:childTnLst>
+                              <p:par>
+                                <p:cTn id="35" presetID="42" presetClass="entr" presetSubtype="0" fill="hold" nodeType="clickEffect">
+                                  <p:stCondLst>
+                                    <p:cond delay="0"/>
+                                  </p:stCondLst>
+                                  <p:childTnLst>
+                                    <p:set>
+                                      <p:cBhvr>
+                                        <p:cTn id="31" dur="1" fill="hold">
+                                          <p:stCondLst>
+                                            <p:cond delay="0"/>
+                                          </p:stCondLst>
+                                        </p:cTn>
+                                        <p:tgtEl>
+                                          <p:spTgt spid="11"/>
+                                        </p:tgtEl>
+                                        <p:attrNameLst>
+                                          <p:attrName>style.visibility</p:attrName>
+                                        </p:attrNameLst>
+                                      </p:cBhvr>
+                                      <p:to>
+                                        <p:strVal val="visible"/>
+                                      </p:to>
+                                    </p:set>
+                                    <p:animEffect transition="in" filter="fade">
+                                      <p:cBhvr>
+                                        <p:cTn id="32" dur="500"/>
+                                        <p:tgtEl>
+                                          <p:spTgt spid="11"/>
+                                        </p:tgtEl>
+                                      </p:cBhvr>
+                                    </p:animEffect>
+                                    <p:anim calcmode="lin" valueType="num">
+                                      <p:cBhvr>
+                                        <p:cTn id="33" dur="500" fill="hold"/>
+                                        <p:tgtEl>
+                                          <p:spTgt spid="11"/>
+                                        </p:tgtEl>
+                                        <p:attrNameLst>
+                                          <p:attrName>ppt_x</p:attrName>
+                                        </p:attrNameLst>
+                                      </p:cBhvr>
+                                      <p:tavLst>
+                                        <p:tav tm="0">
+                                          <p:val>
+                                            <p:strVal val="#ppt_x"/>
+                                          </p:val>
+                                        </p:tav>
+                                        <p:tav tm="100000">
+                                          <p:val>
+                                            <p:strVal val="#ppt_x"/>
+                                          </p:val>
+                                        </p:tav>
+                                      </p:tavLst>
+                                    </p:anim>
+                                    <p:anim calcmode="lin" valueType="num">
+                                      <p:cBhvr>
+                                        <p:cTn id="34" dur="500" fill="hold"/>
+                                        <p:tgtEl>
+                                          <p:spTgt spid="11"/>
+                                        </p:tgtEl>
+                                        <p:attrNameLst>
+                                          <p:attrName>ppt_y</p:attrName>
+                                        </p:attrNameLst>
+                                      </p:cBhvr>
+                                      <p:tavLst>
+                                        <p:tav tm="0">
+                                          <p:val>
+                                            <p:strVal val="#ppt_y+.1"/>
+                                          </p:val>
+                                        </p:tav>
+                                        <p:tav tm="100000">
+                                          <p:val>
+                                            <p:strVal val="#ppt_y"/>
+                                          </p:val>
+                                        </p:tav>
+                                      </p:tavLst>
+                                    </p:anim>
+                                  </p:childTnLst>
+                                </p:cTn>
+                              </p:par>
+                            </p:childTnLst>
+                          </p:cTn>
+                        </p:par>
+                      </p:childTnLst>
+                    </p:cTn>
+                  </p:par>
+                  <p:par>
+                    <p:cTn id="43" fill="hold">
+                      <p:stCondLst>
+                        <p:cond delay="indefinite"/>
+                      </p:stCondLst>
+                      <p:childTnLst>
+                        <p:par>
+                          <p:cTn id="44" fill="hold">
+                            <p:stCondLst>
+                              <p:cond delay="0"/>
+                            </p:stCondLst>
+                            <p:childTnLst>
+                              <p:par>
+                                <p:cTn id="42" presetID="42" presetClass="entr" presetSubtype="0" fill="hold" nodeType="clickEffect">
+                                  <p:stCondLst>
+                                    <p:cond delay="0"/>
+                                  </p:stCondLst>
+                                  <p:childTnLst>
+                                    <p:set>
+                                      <p:cBhvr>
+                                        <p:cTn id="38" dur="1" fill="hold">
+                                          <p:stCondLst>
+                                            <p:cond delay="0"/>
+                                          </p:stCondLst>
+                                        </p:cTn>
+                                        <p:tgtEl>
+                                          <p:spTgt spid="12"/>
+                                        </p:tgtEl>
+                                        <p:attrNameLst>
+                                          <p:attrName>style.visibility</p:attrName>
+                                        </p:attrNameLst>
+                                      </p:cBhvr>
+                                      <p:to>
+                                        <p:strVal val="visible"/>
+                                      </p:to>
+                                    </p:set>
+                                    <p:animEffect transition="in" filter="fade">
+                                      <p:cBhvr>
+                                        <p:cTn id="39" dur="500"/>
+                                        <p:tgtEl>
+                                          <p:spTgt spid="12"/>
+                                        </p:tgtEl>
+                                      </p:cBhvr>
+                                    </p:animEffect>
+                                    <p:anim calcmode="lin" valueType="num">
+                                      <p:cBhvr>
+                                        <p:cTn id="40" dur="500" fill="hold"/>
+                                        <p:tgtEl>
+                                          <p:spTgt spid="12"/>
+                                        </p:tgtEl>
+                                        <p:attrNameLst>
+                                          <p:attrName>ppt_x</p:attrName>
+                                        </p:attrNameLst>
+                                      </p:cBhvr>
+                                      <p:tavLst>
+                                        <p:tav tm="0">
+                                          <p:val>
+                                            <p:strVal val="#ppt_x"/>
+                                          </p:val>
+                                        </p:tav>
+                                        <p:tav tm="100000">
+                                          <p:val>
+                                            <p:strVal val="#ppt_x"/>
+                                          </p:val>
+                                        </p:tav>
+                                      </p:tavLst>
+                                    </p:anim>
+                                    <p:anim calcmode="lin" valueType="num">
+                                      <p:cBhvr>
+                                        <p:cTn id="41" dur="500" fill="hold"/>
+                                        <p:tgtEl>
+                                          <p:spTgt spid="12"/>
+                                        </p:tgtEl>
+                                        <p:attrNameLst>
+                                          <p:attrName>ppt_y</p:attrName>
+                                        </p:attrNameLst>
+                                      </p:cBhvr>
+                                      <p:tavLst>
+                                        <p:tav tm="0">
+                                          <p:val>
+                                            <p:strVal val="#ppt_y+.1"/>
+                                          </p:val>
+                                        </p:tav>
+                                        <p:tav tm="100000">
+                                          <p:val>
+                                            <p:strVal val="#ppt_y"/>
+                                          </p:val>
+                                        </p:tav>
+                                      </p:tavLst>
+                                    </p:anim>
+                                  </p:childTnLst>
+                                </p:cTn>
+                              </p:par>
+                            </p:childTnLst>
+                          </p:cTn>
+                        </p:par>
+                      </p:childTnLst>
+                    </p:cTn>
+                  </p:par>
+                  <p:par>
+                    <p:cTn id="50" fill="hold">
+                      <p:stCondLst>
+                        <p:cond delay="indefinite"/>
+                      </p:stCondLst>
+                      <p:childTnLst>
+                        <p:par>
+                          <p:cTn id="51" fill="hold">
+                            <p:stCondLst>
+                              <p:cond delay="0"/>
+                            </p:stCondLst>
+                            <p:childTnLst>
+                              <p:par>
+                                <p:cTn id="49" presetID="42" presetClass="entr" presetSubtype="0" fill="hold" nodeType="clickEffect">
+                                  <p:stCondLst>
+                                    <p:cond delay="0"/>
+                                  </p:stCondLst>
+                                  <p:childTnLst>
+                                    <p:set>
+                                      <p:cBhvr>
+                                        <p:cTn id="45" dur="1" fill="hold">
+                                          <p:stCondLst>
+                                            <p:cond delay="0"/>
+                                          </p:stCondLst>
+                                        </p:cTn>
+                                        <p:tgtEl>
+                                          <p:spTgt spid="13"/>
+                                        </p:tgtEl>
+                                        <p:attrNameLst>
+                                          <p:attrName>style.visibility</p:attrName>
+                                        </p:attrNameLst>
+                                      </p:cBhvr>
+                                      <p:to>
+                                        <p:strVal val="visible"/>
+                                      </p:to>
+                                    </p:set>
+                                    <p:animEffect transition="in" filter="fade">
+                                      <p:cBhvr>
+                                        <p:cTn id="46" dur="500"/>
+                                        <p:tgtEl>
+                                          <p:spTgt spid="13"/>
+                                        </p:tgtEl>
+                                      </p:cBhvr>
+                                    </p:animEffect>
+                                    <p:anim calcmode="lin" valueType="num">
+                                      <p:cBhvr>
+                                        <p:cTn id="47" dur="500" fill="hold"/>
+                                        <p:tgtEl>
+                                          <p:spTgt spid="13"/>
+                                        </p:tgtEl>
+                                        <p:attrNameLst>
+                                          <p:attrName>ppt_x</p:attrName>
+                                        </p:attrNameLst>
+                                      </p:cBhvr>
+                                      <p:tavLst>
+                                        <p:tav tm="0">
+                                          <p:val>
+                                            <p:strVal val="#ppt_x"/>
+                                          </p:val>
+                                        </p:tav>
+                                        <p:tav tm="100000">
+                                          <p:val>
+                                            <p:strVal val="#ppt_x"/>
+                                          </p:val>
+                                        </p:tav>
+                                      </p:tavLst>
+                                    </p:anim>
+                                    <p:anim calcmode="lin" valueType="num">
+                                      <p:cBhvr>
+                                        <p:cTn id="48" dur="500" fill="hold"/>
+                                        <p:tgtEl>
+                                          <p:spTgt spid="13"/>
+                                        </p:tgtEl>
+                                        <p:attrNameLst>
+                                          <p:attrName>ppt_y</p:attrName>
+                                        </p:attrNameLst>
+                                      </p:cBhvr>
+                                      <p:tavLst>
+                                        <p:tav tm="0">
+                                          <p:val>
+                                            <p:strVal val="#ppt_y+.1"/>
+                                          </p:val>
+                                        </p:tav>
+                                        <p:tav tm="100000">
+                                          <p:val>
+                                            <p:strVal val="#ppt_y"/>
+                                          </p:val>
+                                        </p:tav>
+                                      </p:tavLst>
+                                    </p:anim>
+                                  </p:childTnLst>
+                                </p:cTn>
+                              </p:par>
+                            </p:childTnLst>
+                          </p:cTn>
+                        </p:par>
+                      </p:childTnLst>
+                    </p:cTn>
+                  </p:par>
+                  <p:par>
+                    <p:cTn id="57" fill="hold">
+                      <p:stCondLst>
+                        <p:cond delay="indefinite"/>
+                      </p:stCondLst>
+                      <p:childTnLst>
+                        <p:par>
+                          <p:cTn id="58" fill="hold">
+                            <p:stCondLst>
+                              <p:cond delay="0"/>
+                            </p:stCondLst>
+                            <p:childTnLst>
+                              <p:par>
+                                <p:cTn id="56" presetID="53" presetClass="entr" presetSubtype="16" fill="hold" nodeType="clickEffect">
+                                  <p:stCondLst>
+                                    <p:cond delay="0"/>
+                                  </p:stCondLst>
+                                  <p:childTnLst>
+                                    <p:set>
+                                      <p:cBhvr>
+                                        <p:cTn id="52" dur="1" fill="hold">
+                                          <p:stCondLst>
+                                            <p:cond delay="0"/>
+                                          </p:stCondLst>
+                                        </p:cTn>
+                                        <p:tgtEl>
+                                          <p:spTgt spid="14"/>
+                                        </p:tgtEl>
+                                        <p:attrNameLst>
+                                          <p:attrName>style.visibility</p:attrName>
+                                        </p:attrNameLst>
+                                      </p:cBhvr>
+                                      <p:to>
+                                        <p:strVal val="visible"/>
+                                      </p:to>
+                                    </p:set>
+                                    <p:animEffect transition="in" filter="fade">
+                                      <p:cBhvr>
+                                        <p:cTn id="53" dur="500"/>
+                                        <p:tgtEl>
+                                          <p:spTgt spid="14"/>
+                                        </p:tgtEl>
+                                      </p:cBhvr>
+                                    </p:animEffect>
+                                    <p:anim calcmode="lin" valueType="num">
+                                      <p:cBhvr>
+                                        <p:cTn id="54" dur="500" fill="hold"/>
+                                        <p:tgtEl>
+                                          <p:spTgt spid="14"/>
+                                        </p:tgtEl>
+                                        <p:attrNameLst>
+                                          <p:attrName>ppt_w</p:attrName>
+                                        </p:attrNameLst>
+                                      </p:cBhvr>
+                                      <p:tavLst>
+                                        <p:tav tm="0">
+                                          <p:val>
+                                            <p:fltVal val="0"/>
+                                          </p:val>
+                                        </p:tav>
+                                        <p:tav tm="100000">
+                                          <p:val>
+                                            <p:strVal val="#ppt_w"/>
+                                          </p:val>
+                                        </p:tav>
+                                      </p:tavLst>
+                                    </p:anim>
+                                    <p:anim calcmode="lin" valueType="num">
+                                      <p:cBhvr>
+                                        <p:cTn id="55" dur="500" fill="hold"/>
+                                        <p:tgtEl>
+                                          <p:spTgt spid="14"/>
+                                        </p:tgtEl>
+                                        <p:attrNameLst>
+                                          <p:attrName>ppt_h</p:attrName>
+                                        </p:attrNameLst>
+                                      </p:cBhvr>
+                                      <p:tavLst>
+                                        <p:tav tm="0">
+                                          <p:val>
+                                            <p:fltVal val="0"/>
+                                          </p:val>
+                                        </p:tav>
+                                        <p:tav tm="100000">
+                                          <p:val>
+                                            <p:strVal val="#ppt_h"/>
+                                          </p:val>
+                                        </p:tav>
+                                      </p:tavLst>
+                                    </p:anim>
+                                  </p:childTnLst>
+                                </p:cTn>
+                              </p:par>
+                            </p:childTnLst>
+                          </p:cTn>
+                        </p:par>
+                      </p:childTnLst>
+                    </p:cTn>
+                  </p:par>
+                </p:childTnLst>
+              </p:cTn>
+              <p:prevCondLst>
+                <p:cond evt="onPrev" delay="0">
+                  <p:tgtEl>
+                    <p:sldTgt/>
+                  </p:tgtEl>
+                </p:cond>
+              </p:prevCondLst>
+              <p:nextCondLst>
+                <p:cond evt="onNext" delay="0">
+                  <p:tgtEl>
+                    <p:sldTgt/>
+                  </p:tgtEl>
+                </p:cond>
+              </p:nextCondLst>
+            </p:seq>
+          </p:childTnLst>
+        </p:cTn>
+      </p:par>
+    </p:tnLst>
+  </p:timing>
+</p:sld>
+</file>
+
+<file path=ppt/slides/slide34.xml><?xml version="1.0" encoding="utf-8"?>
+<p:sld xmlns:a="http://schemas.openxmlformats.org/drawingml/2006/main" xmlns:r="http://schemas.openxmlformats.org/officeDocument/2006/relationships" xmlns:p="http://schemas.openxmlformats.org/presentationml/2006/main">
+  <p:cSld>
+    <p:spTree>
+      <p:nvGrpSpPr>
+        <p:cNvPr id="1" name=""/>
+        <p:cNvGrpSpPr/>
+        <p:nvPr/>
+      </p:nvGrpSpPr>
+      <p:grpSpPr>
+        <a:xfrm>
+          <a:off x="0" y="0"/>
+          <a:ext cx="0" cy="0"/>
+          <a:chOff x="0" y="0"/>
+          <a:chExt cx="0" cy="0"/>
+        </a:xfrm>
+      </p:grpSpPr>
+      <p:sp>
+        <p:nvSpPr>
+          <p:cNvPr id="2" name="Shape 2"/>
+          <p:cNvSpPr txBox="1"/>
+          <p:nvPr/>
+        </p:nvSpPr>
+        <p:spPr>
+          <a:xfrm>
+            <a:off x="685800" y="457200"/>
+            <a:ext cx="10820095" cy="237744"/>
+          </a:xfrm>
+          <a:prstGeom prst="rect">
+            <a:avLst/>
+          </a:prstGeom>
+          <a:noFill/>
+          <a:ln>
+            <a:noFill/>
+          </a:ln>
+        </p:spPr>
+        <p:txBody>
+          <a:bodyPr wrap="square" lIns="36576" tIns="27432" rIns="36576" bIns="27432" anchor="t">
+            <a:noAutofit/>
+          </a:bodyPr>
+          <a:lstStyle/>
+          <a:p>
+            <a:pPr algn="l">
+              <a:lnSpc>
+                <a:spcPct val="100000"/>
+              </a:lnSpc>
+            </a:pPr>
+            <a:r>
+              <a:rPr lang="en-US" sz="1200" dirty="0" b="1" spc="150" cap="all">
+                <a:solidFill>
+                  <a:srgbClr val="5F6272"/>
+                </a:solidFill>
+                <a:latin typeface="Segoe UI"/>
+                <a:cs typeface="Segoe UI"/>
+              </a:rPr>
+              <a:t xml:space="preserve">Exit Ticket</a:t>
+            </a:r>
+            <a:endParaRPr lang="en-US" sz="1200" dirty="0"/>
+          </a:p>
+        </p:txBody>
+      </p:sp>
+      <p:sp>
+        <p:nvSpPr>
+          <p:cNvPr id="3" name="Shape 3"/>
+          <p:cNvSpPr txBox="1"/>
+          <p:nvPr/>
+        </p:nvSpPr>
+        <p:spPr>
+          <a:xfrm>
+            <a:off x="685800" y="866394"/>
+            <a:ext cx="10820095" cy="580644"/>
+          </a:xfrm>
+          <a:prstGeom prst="rect">
+            <a:avLst/>
+          </a:prstGeom>
+          <a:noFill/>
+          <a:ln>
+            <a:noFill/>
+          </a:ln>
+        </p:spPr>
+        <p:txBody>
+          <a:bodyPr wrap="square" lIns="36576" tIns="27432" rIns="36576" bIns="27432" anchor="t">
+            <a:noAutofit/>
+          </a:bodyPr>
+          <a:lstStyle/>
+          <a:p>
+            <a:pPr algn="l">
+              <a:lnSpc>
+                <a:spcPct val="100000"/>
+              </a:lnSpc>
+            </a:pPr>
+            <a:r>
+              <a:rPr lang="en-US" sz="3450" dirty="0" b="1">
+                <a:solidFill>
+                  <a:srgbClr val="16171D"/>
+                </a:solidFill>
+                <a:latin typeface="Segoe UI"/>
+                <a:cs typeface="Segoe UI"/>
+              </a:rPr>
+              <a:t xml:space="preserve">Show what you know</a:t>
+            </a:r>
+            <a:endParaRPr lang="en-US" sz="3450" dirty="0"/>
+          </a:p>
+        </p:txBody>
+      </p:sp>
+      <p:sp>
+        <p:nvSpPr>
+          <p:cNvPr id="6" name="Shape 6"/>
+          <p:cNvSpPr txBox="1"/>
+          <p:nvPr/>
+        </p:nvSpPr>
+        <p:spPr>
+          <a:xfrm>
+            <a:off x="685800" y="1618488"/>
             <a:ext cx="10820095" cy="1309116"/>
           </a:xfrm>
           <a:prstGeom prst="roundRect">
@@ -26362,13 +31014,13 @@
       </p:sp>
       <p:sp>
         <p:nvSpPr>
-          <p:cNvPr id="10" name="Shape 10"/>
+          <p:cNvPr id="4" name="Shape 4"/>
           <p:cNvSpPr txBox="1"/>
           <p:nvPr/>
         </p:nvSpPr>
         <p:spPr>
           <a:xfrm>
-            <a:off x="895350" y="4674870"/>
+            <a:off x="895350" y="1789938"/>
             <a:ext cx="10400995" cy="352044"/>
           </a:xfrm>
           <a:prstGeom prst="rect">
@@ -26398,7 +31050,7 @@
                 <a:latin typeface="Segoe UI"/>
                 <a:cs typeface="Segoe UI"/>
               </a:rPr>
-              <a:t xml:space="preserve">3. Write the line parallel to </a:t>
+              <a:t xml:space="preserve">1. </a:t>
             </a:r>
             <a:r>
               <a:rPr lang="en-US" sz="1950" dirty="0" i="1">
@@ -26408,7 +31060,7 @@
                 <a:latin typeface="Segoe UI"/>
                 <a:cs typeface="Segoe UI"/>
               </a:rPr>
-              <a:t xml:space="preserve">y</a:t>
+              <a:t xml:space="preserve">g</a:t>
             </a:r>
             <a:r>
               <a:rPr lang="en-US" sz="1950" dirty="0">
@@ -26418,7 +31070,7 @@
                 <a:latin typeface="Segoe UI"/>
                 <a:cs typeface="Segoe UI"/>
               </a:rPr>
-              <a:t xml:space="preserve"> = 4</a:t>
+              <a:t xml:space="preserve">(</a:t>
             </a:r>
             <a:r>
               <a:rPr lang="en-US" sz="1950" dirty="0" i="1">
@@ -26438,7 +31090,47 @@
                 <a:latin typeface="Segoe UI"/>
                 <a:cs typeface="Segoe UI"/>
               </a:rPr>
-              <a:t xml:space="preserve"> + 1 through (0, −2).</a:t>
+              <a:t xml:space="preserve">) = </a:t>
+            </a:r>
+            <a:r>
+              <a:rPr lang="en-US" sz="1950" dirty="0" i="1">
+                <a:solidFill>
+                  <a:srgbClr val="16171D"/>
+                </a:solidFill>
+                <a:latin typeface="Segoe UI"/>
+                <a:cs typeface="Segoe UI"/>
+              </a:rPr>
+              <a:t xml:space="preserve">f</a:t>
+            </a:r>
+            <a:r>
+              <a:rPr lang="en-US" sz="1950" dirty="0">
+                <a:solidFill>
+                  <a:srgbClr val="16171D"/>
+                </a:solidFill>
+                <a:latin typeface="Segoe UI"/>
+                <a:cs typeface="Segoe UI"/>
+              </a:rPr>
+              <a:t xml:space="preserve">(</a:t>
+            </a:r>
+            <a:r>
+              <a:rPr lang="en-US" sz="1950" dirty="0" i="1">
+                <a:solidFill>
+                  <a:srgbClr val="16171D"/>
+                </a:solidFill>
+                <a:latin typeface="Segoe UI"/>
+                <a:cs typeface="Segoe UI"/>
+              </a:rPr>
+              <a:t xml:space="preserve">x</a:t>
+            </a:r>
+            <a:r>
+              <a:rPr lang="en-US" sz="1950" dirty="0">
+                <a:solidFill>
+                  <a:srgbClr val="16171D"/>
+                </a:solidFill>
+                <a:latin typeface="Segoe UI"/>
+                <a:cs typeface="Segoe UI"/>
+              </a:rPr>
+              <a:t xml:space="preserve">) + 6. Up or down? How far?</a:t>
             </a:r>
             <a:endParaRPr lang="en-US" sz="1950" dirty="0"/>
           </a:p>
@@ -26446,14 +31138,14 @@
       </p:sp>
       <p:sp>
         <p:nvSpPr>
-          <p:cNvPr id="11" name="Shape 11"/>
+          <p:cNvPr id="5" name="Shape 5"/>
           <p:cNvSpPr txBox="1"/>
           <p:nvPr/>
         </p:nvSpPr>
         <p:spPr>
           <a:xfrm>
-            <a:off x="895350" y="5122164"/>
-            <a:ext cx="3571326" cy="518922"/>
+            <a:off x="895350" y="2237232"/>
+            <a:ext cx="2576368" cy="518922"/>
           </a:xfrm>
           <a:prstGeom prst="roundRect">
             <a:avLst>
@@ -26489,6 +31181,410 @@
               <a:t xml:space="preserve">ANSWER   </a:t>
             </a:r>
             <a:r>
+              <a:rPr lang="en-US" sz="2325" dirty="0">
+                <a:solidFill>
+                  <a:srgbClr val="16171D"/>
+                </a:solidFill>
+                <a:latin typeface="Cambria"/>
+                <a:cs typeface="Cambria"/>
+              </a:rPr>
+              <a:t xml:space="preserve">up 6</a:t>
+            </a:r>
+            <a:endParaRPr lang="en-US" sz="2325" dirty="0"/>
+          </a:p>
+        </p:txBody>
+      </p:sp>
+      <p:sp>
+        <p:nvSpPr>
+          <p:cNvPr id="9" name="Shape 9"/>
+          <p:cNvSpPr txBox="1"/>
+          <p:nvPr/>
+        </p:nvSpPr>
+        <p:spPr>
+          <a:xfrm>
+            <a:off x="685800" y="3060954"/>
+            <a:ext cx="10820095" cy="1309116"/>
+          </a:xfrm>
+          <a:prstGeom prst="roundRect">
+            <a:avLst>
+              <a:gd name="adj" fmla="val 8000"/>
+            </a:avLst>
+          </a:prstGeom>
+          <a:solidFill>
+            <a:srgbClr val="FFFFFF"/>
+          </a:solidFill>
+          <a:ln w="12700">
+            <a:solidFill>
+              <a:srgbClr val="E3E4EC"/>
+            </a:solidFill>
+          </a:ln>
+        </p:spPr>
+        <p:txBody>
+          <a:bodyPr wrap="square" lIns="36576" tIns="27432" rIns="36576" bIns="27432" anchor="t">
+            <a:noAutofit/>
+          </a:bodyPr>
+          <a:lstStyle/>
+          <a:p>
+            <a:pPr algn="l">
+              <a:lnSpc>
+                <a:spcPct val="100000"/>
+              </a:lnSpc>
+            </a:pPr>
+            <a:endParaRPr lang="en-US" sz="1950" dirty="0"/>
+          </a:p>
+        </p:txBody>
+      </p:sp>
+      <p:sp>
+        <p:nvSpPr>
+          <p:cNvPr id="7" name="Shape 7"/>
+          <p:cNvSpPr txBox="1"/>
+          <p:nvPr/>
+        </p:nvSpPr>
+        <p:spPr>
+          <a:xfrm>
+            <a:off x="895350" y="3232404"/>
+            <a:ext cx="10400995" cy="352044"/>
+          </a:xfrm>
+          <a:prstGeom prst="rect">
+            <a:avLst/>
+          </a:prstGeom>
+          <a:noFill/>
+          <a:ln>
+            <a:noFill/>
+          </a:ln>
+        </p:spPr>
+        <p:txBody>
+          <a:bodyPr wrap="square" lIns="36576" tIns="27432" rIns="36576" bIns="27432" anchor="t">
+            <a:noAutofit/>
+          </a:bodyPr>
+          <a:lstStyle/>
+          <a:p>
+            <a:pPr algn="l">
+              <a:lnSpc>
+                <a:spcPct val="100000"/>
+              </a:lnSpc>
+            </a:pPr>
+            <a:r>
+              <a:rPr lang="en-US" sz="1950" dirty="0">
+                <a:solidFill>
+                  <a:srgbClr val="16171D"/>
+                </a:solidFill>
+                <a:latin typeface="Segoe UI"/>
+                <a:cs typeface="Segoe UI"/>
+              </a:rPr>
+              <a:t xml:space="preserve">2. What is the slope of </a:t>
+            </a:r>
+            <a:r>
+              <a:rPr lang="en-US" sz="1950" dirty="0" i="1">
+                <a:solidFill>
+                  <a:srgbClr val="16171D"/>
+                </a:solidFill>
+                <a:latin typeface="Segoe UI"/>
+                <a:cs typeface="Segoe UI"/>
+              </a:rPr>
+              <a:t xml:space="preserve">g</a:t>
+            </a:r>
+            <a:r>
+              <a:rPr lang="en-US" sz="1950" dirty="0">
+                <a:solidFill>
+                  <a:srgbClr val="16171D"/>
+                </a:solidFill>
+                <a:latin typeface="Segoe UI"/>
+                <a:cs typeface="Segoe UI"/>
+              </a:rPr>
+              <a:t xml:space="preserve">(</a:t>
+            </a:r>
+            <a:r>
+              <a:rPr lang="en-US" sz="1950" dirty="0" i="1">
+                <a:solidFill>
+                  <a:srgbClr val="16171D"/>
+                </a:solidFill>
+                <a:latin typeface="Segoe UI"/>
+                <a:cs typeface="Segoe UI"/>
+              </a:rPr>
+              <a:t xml:space="preserve">x</a:t>
+            </a:r>
+            <a:r>
+              <a:rPr lang="en-US" sz="1950" dirty="0">
+                <a:solidFill>
+                  <a:srgbClr val="16171D"/>
+                </a:solidFill>
+                <a:latin typeface="Segoe UI"/>
+                <a:cs typeface="Segoe UI"/>
+              </a:rPr>
+              <a:t xml:space="preserve">) = 5 · </a:t>
+            </a:r>
+            <a:r>
+              <a:rPr lang="en-US" sz="1950" dirty="0" i="1">
+                <a:solidFill>
+                  <a:srgbClr val="16171D"/>
+                </a:solidFill>
+                <a:latin typeface="Segoe UI"/>
+                <a:cs typeface="Segoe UI"/>
+              </a:rPr>
+              <a:t xml:space="preserve">f</a:t>
+            </a:r>
+            <a:r>
+              <a:rPr lang="en-US" sz="1950" dirty="0">
+                <a:solidFill>
+                  <a:srgbClr val="16171D"/>
+                </a:solidFill>
+                <a:latin typeface="Segoe UI"/>
+                <a:cs typeface="Segoe UI"/>
+              </a:rPr>
+              <a:t xml:space="preserve">(</a:t>
+            </a:r>
+            <a:r>
+              <a:rPr lang="en-US" sz="1950" dirty="0" i="1">
+                <a:solidFill>
+                  <a:srgbClr val="16171D"/>
+                </a:solidFill>
+                <a:latin typeface="Segoe UI"/>
+                <a:cs typeface="Segoe UI"/>
+              </a:rPr>
+              <a:t xml:space="preserve">x</a:t>
+            </a:r>
+            <a:r>
+              <a:rPr lang="en-US" sz="1950" dirty="0">
+                <a:solidFill>
+                  <a:srgbClr val="16171D"/>
+                </a:solidFill>
+                <a:latin typeface="Segoe UI"/>
+                <a:cs typeface="Segoe UI"/>
+              </a:rPr>
+              <a:t xml:space="preserve">)?</a:t>
+            </a:r>
+            <a:endParaRPr lang="en-US" sz="1950" dirty="0"/>
+          </a:p>
+        </p:txBody>
+      </p:sp>
+      <p:sp>
+        <p:nvSpPr>
+          <p:cNvPr id="8" name="Shape 8"/>
+          <p:cNvSpPr txBox="1"/>
+          <p:nvPr/>
+        </p:nvSpPr>
+        <p:spPr>
+          <a:xfrm>
+            <a:off x="895350" y="3679698"/>
+            <a:ext cx="2078888" cy="518922"/>
+          </a:xfrm>
+          <a:prstGeom prst="roundRect">
+            <a:avLst>
+              <a:gd name="adj" fmla="val 8000"/>
+            </a:avLst>
+          </a:prstGeom>
+          <a:solidFill>
+            <a:srgbClr val="EDF5E9"/>
+          </a:solidFill>
+          <a:ln>
+            <a:noFill/>
+          </a:ln>
+        </p:spPr>
+        <p:txBody>
+          <a:bodyPr wrap="square" lIns="164592" tIns="64008" rIns="164592" bIns="64008" anchor="ctr">
+            <a:noAutofit/>
+          </a:bodyPr>
+          <a:lstStyle/>
+          <a:p>
+            <a:pPr algn="l">
+              <a:lnSpc>
+                <a:spcPct val="100000"/>
+              </a:lnSpc>
+            </a:pPr>
+            <a:r>
+              <a:rPr lang="en-US" sz="1125" dirty="0" b="1" spc="100">
+                <a:solidFill>
+                  <a:srgbClr val="4F8A3C"/>
+                </a:solidFill>
+                <a:latin typeface="Segoe UI"/>
+                <a:cs typeface="Segoe UI"/>
+              </a:rPr>
+              <a:t xml:space="preserve">ANSWER   </a:t>
+            </a:r>
+            <a:r>
+              <a:rPr lang="en-US" sz="2325" dirty="0">
+                <a:solidFill>
+                  <a:srgbClr val="16171D"/>
+                </a:solidFill>
+                <a:latin typeface="Cambria"/>
+                <a:cs typeface="Cambria"/>
+              </a:rPr>
+              <a:t xml:space="preserve">5</a:t>
+            </a:r>
+            <a:endParaRPr lang="en-US" sz="2325" dirty="0"/>
+          </a:p>
+        </p:txBody>
+      </p:sp>
+      <p:sp>
+        <p:nvSpPr>
+          <p:cNvPr id="12" name="Shape 12"/>
+          <p:cNvSpPr txBox="1"/>
+          <p:nvPr/>
+        </p:nvSpPr>
+        <p:spPr>
+          <a:xfrm>
+            <a:off x="685800" y="4503420"/>
+            <a:ext cx="10820095" cy="1309116"/>
+          </a:xfrm>
+          <a:prstGeom prst="roundRect">
+            <a:avLst>
+              <a:gd name="adj" fmla="val 8000"/>
+            </a:avLst>
+          </a:prstGeom>
+          <a:solidFill>
+            <a:srgbClr val="FFFFFF"/>
+          </a:solidFill>
+          <a:ln w="12700">
+            <a:solidFill>
+              <a:srgbClr val="E3E4EC"/>
+            </a:solidFill>
+          </a:ln>
+        </p:spPr>
+        <p:txBody>
+          <a:bodyPr wrap="square" lIns="36576" tIns="27432" rIns="36576" bIns="27432" anchor="t">
+            <a:noAutofit/>
+          </a:bodyPr>
+          <a:lstStyle/>
+          <a:p>
+            <a:pPr algn="l">
+              <a:lnSpc>
+                <a:spcPct val="100000"/>
+              </a:lnSpc>
+            </a:pPr>
+            <a:endParaRPr lang="en-US" sz="1950" dirty="0"/>
+          </a:p>
+        </p:txBody>
+      </p:sp>
+      <p:sp>
+        <p:nvSpPr>
+          <p:cNvPr id="10" name="Shape 10"/>
+          <p:cNvSpPr txBox="1"/>
+          <p:nvPr/>
+        </p:nvSpPr>
+        <p:spPr>
+          <a:xfrm>
+            <a:off x="895350" y="4674870"/>
+            <a:ext cx="10400995" cy="352044"/>
+          </a:xfrm>
+          <a:prstGeom prst="rect">
+            <a:avLst/>
+          </a:prstGeom>
+          <a:noFill/>
+          <a:ln>
+            <a:noFill/>
+          </a:ln>
+        </p:spPr>
+        <p:txBody>
+          <a:bodyPr wrap="square" lIns="36576" tIns="27432" rIns="36576" bIns="27432" anchor="t">
+            <a:noAutofit/>
+          </a:bodyPr>
+          <a:lstStyle/>
+          <a:p>
+            <a:pPr algn="l">
+              <a:lnSpc>
+                <a:spcPct val="100000"/>
+              </a:lnSpc>
+            </a:pPr>
+            <a:r>
+              <a:rPr lang="en-US" sz="1950" dirty="0">
+                <a:solidFill>
+                  <a:srgbClr val="16171D"/>
+                </a:solidFill>
+                <a:latin typeface="Segoe UI"/>
+                <a:cs typeface="Segoe UI"/>
+              </a:rPr>
+              <a:t xml:space="preserve">3. Write the line parallel to </a:t>
+            </a:r>
+            <a:r>
+              <a:rPr lang="en-US" sz="1950" dirty="0" i="1">
+                <a:solidFill>
+                  <a:srgbClr val="16171D"/>
+                </a:solidFill>
+                <a:latin typeface="Segoe UI"/>
+                <a:cs typeface="Segoe UI"/>
+              </a:rPr>
+              <a:t xml:space="preserve">y</a:t>
+            </a:r>
+            <a:r>
+              <a:rPr lang="en-US" sz="1950" dirty="0">
+                <a:solidFill>
+                  <a:srgbClr val="16171D"/>
+                </a:solidFill>
+                <a:latin typeface="Segoe UI"/>
+                <a:cs typeface="Segoe UI"/>
+              </a:rPr>
+              <a:t xml:space="preserve"> = 4</a:t>
+            </a:r>
+            <a:r>
+              <a:rPr lang="en-US" sz="1950" dirty="0" i="1">
+                <a:solidFill>
+                  <a:srgbClr val="16171D"/>
+                </a:solidFill>
+                <a:latin typeface="Segoe UI"/>
+                <a:cs typeface="Segoe UI"/>
+              </a:rPr>
+              <a:t xml:space="preserve">x</a:t>
+            </a:r>
+            <a:r>
+              <a:rPr lang="en-US" sz="1950" dirty="0">
+                <a:solidFill>
+                  <a:srgbClr val="16171D"/>
+                </a:solidFill>
+                <a:latin typeface="Segoe UI"/>
+                <a:cs typeface="Segoe UI"/>
+              </a:rPr>
+              <a:t xml:space="preserve"> + 1 through (0, −2).</a:t>
+            </a:r>
+            <a:endParaRPr lang="en-US" sz="1950" dirty="0"/>
+          </a:p>
+        </p:txBody>
+      </p:sp>
+      <p:sp>
+        <p:nvSpPr>
+          <p:cNvPr id="11" name="Shape 11"/>
+          <p:cNvSpPr txBox="1"/>
+          <p:nvPr/>
+        </p:nvSpPr>
+        <p:spPr>
+          <a:xfrm>
+            <a:off x="895350" y="5122164"/>
+            <a:ext cx="3571326" cy="518922"/>
+          </a:xfrm>
+          <a:prstGeom prst="roundRect">
+            <a:avLst>
+              <a:gd name="adj" fmla="val 8000"/>
+            </a:avLst>
+          </a:prstGeom>
+          <a:solidFill>
+            <a:srgbClr val="EDF5E9"/>
+          </a:solidFill>
+          <a:ln>
+            <a:noFill/>
+          </a:ln>
+        </p:spPr>
+        <p:txBody>
+          <a:bodyPr wrap="square" lIns="164592" tIns="64008" rIns="164592" bIns="64008" anchor="ctr">
+            <a:noAutofit/>
+          </a:bodyPr>
+          <a:lstStyle/>
+          <a:p>
+            <a:pPr algn="l">
+              <a:lnSpc>
+                <a:spcPct val="100000"/>
+              </a:lnSpc>
+            </a:pPr>
+            <a:r>
+              <a:rPr lang="en-US" sz="1125" dirty="0" b="1" spc="100">
+                <a:solidFill>
+                  <a:srgbClr val="4F8A3C"/>
+                </a:solidFill>
+                <a:latin typeface="Segoe UI"/>
+                <a:cs typeface="Segoe UI"/>
+              </a:rPr>
+              <a:t xml:space="preserve">ANSWER   </a:t>
+            </a:r>
+            <a:r>
               <a:rPr lang="en-US" sz="2325" dirty="0" i="1">
                 <a:solidFill>
                   <a:srgbClr val="16171D"/>
@@ -26561,7 +31657,7 @@
                   <a:srgbClr val="5F6272"/>
                 </a:solidFill>
               </a:rPr>
-              <a:t>32</a:t>
+              <a:t>34</a:t>
             </a:fld>
           </a:p>
         </p:txBody>
@@ -26904,7 +32000,7 @@
 </p:sld>
 </file>
 
-<file path=ppt/slides/slide33.xml><?xml version="1.0" encoding="utf-8"?>
+<file path=ppt/slides/slide35.xml><?xml version="1.0" encoding="utf-8"?>
 <p:sld xmlns:a="http://schemas.openxmlformats.org/drawingml/2006/main" xmlns:r="http://schemas.openxmlformats.org/officeDocument/2006/relationships" xmlns:p="http://schemas.openxmlformats.org/presentationml/2006/main">
   <p:cSld>
     <p:spTree>
@@ -27082,7 +32178,7 @@
                   <a:srgbClr val="5F6272"/>
                 </a:solidFill>
               </a:rPr>
-              <a:t>33</a:t>
+              <a:t>35</a:t>
             </a:fld>
           </a:p>
         </p:txBody>
@@ -27098,7 +32194,7 @@
 </p:sld>
 </file>
 
-<file path=ppt/slides/slide34.xml><?xml version="1.0" encoding="utf-8"?>
+<file path=ppt/slides/slide36.xml><?xml version="1.0" encoding="utf-8"?>
 <p:sld xmlns:a="http://schemas.openxmlformats.org/drawingml/2006/main" xmlns:r="http://schemas.openxmlformats.org/officeDocument/2006/relationships" xmlns:p="http://schemas.openxmlformats.org/presentationml/2006/main">
   <p:cSld>
     <p:spTree>
@@ -27415,7 +32511,7 @@
                   <a:srgbClr val="5F6272"/>
                 </a:solidFill>
               </a:rPr>
-              <a:t>34</a:t>
+              <a:t>36</a:t>
             </a:fld>
           </a:p>
         </p:txBody>

--- a/IEP/t2-lesson1-transforming-linear-functions-IEP-catchup.pptx
+++ b/IEP/t2-lesson1-transforming-linear-functions-IEP-catchup.pptx
@@ -1777,7 +1777,7 @@
           <a:p>
             <a:r>
               <a:rPr lang="en-US" dirty="0"/>
-              <a:t>Give students time to try all items before revealing. Students may use the steps slide and their notes.</a:t>
+              <a:t>Give students time to try all items before revealing. Students may use the steps slide and their notes. After each answer, click once per step and read it aloud so students can find where their work went wrong.</a:t>
             </a:r>
           </a:p>
         </p:txBody>
@@ -40293,14 +40293,14 @@
       </p:sp>
       <p:sp>
         <p:nvSpPr>
-          <p:cNvPr id="6" name="Shape 6"/>
+          <p:cNvPr id="8" name="Shape 8"/>
           <p:cNvSpPr txBox="1"/>
           <p:nvPr/>
         </p:nvSpPr>
         <p:spPr>
           <a:xfrm>
             <a:off x="685800" y="1618488"/>
-            <a:ext cx="10820095" cy="1309116"/>
+            <a:ext cx="3479698" cy="2626614"/>
           </a:xfrm>
           <a:prstGeom prst="roundRect">
             <a:avLst>
@@ -40340,7 +40340,7 @@
         <p:spPr>
           <a:xfrm>
             <a:off x="895350" y="1789938"/>
-            <a:ext cx="10400995" cy="352044"/>
+            <a:ext cx="3060598" cy="649224"/>
           </a:xfrm>
           <a:prstGeom prst="rect">
             <a:avLst/>
@@ -40463,7 +40463,7 @@
         </p:nvSpPr>
         <p:spPr>
           <a:xfrm>
-            <a:off x="895350" y="2237232"/>
+            <a:off x="895350" y="2534412"/>
             <a:ext cx="2576368" cy="518922"/>
           </a:xfrm>
           <a:prstGeom prst="roundRect">
@@ -40515,14 +40515,122 @@
       </p:sp>
       <p:sp>
         <p:nvSpPr>
-          <p:cNvPr id="9" name="Shape 9"/>
+          <p:cNvPr id="6" name="Shape 6"/>
           <p:cNvSpPr txBox="1"/>
           <p:nvPr/>
         </p:nvSpPr>
         <p:spPr>
           <a:xfrm>
-            <a:off x="685800" y="3060954"/>
-            <a:ext cx="10820095" cy="1309116"/>
+            <a:off x="895350" y="3148584"/>
+            <a:ext cx="3060598" cy="534924"/>
+          </a:xfrm>
+          <a:prstGeom prst="rect">
+            <a:avLst/>
+          </a:prstGeom>
+          <a:noFill/>
+          <a:ln>
+            <a:noFill/>
+          </a:ln>
+        </p:spPr>
+        <p:txBody>
+          <a:bodyPr wrap="square" lIns="36576" tIns="27432" rIns="36576" bIns="27432" anchor="t">
+            <a:noAutofit/>
+          </a:bodyPr>
+          <a:lstStyle/>
+          <a:p>
+            <a:pPr algn="l">
+              <a:lnSpc>
+                <a:spcPct val="100000"/>
+              </a:lnSpc>
+            </a:pPr>
+            <a:r>
+              <a:rPr lang="en-US" sz="1575" dirty="0" b="1">
+                <a:solidFill>
+                  <a:srgbClr val="16171D"/>
+                </a:solidFill>
+                <a:latin typeface="Segoe UI"/>
+                <a:cs typeface="Segoe UI"/>
+              </a:rPr>
+              <a:t xml:space="preserve">1.</a:t>
+            </a:r>
+            <a:r>
+              <a:rPr lang="en-US" sz="1575" dirty="0">
+                <a:solidFill>
+                  <a:srgbClr val="16171D"/>
+                </a:solidFill>
+                <a:latin typeface="Segoe UI"/>
+                <a:cs typeface="Segoe UI"/>
+              </a:rPr>
+              <a:t xml:space="preserve"> The + 6 is outside f(x), so the graph moves up or down.</a:t>
+            </a:r>
+            <a:endParaRPr lang="en-US" sz="1575" dirty="0"/>
+          </a:p>
+        </p:txBody>
+      </p:sp>
+      <p:sp>
+        <p:nvSpPr>
+          <p:cNvPr id="7" name="Shape 7"/>
+          <p:cNvSpPr txBox="1"/>
+          <p:nvPr/>
+        </p:nvSpPr>
+        <p:spPr>
+          <a:xfrm>
+            <a:off x="895350" y="3778758"/>
+            <a:ext cx="3060598" cy="294894"/>
+          </a:xfrm>
+          <a:prstGeom prst="rect">
+            <a:avLst/>
+          </a:prstGeom>
+          <a:noFill/>
+          <a:ln>
+            <a:noFill/>
+          </a:ln>
+        </p:spPr>
+        <p:txBody>
+          <a:bodyPr wrap="square" lIns="36576" tIns="27432" rIns="36576" bIns="27432" anchor="t">
+            <a:noAutofit/>
+          </a:bodyPr>
+          <a:lstStyle/>
+          <a:p>
+            <a:pPr algn="l">
+              <a:lnSpc>
+                <a:spcPct val="100000"/>
+              </a:lnSpc>
+            </a:pPr>
+            <a:r>
+              <a:rPr lang="en-US" sz="1575" dirty="0" b="1">
+                <a:solidFill>
+                  <a:srgbClr val="16171D"/>
+                </a:solidFill>
+                <a:latin typeface="Segoe UI"/>
+                <a:cs typeface="Segoe UI"/>
+              </a:rPr>
+              <a:t xml:space="preserve">2.</a:t>
+            </a:r>
+            <a:r>
+              <a:rPr lang="en-US" sz="1575" dirty="0">
+                <a:solidFill>
+                  <a:srgbClr val="16171D"/>
+                </a:solidFill>
+                <a:latin typeface="Segoe UI"/>
+                <a:cs typeface="Segoe UI"/>
+              </a:rPr>
+              <a:t xml:space="preserve"> Plus means up: up 6.</a:t>
+            </a:r>
+            <a:endParaRPr lang="en-US" sz="1575" dirty="0"/>
+          </a:p>
+        </p:txBody>
+      </p:sp>
+      <p:sp>
+        <p:nvSpPr>
+          <p:cNvPr id="13" name="Shape 13"/>
+          <p:cNvSpPr txBox="1"/>
+          <p:nvPr/>
+        </p:nvSpPr>
+        <p:spPr>
+          <a:xfrm>
+            <a:off x="4355998" y="1618488"/>
+            <a:ext cx="3479698" cy="2866644"/>
           </a:xfrm>
           <a:prstGeom prst="roundRect">
             <a:avLst>
@@ -40555,14 +40663,14 @@
       </p:sp>
       <p:sp>
         <p:nvSpPr>
-          <p:cNvPr id="7" name="Shape 7"/>
+          <p:cNvPr id="9" name="Shape 9"/>
           <p:cNvSpPr txBox="1"/>
           <p:nvPr/>
         </p:nvSpPr>
         <p:spPr>
           <a:xfrm>
-            <a:off x="895350" y="3232404"/>
-            <a:ext cx="10400995" cy="352044"/>
+            <a:off x="4565548" y="1789938"/>
+            <a:ext cx="3060598" cy="649224"/>
           </a:xfrm>
           <a:prstGeom prst="rect">
             <a:avLst/>
@@ -40679,13 +40787,13 @@
       </p:sp>
       <p:sp>
         <p:nvSpPr>
-          <p:cNvPr id="8" name="Shape 8"/>
+          <p:cNvPr id="10" name="Shape 10"/>
           <p:cNvSpPr txBox="1"/>
           <p:nvPr/>
         </p:nvSpPr>
         <p:spPr>
           <a:xfrm>
-            <a:off x="895350" y="3679698"/>
+            <a:off x="4565548" y="2534412"/>
             <a:ext cx="2078888" cy="518922"/>
           </a:xfrm>
           <a:prstGeom prst="roundRect">
@@ -40737,14 +40845,122 @@
       </p:sp>
       <p:sp>
         <p:nvSpPr>
+          <p:cNvPr id="11" name="Shape 11"/>
+          <p:cNvSpPr txBox="1"/>
+          <p:nvPr/>
+        </p:nvSpPr>
+        <p:spPr>
+          <a:xfrm>
+            <a:off x="4565548" y="3148584"/>
+            <a:ext cx="3060598" cy="534924"/>
+          </a:xfrm>
+          <a:prstGeom prst="rect">
+            <a:avLst/>
+          </a:prstGeom>
+          <a:noFill/>
+          <a:ln>
+            <a:noFill/>
+          </a:ln>
+        </p:spPr>
+        <p:txBody>
+          <a:bodyPr wrap="square" lIns="36576" tIns="27432" rIns="36576" bIns="27432" anchor="t">
+            <a:noAutofit/>
+          </a:bodyPr>
+          <a:lstStyle/>
+          <a:p>
+            <a:pPr algn="l">
+              <a:lnSpc>
+                <a:spcPct val="100000"/>
+              </a:lnSpc>
+            </a:pPr>
+            <a:r>
+              <a:rPr lang="en-US" sz="1575" dirty="0" b="1">
+                <a:solidFill>
+                  <a:srgbClr val="16171D"/>
+                </a:solidFill>
+                <a:latin typeface="Segoe UI"/>
+                <a:cs typeface="Segoe UI"/>
+              </a:rPr>
+              <a:t xml:space="preserve">1.</a:t>
+            </a:r>
+            <a:r>
+              <a:rPr lang="en-US" sz="1575" dirty="0">
+                <a:solidFill>
+                  <a:srgbClr val="16171D"/>
+                </a:solidFill>
+                <a:latin typeface="Segoe UI"/>
+                <a:cs typeface="Segoe UI"/>
+              </a:rPr>
+              <a:t xml:space="preserve"> Replace f(x) with x: g(x) = 5x.</a:t>
+            </a:r>
+            <a:endParaRPr lang="en-US" sz="1575" dirty="0"/>
+          </a:p>
+        </p:txBody>
+      </p:sp>
+      <p:sp>
+        <p:nvSpPr>
           <p:cNvPr id="12" name="Shape 12"/>
           <p:cNvSpPr txBox="1"/>
           <p:nvPr/>
         </p:nvSpPr>
         <p:spPr>
           <a:xfrm>
-            <a:off x="685800" y="4503420"/>
-            <a:ext cx="10820095" cy="1309116"/>
+            <a:off x="4565548" y="3778758"/>
+            <a:ext cx="3060598" cy="534924"/>
+          </a:xfrm>
+          <a:prstGeom prst="rect">
+            <a:avLst/>
+          </a:prstGeom>
+          <a:noFill/>
+          <a:ln>
+            <a:noFill/>
+          </a:ln>
+        </p:spPr>
+        <p:txBody>
+          <a:bodyPr wrap="square" lIns="36576" tIns="27432" rIns="36576" bIns="27432" anchor="t">
+            <a:noAutofit/>
+          </a:bodyPr>
+          <a:lstStyle/>
+          <a:p>
+            <a:pPr algn="l">
+              <a:lnSpc>
+                <a:spcPct val="100000"/>
+              </a:lnSpc>
+            </a:pPr>
+            <a:r>
+              <a:rPr lang="en-US" sz="1575" dirty="0" b="1">
+                <a:solidFill>
+                  <a:srgbClr val="16171D"/>
+                </a:solidFill>
+                <a:latin typeface="Segoe UI"/>
+                <a:cs typeface="Segoe UI"/>
+              </a:rPr>
+              <a:t xml:space="preserve">2.</a:t>
+            </a:r>
+            <a:r>
+              <a:rPr lang="en-US" sz="1575" dirty="0">
+                <a:solidFill>
+                  <a:srgbClr val="16171D"/>
+                </a:solidFill>
+                <a:latin typeface="Segoe UI"/>
+                <a:cs typeface="Segoe UI"/>
+              </a:rPr>
+              <a:t xml:space="preserve"> The number with x is 5, so the slope is 5.</a:t>
+            </a:r>
+            <a:endParaRPr lang="en-US" sz="1575" dirty="0"/>
+          </a:p>
+        </p:txBody>
+      </p:sp>
+      <p:sp>
+        <p:nvSpPr>
+          <p:cNvPr id="19" name="Shape 19"/>
+          <p:cNvSpPr txBox="1"/>
+          <p:nvPr/>
+        </p:nvSpPr>
+        <p:spPr>
+          <a:xfrm>
+            <a:off x="8026197" y="1618488"/>
+            <a:ext cx="3479698" cy="4148328"/>
           </a:xfrm>
           <a:prstGeom prst="roundRect">
             <a:avLst>
@@ -40777,14 +40993,14 @@
       </p:sp>
       <p:sp>
         <p:nvSpPr>
-          <p:cNvPr id="10" name="Shape 10"/>
+          <p:cNvPr id="14" name="Shape 14"/>
           <p:cNvSpPr txBox="1"/>
           <p:nvPr/>
         </p:nvSpPr>
         <p:spPr>
           <a:xfrm>
-            <a:off x="895350" y="4674870"/>
-            <a:ext cx="10400995" cy="352044"/>
+            <a:off x="8235747" y="1789938"/>
+            <a:ext cx="3060598" cy="946404"/>
           </a:xfrm>
           <a:prstGeom prst="rect">
             <a:avLst/>
@@ -40861,14 +41077,14 @@
       </p:sp>
       <p:sp>
         <p:nvSpPr>
-          <p:cNvPr id="11" name="Shape 11"/>
+          <p:cNvPr id="15" name="Shape 15"/>
           <p:cNvSpPr txBox="1"/>
           <p:nvPr/>
         </p:nvSpPr>
         <p:spPr>
           <a:xfrm>
-            <a:off x="895350" y="5122164"/>
-            <a:ext cx="3571326" cy="518922"/>
+            <a:off x="8235747" y="2831592"/>
+            <a:ext cx="3060598" cy="873252"/>
           </a:xfrm>
           <a:prstGeom prst="roundRect">
             <a:avLst>
@@ -40949,7 +41165,169 @@
       </p:sp>
       <p:sp>
         <p:nvSpPr>
-          <p:cNvPr id="13" name="Slide Number 13"/>
+          <p:cNvPr id="16" name="Shape 16"/>
+          <p:cNvSpPr txBox="1"/>
+          <p:nvPr/>
+        </p:nvSpPr>
+        <p:spPr>
+          <a:xfrm>
+            <a:off x="8235747" y="3800094"/>
+            <a:ext cx="3060598" cy="534924"/>
+          </a:xfrm>
+          <a:prstGeom prst="rect">
+            <a:avLst/>
+          </a:prstGeom>
+          <a:noFill/>
+          <a:ln>
+            <a:noFill/>
+          </a:ln>
+        </p:spPr>
+        <p:txBody>
+          <a:bodyPr wrap="square" lIns="36576" tIns="27432" rIns="36576" bIns="27432" anchor="t">
+            <a:noAutofit/>
+          </a:bodyPr>
+          <a:lstStyle/>
+          <a:p>
+            <a:pPr algn="l">
+              <a:lnSpc>
+                <a:spcPct val="100000"/>
+              </a:lnSpc>
+            </a:pPr>
+            <a:r>
+              <a:rPr lang="en-US" sz="1575" dirty="0" b="1">
+                <a:solidFill>
+                  <a:srgbClr val="16171D"/>
+                </a:solidFill>
+                <a:latin typeface="Segoe UI"/>
+                <a:cs typeface="Segoe UI"/>
+              </a:rPr>
+              <a:t xml:space="preserve">1.</a:t>
+            </a:r>
+            <a:r>
+              <a:rPr lang="en-US" sz="1575" dirty="0">
+                <a:solidFill>
+                  <a:srgbClr val="16171D"/>
+                </a:solidFill>
+                <a:latin typeface="Segoe UI"/>
+                <a:cs typeface="Segoe UI"/>
+              </a:rPr>
+              <a:t xml:space="preserve"> Parallel means the same slope: m = 4.</a:t>
+            </a:r>
+            <a:endParaRPr lang="en-US" sz="1575" dirty="0"/>
+          </a:p>
+        </p:txBody>
+      </p:sp>
+      <p:sp>
+        <p:nvSpPr>
+          <p:cNvPr id="17" name="Shape 17"/>
+          <p:cNvSpPr txBox="1"/>
+          <p:nvPr/>
+        </p:nvSpPr>
+        <p:spPr>
+          <a:xfrm>
+            <a:off x="8235747" y="4430268"/>
+            <a:ext cx="3060598" cy="774954"/>
+          </a:xfrm>
+          <a:prstGeom prst="rect">
+            <a:avLst/>
+          </a:prstGeom>
+          <a:noFill/>
+          <a:ln>
+            <a:noFill/>
+          </a:ln>
+        </p:spPr>
+        <p:txBody>
+          <a:bodyPr wrap="square" lIns="36576" tIns="27432" rIns="36576" bIns="27432" anchor="t">
+            <a:noAutofit/>
+          </a:bodyPr>
+          <a:lstStyle/>
+          <a:p>
+            <a:pPr algn="l">
+              <a:lnSpc>
+                <a:spcPct val="100000"/>
+              </a:lnSpc>
+            </a:pPr>
+            <a:r>
+              <a:rPr lang="en-US" sz="1575" dirty="0" b="1">
+                <a:solidFill>
+                  <a:srgbClr val="16171D"/>
+                </a:solidFill>
+                <a:latin typeface="Segoe UI"/>
+                <a:cs typeface="Segoe UI"/>
+              </a:rPr>
+              <a:t xml:space="preserve">2.</a:t>
+            </a:r>
+            <a:r>
+              <a:rPr lang="en-US" sz="1575" dirty="0">
+                <a:solidFill>
+                  <a:srgbClr val="16171D"/>
+                </a:solidFill>
+                <a:latin typeface="Segoe UI"/>
+                <a:cs typeface="Segoe UI"/>
+              </a:rPr>
+              <a:t xml:space="preserve"> Put x = 0, y = −2 into y = mx + b: −2 = 4(0) + b, so b = −2.</a:t>
+            </a:r>
+            <a:endParaRPr lang="en-US" sz="1575" dirty="0"/>
+          </a:p>
+        </p:txBody>
+      </p:sp>
+      <p:sp>
+        <p:nvSpPr>
+          <p:cNvPr id="18" name="Shape 18"/>
+          <p:cNvSpPr txBox="1"/>
+          <p:nvPr/>
+        </p:nvSpPr>
+        <p:spPr>
+          <a:xfrm>
+            <a:off x="8235747" y="5300472"/>
+            <a:ext cx="3060598" cy="294894"/>
+          </a:xfrm>
+          <a:prstGeom prst="rect">
+            <a:avLst/>
+          </a:prstGeom>
+          <a:noFill/>
+          <a:ln>
+            <a:noFill/>
+          </a:ln>
+        </p:spPr>
+        <p:txBody>
+          <a:bodyPr wrap="square" lIns="36576" tIns="27432" rIns="36576" bIns="27432" anchor="t">
+            <a:noAutofit/>
+          </a:bodyPr>
+          <a:lstStyle/>
+          <a:p>
+            <a:pPr algn="l">
+              <a:lnSpc>
+                <a:spcPct val="100000"/>
+              </a:lnSpc>
+            </a:pPr>
+            <a:r>
+              <a:rPr lang="en-US" sz="1575" dirty="0" b="1">
+                <a:solidFill>
+                  <a:srgbClr val="16171D"/>
+                </a:solidFill>
+                <a:latin typeface="Segoe UI"/>
+                <a:cs typeface="Segoe UI"/>
+              </a:rPr>
+              <a:t xml:space="preserve">3.</a:t>
+            </a:r>
+            <a:r>
+              <a:rPr lang="en-US" sz="1575" dirty="0">
+                <a:solidFill>
+                  <a:srgbClr val="16171D"/>
+                </a:solidFill>
+                <a:latin typeface="Segoe UI"/>
+                <a:cs typeface="Segoe UI"/>
+              </a:rPr>
+              <a:t xml:space="preserve"> Write it: y = 4x − 2.</a:t>
+            </a:r>
+            <a:endParaRPr lang="en-US" sz="1575" dirty="0"/>
+          </a:p>
+        </p:txBody>
+      </p:sp>
+      <p:sp>
+        <p:nvSpPr>
+          <p:cNvPr id="20" name="Slide Number 20"/>
           <p:cNvSpPr txBox="1"/>
           <p:nvPr/>
         </p:nvSpPr>
@@ -41109,7 +41487,7 @@
                             </p:stCondLst>
                             <p:childTnLst>
                               <p:par>
-                                <p:cTn id="14" presetID="53" presetClass="entr" presetSubtype="16" fill="hold" nodeType="clickEffect">
+                                <p:cTn id="14" presetID="42" presetClass="entr" presetSubtype="0" fill="hold" nodeType="clickEffect">
                                   <p:stCondLst>
                                     <p:cond delay="0"/>
                                   </p:stCondLst>
@@ -41122,7 +41500,7 @@
                                           </p:stCondLst>
                                         </p:cTn>
                                         <p:tgtEl>
-                                          <p:spTgt spid="8"/>
+                                          <p:spTgt spid="6"/>
                                         </p:tgtEl>
                                         <p:attrNameLst>
                                           <p:attrName>style.visibility</p:attrName>
@@ -41136,7 +41514,7 @@
                                       <p:cBhvr>
                                         <p:cTn id="11" dur="500"/>
                                         <p:tgtEl>
-                                          <p:spTgt spid="8"/>
+                                          <p:spTgt spid="6"/>
                                         </p:tgtEl>
                                       </p:cBhvr>
                                     </p:animEffect>
@@ -41144,7 +41522,205 @@
                                       <p:cBhvr>
                                         <p:cTn id="12" dur="500" fill="hold"/>
                                         <p:tgtEl>
-                                          <p:spTgt spid="8"/>
+                                          <p:spTgt spid="6"/>
+                                        </p:tgtEl>
+                                        <p:attrNameLst>
+                                          <p:attrName>ppt_x</p:attrName>
+                                        </p:attrNameLst>
+                                      </p:cBhvr>
+                                      <p:tavLst>
+                                        <p:tav tm="0">
+                                          <p:val>
+                                            <p:strVal val="#ppt_x"/>
+                                          </p:val>
+                                        </p:tav>
+                                        <p:tav tm="100000">
+                                          <p:val>
+                                            <p:strVal val="#ppt_x"/>
+                                          </p:val>
+                                        </p:tav>
+                                      </p:tavLst>
+                                    </p:anim>
+                                    <p:anim calcmode="lin" valueType="num">
+                                      <p:cBhvr>
+                                        <p:cTn id="13" dur="500" fill="hold"/>
+                                        <p:tgtEl>
+                                          <p:spTgt spid="6"/>
+                                        </p:tgtEl>
+                                        <p:attrNameLst>
+                                          <p:attrName>ppt_y</p:attrName>
+                                        </p:attrNameLst>
+                                      </p:cBhvr>
+                                      <p:tavLst>
+                                        <p:tav tm="0">
+                                          <p:val>
+                                            <p:strVal val="#ppt_y+.1"/>
+                                          </p:val>
+                                        </p:tav>
+                                        <p:tav tm="100000">
+                                          <p:val>
+                                            <p:strVal val="#ppt_y"/>
+                                          </p:val>
+                                        </p:tav>
+                                      </p:tavLst>
+                                    </p:anim>
+                                  </p:childTnLst>
+                                </p:cTn>
+                              </p:par>
+                            </p:childTnLst>
+                          </p:cTn>
+                        </p:par>
+                      </p:childTnLst>
+                    </p:cTn>
+                  </p:par>
+                  <p:par>
+                    <p:cTn id="22" fill="hold">
+                      <p:stCondLst>
+                        <p:cond delay="indefinite"/>
+                      </p:stCondLst>
+                      <p:childTnLst>
+                        <p:par>
+                          <p:cTn id="23" fill="hold">
+                            <p:stCondLst>
+                              <p:cond delay="0"/>
+                            </p:stCondLst>
+                            <p:childTnLst>
+                              <p:par>
+                                <p:cTn id="21" presetID="42" presetClass="entr" presetSubtype="0" fill="hold" nodeType="clickEffect">
+                                  <p:stCondLst>
+                                    <p:cond delay="0"/>
+                                  </p:stCondLst>
+                                  <p:childTnLst>
+                                    <p:set>
+                                      <p:cBhvr>
+                                        <p:cTn id="17" dur="1" fill="hold">
+                                          <p:stCondLst>
+                                            <p:cond delay="0"/>
+                                          </p:stCondLst>
+                                        </p:cTn>
+                                        <p:tgtEl>
+                                          <p:spTgt spid="7"/>
+                                        </p:tgtEl>
+                                        <p:attrNameLst>
+                                          <p:attrName>style.visibility</p:attrName>
+                                        </p:attrNameLst>
+                                      </p:cBhvr>
+                                      <p:to>
+                                        <p:strVal val="visible"/>
+                                      </p:to>
+                                    </p:set>
+                                    <p:animEffect transition="in" filter="fade">
+                                      <p:cBhvr>
+                                        <p:cTn id="18" dur="500"/>
+                                        <p:tgtEl>
+                                          <p:spTgt spid="7"/>
+                                        </p:tgtEl>
+                                      </p:cBhvr>
+                                    </p:animEffect>
+                                    <p:anim calcmode="lin" valueType="num">
+                                      <p:cBhvr>
+                                        <p:cTn id="19" dur="500" fill="hold"/>
+                                        <p:tgtEl>
+                                          <p:spTgt spid="7"/>
+                                        </p:tgtEl>
+                                        <p:attrNameLst>
+                                          <p:attrName>ppt_x</p:attrName>
+                                        </p:attrNameLst>
+                                      </p:cBhvr>
+                                      <p:tavLst>
+                                        <p:tav tm="0">
+                                          <p:val>
+                                            <p:strVal val="#ppt_x"/>
+                                          </p:val>
+                                        </p:tav>
+                                        <p:tav tm="100000">
+                                          <p:val>
+                                            <p:strVal val="#ppt_x"/>
+                                          </p:val>
+                                        </p:tav>
+                                      </p:tavLst>
+                                    </p:anim>
+                                    <p:anim calcmode="lin" valueType="num">
+                                      <p:cBhvr>
+                                        <p:cTn id="20" dur="500" fill="hold"/>
+                                        <p:tgtEl>
+                                          <p:spTgt spid="7"/>
+                                        </p:tgtEl>
+                                        <p:attrNameLst>
+                                          <p:attrName>ppt_y</p:attrName>
+                                        </p:attrNameLst>
+                                      </p:cBhvr>
+                                      <p:tavLst>
+                                        <p:tav tm="0">
+                                          <p:val>
+                                            <p:strVal val="#ppt_y+.1"/>
+                                          </p:val>
+                                        </p:tav>
+                                        <p:tav tm="100000">
+                                          <p:val>
+                                            <p:strVal val="#ppt_y"/>
+                                          </p:val>
+                                        </p:tav>
+                                      </p:tavLst>
+                                    </p:anim>
+                                  </p:childTnLst>
+                                </p:cTn>
+                              </p:par>
+                            </p:childTnLst>
+                          </p:cTn>
+                        </p:par>
+                      </p:childTnLst>
+                    </p:cTn>
+                  </p:par>
+                  <p:par>
+                    <p:cTn id="29" fill="hold">
+                      <p:stCondLst>
+                        <p:cond delay="indefinite"/>
+                      </p:stCondLst>
+                      <p:childTnLst>
+                        <p:par>
+                          <p:cTn id="30" fill="hold">
+                            <p:stCondLst>
+                              <p:cond delay="0"/>
+                            </p:stCondLst>
+                            <p:childTnLst>
+                              <p:par>
+                                <p:cTn id="28" presetID="53" presetClass="entr" presetSubtype="16" fill="hold" nodeType="clickEffect">
+                                  <p:stCondLst>
+                                    <p:cond delay="0"/>
+                                  </p:stCondLst>
+                                  <p:childTnLst>
+                                    <p:set>
+                                      <p:cBhvr>
+                                        <p:cTn id="24" dur="1" fill="hold">
+                                          <p:stCondLst>
+                                            <p:cond delay="0"/>
+                                          </p:stCondLst>
+                                        </p:cTn>
+                                        <p:tgtEl>
+                                          <p:spTgt spid="10"/>
+                                        </p:tgtEl>
+                                        <p:attrNameLst>
+                                          <p:attrName>style.visibility</p:attrName>
+                                        </p:attrNameLst>
+                                      </p:cBhvr>
+                                      <p:to>
+                                        <p:strVal val="visible"/>
+                                      </p:to>
+                                    </p:set>
+                                    <p:animEffect transition="in" filter="fade">
+                                      <p:cBhvr>
+                                        <p:cTn id="25" dur="500"/>
+                                        <p:tgtEl>
+                                          <p:spTgt spid="10"/>
+                                        </p:tgtEl>
+                                      </p:cBhvr>
+                                    </p:animEffect>
+                                    <p:anim calcmode="lin" valueType="num">
+                                      <p:cBhvr>
+                                        <p:cTn id="26" dur="500" fill="hold"/>
+                                        <p:tgtEl>
+                                          <p:spTgt spid="10"/>
                                         </p:tgtEl>
                                         <p:attrNameLst>
                                           <p:attrName>ppt_w</p:attrName>
@@ -41165,9 +41741,9 @@
                                     </p:anim>
                                     <p:anim calcmode="lin" valueType="num">
                                       <p:cBhvr>
-                                        <p:cTn id="13" dur="500" fill="hold"/>
+                                        <p:cTn id="27" dur="500" fill="hold"/>
                                         <p:tgtEl>
-                                          <p:spTgt spid="8"/>
+                                          <p:spTgt spid="10"/>
                                         </p:tgtEl>
                                         <p:attrNameLst>
                                           <p:attrName>ppt_h</p:attrName>
@@ -41196,26 +41772,26 @@
                     </p:cTn>
                   </p:par>
                   <p:par>
-                    <p:cTn id="22" fill="hold">
+                    <p:cTn id="36" fill="hold">
                       <p:stCondLst>
                         <p:cond delay="indefinite"/>
                       </p:stCondLst>
                       <p:childTnLst>
                         <p:par>
-                          <p:cTn id="23" fill="hold">
+                          <p:cTn id="37" fill="hold">
                             <p:stCondLst>
                               <p:cond delay="0"/>
                             </p:stCondLst>
                             <p:childTnLst>
                               <p:par>
-                                <p:cTn id="21" presetID="53" presetClass="entr" presetSubtype="16" fill="hold" nodeType="clickEffect">
+                                <p:cTn id="35" presetID="42" presetClass="entr" presetSubtype="0" fill="hold" nodeType="clickEffect">
                                   <p:stCondLst>
                                     <p:cond delay="0"/>
                                   </p:stCondLst>
                                   <p:childTnLst>
                                     <p:set>
                                       <p:cBhvr>
-                                        <p:cTn id="17" dur="1" fill="hold">
+                                        <p:cTn id="31" dur="1" fill="hold">
                                           <p:stCondLst>
                                             <p:cond delay="0"/>
                                           </p:stCondLst>
@@ -41233,7 +41809,7 @@
                                     </p:set>
                                     <p:animEffect transition="in" filter="fade">
                                       <p:cBhvr>
-                                        <p:cTn id="18" dur="500"/>
+                                        <p:cTn id="32" dur="500"/>
                                         <p:tgtEl>
                                           <p:spTgt spid="11"/>
                                         </p:tgtEl>
@@ -41241,9 +41817,207 @@
                                     </p:animEffect>
                                     <p:anim calcmode="lin" valueType="num">
                                       <p:cBhvr>
-                                        <p:cTn id="19" dur="500" fill="hold"/>
+                                        <p:cTn id="33" dur="500" fill="hold"/>
                                         <p:tgtEl>
                                           <p:spTgt spid="11"/>
+                                        </p:tgtEl>
+                                        <p:attrNameLst>
+                                          <p:attrName>ppt_x</p:attrName>
+                                        </p:attrNameLst>
+                                      </p:cBhvr>
+                                      <p:tavLst>
+                                        <p:tav tm="0">
+                                          <p:val>
+                                            <p:strVal val="#ppt_x"/>
+                                          </p:val>
+                                        </p:tav>
+                                        <p:tav tm="100000">
+                                          <p:val>
+                                            <p:strVal val="#ppt_x"/>
+                                          </p:val>
+                                        </p:tav>
+                                      </p:tavLst>
+                                    </p:anim>
+                                    <p:anim calcmode="lin" valueType="num">
+                                      <p:cBhvr>
+                                        <p:cTn id="34" dur="500" fill="hold"/>
+                                        <p:tgtEl>
+                                          <p:spTgt spid="11"/>
+                                        </p:tgtEl>
+                                        <p:attrNameLst>
+                                          <p:attrName>ppt_y</p:attrName>
+                                        </p:attrNameLst>
+                                      </p:cBhvr>
+                                      <p:tavLst>
+                                        <p:tav tm="0">
+                                          <p:val>
+                                            <p:strVal val="#ppt_y+.1"/>
+                                          </p:val>
+                                        </p:tav>
+                                        <p:tav tm="100000">
+                                          <p:val>
+                                            <p:strVal val="#ppt_y"/>
+                                          </p:val>
+                                        </p:tav>
+                                      </p:tavLst>
+                                    </p:anim>
+                                  </p:childTnLst>
+                                </p:cTn>
+                              </p:par>
+                            </p:childTnLst>
+                          </p:cTn>
+                        </p:par>
+                      </p:childTnLst>
+                    </p:cTn>
+                  </p:par>
+                  <p:par>
+                    <p:cTn id="43" fill="hold">
+                      <p:stCondLst>
+                        <p:cond delay="indefinite"/>
+                      </p:stCondLst>
+                      <p:childTnLst>
+                        <p:par>
+                          <p:cTn id="44" fill="hold">
+                            <p:stCondLst>
+                              <p:cond delay="0"/>
+                            </p:stCondLst>
+                            <p:childTnLst>
+                              <p:par>
+                                <p:cTn id="42" presetID="42" presetClass="entr" presetSubtype="0" fill="hold" nodeType="clickEffect">
+                                  <p:stCondLst>
+                                    <p:cond delay="0"/>
+                                  </p:stCondLst>
+                                  <p:childTnLst>
+                                    <p:set>
+                                      <p:cBhvr>
+                                        <p:cTn id="38" dur="1" fill="hold">
+                                          <p:stCondLst>
+                                            <p:cond delay="0"/>
+                                          </p:stCondLst>
+                                        </p:cTn>
+                                        <p:tgtEl>
+                                          <p:spTgt spid="12"/>
+                                        </p:tgtEl>
+                                        <p:attrNameLst>
+                                          <p:attrName>style.visibility</p:attrName>
+                                        </p:attrNameLst>
+                                      </p:cBhvr>
+                                      <p:to>
+                                        <p:strVal val="visible"/>
+                                      </p:to>
+                                    </p:set>
+                                    <p:animEffect transition="in" filter="fade">
+                                      <p:cBhvr>
+                                        <p:cTn id="39" dur="500"/>
+                                        <p:tgtEl>
+                                          <p:spTgt spid="12"/>
+                                        </p:tgtEl>
+                                      </p:cBhvr>
+                                    </p:animEffect>
+                                    <p:anim calcmode="lin" valueType="num">
+                                      <p:cBhvr>
+                                        <p:cTn id="40" dur="500" fill="hold"/>
+                                        <p:tgtEl>
+                                          <p:spTgt spid="12"/>
+                                        </p:tgtEl>
+                                        <p:attrNameLst>
+                                          <p:attrName>ppt_x</p:attrName>
+                                        </p:attrNameLst>
+                                      </p:cBhvr>
+                                      <p:tavLst>
+                                        <p:tav tm="0">
+                                          <p:val>
+                                            <p:strVal val="#ppt_x"/>
+                                          </p:val>
+                                        </p:tav>
+                                        <p:tav tm="100000">
+                                          <p:val>
+                                            <p:strVal val="#ppt_x"/>
+                                          </p:val>
+                                        </p:tav>
+                                      </p:tavLst>
+                                    </p:anim>
+                                    <p:anim calcmode="lin" valueType="num">
+                                      <p:cBhvr>
+                                        <p:cTn id="41" dur="500" fill="hold"/>
+                                        <p:tgtEl>
+                                          <p:spTgt spid="12"/>
+                                        </p:tgtEl>
+                                        <p:attrNameLst>
+                                          <p:attrName>ppt_y</p:attrName>
+                                        </p:attrNameLst>
+                                      </p:cBhvr>
+                                      <p:tavLst>
+                                        <p:tav tm="0">
+                                          <p:val>
+                                            <p:strVal val="#ppt_y+.1"/>
+                                          </p:val>
+                                        </p:tav>
+                                        <p:tav tm="100000">
+                                          <p:val>
+                                            <p:strVal val="#ppt_y"/>
+                                          </p:val>
+                                        </p:tav>
+                                      </p:tavLst>
+                                    </p:anim>
+                                  </p:childTnLst>
+                                </p:cTn>
+                              </p:par>
+                            </p:childTnLst>
+                          </p:cTn>
+                        </p:par>
+                      </p:childTnLst>
+                    </p:cTn>
+                  </p:par>
+                  <p:par>
+                    <p:cTn id="50" fill="hold">
+                      <p:stCondLst>
+                        <p:cond delay="indefinite"/>
+                      </p:stCondLst>
+                      <p:childTnLst>
+                        <p:par>
+                          <p:cTn id="51" fill="hold">
+                            <p:stCondLst>
+                              <p:cond delay="0"/>
+                            </p:stCondLst>
+                            <p:childTnLst>
+                              <p:par>
+                                <p:cTn id="49" presetID="53" presetClass="entr" presetSubtype="16" fill="hold" nodeType="clickEffect">
+                                  <p:stCondLst>
+                                    <p:cond delay="0"/>
+                                  </p:stCondLst>
+                                  <p:childTnLst>
+                                    <p:set>
+                                      <p:cBhvr>
+                                        <p:cTn id="45" dur="1" fill="hold">
+                                          <p:stCondLst>
+                                            <p:cond delay="0"/>
+                                          </p:stCondLst>
+                                        </p:cTn>
+                                        <p:tgtEl>
+                                          <p:spTgt spid="15"/>
+                                        </p:tgtEl>
+                                        <p:attrNameLst>
+                                          <p:attrName>style.visibility</p:attrName>
+                                        </p:attrNameLst>
+                                      </p:cBhvr>
+                                      <p:to>
+                                        <p:strVal val="visible"/>
+                                      </p:to>
+                                    </p:set>
+                                    <p:animEffect transition="in" filter="fade">
+                                      <p:cBhvr>
+                                        <p:cTn id="46" dur="500"/>
+                                        <p:tgtEl>
+                                          <p:spTgt spid="15"/>
+                                        </p:tgtEl>
+                                      </p:cBhvr>
+                                    </p:animEffect>
+                                    <p:anim calcmode="lin" valueType="num">
+                                      <p:cBhvr>
+                                        <p:cTn id="47" dur="500" fill="hold"/>
+                                        <p:tgtEl>
+                                          <p:spTgt spid="15"/>
                                         </p:tgtEl>
                                         <p:attrNameLst>
                                           <p:attrName>ppt_w</p:attrName>
@@ -41264,9 +42038,9 @@
                                     </p:anim>
                                     <p:anim calcmode="lin" valueType="num">
                                       <p:cBhvr>
-                                        <p:cTn id="20" dur="500" fill="hold"/>
+                                        <p:cTn id="48" dur="500" fill="hold"/>
                                         <p:tgtEl>
-                                          <p:spTgt spid="11"/>
+                                          <p:spTgt spid="15"/>
                                         </p:tgtEl>
                                         <p:attrNameLst>
                                           <p:attrName>ppt_h</p:attrName>
@@ -41281,6 +42055,303 @@
                                         <p:tav tm="100000">
                                           <p:val>
                                             <p:strVal val="#ppt_h"/>
+                                          </p:val>
+                                        </p:tav>
+                                      </p:tavLst>
+                                    </p:anim>
+                                  </p:childTnLst>
+                                </p:cTn>
+                              </p:par>
+                            </p:childTnLst>
+                          </p:cTn>
+                        </p:par>
+                      </p:childTnLst>
+                    </p:cTn>
+                  </p:par>
+                  <p:par>
+                    <p:cTn id="57" fill="hold">
+                      <p:stCondLst>
+                        <p:cond delay="indefinite"/>
+                      </p:stCondLst>
+                      <p:childTnLst>
+                        <p:par>
+                          <p:cTn id="58" fill="hold">
+                            <p:stCondLst>
+                              <p:cond delay="0"/>
+                            </p:stCondLst>
+                            <p:childTnLst>
+                              <p:par>
+                                <p:cTn id="56" presetID="42" presetClass="entr" presetSubtype="0" fill="hold" nodeType="clickEffect">
+                                  <p:stCondLst>
+                                    <p:cond delay="0"/>
+                                  </p:stCondLst>
+                                  <p:childTnLst>
+                                    <p:set>
+                                      <p:cBhvr>
+                                        <p:cTn id="52" dur="1" fill="hold">
+                                          <p:stCondLst>
+                                            <p:cond delay="0"/>
+                                          </p:stCondLst>
+                                        </p:cTn>
+                                        <p:tgtEl>
+                                          <p:spTgt spid="16"/>
+                                        </p:tgtEl>
+                                        <p:attrNameLst>
+                                          <p:attrName>style.visibility</p:attrName>
+                                        </p:attrNameLst>
+                                      </p:cBhvr>
+                                      <p:to>
+                                        <p:strVal val="visible"/>
+                                      </p:to>
+                                    </p:set>
+                                    <p:animEffect transition="in" filter="fade">
+                                      <p:cBhvr>
+                                        <p:cTn id="53" dur="500"/>
+                                        <p:tgtEl>
+                                          <p:spTgt spid="16"/>
+                                        </p:tgtEl>
+                                      </p:cBhvr>
+                                    </p:animEffect>
+                                    <p:anim calcmode="lin" valueType="num">
+                                      <p:cBhvr>
+                                        <p:cTn id="54" dur="500" fill="hold"/>
+                                        <p:tgtEl>
+                                          <p:spTgt spid="16"/>
+                                        </p:tgtEl>
+                                        <p:attrNameLst>
+                                          <p:attrName>ppt_x</p:attrName>
+                                        </p:attrNameLst>
+                                      </p:cBhvr>
+                                      <p:tavLst>
+                                        <p:tav tm="0">
+                                          <p:val>
+                                            <p:strVal val="#ppt_x"/>
+                                          </p:val>
+                                        </p:tav>
+                                        <p:tav tm="100000">
+                                          <p:val>
+                                            <p:strVal val="#ppt_x"/>
+                                          </p:val>
+                                        </p:tav>
+                                      </p:tavLst>
+                                    </p:anim>
+                                    <p:anim calcmode="lin" valueType="num">
+                                      <p:cBhvr>
+                                        <p:cTn id="55" dur="500" fill="hold"/>
+                                        <p:tgtEl>
+                                          <p:spTgt spid="16"/>
+                                        </p:tgtEl>
+                                        <p:attrNameLst>
+                                          <p:attrName>ppt_y</p:attrName>
+                                        </p:attrNameLst>
+                                      </p:cBhvr>
+                                      <p:tavLst>
+                                        <p:tav tm="0">
+                                          <p:val>
+                                            <p:strVal val="#ppt_y+.1"/>
+                                          </p:val>
+                                        </p:tav>
+                                        <p:tav tm="100000">
+                                          <p:val>
+                                            <p:strVal val="#ppt_y"/>
+                                          </p:val>
+                                        </p:tav>
+                                      </p:tavLst>
+                                    </p:anim>
+                                  </p:childTnLst>
+                                </p:cTn>
+                              </p:par>
+                            </p:childTnLst>
+                          </p:cTn>
+                        </p:par>
+                      </p:childTnLst>
+                    </p:cTn>
+                  </p:par>
+                  <p:par>
+                    <p:cTn id="64" fill="hold">
+                      <p:stCondLst>
+                        <p:cond delay="indefinite"/>
+                      </p:stCondLst>
+                      <p:childTnLst>
+                        <p:par>
+                          <p:cTn id="65" fill="hold">
+                            <p:stCondLst>
+                              <p:cond delay="0"/>
+                            </p:stCondLst>
+                            <p:childTnLst>
+                              <p:par>
+                                <p:cTn id="63" presetID="42" presetClass="entr" presetSubtype="0" fill="hold" nodeType="clickEffect">
+                                  <p:stCondLst>
+                                    <p:cond delay="0"/>
+                                  </p:stCondLst>
+                                  <p:childTnLst>
+                                    <p:set>
+                                      <p:cBhvr>
+                                        <p:cTn id="59" dur="1" fill="hold">
+                                          <p:stCondLst>
+                                            <p:cond delay="0"/>
+                                          </p:stCondLst>
+                                        </p:cTn>
+                                        <p:tgtEl>
+                                          <p:spTgt spid="17"/>
+                                        </p:tgtEl>
+                                        <p:attrNameLst>
+                                          <p:attrName>style.visibility</p:attrName>
+                                        </p:attrNameLst>
+                                      </p:cBhvr>
+                                      <p:to>
+                                        <p:strVal val="visible"/>
+                                      </p:to>
+                                    </p:set>
+                                    <p:animEffect transition="in" filter="fade">
+                                      <p:cBhvr>
+                                        <p:cTn id="60" dur="500"/>
+                                        <p:tgtEl>
+                                          <p:spTgt spid="17"/>
+                                        </p:tgtEl>
+                                      </p:cBhvr>
+                                    </p:animEffect>
+                                    <p:anim calcmode="lin" valueType="num">
+                                      <p:cBhvr>
+                                        <p:cTn id="61" dur="500" fill="hold"/>
+                                        <p:tgtEl>
+                                          <p:spTgt spid="17"/>
+                                        </p:tgtEl>
+                                        <p:attrNameLst>
+                                          <p:attrName>ppt_x</p:attrName>
+                                        </p:attrNameLst>
+                                      </p:cBhvr>
+                                      <p:tavLst>
+                                        <p:tav tm="0">
+                                          <p:val>
+                                            <p:strVal val="#ppt_x"/>
+                                          </p:val>
+                                        </p:tav>
+                                        <p:tav tm="100000">
+                                          <p:val>
+                                            <p:strVal val="#ppt_x"/>
+                                          </p:val>
+                                        </p:tav>
+                                      </p:tavLst>
+                                    </p:anim>
+                                    <p:anim calcmode="lin" valueType="num">
+                                      <p:cBhvr>
+                                        <p:cTn id="62" dur="500" fill="hold"/>
+                                        <p:tgtEl>
+                                          <p:spTgt spid="17"/>
+                                        </p:tgtEl>
+                                        <p:attrNameLst>
+                                          <p:attrName>ppt_y</p:attrName>
+                                        </p:attrNameLst>
+                                      </p:cBhvr>
+                                      <p:tavLst>
+                                        <p:tav tm="0">
+                                          <p:val>
+                                            <p:strVal val="#ppt_y+.1"/>
+                                          </p:val>
+                                        </p:tav>
+                                        <p:tav tm="100000">
+                                          <p:val>
+                                            <p:strVal val="#ppt_y"/>
+                                          </p:val>
+                                        </p:tav>
+                                      </p:tavLst>
+                                    </p:anim>
+                                  </p:childTnLst>
+                                </p:cTn>
+                              </p:par>
+                            </p:childTnLst>
+                          </p:cTn>
+                        </p:par>
+                      </p:childTnLst>
+                    </p:cTn>
+                  </p:par>
+                  <p:par>
+                    <p:cTn id="71" fill="hold">
+                      <p:stCondLst>
+                        <p:cond delay="indefinite"/>
+                      </p:stCondLst>
+                      <p:childTnLst>
+                        <p:par>
+                          <p:cTn id="72" fill="hold">
+                            <p:stCondLst>
+                              <p:cond delay="0"/>
+                            </p:stCondLst>
+                            <p:childTnLst>
+                              <p:par>
+                                <p:cTn id="70" presetID="42" presetClass="entr" presetSubtype="0" fill="hold" nodeType="clickEffect">
+                                  <p:stCondLst>
+                                    <p:cond delay="0"/>
+                                  </p:stCondLst>
+                                  <p:childTnLst>
+                                    <p:set>
+                                      <p:cBhvr>
+                                        <p:cTn id="66" dur="1" fill="hold">
+                                          <p:stCondLst>
+                                            <p:cond delay="0"/>
+                                          </p:stCondLst>
+                                        </p:cTn>
+                                        <p:tgtEl>
+                                          <p:spTgt spid="18"/>
+                                        </p:tgtEl>
+                                        <p:attrNameLst>
+                                          <p:attrName>style.visibility</p:attrName>
+                                        </p:attrNameLst>
+                                      </p:cBhvr>
+                                      <p:to>
+                                        <p:strVal val="visible"/>
+                                      </p:to>
+                                    </p:set>
+                                    <p:animEffect transition="in" filter="fade">
+                                      <p:cBhvr>
+                                        <p:cTn id="67" dur="500"/>
+                                        <p:tgtEl>
+                                          <p:spTgt spid="18"/>
+                                        </p:tgtEl>
+                                      </p:cBhvr>
+                                    </p:animEffect>
+                                    <p:anim calcmode="lin" valueType="num">
+                                      <p:cBhvr>
+                                        <p:cTn id="68" dur="500" fill="hold"/>
+                                        <p:tgtEl>
+                                          <p:spTgt spid="18"/>
+                                        </p:tgtEl>
+                                        <p:attrNameLst>
+                                          <p:attrName>ppt_x</p:attrName>
+                                        </p:attrNameLst>
+                                      </p:cBhvr>
+                                      <p:tavLst>
+                                        <p:tav tm="0">
+                                          <p:val>
+                                            <p:strVal val="#ppt_x"/>
+                                          </p:val>
+                                        </p:tav>
+                                        <p:tav tm="100000">
+                                          <p:val>
+                                            <p:strVal val="#ppt_x"/>
+                                          </p:val>
+                                        </p:tav>
+                                      </p:tavLst>
+                                    </p:anim>
+                                    <p:anim calcmode="lin" valueType="num">
+                                      <p:cBhvr>
+                                        <p:cTn id="69" dur="500" fill="hold"/>
+                                        <p:tgtEl>
+                                          <p:spTgt spid="18"/>
+                                        </p:tgtEl>
+                                        <p:attrNameLst>
+                                          <p:attrName>ppt_y</p:attrName>
+                                        </p:attrNameLst>
+                                      </p:cBhvr>
+                                      <p:tavLst>
+                                        <p:tav tm="0">
+                                          <p:val>
+                                            <p:strVal val="#ppt_y+.1"/>
+                                          </p:val>
+                                        </p:tav>
+                                        <p:tav tm="100000">
+                                          <p:val>
+                                            <p:strVal val="#ppt_y"/>
                                           </p:val>
                                         </p:tav>
                                       </p:tavLst>

--- a/IEP/t2-lesson1-transforming-linear-functions-IEP-catchup.pptx
+++ b/IEP/t2-lesson1-transforming-linear-functions-IEP-catchup.pptx
@@ -14745,7 +14745,7 @@
         <p:spPr>
           <a:xfrm>
             <a:off x="6210148" y="4274058"/>
-            <a:ext cx="5295748" cy="2499360"/>
+            <a:ext cx="5295748" cy="2282190"/>
           </a:xfrm>
           <a:prstGeom prst="roundRect">
             <a:avLst>
@@ -14824,7 +14824,7 @@
                 <a:latin typeface="Segoe UI"/>
                 <a:cs typeface="Segoe UI"/>
               </a:rPr>
-              <a:t xml:space="preserve"> </a:t>
+              <a:t xml:space="preserve"> The graph of </a:t>
             </a:r>
             <a:r>
               <a:rPr lang="en-US" sz="1575" dirty="0" i="1">
@@ -14864,7 +14864,7 @@
                 <a:latin typeface="Cambria"/>
                 <a:cs typeface="Cambria"/>
               </a:rPr>
-              <a:t xml:space="preserve">) = 2</a:t>
+              <a:t xml:space="preserve">) = </a:t>
             </a:r>
             <a:r>
               <a:rPr lang="en-US" sz="1575" dirty="0" i="1">
@@ -14881,20 +14881,30 @@
                 <a:solidFill>
                   <a:srgbClr val="16171D"/>
                 </a:solidFill>
-                <a:latin typeface="Cambria"/>
-                <a:cs typeface="Cambria"/>
-              </a:rPr>
-              <a:t xml:space="preserve"> − 1</a:t>
+                <a:latin typeface="Segoe UI"/>
+                <a:cs typeface="Segoe UI"/>
+              </a:rPr>
+              <a:t xml:space="preserve"> is transformed to make </a:t>
+            </a:r>
+            <a:r>
+              <a:rPr lang="en-US" sz="1575" dirty="0" i="1">
+                <a:solidFill>
+                  <a:srgbClr val="16171D"/>
+                </a:solidFill>
+                <a:latin typeface="Cambria"/>
+                <a:cs typeface="Cambria"/>
+              </a:rPr>
+              <a:t xml:space="preserve">g</a:t>
             </a:r>
             <a:r>
               <a:rPr lang="en-US" sz="1575" dirty="0">
                 <a:solidFill>
                   <a:srgbClr val="16171D"/>
                 </a:solidFill>
-                <a:latin typeface="Segoe UI"/>
-                <a:cs typeface="Segoe UI"/>
-              </a:rPr>
-              <a:t xml:space="preserve">. What is the </a:t>
+                <a:latin typeface="Cambria"/>
+                <a:cs typeface="Cambria"/>
+              </a:rPr>
+              <a:t xml:space="preserve">(</a:t>
             </a:r>
             <a:r>
               <a:rPr lang="en-US" sz="1575" dirty="0" i="1">
@@ -14904,17 +14914,17 @@
                 <a:latin typeface="Cambria"/>
                 <a:cs typeface="Cambria"/>
               </a:rPr>
-              <a:t xml:space="preserve">y</a:t>
+              <a:t xml:space="preserve">x</a:t>
             </a:r>
             <a:r>
               <a:rPr lang="en-US" sz="1575" dirty="0">
                 <a:solidFill>
                   <a:srgbClr val="16171D"/>
                 </a:solidFill>
-                <a:latin typeface="Segoe UI"/>
-                <a:cs typeface="Segoe UI"/>
-              </a:rPr>
-              <a:t xml:space="preserve">-intercept of </a:t>
+                <a:latin typeface="Cambria"/>
+                <a:cs typeface="Cambria"/>
+              </a:rPr>
+              <a:t xml:space="preserve">) = </a:t>
             </a:r>
             <a:r>
               <a:rPr lang="en-US" sz="1575" dirty="0" i="1">
@@ -14924,7 +14934,7 @@
                 <a:latin typeface="Cambria"/>
                 <a:cs typeface="Cambria"/>
               </a:rPr>
-              <a:t xml:space="preserve">g</a:t>
+              <a:t xml:space="preserve">x</a:t>
             </a:r>
             <a:r>
               <a:rPr lang="en-US" sz="1575" dirty="0">
@@ -14934,77 +14944,17 @@
                 <a:latin typeface="Cambria"/>
                 <a:cs typeface="Cambria"/>
               </a:rPr>
-              <a:t xml:space="preserve">(</a:t>
-            </a:r>
-            <a:r>
-              <a:rPr lang="en-US" sz="1575" dirty="0" i="1">
-                <a:solidFill>
-                  <a:srgbClr val="16171D"/>
-                </a:solidFill>
-                <a:latin typeface="Cambria"/>
-                <a:cs typeface="Cambria"/>
-              </a:rPr>
-              <a:t xml:space="preserve">x</a:t>
+              <a:t xml:space="preserve"> − 2</a:t>
             </a:r>
             <a:r>
               <a:rPr lang="en-US" sz="1575" dirty="0">
                 <a:solidFill>
                   <a:srgbClr val="16171D"/>
                 </a:solidFill>
-                <a:latin typeface="Cambria"/>
-                <a:cs typeface="Cambria"/>
-              </a:rPr>
-              <a:t xml:space="preserve">) = </a:t>
-            </a:r>
-            <a:r>
-              <a:rPr lang="en-US" sz="1575" dirty="0" i="1">
-                <a:solidFill>
-                  <a:srgbClr val="16171D"/>
-                </a:solidFill>
-                <a:latin typeface="Cambria"/>
-                <a:cs typeface="Cambria"/>
-              </a:rPr>
-              <a:t xml:space="preserve">f</a:t>
-            </a:r>
-            <a:r>
-              <a:rPr lang="en-US" sz="1575" dirty="0">
-                <a:solidFill>
-                  <a:srgbClr val="16171D"/>
-                </a:solidFill>
-                <a:latin typeface="Cambria"/>
-                <a:cs typeface="Cambria"/>
-              </a:rPr>
-              <a:t xml:space="preserve">(</a:t>
-            </a:r>
-            <a:r>
-              <a:rPr lang="en-US" sz="1575" dirty="0" i="1">
-                <a:solidFill>
-                  <a:srgbClr val="16171D"/>
-                </a:solidFill>
-                <a:latin typeface="Cambria"/>
-                <a:cs typeface="Cambria"/>
-              </a:rPr>
-              <a:t xml:space="preserve">x</a:t>
-            </a:r>
-            <a:r>
-              <a:rPr lang="en-US" sz="1575" dirty="0">
-                <a:solidFill>
-                  <a:srgbClr val="16171D"/>
-                </a:solidFill>
-                <a:latin typeface="Cambria"/>
-                <a:cs typeface="Cambria"/>
-              </a:rPr>
-              <a:t xml:space="preserve">) + 6</a:t>
-            </a:r>
-            <a:r>
-              <a:rPr lang="en-US" sz="1575" dirty="0">
-                <a:solidFill>
-                  <a:srgbClr val="16171D"/>
-                </a:solidFill>
-                <a:latin typeface="Segoe UI"/>
-                <a:cs typeface="Segoe UI"/>
-              </a:rPr>
-              <a:t xml:space="preserve">?</a:t>
+                <a:latin typeface="Segoe UI"/>
+                <a:cs typeface="Segoe UI"/>
+              </a:rPr>
+              <a:t xml:space="preserve">. Which describes the transformation?</a:t>
             </a:r>
             <a:endParaRPr lang="en-US" sz="1575" dirty="0"/>
           </a:p>
@@ -15058,127 +15008,7 @@
                 <a:latin typeface="Segoe UI"/>
                 <a:cs typeface="Segoe UI"/>
               </a:rPr>
-              <a:t xml:space="preserve"> </a:t>
-            </a:r>
-            <a:r>
-              <a:rPr lang="en-US" sz="1575" dirty="0" i="1">
-                <a:solidFill>
-                  <a:srgbClr val="16171D"/>
-                </a:solidFill>
-                <a:latin typeface="Cambria"/>
-                <a:cs typeface="Cambria"/>
-              </a:rPr>
-              <a:t xml:space="preserve">y</a:t>
-            </a:r>
-            <a:r>
-              <a:rPr lang="en-US" sz="1575" dirty="0">
-                <a:solidFill>
-                  <a:srgbClr val="16171D"/>
-                </a:solidFill>
-                <a:latin typeface="Cambria"/>
-                <a:cs typeface="Cambria"/>
-              </a:rPr>
-              <a:t xml:space="preserve"> = </a:t>
-            </a:r>
-            <a:r>
-              <a:rPr lang="en-US" sz="1575" dirty="0" i="1">
-                <a:solidFill>
-                  <a:srgbClr val="16171D"/>
-                </a:solidFill>
-                <a:latin typeface="Cambria"/>
-                <a:cs typeface="Cambria"/>
-              </a:rPr>
-              <a:t xml:space="preserve">m</a:t>
-            </a:r>
-            <a:r>
-              <a:rPr lang="en-US" sz="1575" dirty="0" i="1">
-                <a:solidFill>
-                  <a:srgbClr val="16171D"/>
-                </a:solidFill>
-                <a:latin typeface="Cambria"/>
-                <a:cs typeface="Cambria"/>
-              </a:rPr>
-              <a:t xml:space="preserve">x</a:t>
-            </a:r>
-            <a:r>
-              <a:rPr lang="en-US" sz="1575" dirty="0">
-                <a:solidFill>
-                  <a:srgbClr val="16171D"/>
-                </a:solidFill>
-                <a:latin typeface="Cambria"/>
-                <a:cs typeface="Cambria"/>
-              </a:rPr>
-              <a:t xml:space="preserve"> + </a:t>
-            </a:r>
-            <a:r>
-              <a:rPr lang="en-US" sz="1575" dirty="0" i="1">
-                <a:solidFill>
-                  <a:srgbClr val="16171D"/>
-                </a:solidFill>
-                <a:latin typeface="Cambria"/>
-                <a:cs typeface="Cambria"/>
-              </a:rPr>
-              <a:t xml:space="preserve">b</a:t>
-            </a:r>
-            <a:r>
-              <a:rPr lang="en-US" sz="1575" dirty="0">
-                <a:solidFill>
-                  <a:srgbClr val="16171D"/>
-                </a:solidFill>
-                <a:latin typeface="Segoe UI"/>
-                <a:cs typeface="Segoe UI"/>
-              </a:rPr>
-              <a:t xml:space="preserve">, </a:t>
-            </a:r>
-            <a:r>
-              <a:rPr lang="en-US" sz="1575" dirty="0" i="1">
-                <a:solidFill>
-                  <a:srgbClr val="16171D"/>
-                </a:solidFill>
-                <a:latin typeface="Cambria"/>
-                <a:cs typeface="Cambria"/>
-              </a:rPr>
-              <a:t xml:space="preserve">y</a:t>
-            </a:r>
-            <a:r>
-              <a:rPr lang="en-US" sz="1575" dirty="0">
-                <a:solidFill>
-                  <a:srgbClr val="16171D"/>
-                </a:solidFill>
-                <a:latin typeface="Segoe UI"/>
-                <a:cs typeface="Segoe UI"/>
-              </a:rPr>
-              <a:t xml:space="preserve">-intercept </a:t>
-            </a:r>
-            <a:r>
-              <a:rPr lang="en-US" sz="1575" dirty="0">
-                <a:solidFill>
-                  <a:srgbClr val="16171D"/>
-                </a:solidFill>
-                <a:latin typeface="Cambria"/>
-                <a:cs typeface="Cambria"/>
-              </a:rPr>
-              <a:t xml:space="preserve">(0, </a:t>
-            </a:r>
-            <a:r>
-              <a:rPr lang="en-US" sz="1575" dirty="0" i="1">
-                <a:solidFill>
-                  <a:srgbClr val="16171D"/>
-                </a:solidFill>
-                <a:latin typeface="Cambria"/>
-                <a:cs typeface="Cambria"/>
-              </a:rPr>
-              <a:t xml:space="preserve">b</a:t>
-            </a:r>
-            <a:r>
-              <a:rPr lang="en-US" sz="1575" dirty="0">
-                <a:solidFill>
-                  <a:srgbClr val="16171D"/>
-                </a:solidFill>
-                <a:latin typeface="Cambria"/>
-                <a:cs typeface="Cambria"/>
-              </a:rPr>
-              <a:t xml:space="preserve">)</a:t>
+              <a:t xml:space="preserve"> outside: + moves up, − moves down</a:t>
             </a:r>
             <a:endParaRPr lang="en-US" sz="1575" dirty="0"/>
           </a:p>
@@ -15193,7 +15023,7 @@
         <p:spPr>
           <a:xfrm>
             <a:off x="6419698" y="5351526"/>
-            <a:ext cx="4876648" cy="1250442"/>
+            <a:ext cx="4876648" cy="1033272"/>
           </a:xfrm>
           <a:prstGeom prst="roundRect">
             <a:avLst>
@@ -15233,10 +15063,10 @@
                 <a:solidFill>
                   <a:srgbClr val="16171D"/>
                 </a:solidFill>
-                <a:latin typeface="Cambria"/>
-                <a:cs typeface="Cambria"/>
-              </a:rPr>
-              <a:t xml:space="preserve">(0, 5)</a:t>
+                <a:latin typeface="Segoe UI"/>
+                <a:cs typeface="Segoe UI"/>
+              </a:rPr>
+              <a:t xml:space="preserve">A translation down 2 units</a:t>
             </a:r>
             <a:br>
               <a:rPr lang="en-US" sz="1425" dirty="0">
@@ -15265,7 +15095,27 @@
                 <a:latin typeface="Segoe UI"/>
                 <a:cs typeface="Segoe UI"/>
               </a:rPr>
-              <a:t xml:space="preserve"> </a:t>
+              <a:t xml:space="preserve"> The </a:t>
+            </a:r>
+            <a:r>
+              <a:rPr lang="en-US" sz="1425" dirty="0">
+                <a:solidFill>
+                  <a:srgbClr val="16171D"/>
+                </a:solidFill>
+                <a:latin typeface="Cambria"/>
+                <a:cs typeface="Cambria"/>
+              </a:rPr>
+              <a:t xml:space="preserve">− 2</a:t>
+            </a:r>
+            <a:r>
+              <a:rPr lang="en-US" sz="1425" dirty="0">
+                <a:solidFill>
+                  <a:srgbClr val="16171D"/>
+                </a:solidFill>
+                <a:latin typeface="Segoe UI"/>
+                <a:cs typeface="Segoe UI"/>
+              </a:rPr>
+              <a:t xml:space="preserve"> is outside </a:t>
             </a:r>
             <a:r>
               <a:rPr lang="en-US" sz="1425" dirty="0" i="1">
@@ -15275,7 +15125,7 @@
                 <a:latin typeface="Cambria"/>
                 <a:cs typeface="Cambria"/>
               </a:rPr>
-              <a:t xml:space="preserve">g</a:t>
+              <a:t xml:space="preserve">f</a:t>
             </a:r>
             <a:r>
               <a:rPr lang="en-US" sz="1425" dirty="0">
@@ -15305,7 +15155,17 @@
                 <a:latin typeface="Cambria"/>
                 <a:cs typeface="Cambria"/>
               </a:rPr>
-              <a:t xml:space="preserve">) = 2</a:t>
+              <a:t xml:space="preserve">)</a:t>
+            </a:r>
+            <a:r>
+              <a:rPr lang="en-US" sz="1425" dirty="0">
+                <a:solidFill>
+                  <a:srgbClr val="16171D"/>
+                </a:solidFill>
+                <a:latin typeface="Segoe UI"/>
+                <a:cs typeface="Segoe UI"/>
+              </a:rPr>
+              <a:t xml:space="preserve">: it changes every output (</a:t>
             </a:r>
             <a:r>
               <a:rPr lang="en-US" sz="1425" dirty="0" i="1">
@@ -15315,27 +15175,17 @@
                 <a:latin typeface="Cambria"/>
                 <a:cs typeface="Cambria"/>
               </a:rPr>
-              <a:t xml:space="preserve">x</a:t>
+              <a:t xml:space="preserve">y</a:t>
             </a:r>
             <a:r>
               <a:rPr lang="en-US" sz="1425" dirty="0">
                 <a:solidFill>
                   <a:srgbClr val="16171D"/>
                 </a:solidFill>
-                <a:latin typeface="Cambria"/>
-                <a:cs typeface="Cambria"/>
-              </a:rPr>
-              <a:t xml:space="preserve"> − 1 + 6</a:t>
-            </a:r>
-            <a:r>
-              <a:rPr lang="en-US" sz="1425" dirty="0">
-                <a:solidFill>
-                  <a:srgbClr val="16171D"/>
-                </a:solidFill>
-                <a:latin typeface="Segoe UI"/>
-                <a:cs typeface="Segoe UI"/>
-              </a:rPr>
-              <a:t xml:space="preserve">.</a:t>
+                <a:latin typeface="Segoe UI"/>
+                <a:cs typeface="Segoe UI"/>
+              </a:rPr>
+              <a:t xml:space="preserve">-value).</a:t>
             </a:r>
             <a:br>
               <a:rPr lang="en-US" sz="1425" dirty="0">
@@ -15364,216 +15214,7 @@
                 <a:latin typeface="Segoe UI"/>
                 <a:cs typeface="Segoe UI"/>
               </a:rPr>
-              <a:t xml:space="preserve"> Combine: </a:t>
-            </a:r>
-            <a:r>
-              <a:rPr lang="en-US" sz="1425" dirty="0">
-                <a:solidFill>
-                  <a:srgbClr val="16171D"/>
-                </a:solidFill>
-                <a:latin typeface="Cambria"/>
-                <a:cs typeface="Cambria"/>
-              </a:rPr>
-              <a:t xml:space="preserve">−1 + 6 = 5</a:t>
-            </a:r>
-            <a:r>
-              <a:rPr lang="en-US" sz="1425" dirty="0">
-                <a:solidFill>
-                  <a:srgbClr val="16171D"/>
-                </a:solidFill>
-                <a:latin typeface="Segoe UI"/>
-                <a:cs typeface="Segoe UI"/>
-              </a:rPr>
-              <a:t xml:space="preserve">, so </a:t>
-            </a:r>
-            <a:r>
-              <a:rPr lang="en-US" sz="1425" dirty="0" i="1">
-                <a:solidFill>
-                  <a:srgbClr val="16171D"/>
-                </a:solidFill>
-                <a:latin typeface="Cambria"/>
-                <a:cs typeface="Cambria"/>
-              </a:rPr>
-              <a:t xml:space="preserve">g</a:t>
-            </a:r>
-            <a:r>
-              <a:rPr lang="en-US" sz="1425" dirty="0">
-                <a:solidFill>
-                  <a:srgbClr val="16171D"/>
-                </a:solidFill>
-                <a:latin typeface="Cambria"/>
-                <a:cs typeface="Cambria"/>
-              </a:rPr>
-              <a:t xml:space="preserve">(</a:t>
-            </a:r>
-            <a:r>
-              <a:rPr lang="en-US" sz="1425" dirty="0" i="1">
-                <a:solidFill>
-                  <a:srgbClr val="16171D"/>
-                </a:solidFill>
-                <a:latin typeface="Cambria"/>
-                <a:cs typeface="Cambria"/>
-              </a:rPr>
-              <a:t xml:space="preserve">x</a:t>
-            </a:r>
-            <a:r>
-              <a:rPr lang="en-US" sz="1425" dirty="0">
-                <a:solidFill>
-                  <a:srgbClr val="16171D"/>
-                </a:solidFill>
-                <a:latin typeface="Cambria"/>
-                <a:cs typeface="Cambria"/>
-              </a:rPr>
-              <a:t xml:space="preserve">) = 2</a:t>
-            </a:r>
-            <a:r>
-              <a:rPr lang="en-US" sz="1425" dirty="0" i="1">
-                <a:solidFill>
-                  <a:srgbClr val="16171D"/>
-                </a:solidFill>
-                <a:latin typeface="Cambria"/>
-                <a:cs typeface="Cambria"/>
-              </a:rPr>
-              <a:t xml:space="preserve">x</a:t>
-            </a:r>
-            <a:r>
-              <a:rPr lang="en-US" sz="1425" dirty="0">
-                <a:solidFill>
-                  <a:srgbClr val="16171D"/>
-                </a:solidFill>
-                <a:latin typeface="Cambria"/>
-                <a:cs typeface="Cambria"/>
-              </a:rPr>
-              <a:t xml:space="preserve"> + 5</a:t>
-            </a:r>
-            <a:r>
-              <a:rPr lang="en-US" sz="1425" dirty="0">
-                <a:solidFill>
-                  <a:srgbClr val="16171D"/>
-                </a:solidFill>
-                <a:latin typeface="Segoe UI"/>
-                <a:cs typeface="Segoe UI"/>
-              </a:rPr>
-              <a:t xml:space="preserve">.</a:t>
-            </a:r>
-            <a:br>
-              <a:rPr lang="en-US" sz="1425" dirty="0">
-                <a:solidFill>
-                  <a:srgbClr val="16171D"/>
-                </a:solidFill>
-                <a:latin typeface="Segoe UI"/>
-                <a:cs typeface="Segoe UI"/>
-              </a:rPr>
-            </a:br>
-            <a:r>
-              <a:rPr lang="en-US" sz="1425" dirty="0" b="1">
-                <a:solidFill>
-                  <a:srgbClr val="16171D"/>
-                </a:solidFill>
-                <a:latin typeface="Segoe UI"/>
-                <a:cs typeface="Segoe UI"/>
-              </a:rPr>
-              <a:t xml:space="preserve">3.</a:t>
-            </a:r>
-            <a:r>
-              <a:rPr lang="en-US" sz="1425" dirty="0">
-                <a:solidFill>
-                  <a:srgbClr val="16171D"/>
-                </a:solidFill>
-                <a:latin typeface="Segoe UI"/>
-                <a:cs typeface="Segoe UI"/>
-              </a:rPr>
-              <a:t xml:space="preserve"> </a:t>
-            </a:r>
-            <a:r>
-              <a:rPr lang="en-US" sz="1425" dirty="0" i="1">
-                <a:solidFill>
-                  <a:srgbClr val="16171D"/>
-                </a:solidFill>
-                <a:latin typeface="Cambria"/>
-                <a:cs typeface="Cambria"/>
-              </a:rPr>
-              <a:t xml:space="preserve">b</a:t>
-            </a:r>
-            <a:r>
-              <a:rPr lang="en-US" sz="1425" dirty="0">
-                <a:solidFill>
-                  <a:srgbClr val="16171D"/>
-                </a:solidFill>
-                <a:latin typeface="Cambria"/>
-                <a:cs typeface="Cambria"/>
-              </a:rPr>
-              <a:t xml:space="preserve"> = 5</a:t>
-            </a:r>
-            <a:r>
-              <a:rPr lang="en-US" sz="1425" dirty="0">
-                <a:solidFill>
-                  <a:srgbClr val="16171D"/>
-                </a:solidFill>
-                <a:latin typeface="Segoe UI"/>
-                <a:cs typeface="Segoe UI"/>
-              </a:rPr>
-              <a:t xml:space="preserve">, so the </a:t>
-            </a:r>
-            <a:r>
-              <a:rPr lang="en-US" sz="1425" dirty="0" i="1">
-                <a:solidFill>
-                  <a:srgbClr val="16171D"/>
-                </a:solidFill>
-                <a:latin typeface="Cambria"/>
-                <a:cs typeface="Cambria"/>
-              </a:rPr>
-              <a:t xml:space="preserve">y</a:t>
-            </a:r>
-            <a:r>
-              <a:rPr lang="en-US" sz="1425" dirty="0">
-                <a:solidFill>
-                  <a:srgbClr val="16171D"/>
-                </a:solidFill>
-                <a:latin typeface="Segoe UI"/>
-                <a:cs typeface="Segoe UI"/>
-              </a:rPr>
-              <a:t xml:space="preserve">-intercept is </a:t>
-            </a:r>
-            <a:r>
-              <a:rPr lang="en-US" sz="1425" dirty="0">
-                <a:solidFill>
-                  <a:srgbClr val="16171D"/>
-                </a:solidFill>
-                <a:latin typeface="Cambria"/>
-                <a:cs typeface="Cambria"/>
-              </a:rPr>
-              <a:t xml:space="preserve">(0, 5)</a:t>
-            </a:r>
-            <a:r>
-              <a:rPr lang="en-US" sz="1425" dirty="0">
-                <a:solidFill>
-                  <a:srgbClr val="16171D"/>
-                </a:solidFill>
-                <a:latin typeface="Segoe UI"/>
-                <a:cs typeface="Segoe UI"/>
-              </a:rPr>
-              <a:t xml:space="preserve">: </a:t>
-            </a:r>
-            <a:r>
-              <a:rPr lang="en-US" sz="1425" dirty="0">
-                <a:solidFill>
-                  <a:srgbClr val="16171D"/>
-                </a:solidFill>
-                <a:latin typeface="Cambria"/>
-                <a:cs typeface="Cambria"/>
-              </a:rPr>
-              <a:t xml:space="preserve">(0, −1)</a:t>
-            </a:r>
-            <a:r>
-              <a:rPr lang="en-US" sz="1425" dirty="0">
-                <a:solidFill>
-                  <a:srgbClr val="16171D"/>
-                </a:solidFill>
-                <a:latin typeface="Segoe UI"/>
-                <a:cs typeface="Segoe UI"/>
-              </a:rPr>
-              <a:t xml:space="preserve"> moved up 6.</a:t>
+              <a:t xml:space="preserve"> Minus means down: a translation down 2 units.</a:t>
             </a:r>
             <a:endParaRPr lang="en-US" sz="1425" dirty="0"/>
           </a:p>
@@ -28532,7 +28173,7 @@
         <p:spPr>
           <a:xfrm>
             <a:off x="6210148" y="4251198"/>
-            <a:ext cx="5295748" cy="2065020"/>
+            <a:ext cx="5295748" cy="2545080"/>
           </a:xfrm>
           <a:prstGeom prst="roundRect">
             <a:avLst>
@@ -28572,7 +28213,7 @@
         <p:spPr>
           <a:xfrm>
             <a:off x="6419698" y="4422648"/>
-            <a:ext cx="4876648" cy="534924"/>
+            <a:ext cx="4876648" cy="774954"/>
           </a:xfrm>
           <a:prstGeom prst="rect">
             <a:avLst/>
@@ -28611,7 +28252,7 @@
                 <a:latin typeface="Segoe UI"/>
                 <a:cs typeface="Segoe UI"/>
               </a:rPr>
-              <a:t xml:space="preserve"> </a:t>
+              <a:t xml:space="preserve"> Which function is a reflection of </a:t>
             </a:r>
             <a:r>
               <a:rPr lang="en-US" sz="1575" dirty="0" i="1">
@@ -28671,7 +28312,7 @@
                 <a:latin typeface="Segoe UI"/>
                 <a:cs typeface="Segoe UI"/>
               </a:rPr>
-              <a:t xml:space="preserve"> and </a:t>
+              <a:t xml:space="preserve"> across the </a:t>
             </a:r>
             <a:r>
               <a:rPr lang="en-US" sz="1575" dirty="0" i="1">
@@ -28681,157 +28322,17 @@
                 <a:latin typeface="Cambria"/>
                 <a:cs typeface="Cambria"/>
               </a:rPr>
-              <a:t xml:space="preserve">g</a:t>
+              <a:t xml:space="preserve">x</a:t>
             </a:r>
             <a:r>
               <a:rPr lang="en-US" sz="1575" dirty="0">
                 <a:solidFill>
                   <a:srgbClr val="16171D"/>
                 </a:solidFill>
-                <a:latin typeface="Cambria"/>
-                <a:cs typeface="Cambria"/>
-              </a:rPr>
-              <a:t xml:space="preserve">(</a:t>
-            </a:r>
-            <a:r>
-              <a:rPr lang="en-US" sz="1575" dirty="0" i="1">
-                <a:solidFill>
-                  <a:srgbClr val="16171D"/>
-                </a:solidFill>
-                <a:latin typeface="Cambria"/>
-                <a:cs typeface="Cambria"/>
-              </a:rPr>
-              <a:t xml:space="preserve">x</a:t>
-            </a:r>
-            <a:r>
-              <a:rPr lang="en-US" sz="1575" dirty="0">
-                <a:solidFill>
-                  <a:srgbClr val="16171D"/>
-                </a:solidFill>
-                <a:latin typeface="Cambria"/>
-                <a:cs typeface="Cambria"/>
-              </a:rPr>
-              <a:t xml:space="preserve">) = 2</a:t>
-            </a:r>
-            <a:r>
-              <a:rPr lang="en-US" sz="1575" dirty="0" i="1">
-                <a:solidFill>
-                  <a:srgbClr val="16171D"/>
-                </a:solidFill>
-                <a:latin typeface="Cambria"/>
-                <a:cs typeface="Cambria"/>
-              </a:rPr>
-              <a:t xml:space="preserve">f</a:t>
-            </a:r>
-            <a:r>
-              <a:rPr lang="en-US" sz="1575" dirty="0">
-                <a:solidFill>
-                  <a:srgbClr val="16171D"/>
-                </a:solidFill>
-                <a:latin typeface="Cambria"/>
-                <a:cs typeface="Cambria"/>
-              </a:rPr>
-              <a:t xml:space="preserve">(</a:t>
-            </a:r>
-            <a:r>
-              <a:rPr lang="en-US" sz="1575" dirty="0" i="1">
-                <a:solidFill>
-                  <a:srgbClr val="16171D"/>
-                </a:solidFill>
-                <a:latin typeface="Cambria"/>
-                <a:cs typeface="Cambria"/>
-              </a:rPr>
-              <a:t xml:space="preserve">x</a:t>
-            </a:r>
-            <a:r>
-              <a:rPr lang="en-US" sz="1575" dirty="0">
-                <a:solidFill>
-                  <a:srgbClr val="16171D"/>
-                </a:solidFill>
-                <a:latin typeface="Cambria"/>
-                <a:cs typeface="Cambria"/>
-              </a:rPr>
-              <a:t xml:space="preserve">) − 5</a:t>
-            </a:r>
-            <a:r>
-              <a:rPr lang="en-US" sz="1575" dirty="0">
-                <a:solidFill>
-                  <a:srgbClr val="16171D"/>
-                </a:solidFill>
-                <a:latin typeface="Segoe UI"/>
-                <a:cs typeface="Segoe UI"/>
-              </a:rPr>
-              <a:t xml:space="preserve">. What is the </a:t>
-            </a:r>
-            <a:r>
-              <a:rPr lang="en-US" sz="1575" dirty="0" i="1">
-                <a:solidFill>
-                  <a:srgbClr val="16171D"/>
-                </a:solidFill>
-                <a:latin typeface="Cambria"/>
-                <a:cs typeface="Cambria"/>
-              </a:rPr>
-              <a:t xml:space="preserve">y</a:t>
-            </a:r>
-            <a:r>
-              <a:rPr lang="en-US" sz="1575" dirty="0">
-                <a:solidFill>
-                  <a:srgbClr val="16171D"/>
-                </a:solidFill>
-                <a:latin typeface="Segoe UI"/>
-                <a:cs typeface="Segoe UI"/>
-              </a:rPr>
-              <a:t xml:space="preserve">-intercept of </a:t>
-            </a:r>
-            <a:r>
-              <a:rPr lang="en-US" sz="1575" dirty="0" i="1">
-                <a:solidFill>
-                  <a:srgbClr val="16171D"/>
-                </a:solidFill>
-                <a:latin typeface="Cambria"/>
-                <a:cs typeface="Cambria"/>
-              </a:rPr>
-              <a:t xml:space="preserve">g</a:t>
-            </a:r>
-            <a:r>
-              <a:rPr lang="en-US" sz="1575" dirty="0">
-                <a:solidFill>
-                  <a:srgbClr val="16171D"/>
-                </a:solidFill>
-                <a:latin typeface="Cambria"/>
-                <a:cs typeface="Cambria"/>
-              </a:rPr>
-              <a:t xml:space="preserve">(</a:t>
-            </a:r>
-            <a:r>
-              <a:rPr lang="en-US" sz="1575" dirty="0" i="1">
-                <a:solidFill>
-                  <a:srgbClr val="16171D"/>
-                </a:solidFill>
-                <a:latin typeface="Cambria"/>
-                <a:cs typeface="Cambria"/>
-              </a:rPr>
-              <a:t xml:space="preserve">x</a:t>
-            </a:r>
-            <a:r>
-              <a:rPr lang="en-US" sz="1575" dirty="0">
-                <a:solidFill>
-                  <a:srgbClr val="16171D"/>
-                </a:solidFill>
-                <a:latin typeface="Cambria"/>
-                <a:cs typeface="Cambria"/>
-              </a:rPr>
-              <a:t xml:space="preserve">)</a:t>
-            </a:r>
-            <a:r>
-              <a:rPr lang="en-US" sz="1575" dirty="0">
-                <a:solidFill>
-                  <a:srgbClr val="16171D"/>
-                </a:solidFill>
-                <a:latin typeface="Segoe UI"/>
-                <a:cs typeface="Segoe UI"/>
-              </a:rPr>
-              <a:t xml:space="preserve">?</a:t>
+                <a:latin typeface="Segoe UI"/>
+                <a:cs typeface="Segoe UI"/>
+              </a:rPr>
+              <a:t xml:space="preserve">-axis and a vertical dilation by a factor of 2?</a:t>
             </a:r>
             <a:endParaRPr lang="en-US" sz="1575" dirty="0"/>
           </a:p>
@@ -28845,8 +28346,8 @@
         </p:nvSpPr>
         <p:spPr>
           <a:xfrm>
-            <a:off x="6419698" y="4995672"/>
-            <a:ext cx="4876648" cy="294894"/>
+            <a:off x="6419698" y="5235702"/>
+            <a:ext cx="4876648" cy="534924"/>
           </a:xfrm>
           <a:prstGeom prst="rect">
             <a:avLst/>
@@ -28945,7 +28446,17 @@
                 <a:latin typeface="Cambria"/>
                 <a:cs typeface="Cambria"/>
               </a:rPr>
-              <a:t xml:space="preserve">) + </a:t>
+              <a:t xml:space="preserve">)</a:t>
+            </a:r>
+            <a:r>
+              <a:rPr lang="en-US" sz="1575" dirty="0">
+                <a:solidFill>
+                  <a:srgbClr val="16171D"/>
+                </a:solidFill>
+                <a:latin typeface="Segoe UI"/>
+                <a:cs typeface="Segoe UI"/>
+              </a:rPr>
+              <a:t xml:space="preserve">: </a:t>
             </a:r>
             <a:r>
               <a:rPr lang="en-US" sz="1575" dirty="0" i="1">
@@ -28955,17 +28466,57 @@
                 <a:latin typeface="Cambria"/>
                 <a:cs typeface="Cambria"/>
               </a:rPr>
-              <a:t xml:space="preserve">d</a:t>
+              <a:t xml:space="preserve">a</a:t>
             </a:r>
             <a:r>
               <a:rPr lang="en-US" sz="1575" dirty="0">
                 <a:solidFill>
                   <a:srgbClr val="16171D"/>
                 </a:solidFill>
-                <a:latin typeface="Segoe UI"/>
-                <a:cs typeface="Segoe UI"/>
-              </a:rPr>
-              <a:t xml:space="preserve"> has </a:t>
+                <a:latin typeface="Cambria"/>
+                <a:cs typeface="Cambria"/>
+              </a:rPr>
+              <a:t xml:space="preserve"> </a:t>
+            </a:r>
+            <a:r>
+              <a:rPr lang="en-US" sz="1575" dirty="0">
+                <a:solidFill>
+                  <a:srgbClr val="16171D"/>
+                </a:solidFill>
+                <a:latin typeface="Cambria"/>
+                <a:cs typeface="Cambria"/>
+              </a:rPr>
+              <a:t xml:space="preserve">&lt;</a:t>
+            </a:r>
+            <a:r>
+              <a:rPr lang="en-US" sz="1575" dirty="0">
+                <a:solidFill>
+                  <a:srgbClr val="16171D"/>
+                </a:solidFill>
+                <a:latin typeface="Cambria"/>
+                <a:cs typeface="Cambria"/>
+              </a:rPr>
+              <a:t xml:space="preserve"> 0</a:t>
+            </a:r>
+            <a:r>
+              <a:rPr lang="en-US" sz="1575" dirty="0">
+                <a:solidFill>
+                  <a:srgbClr val="16171D"/>
+                </a:solidFill>
+                <a:latin typeface="Segoe UI"/>
+                <a:cs typeface="Segoe UI"/>
+              </a:rPr>
+              <a:t xml:space="preserve"> reflects, </a:t>
+            </a:r>
+            <a:r>
+              <a:rPr lang="en-US" sz="1575" dirty="0">
+                <a:solidFill>
+                  <a:srgbClr val="16171D"/>
+                </a:solidFill>
+                <a:latin typeface="Cambria"/>
+                <a:cs typeface="Cambria"/>
+              </a:rPr>
+              <a:t xml:space="preserve">|</a:t>
             </a:r>
             <a:r>
               <a:rPr lang="en-US" sz="1575" dirty="0" i="1">
@@ -28975,47 +28526,27 @@
                 <a:latin typeface="Cambria"/>
                 <a:cs typeface="Cambria"/>
               </a:rPr>
-              <a:t xml:space="preserve">y</a:t>
+              <a:t xml:space="preserve">a</a:t>
             </a:r>
             <a:r>
               <a:rPr lang="en-US" sz="1575" dirty="0">
                 <a:solidFill>
                   <a:srgbClr val="16171D"/>
                 </a:solidFill>
-                <a:latin typeface="Segoe UI"/>
-                <a:cs typeface="Segoe UI"/>
-              </a:rPr>
-              <a:t xml:space="preserve">-intercept </a:t>
+                <a:latin typeface="Cambria"/>
+                <a:cs typeface="Cambria"/>
+              </a:rPr>
+              <a:t xml:space="preserve">| &gt; 1</a:t>
             </a:r>
             <a:r>
               <a:rPr lang="en-US" sz="1575" dirty="0">
                 <a:solidFill>
                   <a:srgbClr val="16171D"/>
                 </a:solidFill>
-                <a:latin typeface="Cambria"/>
-                <a:cs typeface="Cambria"/>
-              </a:rPr>
-              <a:t xml:space="preserve">(0, </a:t>
-            </a:r>
-            <a:r>
-              <a:rPr lang="en-US" sz="1575" dirty="0" i="1">
-                <a:solidFill>
-                  <a:srgbClr val="16171D"/>
-                </a:solidFill>
-                <a:latin typeface="Cambria"/>
-                <a:cs typeface="Cambria"/>
-              </a:rPr>
-              <a:t xml:space="preserve">d</a:t>
-            </a:r>
-            <a:r>
-              <a:rPr lang="en-US" sz="1575" dirty="0">
-                <a:solidFill>
-                  <a:srgbClr val="16171D"/>
-                </a:solidFill>
-                <a:latin typeface="Cambria"/>
-                <a:cs typeface="Cambria"/>
-              </a:rPr>
-              <a:t xml:space="preserve">)</a:t>
+                <a:latin typeface="Segoe UI"/>
+                <a:cs typeface="Segoe UI"/>
+              </a:rPr>
+              <a:t xml:space="preserve"> stretches</a:t>
             </a:r>
             <a:endParaRPr lang="en-US" sz="1575" dirty="0"/>
           </a:p>
@@ -29029,8 +28560,8 @@
         </p:nvSpPr>
         <p:spPr>
           <a:xfrm>
-            <a:off x="6419698" y="5328666"/>
-            <a:ext cx="4347275" cy="816102"/>
+            <a:off x="6419698" y="5808726"/>
+            <a:ext cx="4876648" cy="816102"/>
           </a:xfrm>
           <a:prstGeom prst="roundRect">
             <a:avLst>
@@ -29066,6 +28597,16 @@
               <a:t xml:space="preserve">ANSWER   </a:t>
             </a:r>
             <a:r>
+              <a:rPr lang="en-US" sz="1425" dirty="0" b="1" i="1">
+                <a:solidFill>
+                  <a:srgbClr val="16171D"/>
+                </a:solidFill>
+                <a:latin typeface="Cambria"/>
+                <a:cs typeface="Cambria"/>
+              </a:rPr>
+              <a:t xml:space="preserve">g</a:t>
+            </a:r>
+            <a:r>
               <a:rPr lang="en-US" sz="1425" dirty="0" b="1">
                 <a:solidFill>
                   <a:srgbClr val="16171D"/>
@@ -29073,7 +28614,37 @@
                 <a:latin typeface="Cambria"/>
                 <a:cs typeface="Cambria"/>
               </a:rPr>
-              <a:t xml:space="preserve">(0, −5)</a:t>
+              <a:t xml:space="preserve">(</a:t>
+            </a:r>
+            <a:r>
+              <a:rPr lang="en-US" sz="1425" dirty="0" b="1" i="1">
+                <a:solidFill>
+                  <a:srgbClr val="16171D"/>
+                </a:solidFill>
+                <a:latin typeface="Cambria"/>
+                <a:cs typeface="Cambria"/>
+              </a:rPr>
+              <a:t xml:space="preserve">x</a:t>
+            </a:r>
+            <a:r>
+              <a:rPr lang="en-US" sz="1425" dirty="0" b="1">
+                <a:solidFill>
+                  <a:srgbClr val="16171D"/>
+                </a:solidFill>
+                <a:latin typeface="Cambria"/>
+                <a:cs typeface="Cambria"/>
+              </a:rPr>
+              <a:t xml:space="preserve">) = −2</a:t>
+            </a:r>
+            <a:r>
+              <a:rPr lang="en-US" sz="1425" dirty="0" b="1" i="1">
+                <a:solidFill>
+                  <a:srgbClr val="16171D"/>
+                </a:solidFill>
+                <a:latin typeface="Cambria"/>
+                <a:cs typeface="Cambria"/>
+              </a:rPr>
+              <a:t xml:space="preserve">x</a:t>
             </a:r>
             <a:br>
               <a:rPr lang="en-US" sz="1425" dirty="0">
@@ -29102,7 +28673,7 @@
                 <a:latin typeface="Segoe UI"/>
                 <a:cs typeface="Segoe UI"/>
               </a:rPr>
-              <a:t xml:space="preserve"> Replace </a:t>
+              <a:t xml:space="preserve"> Reflect: </a:t>
             </a:r>
             <a:r>
               <a:rPr lang="en-US" sz="1425" dirty="0" i="1">
@@ -29112,17 +28683,27 @@
                 <a:latin typeface="Cambria"/>
                 <a:cs typeface="Cambria"/>
               </a:rPr>
-              <a:t xml:space="preserve">f</a:t>
+              <a:t xml:space="preserve">a</a:t>
             </a:r>
             <a:r>
               <a:rPr lang="en-US" sz="1425" dirty="0">
                 <a:solidFill>
                   <a:srgbClr val="16171D"/>
                 </a:solidFill>
-                <a:latin typeface="Cambria"/>
-                <a:cs typeface="Cambria"/>
-              </a:rPr>
-              <a:t xml:space="preserve">(</a:t>
+                <a:latin typeface="Segoe UI"/>
+                <a:cs typeface="Segoe UI"/>
+              </a:rPr>
+              <a:t xml:space="preserve"> is negative. Factor of 2: </a:t>
+            </a:r>
+            <a:r>
+              <a:rPr lang="en-US" sz="1425" dirty="0">
+                <a:solidFill>
+                  <a:srgbClr val="16171D"/>
+                </a:solidFill>
+                <a:latin typeface="Cambria"/>
+                <a:cs typeface="Cambria"/>
+              </a:rPr>
+              <a:t xml:space="preserve">|</a:t>
             </a:r>
             <a:r>
               <a:rPr lang="en-US" sz="1425" dirty="0" i="1">
@@ -29132,7 +28713,7 @@
                 <a:latin typeface="Cambria"/>
                 <a:cs typeface="Cambria"/>
               </a:rPr>
-              <a:t xml:space="preserve">x</a:t>
+              <a:t xml:space="preserve">a</a:t>
             </a:r>
             <a:r>
               <a:rPr lang="en-US" sz="1425" dirty="0">
@@ -29142,97 +28723,7 @@
                 <a:latin typeface="Cambria"/>
                 <a:cs typeface="Cambria"/>
               </a:rPr>
-              <a:t xml:space="preserve">)</a:t>
-            </a:r>
-            <a:r>
-              <a:rPr lang="en-US" sz="1425" dirty="0">
-                <a:solidFill>
-                  <a:srgbClr val="16171D"/>
-                </a:solidFill>
-                <a:latin typeface="Segoe UI"/>
-                <a:cs typeface="Segoe UI"/>
-              </a:rPr>
-              <a:t xml:space="preserve"> with </a:t>
-            </a:r>
-            <a:r>
-              <a:rPr lang="en-US" sz="1425" dirty="0" i="1">
-                <a:solidFill>
-                  <a:srgbClr val="16171D"/>
-                </a:solidFill>
-                <a:latin typeface="Cambria"/>
-                <a:cs typeface="Cambria"/>
-              </a:rPr>
-              <a:t xml:space="preserve">x</a:t>
-            </a:r>
-            <a:r>
-              <a:rPr lang="en-US" sz="1425" dirty="0">
-                <a:solidFill>
-                  <a:srgbClr val="16171D"/>
-                </a:solidFill>
-                <a:latin typeface="Segoe UI"/>
-                <a:cs typeface="Segoe UI"/>
-              </a:rPr>
-              <a:t xml:space="preserve">: </a:t>
-            </a:r>
-            <a:r>
-              <a:rPr lang="en-US" sz="1425" dirty="0" i="1">
-                <a:solidFill>
-                  <a:srgbClr val="16171D"/>
-                </a:solidFill>
-                <a:latin typeface="Cambria"/>
-                <a:cs typeface="Cambria"/>
-              </a:rPr>
-              <a:t xml:space="preserve">g</a:t>
-            </a:r>
-            <a:r>
-              <a:rPr lang="en-US" sz="1425" dirty="0">
-                <a:solidFill>
-                  <a:srgbClr val="16171D"/>
-                </a:solidFill>
-                <a:latin typeface="Cambria"/>
-                <a:cs typeface="Cambria"/>
-              </a:rPr>
-              <a:t xml:space="preserve">(</a:t>
-            </a:r>
-            <a:r>
-              <a:rPr lang="en-US" sz="1425" dirty="0" i="1">
-                <a:solidFill>
-                  <a:srgbClr val="16171D"/>
-                </a:solidFill>
-                <a:latin typeface="Cambria"/>
-                <a:cs typeface="Cambria"/>
-              </a:rPr>
-              <a:t xml:space="preserve">x</a:t>
-            </a:r>
-            <a:r>
-              <a:rPr lang="en-US" sz="1425" dirty="0">
-                <a:solidFill>
-                  <a:srgbClr val="16171D"/>
-                </a:solidFill>
-                <a:latin typeface="Cambria"/>
-                <a:cs typeface="Cambria"/>
-              </a:rPr>
-              <a:t xml:space="preserve">) = 2</a:t>
-            </a:r>
-            <a:r>
-              <a:rPr lang="en-US" sz="1425" dirty="0" i="1">
-                <a:solidFill>
-                  <a:srgbClr val="16171D"/>
-                </a:solidFill>
-                <a:latin typeface="Cambria"/>
-                <a:cs typeface="Cambria"/>
-              </a:rPr>
-              <a:t xml:space="preserve">x</a:t>
-            </a:r>
-            <a:r>
-              <a:rPr lang="en-US" sz="1425" dirty="0">
-                <a:solidFill>
-                  <a:srgbClr val="16171D"/>
-                </a:solidFill>
-                <a:latin typeface="Cambria"/>
-                <a:cs typeface="Cambria"/>
-              </a:rPr>
-              <a:t xml:space="preserve"> − 5</a:t>
+              <a:t xml:space="preserve">| = 2</a:t>
             </a:r>
             <a:r>
               <a:rPr lang="en-US" sz="1425" dirty="0">
@@ -29271,7 +28762,7 @@
                 <a:latin typeface="Segoe UI"/>
                 <a:cs typeface="Segoe UI"/>
               </a:rPr>
-              <a:t xml:space="preserve"> </a:t>
+              <a:t xml:space="preserve"> So </a:t>
             </a:r>
             <a:r>
               <a:rPr lang="en-US" sz="1425" dirty="0" i="1">
@@ -29281,7 +28772,7 @@
                 <a:latin typeface="Cambria"/>
                 <a:cs typeface="Cambria"/>
               </a:rPr>
-              <a:t xml:space="preserve">d</a:t>
+              <a:t xml:space="preserve">a</a:t>
             </a:r>
             <a:r>
               <a:rPr lang="en-US" sz="1425" dirty="0">
@@ -29291,7 +28782,7 @@
                 <a:latin typeface="Cambria"/>
                 <a:cs typeface="Cambria"/>
               </a:rPr>
-              <a:t xml:space="preserve"> = −5</a:t>
+              <a:t xml:space="preserve"> = −2</a:t>
             </a:r>
             <a:r>
               <a:rPr lang="en-US" sz="1425" dirty="0">
@@ -29301,7 +28792,7 @@
                 <a:latin typeface="Segoe UI"/>
                 <a:cs typeface="Segoe UI"/>
               </a:rPr>
-              <a:t xml:space="preserve">, so the </a:t>
+              <a:t xml:space="preserve"> and </a:t>
             </a:r>
             <a:r>
               <a:rPr lang="en-US" sz="1425" dirty="0" i="1">
@@ -29311,17 +28802,27 @@
                 <a:latin typeface="Cambria"/>
                 <a:cs typeface="Cambria"/>
               </a:rPr>
-              <a:t xml:space="preserve">y</a:t>
+              <a:t xml:space="preserve">g</a:t>
             </a:r>
             <a:r>
               <a:rPr lang="en-US" sz="1425" dirty="0">
                 <a:solidFill>
                   <a:srgbClr val="16171D"/>
                 </a:solidFill>
-                <a:latin typeface="Segoe UI"/>
-                <a:cs typeface="Segoe UI"/>
-              </a:rPr>
-              <a:t xml:space="preserve">-intercept is </a:t>
+                <a:latin typeface="Cambria"/>
+                <a:cs typeface="Cambria"/>
+              </a:rPr>
+              <a:t xml:space="preserve">(</a:t>
+            </a:r>
+            <a:r>
+              <a:rPr lang="en-US" sz="1425" dirty="0" i="1">
+                <a:solidFill>
+                  <a:srgbClr val="16171D"/>
+                </a:solidFill>
+                <a:latin typeface="Cambria"/>
+                <a:cs typeface="Cambria"/>
+              </a:rPr>
+              <a:t xml:space="preserve">x</a:t>
             </a:r>
             <a:r>
               <a:rPr lang="en-US" sz="1425" dirty="0">
@@ -29331,7 +28832,17 @@
                 <a:latin typeface="Cambria"/>
                 <a:cs typeface="Cambria"/>
               </a:rPr>
-              <a:t xml:space="preserve">(0, −5)</a:t>
+              <a:t xml:space="preserve">) = −2</a:t>
+            </a:r>
+            <a:r>
+              <a:rPr lang="en-US" sz="1425" dirty="0" i="1">
+                <a:solidFill>
+                  <a:srgbClr val="16171D"/>
+                </a:solidFill>
+                <a:latin typeface="Cambria"/>
+                <a:cs typeface="Cambria"/>
+              </a:rPr>
+              <a:t xml:space="preserve">x</a:t>
             </a:r>
             <a:r>
               <a:rPr lang="en-US" sz="1425" dirty="0">
@@ -34752,7 +34263,7 @@
         <p:spPr>
           <a:xfrm>
             <a:off x="6210148" y="3793998"/>
-            <a:ext cx="5295748" cy="2042160"/>
+            <a:ext cx="5295748" cy="2499360"/>
           </a:xfrm>
           <a:prstGeom prst="roundRect">
             <a:avLst>
@@ -34792,7 +34303,7 @@
         <p:spPr>
           <a:xfrm>
             <a:off x="6419698" y="3965448"/>
-            <a:ext cx="4876648" cy="294894"/>
+            <a:ext cx="4876648" cy="534924"/>
           </a:xfrm>
           <a:prstGeom prst="rect">
             <a:avLst/>
@@ -34831,7 +34342,7 @@
                 <a:latin typeface="Segoe UI"/>
                 <a:cs typeface="Segoe UI"/>
               </a:rPr>
-              <a:t xml:space="preserve"> Which line is parallel to </a:t>
+              <a:t xml:space="preserve"> Which equation in slope-intercept form is parallel to </a:t>
             </a:r>
             <a:r>
               <a:rPr lang="en-US" sz="1575" dirty="0" i="1">
@@ -34872,6 +34383,26 @@
                 <a:cs typeface="Cambria"/>
               </a:rPr>
               <a:t xml:space="preserve"> + 1</a:t>
+            </a:r>
+            <a:r>
+              <a:rPr lang="en-US" sz="1575" dirty="0">
+                <a:solidFill>
+                  <a:srgbClr val="16171D"/>
+                </a:solidFill>
+                <a:latin typeface="Segoe UI"/>
+                <a:cs typeface="Segoe UI"/>
+              </a:rPr>
+              <a:t xml:space="preserve"> and passes through </a:t>
+            </a:r>
+            <a:r>
+              <a:rPr lang="en-US" sz="1575" dirty="0">
+                <a:solidFill>
+                  <a:srgbClr val="16171D"/>
+                </a:solidFill>
+                <a:latin typeface="Cambria"/>
+                <a:cs typeface="Cambria"/>
+              </a:rPr>
+              <a:t xml:space="preserve">(1, 5)</a:t>
             </a:r>
             <a:r>
               <a:rPr lang="en-US" sz="1575" dirty="0">
@@ -34895,7 +34426,7 @@
         </p:nvSpPr>
         <p:spPr>
           <a:xfrm>
-            <a:off x="6419698" y="4298442"/>
+            <a:off x="6419698" y="4538472"/>
             <a:ext cx="4876648" cy="294894"/>
           </a:xfrm>
           <a:prstGeom prst="rect">
@@ -34935,7 +34466,67 @@
                 <a:latin typeface="Segoe UI"/>
                 <a:cs typeface="Segoe UI"/>
               </a:rPr>
-              <a:t xml:space="preserve"> parallel lines have the same slope</a:t>
+              <a:t xml:space="preserve"> parallel: same slope · </a:t>
+            </a:r>
+            <a:r>
+              <a:rPr lang="en-US" sz="1575" dirty="0" i="1">
+                <a:solidFill>
+                  <a:srgbClr val="16171D"/>
+                </a:solidFill>
+                <a:latin typeface="Cambria"/>
+                <a:cs typeface="Cambria"/>
+              </a:rPr>
+              <a:t xml:space="preserve">y</a:t>
+            </a:r>
+            <a:r>
+              <a:rPr lang="en-US" sz="1575" dirty="0">
+                <a:solidFill>
+                  <a:srgbClr val="16171D"/>
+                </a:solidFill>
+                <a:latin typeface="Cambria"/>
+                <a:cs typeface="Cambria"/>
+              </a:rPr>
+              <a:t xml:space="preserve"> = </a:t>
+            </a:r>
+            <a:r>
+              <a:rPr lang="en-US" sz="1575" dirty="0" i="1">
+                <a:solidFill>
+                  <a:srgbClr val="16171D"/>
+                </a:solidFill>
+                <a:latin typeface="Cambria"/>
+                <a:cs typeface="Cambria"/>
+              </a:rPr>
+              <a:t xml:space="preserve">m</a:t>
+            </a:r>
+            <a:r>
+              <a:rPr lang="en-US" sz="1575" dirty="0" i="1">
+                <a:solidFill>
+                  <a:srgbClr val="16171D"/>
+                </a:solidFill>
+                <a:latin typeface="Cambria"/>
+                <a:cs typeface="Cambria"/>
+              </a:rPr>
+              <a:t xml:space="preserve">x</a:t>
+            </a:r>
+            <a:r>
+              <a:rPr lang="en-US" sz="1575" dirty="0">
+                <a:solidFill>
+                  <a:srgbClr val="16171D"/>
+                </a:solidFill>
+                <a:latin typeface="Cambria"/>
+                <a:cs typeface="Cambria"/>
+              </a:rPr>
+              <a:t xml:space="preserve"> + </a:t>
+            </a:r>
+            <a:r>
+              <a:rPr lang="en-US" sz="1575" dirty="0" i="1">
+                <a:solidFill>
+                  <a:srgbClr val="16171D"/>
+                </a:solidFill>
+                <a:latin typeface="Cambria"/>
+                <a:cs typeface="Cambria"/>
+              </a:rPr>
+              <a:t xml:space="preserve">b</a:t>
             </a:r>
             <a:endParaRPr lang="en-US" sz="1575" dirty="0"/>
           </a:p>
@@ -34949,8 +34540,8 @@
         </p:nvSpPr>
         <p:spPr>
           <a:xfrm>
-            <a:off x="6419698" y="4631436"/>
-            <a:ext cx="4876648" cy="1033272"/>
+            <a:off x="6419698" y="4871466"/>
+            <a:ext cx="4876648" cy="1250442"/>
           </a:xfrm>
           <a:prstGeom prst="roundRect">
             <a:avLst>
@@ -35023,7 +34614,7 @@
                 <a:latin typeface="Cambria"/>
                 <a:cs typeface="Cambria"/>
               </a:rPr>
-              <a:t xml:space="preserve"> − 5</a:t>
+              <a:t xml:space="preserve"> + 2</a:t>
             </a:r>
             <a:br>
               <a:rPr lang="en-US" sz="1425" dirty="0">
@@ -35052,7 +34643,7 @@
                 <a:latin typeface="Segoe UI"/>
                 <a:cs typeface="Segoe UI"/>
               </a:rPr>
-              <a:t xml:space="preserve"> The slope of </a:t>
+              <a:t xml:space="preserve"> Parallel to </a:t>
             </a:r>
             <a:r>
               <a:rPr lang="en-US" sz="1425" dirty="0" i="1">
@@ -35102,7 +34693,7 @@
                 <a:latin typeface="Segoe UI"/>
                 <a:cs typeface="Segoe UI"/>
               </a:rPr>
-              <a:t xml:space="preserve"> is 3, the number with </a:t>
+              <a:t xml:space="preserve"> means the same slope: </a:t>
             </a:r>
             <a:r>
               <a:rPr lang="en-US" sz="1425" dirty="0" i="1">
@@ -35112,7 +34703,17 @@
                 <a:latin typeface="Cambria"/>
                 <a:cs typeface="Cambria"/>
               </a:rPr>
-              <a:t xml:space="preserve">x</a:t>
+              <a:t xml:space="preserve">m</a:t>
+            </a:r>
+            <a:r>
+              <a:rPr lang="en-US" sz="1425" dirty="0">
+                <a:solidFill>
+                  <a:srgbClr val="16171D"/>
+                </a:solidFill>
+                <a:latin typeface="Cambria"/>
+                <a:cs typeface="Cambria"/>
+              </a:rPr>
+              <a:t xml:space="preserve"> = 3</a:t>
             </a:r>
             <a:r>
               <a:rPr lang="en-US" sz="1425" dirty="0">
@@ -35151,7 +34752,37 @@
                 <a:latin typeface="Segoe UI"/>
                 <a:cs typeface="Segoe UI"/>
               </a:rPr>
-              <a:t xml:space="preserve"> Find the choice with slope 3: </a:t>
+              <a:t xml:space="preserve"> Put in the point </a:t>
+            </a:r>
+            <a:r>
+              <a:rPr lang="en-US" sz="1425" dirty="0">
+                <a:solidFill>
+                  <a:srgbClr val="16171D"/>
+                </a:solidFill>
+                <a:latin typeface="Cambria"/>
+                <a:cs typeface="Cambria"/>
+              </a:rPr>
+              <a:t xml:space="preserve">(1, 5)</a:t>
+            </a:r>
+            <a:r>
+              <a:rPr lang="en-US" sz="1425" dirty="0">
+                <a:solidFill>
+                  <a:srgbClr val="16171D"/>
+                </a:solidFill>
+                <a:latin typeface="Segoe UI"/>
+                <a:cs typeface="Segoe UI"/>
+              </a:rPr>
+              <a:t xml:space="preserve">: </a:t>
+            </a:r>
+            <a:r>
+              <a:rPr lang="en-US" sz="1425" dirty="0">
+                <a:solidFill>
+                  <a:srgbClr val="16171D"/>
+                </a:solidFill>
+                <a:latin typeface="Cambria"/>
+                <a:cs typeface="Cambria"/>
+              </a:rPr>
+              <a:t xml:space="preserve">5 = 3(1) + </a:t>
             </a:r>
             <a:r>
               <a:rPr lang="en-US" sz="1425" dirty="0" i="1">
@@ -35161,6 +34792,115 @@
                 <a:latin typeface="Cambria"/>
                 <a:cs typeface="Cambria"/>
               </a:rPr>
+              <a:t xml:space="preserve">b</a:t>
+            </a:r>
+            <a:r>
+              <a:rPr lang="en-US" sz="1425" dirty="0">
+                <a:solidFill>
+                  <a:srgbClr val="16171D"/>
+                </a:solidFill>
+                <a:latin typeface="Segoe UI"/>
+                <a:cs typeface="Segoe UI"/>
+              </a:rPr>
+              <a:t xml:space="preserve">.</a:t>
+            </a:r>
+            <a:br>
+              <a:rPr lang="en-US" sz="1425" dirty="0">
+                <a:solidFill>
+                  <a:srgbClr val="16171D"/>
+                </a:solidFill>
+                <a:latin typeface="Segoe UI"/>
+                <a:cs typeface="Segoe UI"/>
+              </a:rPr>
+            </a:br>
+            <a:r>
+              <a:rPr lang="en-US" sz="1425" dirty="0" b="1">
+                <a:solidFill>
+                  <a:srgbClr val="16171D"/>
+                </a:solidFill>
+                <a:latin typeface="Segoe UI"/>
+                <a:cs typeface="Segoe UI"/>
+              </a:rPr>
+              <a:t xml:space="preserve">3.</a:t>
+            </a:r>
+            <a:r>
+              <a:rPr lang="en-US" sz="1425" dirty="0">
+                <a:solidFill>
+                  <a:srgbClr val="16171D"/>
+                </a:solidFill>
+                <a:latin typeface="Segoe UI"/>
+                <a:cs typeface="Segoe UI"/>
+              </a:rPr>
+              <a:t xml:space="preserve"> </a:t>
+            </a:r>
+            <a:r>
+              <a:rPr lang="en-US" sz="1425" dirty="0">
+                <a:solidFill>
+                  <a:srgbClr val="16171D"/>
+                </a:solidFill>
+                <a:latin typeface="Cambria"/>
+                <a:cs typeface="Cambria"/>
+              </a:rPr>
+              <a:t xml:space="preserve">5 = 3 + </a:t>
+            </a:r>
+            <a:r>
+              <a:rPr lang="en-US" sz="1425" dirty="0" i="1">
+                <a:solidFill>
+                  <a:srgbClr val="16171D"/>
+                </a:solidFill>
+                <a:latin typeface="Cambria"/>
+                <a:cs typeface="Cambria"/>
+              </a:rPr>
+              <a:t xml:space="preserve">b</a:t>
+            </a:r>
+            <a:r>
+              <a:rPr lang="en-US" sz="1425" dirty="0">
+                <a:solidFill>
+                  <a:srgbClr val="16171D"/>
+                </a:solidFill>
+                <a:latin typeface="Segoe UI"/>
+                <a:cs typeface="Segoe UI"/>
+              </a:rPr>
+              <a:t xml:space="preserve">, so </a:t>
+            </a:r>
+            <a:r>
+              <a:rPr lang="en-US" sz="1425" dirty="0" i="1">
+                <a:solidFill>
+                  <a:srgbClr val="16171D"/>
+                </a:solidFill>
+                <a:latin typeface="Cambria"/>
+                <a:cs typeface="Cambria"/>
+              </a:rPr>
+              <a:t xml:space="preserve">b</a:t>
+            </a:r>
+            <a:r>
+              <a:rPr lang="en-US" sz="1425" dirty="0">
+                <a:solidFill>
+                  <a:srgbClr val="16171D"/>
+                </a:solidFill>
+                <a:latin typeface="Cambria"/>
+                <a:cs typeface="Cambria"/>
+              </a:rPr>
+              <a:t xml:space="preserve"> = 2</a:t>
+            </a:r>
+            <a:r>
+              <a:rPr lang="en-US" sz="1425" dirty="0">
+                <a:solidFill>
+                  <a:srgbClr val="16171D"/>
+                </a:solidFill>
+                <a:latin typeface="Segoe UI"/>
+                <a:cs typeface="Segoe UI"/>
+              </a:rPr>
+              <a:t xml:space="preserve">: </a:t>
+            </a:r>
+            <a:r>
+              <a:rPr lang="en-US" sz="1425" dirty="0" i="1">
+                <a:solidFill>
+                  <a:srgbClr val="16171D"/>
+                </a:solidFill>
+                <a:latin typeface="Cambria"/>
+                <a:cs typeface="Cambria"/>
+              </a:rPr>
               <a:t xml:space="preserve">y</a:t>
             </a:r>
             <a:r>
@@ -35191,7 +34931,7 @@
                 <a:latin typeface="Cambria"/>
                 <a:cs typeface="Cambria"/>
               </a:rPr>
-              <a:t xml:space="preserve"> − 5</a:t>
+              <a:t xml:space="preserve"> + 2</a:t>
             </a:r>
             <a:r>
               <a:rPr lang="en-US" sz="1425" dirty="0">

--- a/IEP/t2-lesson1-transforming-linear-functions-IEP-catchup.pptx
+++ b/IEP/t2-lesson1-transforming-linear-functions-IEP-catchup.pptx
@@ -5018,7 +5018,7 @@
                 <a:latin typeface="Segoe UI"/>
                 <a:cs typeface="Segoe UI"/>
               </a:rPr>
-              <a:t xml:space="preserve">I do · Watch me</a:t>
+              <a:t xml:space="preserve">I do · Watch me · ★ Essential</a:t>
             </a:r>
             <a:endParaRPr lang="en-US" sz="1200" dirty="0"/>
           </a:p>
@@ -9241,7 +9241,7 @@
                 <a:latin typeface="Segoe UI"/>
                 <a:cs typeface="Segoe UI"/>
               </a:rPr>
-              <a:t xml:space="preserve">We do · Together</a:t>
+              <a:t xml:space="preserve">We do · Together · ★ Essential</a:t>
             </a:r>
             <a:endParaRPr lang="en-US" sz="1200" dirty="0"/>
           </a:p>
@@ -18872,7 +18872,7 @@
                 <a:latin typeface="Segoe UI"/>
                 <a:cs typeface="Segoe UI"/>
               </a:rPr>
-              <a:t xml:space="preserve">We do · Parallel line</a:t>
+              <a:t xml:space="preserve">We do · Parallel line · ★ Essential</a:t>
             </a:r>
             <a:endParaRPr lang="en-US" sz="1200" dirty="0"/>
           </a:p>
@@ -19805,7 +19805,7 @@
                 <a:latin typeface="Segoe UI"/>
                 <a:cs typeface="Segoe UI"/>
               </a:rPr>
-              <a:t xml:space="preserve">You do · Try it</a:t>
+              <a:t xml:space="preserve">You do · Try it · ★ Essential</a:t>
             </a:r>
             <a:endParaRPr lang="en-US" sz="1200" dirty="0"/>
           </a:p>
@@ -20611,7 +20611,7 @@
                 <a:latin typeface="Segoe UI"/>
                 <a:cs typeface="Segoe UI"/>
               </a:rPr>
-              <a:t xml:space="preserve">Check it · Step by step</a:t>
+              <a:t xml:space="preserve">Check it · Step by step · ★ Essential</a:t>
             </a:r>
             <a:endParaRPr lang="en-US" sz="1200" dirty="0"/>
           </a:p>
@@ -23007,7 +23007,7 @@
                 <a:latin typeface="Segoe UI"/>
                 <a:cs typeface="Segoe UI"/>
               </a:rPr>
-              <a:t xml:space="preserve">I do · Stretch</a:t>
+              <a:t xml:space="preserve">I do · Stretch · ★ Essential</a:t>
             </a:r>
             <a:endParaRPr lang="en-US" sz="1200" dirty="0"/>
           </a:p>
@@ -36389,7 +36389,7 @@
                 <a:latin typeface="Segoe UI"/>
                 <a:cs typeface="Segoe UI"/>
               </a:rPr>
-              <a:t xml:space="preserve">You do · Try it</a:t>
+              <a:t xml:space="preserve">You do · Try it · ★ Essential</a:t>
             </a:r>
             <a:endParaRPr lang="en-US" sz="1200" dirty="0"/>
           </a:p>
@@ -37401,7 +37401,7 @@
                 <a:latin typeface="Segoe UI"/>
                 <a:cs typeface="Segoe UI"/>
               </a:rPr>
-              <a:t xml:space="preserve">Check it · Step by step</a:t>
+              <a:t xml:space="preserve">Check it · Step by step · ★ Essential</a:t>
             </a:r>
             <a:endParaRPr lang="en-US" sz="1200" dirty="0"/>
           </a:p>
